--- a/docs/pptx/whole/jx-linsubhr-ratio-hosp2.pptx
+++ b/docs/pptx/whole/jx-linsubhr-ratio-hosp2.pptx
@@ -2271,7 +2271,7 @@
           </p:nvSpPr>
           <p:spPr>
             <a:xfrm>
-              <a:off x="817517" y="5114368"/>
+              <a:off x="817517" y="5142518"/>
               <a:ext cx="7799693" cy="0"/>
             </a:xfrm>
             <a:custGeom>
@@ -2314,7 +2314,7 @@
           </p:nvSpPr>
           <p:spPr>
             <a:xfrm>
-              <a:off x="817517" y="4244691"/>
+              <a:off x="817517" y="4313054"/>
               <a:ext cx="7799693" cy="0"/>
             </a:xfrm>
             <a:custGeom>
@@ -2357,7 +2357,7 @@
           </p:nvSpPr>
           <p:spPr>
             <a:xfrm>
-              <a:off x="817517" y="3375014"/>
+              <a:off x="817517" y="3483591"/>
               <a:ext cx="7799693" cy="0"/>
             </a:xfrm>
             <a:custGeom>
@@ -2400,7 +2400,7 @@
           </p:nvSpPr>
           <p:spPr>
             <a:xfrm>
-              <a:off x="817517" y="2505337"/>
+              <a:off x="817517" y="2654127"/>
               <a:ext cx="7799693" cy="0"/>
             </a:xfrm>
             <a:custGeom>
@@ -2443,15 +2443,15 @@
           </p:nvSpPr>
           <p:spPr>
             <a:xfrm>
-              <a:off x="1615213" y="1896563"/>
-              <a:ext cx="0" cy="3826579"/>
+              <a:off x="1615213" y="2073503"/>
+              <a:ext cx="0" cy="3649639"/>
             </a:xfrm>
             <a:custGeom>
               <a:avLst/>
               <a:pathLst>
-                <a:path w="0" h="3826579">
+                <a:path w="0" h="3649639">
                   <a:moveTo>
-                    <a:pt x="0" y="3826579"/>
+                    <a:pt x="0" y="3649639"/>
                   </a:moveTo>
                   <a:lnTo>
                     <a:pt x="0" y="0"/>
@@ -2486,15 +2486,15 @@
           </p:nvSpPr>
           <p:spPr>
             <a:xfrm>
-              <a:off x="3387871" y="1896563"/>
-              <a:ext cx="0" cy="3826579"/>
+              <a:off x="3387871" y="2073503"/>
+              <a:ext cx="0" cy="3649639"/>
             </a:xfrm>
             <a:custGeom>
               <a:avLst/>
               <a:pathLst>
-                <a:path w="0" h="3826579">
+                <a:path w="0" h="3649639">
                   <a:moveTo>
-                    <a:pt x="0" y="3826579"/>
+                    <a:pt x="0" y="3649639"/>
                   </a:moveTo>
                   <a:lnTo>
                     <a:pt x="0" y="0"/>
@@ -2529,15 +2529,15 @@
           </p:nvSpPr>
           <p:spPr>
             <a:xfrm>
-              <a:off x="5160528" y="1896563"/>
-              <a:ext cx="0" cy="3826579"/>
+              <a:off x="5160528" y="2073503"/>
+              <a:ext cx="0" cy="3649639"/>
             </a:xfrm>
             <a:custGeom>
               <a:avLst/>
               <a:pathLst>
-                <a:path w="0" h="3826579">
+                <a:path w="0" h="3649639">
                   <a:moveTo>
-                    <a:pt x="0" y="3826579"/>
+                    <a:pt x="0" y="3649639"/>
                   </a:moveTo>
                   <a:lnTo>
                     <a:pt x="0" y="0"/>
@@ -2572,15 +2572,15 @@
           </p:nvSpPr>
           <p:spPr>
             <a:xfrm>
-              <a:off x="6933186" y="1896563"/>
-              <a:ext cx="0" cy="3826579"/>
+              <a:off x="6933186" y="2073503"/>
+              <a:ext cx="0" cy="3649639"/>
             </a:xfrm>
             <a:custGeom>
               <a:avLst/>
               <a:pathLst>
-                <a:path w="0" h="3826579">
+                <a:path w="0" h="3649639">
                   <a:moveTo>
-                    <a:pt x="0" y="3826579"/>
+                    <a:pt x="0" y="3649639"/>
                   </a:moveTo>
                   <a:lnTo>
                     <a:pt x="0" y="0"/>
@@ -2615,7 +2615,7 @@
           </p:nvSpPr>
           <p:spPr>
             <a:xfrm>
-              <a:off x="817517" y="5549207"/>
+              <a:off x="817517" y="5557249"/>
               <a:ext cx="7799693" cy="0"/>
             </a:xfrm>
             <a:custGeom>
@@ -2658,7 +2658,7 @@
           </p:nvSpPr>
           <p:spPr>
             <a:xfrm>
-              <a:off x="817517" y="4679530"/>
+              <a:off x="817517" y="4727786"/>
               <a:ext cx="7799693" cy="0"/>
             </a:xfrm>
             <a:custGeom>
@@ -2701,7 +2701,7 @@
           </p:nvSpPr>
           <p:spPr>
             <a:xfrm>
-              <a:off x="817517" y="3809853"/>
+              <a:off x="817517" y="3898322"/>
               <a:ext cx="7799693" cy="0"/>
             </a:xfrm>
             <a:custGeom>
@@ -2744,7 +2744,7 @@
           </p:nvSpPr>
           <p:spPr>
             <a:xfrm>
-              <a:off x="817517" y="2940175"/>
+              <a:off x="817517" y="3068859"/>
               <a:ext cx="7799693" cy="0"/>
             </a:xfrm>
             <a:custGeom>
@@ -2787,7 +2787,7 @@
           </p:nvSpPr>
           <p:spPr>
             <a:xfrm>
-              <a:off x="817517" y="2070498"/>
+              <a:off x="817517" y="2239395"/>
               <a:ext cx="7799693" cy="0"/>
             </a:xfrm>
             <a:custGeom>
@@ -2830,15 +2830,15 @@
           </p:nvSpPr>
           <p:spPr>
             <a:xfrm>
-              <a:off x="2501542" y="1896563"/>
-              <a:ext cx="0" cy="3826579"/>
+              <a:off x="2501542" y="2073503"/>
+              <a:ext cx="0" cy="3649639"/>
             </a:xfrm>
             <a:custGeom>
               <a:avLst/>
               <a:pathLst>
-                <a:path w="0" h="3826579">
+                <a:path w="0" h="3649639">
                   <a:moveTo>
-                    <a:pt x="0" y="3826579"/>
+                    <a:pt x="0" y="3649639"/>
                   </a:moveTo>
                   <a:lnTo>
                     <a:pt x="0" y="0"/>
@@ -2873,15 +2873,15 @@
           </p:nvSpPr>
           <p:spPr>
             <a:xfrm>
-              <a:off x="4274200" y="1896563"/>
-              <a:ext cx="0" cy="3826579"/>
+              <a:off x="4274200" y="2073503"/>
+              <a:ext cx="0" cy="3649639"/>
             </a:xfrm>
             <a:custGeom>
               <a:avLst/>
               <a:pathLst>
-                <a:path w="0" h="3826579">
+                <a:path w="0" h="3649639">
                   <a:moveTo>
-                    <a:pt x="0" y="3826579"/>
+                    <a:pt x="0" y="3649639"/>
                   </a:moveTo>
                   <a:lnTo>
                     <a:pt x="0" y="0"/>
@@ -2916,15 +2916,15 @@
           </p:nvSpPr>
           <p:spPr>
             <a:xfrm>
-              <a:off x="6046857" y="1896563"/>
-              <a:ext cx="0" cy="3826579"/>
+              <a:off x="6046857" y="2073503"/>
+              <a:ext cx="0" cy="3649639"/>
             </a:xfrm>
             <a:custGeom>
               <a:avLst/>
               <a:pathLst>
-                <a:path w="0" h="3826579">
+                <a:path w="0" h="3649639">
                   <a:moveTo>
-                    <a:pt x="0" y="3826579"/>
+                    <a:pt x="0" y="3649639"/>
                   </a:moveTo>
                   <a:lnTo>
                     <a:pt x="0" y="0"/>
@@ -2959,15 +2959,15 @@
           </p:nvSpPr>
           <p:spPr>
             <a:xfrm>
-              <a:off x="7819515" y="1896563"/>
-              <a:ext cx="0" cy="3826579"/>
+              <a:off x="7819515" y="2073503"/>
+              <a:ext cx="0" cy="3649639"/>
             </a:xfrm>
             <a:custGeom>
               <a:avLst/>
               <a:pathLst>
-                <a:path w="0" h="3826579">
+                <a:path w="0" h="3649639">
                   <a:moveTo>
-                    <a:pt x="0" y="3826579"/>
+                    <a:pt x="0" y="3649639"/>
                   </a:moveTo>
                   <a:lnTo>
                     <a:pt x="0" y="0"/>
@@ -3002,570 +3002,570 @@
           </p:nvSpPr>
           <p:spPr>
             <a:xfrm>
-              <a:off x="817517" y="1896563"/>
-              <a:ext cx="7235830" cy="3560662"/>
+              <a:off x="817517" y="2073503"/>
+              <a:ext cx="7235830" cy="3396018"/>
             </a:xfrm>
             <a:custGeom>
               <a:avLst/>
               <a:pathLst>
-                <a:path w="7235830" h="3560662">
+                <a:path w="7235830" h="3396018">
                   <a:moveTo>
                     <a:pt x="1034415" y="0"/>
                   </a:moveTo>
                   <a:lnTo>
-                    <a:pt x="1039987" y="12309"/>
-                  </a:lnTo>
-                  <a:lnTo>
-                    <a:pt x="1113747" y="168275"/>
-                  </a:lnTo>
-                  <a:lnTo>
-                    <a:pt x="1187508" y="317558"/>
-                  </a:lnTo>
-                  <a:lnTo>
-                    <a:pt x="1261268" y="460446"/>
-                  </a:lnTo>
-                  <a:lnTo>
-                    <a:pt x="1335028" y="597211"/>
-                  </a:lnTo>
-                  <a:lnTo>
-                    <a:pt x="1408788" y="728117"/>
-                  </a:lnTo>
-                  <a:lnTo>
-                    <a:pt x="1482548" y="853415"/>
-                  </a:lnTo>
-                  <a:lnTo>
-                    <a:pt x="1556308" y="973344"/>
-                  </a:lnTo>
-                  <a:lnTo>
-                    <a:pt x="1630068" y="1088135"/>
-                  </a:lnTo>
-                  <a:lnTo>
-                    <a:pt x="1703828" y="1198009"/>
-                  </a:lnTo>
-                  <a:lnTo>
-                    <a:pt x="1777588" y="1303174"/>
-                  </a:lnTo>
-                  <a:lnTo>
-                    <a:pt x="1851348" y="1403834"/>
-                  </a:lnTo>
-                  <a:lnTo>
-                    <a:pt x="1925108" y="1500182"/>
-                  </a:lnTo>
-                  <a:lnTo>
-                    <a:pt x="1998868" y="1592401"/>
-                  </a:lnTo>
-                  <a:lnTo>
-                    <a:pt x="2072628" y="1680670"/>
-                  </a:lnTo>
-                  <a:lnTo>
-                    <a:pt x="2146388" y="1765156"/>
-                  </a:lnTo>
-                  <a:lnTo>
-                    <a:pt x="2220148" y="1846023"/>
-                  </a:lnTo>
-                  <a:lnTo>
-                    <a:pt x="2293908" y="1923426"/>
-                  </a:lnTo>
-                  <a:lnTo>
-                    <a:pt x="2367668" y="1997512"/>
-                  </a:lnTo>
-                  <a:lnTo>
-                    <a:pt x="2441428" y="2068424"/>
-                  </a:lnTo>
-                  <a:lnTo>
-                    <a:pt x="2515188" y="2136298"/>
-                  </a:lnTo>
-                  <a:lnTo>
-                    <a:pt x="2588948" y="2201263"/>
-                  </a:lnTo>
-                  <a:lnTo>
-                    <a:pt x="2662708" y="2263446"/>
-                  </a:lnTo>
-                  <a:lnTo>
-                    <a:pt x="2736468" y="2322964"/>
-                  </a:lnTo>
-                  <a:lnTo>
-                    <a:pt x="2810228" y="2379933"/>
-                  </a:lnTo>
-                  <a:lnTo>
-                    <a:pt x="2883988" y="2434460"/>
-                  </a:lnTo>
-                  <a:lnTo>
-                    <a:pt x="2957748" y="2486652"/>
-                  </a:lnTo>
-                  <a:lnTo>
-                    <a:pt x="3031508" y="2536607"/>
-                  </a:lnTo>
-                  <a:lnTo>
-                    <a:pt x="3105268" y="2584422"/>
-                  </a:lnTo>
-                  <a:lnTo>
-                    <a:pt x="3179028" y="2630189"/>
-                  </a:lnTo>
-                  <a:lnTo>
-                    <a:pt x="3252788" y="2673995"/>
-                  </a:lnTo>
-                  <a:lnTo>
-                    <a:pt x="3326548" y="2715924"/>
-                  </a:lnTo>
-                  <a:lnTo>
-                    <a:pt x="3400308" y="2756056"/>
-                  </a:lnTo>
-                  <a:lnTo>
-                    <a:pt x="3474068" y="2785738"/>
-                  </a:lnTo>
-                  <a:lnTo>
-                    <a:pt x="3547828" y="2794791"/>
-                  </a:lnTo>
-                  <a:lnTo>
-                    <a:pt x="3621588" y="2803749"/>
-                  </a:lnTo>
-                  <a:lnTo>
-                    <a:pt x="3695348" y="2812614"/>
-                  </a:lnTo>
-                  <a:lnTo>
-                    <a:pt x="3769108" y="2821386"/>
-                  </a:lnTo>
-                  <a:lnTo>
-                    <a:pt x="3842868" y="2830067"/>
-                  </a:lnTo>
-                  <a:lnTo>
-                    <a:pt x="3916628" y="2838657"/>
-                  </a:lnTo>
-                  <a:lnTo>
-                    <a:pt x="3990388" y="2847157"/>
-                  </a:lnTo>
-                  <a:lnTo>
-                    <a:pt x="4064149" y="2855569"/>
-                  </a:lnTo>
-                  <a:lnTo>
-                    <a:pt x="4137909" y="2863892"/>
-                  </a:lnTo>
-                  <a:lnTo>
-                    <a:pt x="4211669" y="2872129"/>
-                  </a:lnTo>
-                  <a:lnTo>
-                    <a:pt x="4285429" y="2880280"/>
-                  </a:lnTo>
-                  <a:lnTo>
-                    <a:pt x="4359189" y="2888345"/>
-                  </a:lnTo>
-                  <a:lnTo>
-                    <a:pt x="4432949" y="2896327"/>
-                  </a:lnTo>
-                  <a:lnTo>
-                    <a:pt x="4506709" y="2904225"/>
-                  </a:lnTo>
-                  <a:lnTo>
-                    <a:pt x="4580469" y="2912040"/>
-                  </a:lnTo>
-                  <a:lnTo>
-                    <a:pt x="4654229" y="2919774"/>
-                  </a:lnTo>
-                  <a:lnTo>
-                    <a:pt x="4727989" y="2927427"/>
-                  </a:lnTo>
-                  <a:lnTo>
-                    <a:pt x="4801749" y="2935001"/>
-                  </a:lnTo>
-                  <a:lnTo>
-                    <a:pt x="4875509" y="2942495"/>
-                  </a:lnTo>
-                  <a:lnTo>
-                    <a:pt x="4949269" y="2949911"/>
-                  </a:lnTo>
-                  <a:lnTo>
-                    <a:pt x="5023029" y="2957249"/>
-                  </a:lnTo>
-                  <a:lnTo>
-                    <a:pt x="5096789" y="2964511"/>
-                  </a:lnTo>
-                  <a:lnTo>
-                    <a:pt x="5170549" y="2971697"/>
-                  </a:lnTo>
-                  <a:lnTo>
-                    <a:pt x="5244309" y="2978808"/>
-                  </a:lnTo>
-                  <a:lnTo>
-                    <a:pt x="5318069" y="2985845"/>
-                  </a:lnTo>
-                  <a:lnTo>
-                    <a:pt x="5391829" y="2992808"/>
-                  </a:lnTo>
-                  <a:lnTo>
-                    <a:pt x="5465589" y="2999698"/>
-                  </a:lnTo>
-                  <a:lnTo>
-                    <a:pt x="5539349" y="3006517"/>
-                  </a:lnTo>
-                  <a:lnTo>
-                    <a:pt x="5613109" y="3013264"/>
-                  </a:lnTo>
-                  <a:lnTo>
-                    <a:pt x="5686869" y="3019941"/>
-                  </a:lnTo>
-                  <a:lnTo>
-                    <a:pt x="5760629" y="3026548"/>
-                  </a:lnTo>
-                  <a:lnTo>
-                    <a:pt x="5834389" y="3033086"/>
-                  </a:lnTo>
-                  <a:lnTo>
-                    <a:pt x="5908149" y="3039556"/>
-                  </a:lnTo>
-                  <a:lnTo>
-                    <a:pt x="5981909" y="3045959"/>
-                  </a:lnTo>
-                  <a:lnTo>
-                    <a:pt x="6055669" y="3052294"/>
-                  </a:lnTo>
-                  <a:lnTo>
-                    <a:pt x="6129429" y="3058563"/>
-                  </a:lnTo>
-                  <a:lnTo>
-                    <a:pt x="6203189" y="3064767"/>
-                  </a:lnTo>
-                  <a:lnTo>
-                    <a:pt x="6276949" y="3070906"/>
-                  </a:lnTo>
-                  <a:lnTo>
-                    <a:pt x="6350709" y="3076981"/>
-                  </a:lnTo>
-                  <a:lnTo>
-                    <a:pt x="6424469" y="3082993"/>
-                  </a:lnTo>
-                  <a:lnTo>
-                    <a:pt x="6498229" y="3088941"/>
-                  </a:lnTo>
-                  <a:lnTo>
-                    <a:pt x="6571989" y="3094828"/>
-                  </a:lnTo>
-                  <a:lnTo>
-                    <a:pt x="6645749" y="3100653"/>
-                  </a:lnTo>
-                  <a:lnTo>
-                    <a:pt x="6719509" y="3106417"/>
-                  </a:lnTo>
-                  <a:lnTo>
-                    <a:pt x="6793269" y="3112122"/>
-                  </a:lnTo>
-                  <a:lnTo>
-                    <a:pt x="6867029" y="3117766"/>
-                  </a:lnTo>
-                  <a:lnTo>
-                    <a:pt x="6940789" y="3123352"/>
-                  </a:lnTo>
-                  <a:lnTo>
-                    <a:pt x="7014550" y="3128879"/>
-                  </a:lnTo>
-                  <a:lnTo>
-                    <a:pt x="7088310" y="3134349"/>
-                  </a:lnTo>
-                  <a:lnTo>
-                    <a:pt x="7162070" y="3139761"/>
-                  </a:lnTo>
-                  <a:lnTo>
-                    <a:pt x="7235830" y="3145117"/>
-                  </a:lnTo>
-                  <a:lnTo>
-                    <a:pt x="7235830" y="3560662"/>
-                  </a:lnTo>
-                  <a:lnTo>
-                    <a:pt x="7162070" y="3556545"/>
-                  </a:lnTo>
-                  <a:lnTo>
-                    <a:pt x="7088310" y="3552243"/>
-                  </a:lnTo>
-                  <a:lnTo>
-                    <a:pt x="7014550" y="3547749"/>
-                  </a:lnTo>
-                  <a:lnTo>
-                    <a:pt x="6940789" y="3543054"/>
-                  </a:lnTo>
-                  <a:lnTo>
-                    <a:pt x="6867029" y="3538148"/>
-                  </a:lnTo>
-                  <a:lnTo>
-                    <a:pt x="6793269" y="3533023"/>
-                  </a:lnTo>
-                  <a:lnTo>
-                    <a:pt x="6719509" y="3527669"/>
-                  </a:lnTo>
-                  <a:lnTo>
-                    <a:pt x="6645749" y="3522075"/>
-                  </a:lnTo>
-                  <a:lnTo>
-                    <a:pt x="6571989" y="3516231"/>
-                  </a:lnTo>
-                  <a:lnTo>
-                    <a:pt x="6498229" y="3510124"/>
-                  </a:lnTo>
-                  <a:lnTo>
-                    <a:pt x="6424469" y="3503745"/>
-                  </a:lnTo>
-                  <a:lnTo>
-                    <a:pt x="6350709" y="3497080"/>
-                  </a:lnTo>
-                  <a:lnTo>
-                    <a:pt x="6276949" y="3490117"/>
-                  </a:lnTo>
-                  <a:lnTo>
-                    <a:pt x="6203189" y="3482842"/>
-                  </a:lnTo>
-                  <a:lnTo>
-                    <a:pt x="6129429" y="3475242"/>
-                  </a:lnTo>
-                  <a:lnTo>
-                    <a:pt x="6055669" y="3467301"/>
-                  </a:lnTo>
-                  <a:lnTo>
-                    <a:pt x="5981909" y="3459005"/>
-                  </a:lnTo>
-                  <a:lnTo>
-                    <a:pt x="5908149" y="3450337"/>
-                  </a:lnTo>
-                  <a:lnTo>
-                    <a:pt x="5834389" y="3441281"/>
-                  </a:lnTo>
-                  <a:lnTo>
-                    <a:pt x="5760629" y="3431821"/>
-                  </a:lnTo>
-                  <a:lnTo>
-                    <a:pt x="5686869" y="3421936"/>
-                  </a:lnTo>
-                  <a:lnTo>
-                    <a:pt x="5613109" y="3411609"/>
-                  </a:lnTo>
-                  <a:lnTo>
-                    <a:pt x="5539349" y="3400820"/>
-                  </a:lnTo>
-                  <a:lnTo>
-                    <a:pt x="5465589" y="3389549"/>
-                  </a:lnTo>
-                  <a:lnTo>
-                    <a:pt x="5391829" y="3377772"/>
-                  </a:lnTo>
-                  <a:lnTo>
-                    <a:pt x="5318069" y="3365468"/>
-                  </a:lnTo>
-                  <a:lnTo>
-                    <a:pt x="5244309" y="3352614"/>
-                  </a:lnTo>
-                  <a:lnTo>
-                    <a:pt x="5170549" y="3339184"/>
-                  </a:lnTo>
-                  <a:lnTo>
-                    <a:pt x="5096789" y="3325153"/>
-                  </a:lnTo>
-                  <a:lnTo>
-                    <a:pt x="5023029" y="3310494"/>
-                  </a:lnTo>
-                  <a:lnTo>
-                    <a:pt x="4949269" y="3295179"/>
-                  </a:lnTo>
-                  <a:lnTo>
-                    <a:pt x="4875509" y="3279179"/>
-                  </a:lnTo>
-                  <a:lnTo>
-                    <a:pt x="4801749" y="3262462"/>
-                  </a:lnTo>
-                  <a:lnTo>
-                    <a:pt x="4727989" y="3244997"/>
-                  </a:lnTo>
-                  <a:lnTo>
-                    <a:pt x="4654229" y="3226750"/>
-                  </a:lnTo>
-                  <a:lnTo>
-                    <a:pt x="4580469" y="3207686"/>
-                  </a:lnTo>
-                  <a:lnTo>
-                    <a:pt x="4506709" y="3187769"/>
-                  </a:lnTo>
-                  <a:lnTo>
-                    <a:pt x="4432949" y="3166961"/>
-                  </a:lnTo>
-                  <a:lnTo>
-                    <a:pt x="4359189" y="3145221"/>
-                  </a:lnTo>
-                  <a:lnTo>
-                    <a:pt x="4285429" y="3122508"/>
-                  </a:lnTo>
-                  <a:lnTo>
-                    <a:pt x="4211669" y="3098778"/>
-                  </a:lnTo>
-                  <a:lnTo>
-                    <a:pt x="4137909" y="3073987"/>
-                  </a:lnTo>
-                  <a:lnTo>
-                    <a:pt x="4064149" y="3048085"/>
-                  </a:lnTo>
-                  <a:lnTo>
-                    <a:pt x="3990388" y="3021024"/>
-                  </a:lnTo>
-                  <a:lnTo>
-                    <a:pt x="3916628" y="2992752"/>
-                  </a:lnTo>
-                  <a:lnTo>
-                    <a:pt x="3842868" y="2963214"/>
-                  </a:lnTo>
-                  <a:lnTo>
-                    <a:pt x="3769108" y="2932354"/>
-                  </a:lnTo>
-                  <a:lnTo>
-                    <a:pt x="3695348" y="2900113"/>
-                  </a:lnTo>
-                  <a:lnTo>
-                    <a:pt x="3621588" y="2866429"/>
-                  </a:lnTo>
-                  <a:lnTo>
-                    <a:pt x="3547828" y="2831237"/>
-                  </a:lnTo>
-                  <a:lnTo>
-                    <a:pt x="3474068" y="2794469"/>
-                  </a:lnTo>
-                  <a:lnTo>
-                    <a:pt x="3400308" y="2776589"/>
-                  </a:lnTo>
-                  <a:lnTo>
-                    <a:pt x="3326548" y="2767345"/>
-                  </a:lnTo>
-                  <a:lnTo>
-                    <a:pt x="3252788" y="2758002"/>
-                  </a:lnTo>
-                  <a:lnTo>
-                    <a:pt x="3179028" y="2748561"/>
-                  </a:lnTo>
-                  <a:lnTo>
-                    <a:pt x="3105268" y="2739020"/>
-                  </a:lnTo>
-                  <a:lnTo>
-                    <a:pt x="3031508" y="2729379"/>
-                  </a:lnTo>
-                  <a:lnTo>
-                    <a:pt x="2957748" y="2719636"/>
-                  </a:lnTo>
-                  <a:lnTo>
-                    <a:pt x="2883988" y="2709790"/>
-                  </a:lnTo>
-                  <a:lnTo>
-                    <a:pt x="2810228" y="2699840"/>
-                  </a:lnTo>
-                  <a:lnTo>
-                    <a:pt x="2736468" y="2689785"/>
-                  </a:lnTo>
-                  <a:lnTo>
-                    <a:pt x="2662708" y="2679624"/>
-                  </a:lnTo>
-                  <a:lnTo>
-                    <a:pt x="2588948" y="2669355"/>
-                  </a:lnTo>
-                  <a:lnTo>
-                    <a:pt x="2515188" y="2658979"/>
-                  </a:lnTo>
-                  <a:lnTo>
-                    <a:pt x="2441428" y="2648493"/>
-                  </a:lnTo>
-                  <a:lnTo>
-                    <a:pt x="2367668" y="2637896"/>
-                  </a:lnTo>
-                  <a:lnTo>
-                    <a:pt x="2293908" y="2627187"/>
-                  </a:lnTo>
-                  <a:lnTo>
-                    <a:pt x="2220148" y="2616366"/>
-                  </a:lnTo>
-                  <a:lnTo>
-                    <a:pt x="2146388" y="2605430"/>
-                  </a:lnTo>
-                  <a:lnTo>
-                    <a:pt x="2072628" y="2594379"/>
-                  </a:lnTo>
-                  <a:lnTo>
-                    <a:pt x="1998868" y="2583211"/>
-                  </a:lnTo>
-                  <a:lnTo>
-                    <a:pt x="1925108" y="2571925"/>
-                  </a:lnTo>
-                  <a:lnTo>
-                    <a:pt x="1851348" y="2560521"/>
-                  </a:lnTo>
-                  <a:lnTo>
-                    <a:pt x="1777588" y="2548995"/>
-                  </a:lnTo>
-                  <a:lnTo>
-                    <a:pt x="1703828" y="2537349"/>
-                  </a:lnTo>
-                  <a:lnTo>
-                    <a:pt x="1630068" y="2525579"/>
-                  </a:lnTo>
-                  <a:lnTo>
-                    <a:pt x="1556308" y="2513685"/>
-                  </a:lnTo>
-                  <a:lnTo>
-                    <a:pt x="1482548" y="2501666"/>
-                  </a:lnTo>
-                  <a:lnTo>
-                    <a:pt x="1408788" y="2489520"/>
-                  </a:lnTo>
-                  <a:lnTo>
-                    <a:pt x="1335028" y="2477245"/>
-                  </a:lnTo>
-                  <a:lnTo>
-                    <a:pt x="1261268" y="2464841"/>
-                  </a:lnTo>
-                  <a:lnTo>
-                    <a:pt x="1187508" y="2452306"/>
-                  </a:lnTo>
-                  <a:lnTo>
-                    <a:pt x="1113747" y="2439639"/>
-                  </a:lnTo>
-                  <a:lnTo>
-                    <a:pt x="1039987" y="2426839"/>
-                  </a:lnTo>
-                  <a:lnTo>
-                    <a:pt x="966227" y="2413903"/>
-                  </a:lnTo>
-                  <a:lnTo>
-                    <a:pt x="892467" y="2400830"/>
-                  </a:lnTo>
-                  <a:lnTo>
-                    <a:pt x="818707" y="2387620"/>
-                  </a:lnTo>
-                  <a:lnTo>
-                    <a:pt x="744947" y="2374270"/>
-                  </a:lnTo>
-                  <a:lnTo>
-                    <a:pt x="671187" y="2360780"/>
-                  </a:lnTo>
-                  <a:lnTo>
-                    <a:pt x="597427" y="2347147"/>
-                  </a:lnTo>
-                  <a:lnTo>
-                    <a:pt x="523667" y="2333370"/>
-                  </a:lnTo>
-                  <a:lnTo>
-                    <a:pt x="449907" y="2319447"/>
-                  </a:lnTo>
-                  <a:lnTo>
-                    <a:pt x="376147" y="2305378"/>
-                  </a:lnTo>
-                  <a:lnTo>
-                    <a:pt x="302387" y="2291161"/>
-                  </a:lnTo>
-                  <a:lnTo>
-                    <a:pt x="228627" y="2276793"/>
-                  </a:lnTo>
-                  <a:lnTo>
-                    <a:pt x="154867" y="2262274"/>
-                  </a:lnTo>
-                  <a:lnTo>
-                    <a:pt x="81107" y="2247601"/>
-                  </a:lnTo>
-                  <a:lnTo>
-                    <a:pt x="7347" y="2232774"/>
-                  </a:lnTo>
-                  <a:lnTo>
-                    <a:pt x="0" y="2231281"/>
+                    <a:pt x="1039987" y="11740"/>
+                  </a:lnTo>
+                  <a:lnTo>
+                    <a:pt x="1113747" y="160494"/>
+                  </a:lnTo>
+                  <a:lnTo>
+                    <a:pt x="1187508" y="302874"/>
+                  </a:lnTo>
+                  <a:lnTo>
+                    <a:pt x="1261268" y="439155"/>
+                  </a:lnTo>
+                  <a:lnTo>
+                    <a:pt x="1335028" y="569596"/>
+                  </a:lnTo>
+                  <a:lnTo>
+                    <a:pt x="1408788" y="694449"/>
+                  </a:lnTo>
+                  <a:lnTo>
+                    <a:pt x="1482548" y="813953"/>
+                  </a:lnTo>
+                  <a:lnTo>
+                    <a:pt x="1556308" y="928337"/>
+                  </a:lnTo>
+                  <a:lnTo>
+                    <a:pt x="1630068" y="1037820"/>
+                  </a:lnTo>
+                  <a:lnTo>
+                    <a:pt x="1703828" y="1142613"/>
+                  </a:lnTo>
+                  <a:lnTo>
+                    <a:pt x="1777588" y="1242916"/>
+                  </a:lnTo>
+                  <a:lnTo>
+                    <a:pt x="1851348" y="1338921"/>
+                  </a:lnTo>
+                  <a:lnTo>
+                    <a:pt x="1925108" y="1430814"/>
+                  </a:lnTo>
+                  <a:lnTo>
+                    <a:pt x="1998868" y="1518769"/>
+                  </a:lnTo>
+                  <a:lnTo>
+                    <a:pt x="2072628" y="1602956"/>
+                  </a:lnTo>
+                  <a:lnTo>
+                    <a:pt x="2146388" y="1683536"/>
+                  </a:lnTo>
+                  <a:lnTo>
+                    <a:pt x="2220148" y="1760664"/>
+                  </a:lnTo>
+                  <a:lnTo>
+                    <a:pt x="2293908" y="1834487"/>
+                  </a:lnTo>
+                  <a:lnTo>
+                    <a:pt x="2367668" y="1905147"/>
+                  </a:lnTo>
+                  <a:lnTo>
+                    <a:pt x="2441428" y="1972781"/>
+                  </a:lnTo>
+                  <a:lnTo>
+                    <a:pt x="2515188" y="2037516"/>
+                  </a:lnTo>
+                  <a:lnTo>
+                    <a:pt x="2588948" y="2099478"/>
+                  </a:lnTo>
+                  <a:lnTo>
+                    <a:pt x="2662708" y="2158785"/>
+                  </a:lnTo>
+                  <a:lnTo>
+                    <a:pt x="2736468" y="2215551"/>
+                  </a:lnTo>
+                  <a:lnTo>
+                    <a:pt x="2810228" y="2269886"/>
+                  </a:lnTo>
+                  <a:lnTo>
+                    <a:pt x="2883988" y="2321892"/>
+                  </a:lnTo>
+                  <a:lnTo>
+                    <a:pt x="2957748" y="2371670"/>
+                  </a:lnTo>
+                  <a:lnTo>
+                    <a:pt x="3031508" y="2419316"/>
+                  </a:lnTo>
+                  <a:lnTo>
+                    <a:pt x="3105268" y="2464920"/>
+                  </a:lnTo>
+                  <a:lnTo>
+                    <a:pt x="3179028" y="2508570"/>
+                  </a:lnTo>
+                  <a:lnTo>
+                    <a:pt x="3252788" y="2550350"/>
+                  </a:lnTo>
+                  <a:lnTo>
+                    <a:pt x="3326548" y="2590340"/>
+                  </a:lnTo>
+                  <a:lnTo>
+                    <a:pt x="3400308" y="2628617"/>
+                  </a:lnTo>
+                  <a:lnTo>
+                    <a:pt x="3474068" y="2656926"/>
+                  </a:lnTo>
+                  <a:lnTo>
+                    <a:pt x="3547828" y="2665561"/>
+                  </a:lnTo>
+                  <a:lnTo>
+                    <a:pt x="3621588" y="2674105"/>
+                  </a:lnTo>
+                  <a:lnTo>
+                    <a:pt x="3695348" y="2682560"/>
+                  </a:lnTo>
+                  <a:lnTo>
+                    <a:pt x="3769108" y="2690926"/>
+                  </a:lnTo>
+                  <a:lnTo>
+                    <a:pt x="3842868" y="2699206"/>
+                  </a:lnTo>
+                  <a:lnTo>
+                    <a:pt x="3916628" y="2707398"/>
+                  </a:lnTo>
+                  <a:lnTo>
+                    <a:pt x="3990388" y="2715506"/>
+                  </a:lnTo>
+                  <a:lnTo>
+                    <a:pt x="4064149" y="2723528"/>
+                  </a:lnTo>
+                  <a:lnTo>
+                    <a:pt x="4137909" y="2731467"/>
+                  </a:lnTo>
+                  <a:lnTo>
+                    <a:pt x="4211669" y="2739323"/>
+                  </a:lnTo>
+                  <a:lnTo>
+                    <a:pt x="4285429" y="2747097"/>
+                  </a:lnTo>
+                  <a:lnTo>
+                    <a:pt x="4359189" y="2754789"/>
+                  </a:lnTo>
+                  <a:lnTo>
+                    <a:pt x="4432949" y="2762402"/>
+                  </a:lnTo>
+                  <a:lnTo>
+                    <a:pt x="4506709" y="2769934"/>
+                  </a:lnTo>
+                  <a:lnTo>
+                    <a:pt x="4580469" y="2777389"/>
+                  </a:lnTo>
+                  <a:lnTo>
+                    <a:pt x="4654229" y="2784765"/>
+                  </a:lnTo>
+                  <a:lnTo>
+                    <a:pt x="4727989" y="2792064"/>
+                  </a:lnTo>
+                  <a:lnTo>
+                    <a:pt x="4801749" y="2799287"/>
+                  </a:lnTo>
+                  <a:lnTo>
+                    <a:pt x="4875509" y="2806435"/>
+                  </a:lnTo>
+                  <a:lnTo>
+                    <a:pt x="4949269" y="2813508"/>
+                  </a:lnTo>
+                  <a:lnTo>
+                    <a:pt x="5023029" y="2820507"/>
+                  </a:lnTo>
+                  <a:lnTo>
+                    <a:pt x="5096789" y="2827433"/>
+                  </a:lnTo>
+                  <a:lnTo>
+                    <a:pt x="5170549" y="2834287"/>
+                  </a:lnTo>
+                  <a:lnTo>
+                    <a:pt x="5244309" y="2841069"/>
+                  </a:lnTo>
+                  <a:lnTo>
+                    <a:pt x="5318069" y="2847780"/>
+                  </a:lnTo>
+                  <a:lnTo>
+                    <a:pt x="5391829" y="2854421"/>
+                  </a:lnTo>
+                  <a:lnTo>
+                    <a:pt x="5465589" y="2860993"/>
+                  </a:lnTo>
+                  <a:lnTo>
+                    <a:pt x="5539349" y="2867497"/>
+                  </a:lnTo>
+                  <a:lnTo>
+                    <a:pt x="5613109" y="2873932"/>
+                  </a:lnTo>
+                  <a:lnTo>
+                    <a:pt x="5686869" y="2880300"/>
+                  </a:lnTo>
+                  <a:lnTo>
+                    <a:pt x="5760629" y="2886602"/>
+                  </a:lnTo>
+                  <a:lnTo>
+                    <a:pt x="5834389" y="2892838"/>
+                  </a:lnTo>
+                  <a:lnTo>
+                    <a:pt x="5908149" y="2899008"/>
+                  </a:lnTo>
+                  <a:lnTo>
+                    <a:pt x="5981909" y="2905115"/>
+                  </a:lnTo>
+                  <a:lnTo>
+                    <a:pt x="6055669" y="2911157"/>
+                  </a:lnTo>
+                  <a:lnTo>
+                    <a:pt x="6129429" y="2917137"/>
+                  </a:lnTo>
+                  <a:lnTo>
+                    <a:pt x="6203189" y="2923054"/>
+                  </a:lnTo>
+                  <a:lnTo>
+                    <a:pt x="6276949" y="2928909"/>
+                  </a:lnTo>
+                  <a:lnTo>
+                    <a:pt x="6350709" y="2934703"/>
+                  </a:lnTo>
+                  <a:lnTo>
+                    <a:pt x="6424469" y="2940436"/>
+                  </a:lnTo>
+                  <a:lnTo>
+                    <a:pt x="6498229" y="2946110"/>
+                  </a:lnTo>
+                  <a:lnTo>
+                    <a:pt x="6571989" y="2951724"/>
+                  </a:lnTo>
+                  <a:lnTo>
+                    <a:pt x="6645749" y="2957280"/>
+                  </a:lnTo>
+                  <a:lnTo>
+                    <a:pt x="6719509" y="2962778"/>
+                  </a:lnTo>
+                  <a:lnTo>
+                    <a:pt x="6793269" y="2968218"/>
+                  </a:lnTo>
+                  <a:lnTo>
+                    <a:pt x="6867029" y="2973602"/>
+                  </a:lnTo>
+                  <a:lnTo>
+                    <a:pt x="6940789" y="2978929"/>
+                  </a:lnTo>
+                  <a:lnTo>
+                    <a:pt x="7014550" y="2984201"/>
+                  </a:lnTo>
+                  <a:lnTo>
+                    <a:pt x="7088310" y="2989417"/>
+                  </a:lnTo>
+                  <a:lnTo>
+                    <a:pt x="7162070" y="2994580"/>
+                  </a:lnTo>
+                  <a:lnTo>
+                    <a:pt x="7235830" y="2999688"/>
+                  </a:lnTo>
+                  <a:lnTo>
+                    <a:pt x="7235830" y="3396018"/>
+                  </a:lnTo>
+                  <a:lnTo>
+                    <a:pt x="7162070" y="3392091"/>
+                  </a:lnTo>
+                  <a:lnTo>
+                    <a:pt x="7088310" y="3387989"/>
+                  </a:lnTo>
+                  <a:lnTo>
+                    <a:pt x="7014550" y="3383702"/>
+                  </a:lnTo>
+                  <a:lnTo>
+                    <a:pt x="6940789" y="3379224"/>
+                  </a:lnTo>
+                  <a:lnTo>
+                    <a:pt x="6867029" y="3374546"/>
+                  </a:lnTo>
+                  <a:lnTo>
+                    <a:pt x="6793269" y="3369658"/>
+                  </a:lnTo>
+                  <a:lnTo>
+                    <a:pt x="6719509" y="3364551"/>
+                  </a:lnTo>
+                  <a:lnTo>
+                    <a:pt x="6645749" y="3359216"/>
+                  </a:lnTo>
+                  <a:lnTo>
+                    <a:pt x="6571989" y="3353641"/>
+                  </a:lnTo>
+                  <a:lnTo>
+                    <a:pt x="6498229" y="3347818"/>
+                  </a:lnTo>
+                  <a:lnTo>
+                    <a:pt x="6424469" y="3341733"/>
+                  </a:lnTo>
+                  <a:lnTo>
+                    <a:pt x="6350709" y="3335377"/>
+                  </a:lnTo>
+                  <a:lnTo>
+                    <a:pt x="6276949" y="3328735"/>
+                  </a:lnTo>
+                  <a:lnTo>
+                    <a:pt x="6203189" y="3321797"/>
+                  </a:lnTo>
+                  <a:lnTo>
+                    <a:pt x="6129429" y="3314548"/>
+                  </a:lnTo>
+                  <a:lnTo>
+                    <a:pt x="6055669" y="3306974"/>
+                  </a:lnTo>
+                  <a:lnTo>
+                    <a:pt x="5981909" y="3299061"/>
+                  </a:lnTo>
+                  <a:lnTo>
+                    <a:pt x="5908149" y="3290795"/>
+                  </a:lnTo>
+                  <a:lnTo>
+                    <a:pt x="5834389" y="3282158"/>
+                  </a:lnTo>
+                  <a:lnTo>
+                    <a:pt x="5760629" y="3273134"/>
+                  </a:lnTo>
+                  <a:lnTo>
+                    <a:pt x="5686869" y="3263707"/>
+                  </a:lnTo>
+                  <a:lnTo>
+                    <a:pt x="5613109" y="3253858"/>
+                  </a:lnTo>
+                  <a:lnTo>
+                    <a:pt x="5539349" y="3243568"/>
+                  </a:lnTo>
+                  <a:lnTo>
+                    <a:pt x="5465589" y="3232817"/>
+                  </a:lnTo>
+                  <a:lnTo>
+                    <a:pt x="5391829" y="3221585"/>
+                  </a:lnTo>
+                  <a:lnTo>
+                    <a:pt x="5318069" y="3209850"/>
+                  </a:lnTo>
+                  <a:lnTo>
+                    <a:pt x="5244309" y="3197590"/>
+                  </a:lnTo>
+                  <a:lnTo>
+                    <a:pt x="5170549" y="3184782"/>
+                  </a:lnTo>
+                  <a:lnTo>
+                    <a:pt x="5096789" y="3171399"/>
+                  </a:lnTo>
+                  <a:lnTo>
+                    <a:pt x="5023029" y="3157418"/>
+                  </a:lnTo>
+                  <a:lnTo>
+                    <a:pt x="4949269" y="3142811"/>
+                  </a:lnTo>
+                  <a:lnTo>
+                    <a:pt x="4875509" y="3127551"/>
+                  </a:lnTo>
+                  <a:lnTo>
+                    <a:pt x="4801749" y="3111607"/>
+                  </a:lnTo>
+                  <a:lnTo>
+                    <a:pt x="4727989" y="3094949"/>
+                  </a:lnTo>
+                  <a:lnTo>
+                    <a:pt x="4654229" y="3077546"/>
+                  </a:lnTo>
+                  <a:lnTo>
+                    <a:pt x="4580469" y="3059364"/>
+                  </a:lnTo>
+                  <a:lnTo>
+                    <a:pt x="4506709" y="3040368"/>
+                  </a:lnTo>
+                  <a:lnTo>
+                    <a:pt x="4432949" y="3020522"/>
+                  </a:lnTo>
+                  <a:lnTo>
+                    <a:pt x="4359189" y="2999787"/>
+                  </a:lnTo>
+                  <a:lnTo>
+                    <a:pt x="4285429" y="2978124"/>
+                  </a:lnTo>
+                  <a:lnTo>
+                    <a:pt x="4211669" y="2955492"/>
+                  </a:lnTo>
+                  <a:lnTo>
+                    <a:pt x="4137909" y="2931847"/>
+                  </a:lnTo>
+                  <a:lnTo>
+                    <a:pt x="4064149" y="2907143"/>
+                  </a:lnTo>
+                  <a:lnTo>
+                    <a:pt x="3990388" y="2881333"/>
+                  </a:lnTo>
+                  <a:lnTo>
+                    <a:pt x="3916628" y="2854368"/>
+                  </a:lnTo>
+                  <a:lnTo>
+                    <a:pt x="3842868" y="2826196"/>
+                  </a:lnTo>
+                  <a:lnTo>
+                    <a:pt x="3769108" y="2796763"/>
+                  </a:lnTo>
+                  <a:lnTo>
+                    <a:pt x="3695348" y="2766013"/>
+                  </a:lnTo>
+                  <a:lnTo>
+                    <a:pt x="3621588" y="2733886"/>
+                  </a:lnTo>
+                  <a:lnTo>
+                    <a:pt x="3547828" y="2700321"/>
+                  </a:lnTo>
+                  <a:lnTo>
+                    <a:pt x="3474068" y="2665254"/>
+                  </a:lnTo>
+                  <a:lnTo>
+                    <a:pt x="3400308" y="2648201"/>
+                  </a:lnTo>
+                  <a:lnTo>
+                    <a:pt x="3326548" y="2639384"/>
+                  </a:lnTo>
+                  <a:lnTo>
+                    <a:pt x="3252788" y="2630473"/>
+                  </a:lnTo>
+                  <a:lnTo>
+                    <a:pt x="3179028" y="2621468"/>
+                  </a:lnTo>
+                  <a:lnTo>
+                    <a:pt x="3105268" y="2612369"/>
+                  </a:lnTo>
+                  <a:lnTo>
+                    <a:pt x="3031508" y="2603173"/>
+                  </a:lnTo>
+                  <a:lnTo>
+                    <a:pt x="2957748" y="2593881"/>
+                  </a:lnTo>
+                  <a:lnTo>
+                    <a:pt x="2883988" y="2584490"/>
+                  </a:lnTo>
+                  <a:lnTo>
+                    <a:pt x="2810228" y="2575000"/>
+                  </a:lnTo>
+                  <a:lnTo>
+                    <a:pt x="2736468" y="2565410"/>
+                  </a:lnTo>
+                  <a:lnTo>
+                    <a:pt x="2662708" y="2555719"/>
+                  </a:lnTo>
+                  <a:lnTo>
+                    <a:pt x="2588948" y="2545925"/>
+                  </a:lnTo>
+                  <a:lnTo>
+                    <a:pt x="2515188" y="2536029"/>
+                  </a:lnTo>
+                  <a:lnTo>
+                    <a:pt x="2441428" y="2526027"/>
+                  </a:lnTo>
+                  <a:lnTo>
+                    <a:pt x="2367668" y="2515921"/>
+                  </a:lnTo>
+                  <a:lnTo>
+                    <a:pt x="2293908" y="2505707"/>
+                  </a:lnTo>
+                  <a:lnTo>
+                    <a:pt x="2220148" y="2495386"/>
+                  </a:lnTo>
+                  <a:lnTo>
+                    <a:pt x="2146388" y="2484956"/>
+                  </a:lnTo>
+                  <a:lnTo>
+                    <a:pt x="2072628" y="2474416"/>
+                  </a:lnTo>
+                  <a:lnTo>
+                    <a:pt x="1998868" y="2463764"/>
+                  </a:lnTo>
+                  <a:lnTo>
+                    <a:pt x="1925108" y="2453000"/>
+                  </a:lnTo>
+                  <a:lnTo>
+                    <a:pt x="1851348" y="2442123"/>
+                  </a:lnTo>
+                  <a:lnTo>
+                    <a:pt x="1777588" y="2431131"/>
+                  </a:lnTo>
+                  <a:lnTo>
+                    <a:pt x="1703828" y="2420023"/>
+                  </a:lnTo>
+                  <a:lnTo>
+                    <a:pt x="1630068" y="2408797"/>
+                  </a:lnTo>
+                  <a:lnTo>
+                    <a:pt x="1556308" y="2397453"/>
+                  </a:lnTo>
+                  <a:lnTo>
+                    <a:pt x="1482548" y="2385990"/>
+                  </a:lnTo>
+                  <a:lnTo>
+                    <a:pt x="1408788" y="2374405"/>
+                  </a:lnTo>
+                  <a:lnTo>
+                    <a:pt x="1335028" y="2362698"/>
+                  </a:lnTo>
+                  <a:lnTo>
+                    <a:pt x="1261268" y="2350868"/>
+                  </a:lnTo>
+                  <a:lnTo>
+                    <a:pt x="1187508" y="2338913"/>
+                  </a:lnTo>
+                  <a:lnTo>
+                    <a:pt x="1113747" y="2326831"/>
+                  </a:lnTo>
+                  <a:lnTo>
+                    <a:pt x="1039987" y="2314622"/>
+                  </a:lnTo>
+                  <a:lnTo>
+                    <a:pt x="966227" y="2302285"/>
+                  </a:lnTo>
+                  <a:lnTo>
+                    <a:pt x="892467" y="2289817"/>
+                  </a:lnTo>
+                  <a:lnTo>
+                    <a:pt x="818707" y="2277217"/>
+                  </a:lnTo>
+                  <a:lnTo>
+                    <a:pt x="744947" y="2264485"/>
+                  </a:lnTo>
+                  <a:lnTo>
+                    <a:pt x="671187" y="2251618"/>
+                  </a:lnTo>
+                  <a:lnTo>
+                    <a:pt x="597427" y="2238615"/>
+                  </a:lnTo>
+                  <a:lnTo>
+                    <a:pt x="523667" y="2225476"/>
+                  </a:lnTo>
+                  <a:lnTo>
+                    <a:pt x="449907" y="2212197"/>
+                  </a:lnTo>
+                  <a:lnTo>
+                    <a:pt x="376147" y="2198778"/>
+                  </a:lnTo>
+                  <a:lnTo>
+                    <a:pt x="302387" y="2185218"/>
+                  </a:lnTo>
+                  <a:lnTo>
+                    <a:pt x="228627" y="2171515"/>
+                  </a:lnTo>
+                  <a:lnTo>
+                    <a:pt x="154867" y="2157667"/>
+                  </a:lnTo>
+                  <a:lnTo>
+                    <a:pt x="81107" y="2143673"/>
+                  </a:lnTo>
+                  <a:lnTo>
+                    <a:pt x="7347" y="2129531"/>
+                  </a:lnTo>
+                  <a:lnTo>
+                    <a:pt x="0" y="2128108"/>
                   </a:lnTo>
                   <a:close/>
                 </a:path>
@@ -3591,270 +3591,270 @@
           </p:nvSpPr>
           <p:spPr>
             <a:xfrm>
-              <a:off x="1851933" y="1896563"/>
-              <a:ext cx="6201414" cy="3145117"/>
+              <a:off x="1851933" y="2073503"/>
+              <a:ext cx="6201414" cy="2999688"/>
             </a:xfrm>
             <a:custGeom>
               <a:avLst/>
               <a:pathLst>
-                <a:path w="6201414" h="3145117">
+                <a:path w="6201414" h="2999688">
                   <a:moveTo>
                     <a:pt x="0" y="0"/>
                   </a:moveTo>
                   <a:lnTo>
-                    <a:pt x="5572" y="12309"/>
-                  </a:lnTo>
-                  <a:lnTo>
-                    <a:pt x="79332" y="168275"/>
-                  </a:lnTo>
-                  <a:lnTo>
-                    <a:pt x="153092" y="317558"/>
-                  </a:lnTo>
-                  <a:lnTo>
-                    <a:pt x="226852" y="460446"/>
-                  </a:lnTo>
-                  <a:lnTo>
-                    <a:pt x="300612" y="597211"/>
-                  </a:lnTo>
-                  <a:lnTo>
-                    <a:pt x="374372" y="728117"/>
-                  </a:lnTo>
-                  <a:lnTo>
-                    <a:pt x="448132" y="853415"/>
-                  </a:lnTo>
-                  <a:lnTo>
-                    <a:pt x="521892" y="973344"/>
-                  </a:lnTo>
-                  <a:lnTo>
-                    <a:pt x="595652" y="1088135"/>
-                  </a:lnTo>
-                  <a:lnTo>
-                    <a:pt x="669412" y="1198009"/>
-                  </a:lnTo>
-                  <a:lnTo>
-                    <a:pt x="743172" y="1303174"/>
-                  </a:lnTo>
-                  <a:lnTo>
-                    <a:pt x="816932" y="1403834"/>
-                  </a:lnTo>
-                  <a:lnTo>
-                    <a:pt x="890692" y="1500182"/>
-                  </a:lnTo>
-                  <a:lnTo>
-                    <a:pt x="964452" y="1592401"/>
-                  </a:lnTo>
-                  <a:lnTo>
-                    <a:pt x="1038212" y="1680670"/>
-                  </a:lnTo>
-                  <a:lnTo>
-                    <a:pt x="1111972" y="1765156"/>
-                  </a:lnTo>
-                  <a:lnTo>
-                    <a:pt x="1185732" y="1846023"/>
-                  </a:lnTo>
-                  <a:lnTo>
-                    <a:pt x="1259492" y="1923426"/>
-                  </a:lnTo>
-                  <a:lnTo>
-                    <a:pt x="1333252" y="1997512"/>
-                  </a:lnTo>
-                  <a:lnTo>
-                    <a:pt x="1407012" y="2068424"/>
-                  </a:lnTo>
-                  <a:lnTo>
-                    <a:pt x="1480772" y="2136298"/>
-                  </a:lnTo>
-                  <a:lnTo>
-                    <a:pt x="1554532" y="2201263"/>
-                  </a:lnTo>
-                  <a:lnTo>
-                    <a:pt x="1628292" y="2263446"/>
-                  </a:lnTo>
-                  <a:lnTo>
-                    <a:pt x="1702052" y="2322964"/>
-                  </a:lnTo>
-                  <a:lnTo>
-                    <a:pt x="1775812" y="2379933"/>
-                  </a:lnTo>
-                  <a:lnTo>
-                    <a:pt x="1849572" y="2434460"/>
-                  </a:lnTo>
-                  <a:lnTo>
-                    <a:pt x="1923332" y="2486652"/>
-                  </a:lnTo>
-                  <a:lnTo>
-                    <a:pt x="1997092" y="2536607"/>
-                  </a:lnTo>
-                  <a:lnTo>
-                    <a:pt x="2070852" y="2584422"/>
-                  </a:lnTo>
-                  <a:lnTo>
-                    <a:pt x="2144612" y="2630189"/>
-                  </a:lnTo>
-                  <a:lnTo>
-                    <a:pt x="2218372" y="2673995"/>
-                  </a:lnTo>
-                  <a:lnTo>
-                    <a:pt x="2292133" y="2715924"/>
-                  </a:lnTo>
-                  <a:lnTo>
-                    <a:pt x="2365893" y="2756056"/>
-                  </a:lnTo>
-                  <a:lnTo>
-                    <a:pt x="2439653" y="2785738"/>
-                  </a:lnTo>
-                  <a:lnTo>
-                    <a:pt x="2513413" y="2794791"/>
-                  </a:lnTo>
-                  <a:lnTo>
-                    <a:pt x="2587173" y="2803749"/>
-                  </a:lnTo>
-                  <a:lnTo>
-                    <a:pt x="2660933" y="2812614"/>
-                  </a:lnTo>
-                  <a:lnTo>
-                    <a:pt x="2734693" y="2821386"/>
-                  </a:lnTo>
-                  <a:lnTo>
-                    <a:pt x="2808453" y="2830067"/>
-                  </a:lnTo>
-                  <a:lnTo>
-                    <a:pt x="2882213" y="2838657"/>
-                  </a:lnTo>
-                  <a:lnTo>
-                    <a:pt x="2955973" y="2847157"/>
-                  </a:lnTo>
-                  <a:lnTo>
-                    <a:pt x="3029733" y="2855569"/>
-                  </a:lnTo>
-                  <a:lnTo>
-                    <a:pt x="3103493" y="2863892"/>
-                  </a:lnTo>
-                  <a:lnTo>
-                    <a:pt x="3177253" y="2872129"/>
-                  </a:lnTo>
-                  <a:lnTo>
-                    <a:pt x="3251013" y="2880280"/>
-                  </a:lnTo>
-                  <a:lnTo>
-                    <a:pt x="3324773" y="2888345"/>
-                  </a:lnTo>
-                  <a:lnTo>
-                    <a:pt x="3398533" y="2896327"/>
-                  </a:lnTo>
-                  <a:lnTo>
-                    <a:pt x="3472293" y="2904225"/>
-                  </a:lnTo>
-                  <a:lnTo>
-                    <a:pt x="3546053" y="2912040"/>
-                  </a:lnTo>
-                  <a:lnTo>
-                    <a:pt x="3619813" y="2919774"/>
-                  </a:lnTo>
-                  <a:lnTo>
-                    <a:pt x="3693573" y="2927427"/>
-                  </a:lnTo>
-                  <a:lnTo>
-                    <a:pt x="3767333" y="2935001"/>
-                  </a:lnTo>
-                  <a:lnTo>
-                    <a:pt x="3841093" y="2942495"/>
-                  </a:lnTo>
-                  <a:lnTo>
-                    <a:pt x="3914853" y="2949911"/>
-                  </a:lnTo>
-                  <a:lnTo>
-                    <a:pt x="3988613" y="2957249"/>
-                  </a:lnTo>
-                  <a:lnTo>
-                    <a:pt x="4062373" y="2964511"/>
-                  </a:lnTo>
-                  <a:lnTo>
-                    <a:pt x="4136133" y="2971697"/>
-                  </a:lnTo>
-                  <a:lnTo>
-                    <a:pt x="4209893" y="2978808"/>
-                  </a:lnTo>
-                  <a:lnTo>
-                    <a:pt x="4283653" y="2985845"/>
-                  </a:lnTo>
-                  <a:lnTo>
-                    <a:pt x="4357413" y="2992808"/>
-                  </a:lnTo>
-                  <a:lnTo>
-                    <a:pt x="4431173" y="2999698"/>
-                  </a:lnTo>
-                  <a:lnTo>
-                    <a:pt x="4504933" y="3006517"/>
-                  </a:lnTo>
-                  <a:lnTo>
-                    <a:pt x="4578693" y="3013264"/>
-                  </a:lnTo>
-                  <a:lnTo>
-                    <a:pt x="4652453" y="3019941"/>
-                  </a:lnTo>
-                  <a:lnTo>
-                    <a:pt x="4726213" y="3026548"/>
-                  </a:lnTo>
-                  <a:lnTo>
-                    <a:pt x="4799973" y="3033086"/>
-                  </a:lnTo>
-                  <a:lnTo>
-                    <a:pt x="4873733" y="3039556"/>
-                  </a:lnTo>
-                  <a:lnTo>
-                    <a:pt x="4947493" y="3045959"/>
-                  </a:lnTo>
-                  <a:lnTo>
-                    <a:pt x="5021253" y="3052294"/>
-                  </a:lnTo>
-                  <a:lnTo>
-                    <a:pt x="5095013" y="3058563"/>
-                  </a:lnTo>
-                  <a:lnTo>
-                    <a:pt x="5168773" y="3064767"/>
-                  </a:lnTo>
-                  <a:lnTo>
-                    <a:pt x="5242534" y="3070906"/>
-                  </a:lnTo>
-                  <a:lnTo>
-                    <a:pt x="5316294" y="3076981"/>
-                  </a:lnTo>
-                  <a:lnTo>
-                    <a:pt x="5390054" y="3082993"/>
-                  </a:lnTo>
-                  <a:lnTo>
-                    <a:pt x="5463814" y="3088941"/>
-                  </a:lnTo>
-                  <a:lnTo>
-                    <a:pt x="5537574" y="3094828"/>
-                  </a:lnTo>
-                  <a:lnTo>
-                    <a:pt x="5611334" y="3100653"/>
-                  </a:lnTo>
-                  <a:lnTo>
-                    <a:pt x="5685094" y="3106417"/>
-                  </a:lnTo>
-                  <a:lnTo>
-                    <a:pt x="5758854" y="3112122"/>
-                  </a:lnTo>
-                  <a:lnTo>
-                    <a:pt x="5832614" y="3117766"/>
-                  </a:lnTo>
-                  <a:lnTo>
-                    <a:pt x="5906374" y="3123352"/>
-                  </a:lnTo>
-                  <a:lnTo>
-                    <a:pt x="5980134" y="3128879"/>
-                  </a:lnTo>
-                  <a:lnTo>
-                    <a:pt x="6053894" y="3134349"/>
-                  </a:lnTo>
-                  <a:lnTo>
-                    <a:pt x="6127654" y="3139761"/>
-                  </a:lnTo>
-                  <a:lnTo>
-                    <a:pt x="6201414" y="3145117"/>
+                    <a:pt x="5572" y="11740"/>
+                  </a:lnTo>
+                  <a:lnTo>
+                    <a:pt x="79332" y="160494"/>
+                  </a:lnTo>
+                  <a:lnTo>
+                    <a:pt x="153092" y="302874"/>
+                  </a:lnTo>
+                  <a:lnTo>
+                    <a:pt x="226852" y="439155"/>
+                  </a:lnTo>
+                  <a:lnTo>
+                    <a:pt x="300612" y="569596"/>
+                  </a:lnTo>
+                  <a:lnTo>
+                    <a:pt x="374372" y="694449"/>
+                  </a:lnTo>
+                  <a:lnTo>
+                    <a:pt x="448132" y="813953"/>
+                  </a:lnTo>
+                  <a:lnTo>
+                    <a:pt x="521892" y="928337"/>
+                  </a:lnTo>
+                  <a:lnTo>
+                    <a:pt x="595652" y="1037820"/>
+                  </a:lnTo>
+                  <a:lnTo>
+                    <a:pt x="669412" y="1142613"/>
+                  </a:lnTo>
+                  <a:lnTo>
+                    <a:pt x="743172" y="1242916"/>
+                  </a:lnTo>
+                  <a:lnTo>
+                    <a:pt x="816932" y="1338921"/>
+                  </a:lnTo>
+                  <a:lnTo>
+                    <a:pt x="890692" y="1430814"/>
+                  </a:lnTo>
+                  <a:lnTo>
+                    <a:pt x="964452" y="1518769"/>
+                  </a:lnTo>
+                  <a:lnTo>
+                    <a:pt x="1038212" y="1602956"/>
+                  </a:lnTo>
+                  <a:lnTo>
+                    <a:pt x="1111972" y="1683536"/>
+                  </a:lnTo>
+                  <a:lnTo>
+                    <a:pt x="1185732" y="1760664"/>
+                  </a:lnTo>
+                  <a:lnTo>
+                    <a:pt x="1259492" y="1834487"/>
+                  </a:lnTo>
+                  <a:lnTo>
+                    <a:pt x="1333252" y="1905147"/>
+                  </a:lnTo>
+                  <a:lnTo>
+                    <a:pt x="1407012" y="1972781"/>
+                  </a:lnTo>
+                  <a:lnTo>
+                    <a:pt x="1480772" y="2037516"/>
+                  </a:lnTo>
+                  <a:lnTo>
+                    <a:pt x="1554532" y="2099478"/>
+                  </a:lnTo>
+                  <a:lnTo>
+                    <a:pt x="1628292" y="2158785"/>
+                  </a:lnTo>
+                  <a:lnTo>
+                    <a:pt x="1702052" y="2215551"/>
+                  </a:lnTo>
+                  <a:lnTo>
+                    <a:pt x="1775812" y="2269886"/>
+                  </a:lnTo>
+                  <a:lnTo>
+                    <a:pt x="1849572" y="2321892"/>
+                  </a:lnTo>
+                  <a:lnTo>
+                    <a:pt x="1923332" y="2371670"/>
+                  </a:lnTo>
+                  <a:lnTo>
+                    <a:pt x="1997092" y="2419316"/>
+                  </a:lnTo>
+                  <a:lnTo>
+                    <a:pt x="2070852" y="2464920"/>
+                  </a:lnTo>
+                  <a:lnTo>
+                    <a:pt x="2144612" y="2508570"/>
+                  </a:lnTo>
+                  <a:lnTo>
+                    <a:pt x="2218372" y="2550350"/>
+                  </a:lnTo>
+                  <a:lnTo>
+                    <a:pt x="2292133" y="2590340"/>
+                  </a:lnTo>
+                  <a:lnTo>
+                    <a:pt x="2365893" y="2628617"/>
+                  </a:lnTo>
+                  <a:lnTo>
+                    <a:pt x="2439653" y="2656926"/>
+                  </a:lnTo>
+                  <a:lnTo>
+                    <a:pt x="2513413" y="2665561"/>
+                  </a:lnTo>
+                  <a:lnTo>
+                    <a:pt x="2587173" y="2674105"/>
+                  </a:lnTo>
+                  <a:lnTo>
+                    <a:pt x="2660933" y="2682560"/>
+                  </a:lnTo>
+                  <a:lnTo>
+                    <a:pt x="2734693" y="2690926"/>
+                  </a:lnTo>
+                  <a:lnTo>
+                    <a:pt x="2808453" y="2699206"/>
+                  </a:lnTo>
+                  <a:lnTo>
+                    <a:pt x="2882213" y="2707398"/>
+                  </a:lnTo>
+                  <a:lnTo>
+                    <a:pt x="2955973" y="2715506"/>
+                  </a:lnTo>
+                  <a:lnTo>
+                    <a:pt x="3029733" y="2723528"/>
+                  </a:lnTo>
+                  <a:lnTo>
+                    <a:pt x="3103493" y="2731467"/>
+                  </a:lnTo>
+                  <a:lnTo>
+                    <a:pt x="3177253" y="2739323"/>
+                  </a:lnTo>
+                  <a:lnTo>
+                    <a:pt x="3251013" y="2747097"/>
+                  </a:lnTo>
+                  <a:lnTo>
+                    <a:pt x="3324773" y="2754789"/>
+                  </a:lnTo>
+                  <a:lnTo>
+                    <a:pt x="3398533" y="2762402"/>
+                  </a:lnTo>
+                  <a:lnTo>
+                    <a:pt x="3472293" y="2769934"/>
+                  </a:lnTo>
+                  <a:lnTo>
+                    <a:pt x="3546053" y="2777389"/>
+                  </a:lnTo>
+                  <a:lnTo>
+                    <a:pt x="3619813" y="2784765"/>
+                  </a:lnTo>
+                  <a:lnTo>
+                    <a:pt x="3693573" y="2792064"/>
+                  </a:lnTo>
+                  <a:lnTo>
+                    <a:pt x="3767333" y="2799287"/>
+                  </a:lnTo>
+                  <a:lnTo>
+                    <a:pt x="3841093" y="2806435"/>
+                  </a:lnTo>
+                  <a:lnTo>
+                    <a:pt x="3914853" y="2813508"/>
+                  </a:lnTo>
+                  <a:lnTo>
+                    <a:pt x="3988613" y="2820507"/>
+                  </a:lnTo>
+                  <a:lnTo>
+                    <a:pt x="4062373" y="2827433"/>
+                  </a:lnTo>
+                  <a:lnTo>
+                    <a:pt x="4136133" y="2834287"/>
+                  </a:lnTo>
+                  <a:lnTo>
+                    <a:pt x="4209893" y="2841069"/>
+                  </a:lnTo>
+                  <a:lnTo>
+                    <a:pt x="4283653" y="2847780"/>
+                  </a:lnTo>
+                  <a:lnTo>
+                    <a:pt x="4357413" y="2854421"/>
+                  </a:lnTo>
+                  <a:lnTo>
+                    <a:pt x="4431173" y="2860993"/>
+                  </a:lnTo>
+                  <a:lnTo>
+                    <a:pt x="4504933" y="2867497"/>
+                  </a:lnTo>
+                  <a:lnTo>
+                    <a:pt x="4578693" y="2873932"/>
+                  </a:lnTo>
+                  <a:lnTo>
+                    <a:pt x="4652453" y="2880300"/>
+                  </a:lnTo>
+                  <a:lnTo>
+                    <a:pt x="4726213" y="2886602"/>
+                  </a:lnTo>
+                  <a:lnTo>
+                    <a:pt x="4799973" y="2892838"/>
+                  </a:lnTo>
+                  <a:lnTo>
+                    <a:pt x="4873733" y="2899008"/>
+                  </a:lnTo>
+                  <a:lnTo>
+                    <a:pt x="4947493" y="2905115"/>
+                  </a:lnTo>
+                  <a:lnTo>
+                    <a:pt x="5021253" y="2911157"/>
+                  </a:lnTo>
+                  <a:lnTo>
+                    <a:pt x="5095013" y="2917137"/>
+                  </a:lnTo>
+                  <a:lnTo>
+                    <a:pt x="5168773" y="2923054"/>
+                  </a:lnTo>
+                  <a:lnTo>
+                    <a:pt x="5242534" y="2928909"/>
+                  </a:lnTo>
+                  <a:lnTo>
+                    <a:pt x="5316294" y="2934703"/>
+                  </a:lnTo>
+                  <a:lnTo>
+                    <a:pt x="5390054" y="2940436"/>
+                  </a:lnTo>
+                  <a:lnTo>
+                    <a:pt x="5463814" y="2946110"/>
+                  </a:lnTo>
+                  <a:lnTo>
+                    <a:pt x="5537574" y="2951724"/>
+                  </a:lnTo>
+                  <a:lnTo>
+                    <a:pt x="5611334" y="2957280"/>
+                  </a:lnTo>
+                  <a:lnTo>
+                    <a:pt x="5685094" y="2962778"/>
+                  </a:lnTo>
+                  <a:lnTo>
+                    <a:pt x="5758854" y="2968218"/>
+                  </a:lnTo>
+                  <a:lnTo>
+                    <a:pt x="5832614" y="2973602"/>
+                  </a:lnTo>
+                  <a:lnTo>
+                    <a:pt x="5906374" y="2978929"/>
+                  </a:lnTo>
+                  <a:lnTo>
+                    <a:pt x="5980134" y="2984201"/>
+                  </a:lnTo>
+                  <a:lnTo>
+                    <a:pt x="6053894" y="2989417"/>
+                  </a:lnTo>
+                  <a:lnTo>
+                    <a:pt x="6127654" y="2994580"/>
+                  </a:lnTo>
+                  <a:lnTo>
+                    <a:pt x="6201414" y="2999688"/>
                   </a:lnTo>
                 </a:path>
               </a:pathLst>
@@ -3874,309 +3874,309 @@
           </p:nvSpPr>
           <p:spPr>
             <a:xfrm>
-              <a:off x="817517" y="4127845"/>
-              <a:ext cx="7235830" cy="1329380"/>
+              <a:off x="817517" y="4201611"/>
+              <a:ext cx="7235830" cy="1267910"/>
             </a:xfrm>
             <a:custGeom>
               <a:avLst/>
               <a:pathLst>
-                <a:path w="7235830" h="1329380">
+                <a:path w="7235830" h="1267910">
                   <a:moveTo>
-                    <a:pt x="7235830" y="1329380"/>
+                    <a:pt x="7235830" y="1267910"/>
                   </a:moveTo>
                   <a:lnTo>
-                    <a:pt x="7162070" y="1325263"/>
-                  </a:lnTo>
-                  <a:lnTo>
-                    <a:pt x="7088310" y="1320961"/>
-                  </a:lnTo>
-                  <a:lnTo>
-                    <a:pt x="7014550" y="1316467"/>
-                  </a:lnTo>
-                  <a:lnTo>
-                    <a:pt x="6940789" y="1311772"/>
-                  </a:lnTo>
-                  <a:lnTo>
-                    <a:pt x="6867029" y="1306867"/>
-                  </a:lnTo>
-                  <a:lnTo>
-                    <a:pt x="6793269" y="1301742"/>
-                  </a:lnTo>
-                  <a:lnTo>
-                    <a:pt x="6719509" y="1296387"/>
-                  </a:lnTo>
-                  <a:lnTo>
-                    <a:pt x="6645749" y="1290793"/>
-                  </a:lnTo>
-                  <a:lnTo>
-                    <a:pt x="6571989" y="1284949"/>
-                  </a:lnTo>
-                  <a:lnTo>
-                    <a:pt x="6498229" y="1278843"/>
-                  </a:lnTo>
-                  <a:lnTo>
-                    <a:pt x="6424469" y="1272463"/>
-                  </a:lnTo>
-                  <a:lnTo>
-                    <a:pt x="6350709" y="1265799"/>
-                  </a:lnTo>
-                  <a:lnTo>
-                    <a:pt x="6276949" y="1258835"/>
-                  </a:lnTo>
-                  <a:lnTo>
-                    <a:pt x="6203189" y="1251560"/>
-                  </a:lnTo>
-                  <a:lnTo>
-                    <a:pt x="6129429" y="1243960"/>
-                  </a:lnTo>
-                  <a:lnTo>
-                    <a:pt x="6055669" y="1236019"/>
-                  </a:lnTo>
-                  <a:lnTo>
-                    <a:pt x="5981909" y="1227723"/>
-                  </a:lnTo>
-                  <a:lnTo>
-                    <a:pt x="5908149" y="1219055"/>
-                  </a:lnTo>
-                  <a:lnTo>
-                    <a:pt x="5834389" y="1210000"/>
-                  </a:lnTo>
-                  <a:lnTo>
-                    <a:pt x="5760629" y="1200539"/>
-                  </a:lnTo>
-                  <a:lnTo>
-                    <a:pt x="5686869" y="1190655"/>
-                  </a:lnTo>
-                  <a:lnTo>
-                    <a:pt x="5613109" y="1180328"/>
-                  </a:lnTo>
-                  <a:lnTo>
-                    <a:pt x="5539349" y="1169539"/>
-                  </a:lnTo>
-                  <a:lnTo>
-                    <a:pt x="5465589" y="1158267"/>
-                  </a:lnTo>
-                  <a:lnTo>
-                    <a:pt x="5391829" y="1146490"/>
-                  </a:lnTo>
-                  <a:lnTo>
-                    <a:pt x="5318069" y="1134187"/>
-                  </a:lnTo>
-                  <a:lnTo>
-                    <a:pt x="5244309" y="1121332"/>
-                  </a:lnTo>
-                  <a:lnTo>
-                    <a:pt x="5170549" y="1107902"/>
-                  </a:lnTo>
-                  <a:lnTo>
-                    <a:pt x="5096789" y="1093872"/>
-                  </a:lnTo>
-                  <a:lnTo>
-                    <a:pt x="5023029" y="1079213"/>
-                  </a:lnTo>
-                  <a:lnTo>
-                    <a:pt x="4949269" y="1063898"/>
-                  </a:lnTo>
-                  <a:lnTo>
-                    <a:pt x="4875509" y="1047897"/>
-                  </a:lnTo>
-                  <a:lnTo>
-                    <a:pt x="4801749" y="1031180"/>
-                  </a:lnTo>
-                  <a:lnTo>
-                    <a:pt x="4727989" y="1013715"/>
-                  </a:lnTo>
-                  <a:lnTo>
-                    <a:pt x="4654229" y="995468"/>
-                  </a:lnTo>
-                  <a:lnTo>
-                    <a:pt x="4580469" y="976405"/>
-                  </a:lnTo>
-                  <a:lnTo>
-                    <a:pt x="4506709" y="956488"/>
-                  </a:lnTo>
-                  <a:lnTo>
-                    <a:pt x="4432949" y="935679"/>
-                  </a:lnTo>
-                  <a:lnTo>
-                    <a:pt x="4359189" y="913939"/>
-                  </a:lnTo>
-                  <a:lnTo>
-                    <a:pt x="4285429" y="891226"/>
-                  </a:lnTo>
-                  <a:lnTo>
-                    <a:pt x="4211669" y="867497"/>
-                  </a:lnTo>
-                  <a:lnTo>
-                    <a:pt x="4137909" y="842705"/>
-                  </a:lnTo>
-                  <a:lnTo>
-                    <a:pt x="4064149" y="816803"/>
-                  </a:lnTo>
-                  <a:lnTo>
-                    <a:pt x="3990388" y="789742"/>
-                  </a:lnTo>
-                  <a:lnTo>
-                    <a:pt x="3916628" y="761470"/>
-                  </a:lnTo>
-                  <a:lnTo>
-                    <a:pt x="3842868" y="731933"/>
-                  </a:lnTo>
-                  <a:lnTo>
-                    <a:pt x="3769108" y="701073"/>
-                  </a:lnTo>
-                  <a:lnTo>
-                    <a:pt x="3695348" y="668832"/>
-                  </a:lnTo>
-                  <a:lnTo>
-                    <a:pt x="3621588" y="635147"/>
-                  </a:lnTo>
-                  <a:lnTo>
-                    <a:pt x="3547828" y="599955"/>
-                  </a:lnTo>
-                  <a:lnTo>
-                    <a:pt x="3474068" y="563188"/>
-                  </a:lnTo>
-                  <a:lnTo>
-                    <a:pt x="3400308" y="545308"/>
-                  </a:lnTo>
-                  <a:lnTo>
-                    <a:pt x="3326548" y="536063"/>
-                  </a:lnTo>
-                  <a:lnTo>
-                    <a:pt x="3252788" y="526720"/>
-                  </a:lnTo>
-                  <a:lnTo>
-                    <a:pt x="3179028" y="517279"/>
-                  </a:lnTo>
-                  <a:lnTo>
-                    <a:pt x="3105268" y="507738"/>
-                  </a:lnTo>
-                  <a:lnTo>
-                    <a:pt x="3031508" y="498097"/>
-                  </a:lnTo>
-                  <a:lnTo>
-                    <a:pt x="2957748" y="488354"/>
-                  </a:lnTo>
-                  <a:lnTo>
-                    <a:pt x="2883988" y="478508"/>
-                  </a:lnTo>
-                  <a:lnTo>
-                    <a:pt x="2810228" y="468558"/>
-                  </a:lnTo>
-                  <a:lnTo>
-                    <a:pt x="2736468" y="458503"/>
-                  </a:lnTo>
-                  <a:lnTo>
-                    <a:pt x="2662708" y="448342"/>
-                  </a:lnTo>
-                  <a:lnTo>
-                    <a:pt x="2588948" y="438074"/>
-                  </a:lnTo>
-                  <a:lnTo>
-                    <a:pt x="2515188" y="427697"/>
-                  </a:lnTo>
-                  <a:lnTo>
-                    <a:pt x="2441428" y="417211"/>
-                  </a:lnTo>
-                  <a:lnTo>
-                    <a:pt x="2367668" y="406614"/>
-                  </a:lnTo>
-                  <a:lnTo>
-                    <a:pt x="2293908" y="395906"/>
-                  </a:lnTo>
-                  <a:lnTo>
-                    <a:pt x="2220148" y="385084"/>
-                  </a:lnTo>
-                  <a:lnTo>
-                    <a:pt x="2146388" y="374148"/>
-                  </a:lnTo>
-                  <a:lnTo>
-                    <a:pt x="2072628" y="363097"/>
-                  </a:lnTo>
-                  <a:lnTo>
-                    <a:pt x="1998868" y="351929"/>
-                  </a:lnTo>
-                  <a:lnTo>
-                    <a:pt x="1925108" y="340644"/>
-                  </a:lnTo>
-                  <a:lnTo>
-                    <a:pt x="1851348" y="329239"/>
-                  </a:lnTo>
-                  <a:lnTo>
-                    <a:pt x="1777588" y="317714"/>
-                  </a:lnTo>
-                  <a:lnTo>
-                    <a:pt x="1703828" y="306067"/>
-                  </a:lnTo>
-                  <a:lnTo>
-                    <a:pt x="1630068" y="294297"/>
-                  </a:lnTo>
-                  <a:lnTo>
-                    <a:pt x="1556308" y="282403"/>
-                  </a:lnTo>
-                  <a:lnTo>
-                    <a:pt x="1482548" y="270384"/>
-                  </a:lnTo>
-                  <a:lnTo>
-                    <a:pt x="1408788" y="258238"/>
-                  </a:lnTo>
-                  <a:lnTo>
-                    <a:pt x="1335028" y="245963"/>
-                  </a:lnTo>
-                  <a:lnTo>
-                    <a:pt x="1261268" y="233560"/>
-                  </a:lnTo>
-                  <a:lnTo>
-                    <a:pt x="1187508" y="221025"/>
-                  </a:lnTo>
-                  <a:lnTo>
-                    <a:pt x="1113747" y="208358"/>
-                  </a:lnTo>
-                  <a:lnTo>
-                    <a:pt x="1039987" y="195557"/>
-                  </a:lnTo>
-                  <a:lnTo>
-                    <a:pt x="966227" y="182621"/>
-                  </a:lnTo>
-                  <a:lnTo>
-                    <a:pt x="892467" y="169549"/>
-                  </a:lnTo>
-                  <a:lnTo>
-                    <a:pt x="818707" y="156338"/>
-                  </a:lnTo>
-                  <a:lnTo>
-                    <a:pt x="744947" y="142988"/>
-                  </a:lnTo>
-                  <a:lnTo>
-                    <a:pt x="671187" y="129498"/>
-                  </a:lnTo>
-                  <a:lnTo>
-                    <a:pt x="597427" y="115865"/>
-                  </a:lnTo>
-                  <a:lnTo>
-                    <a:pt x="523667" y="102088"/>
-                  </a:lnTo>
-                  <a:lnTo>
-                    <a:pt x="449907" y="88166"/>
-                  </a:lnTo>
-                  <a:lnTo>
-                    <a:pt x="376147" y="74097"/>
-                  </a:lnTo>
-                  <a:lnTo>
-                    <a:pt x="302387" y="59879"/>
-                  </a:lnTo>
-                  <a:lnTo>
-                    <a:pt x="228627" y="45511"/>
-                  </a:lnTo>
-                  <a:lnTo>
-                    <a:pt x="154867" y="30992"/>
-                  </a:lnTo>
-                  <a:lnTo>
-                    <a:pt x="81107" y="16319"/>
-                  </a:lnTo>
-                  <a:lnTo>
-                    <a:pt x="7347" y="1492"/>
+                    <a:pt x="7162070" y="1263983"/>
+                  </a:lnTo>
+                  <a:lnTo>
+                    <a:pt x="7088310" y="1259880"/>
+                  </a:lnTo>
+                  <a:lnTo>
+                    <a:pt x="7014550" y="1255594"/>
+                  </a:lnTo>
+                  <a:lnTo>
+                    <a:pt x="6940789" y="1251116"/>
+                  </a:lnTo>
+                  <a:lnTo>
+                    <a:pt x="6867029" y="1246438"/>
+                  </a:lnTo>
+                  <a:lnTo>
+                    <a:pt x="6793269" y="1241550"/>
+                  </a:lnTo>
+                  <a:lnTo>
+                    <a:pt x="6719509" y="1236443"/>
+                  </a:lnTo>
+                  <a:lnTo>
+                    <a:pt x="6645749" y="1231107"/>
+                  </a:lnTo>
+                  <a:lnTo>
+                    <a:pt x="6571989" y="1225533"/>
+                  </a:lnTo>
+                  <a:lnTo>
+                    <a:pt x="6498229" y="1219710"/>
+                  </a:lnTo>
+                  <a:lnTo>
+                    <a:pt x="6424469" y="1213625"/>
+                  </a:lnTo>
+                  <a:lnTo>
+                    <a:pt x="6350709" y="1207268"/>
+                  </a:lnTo>
+                  <a:lnTo>
+                    <a:pt x="6276949" y="1200627"/>
+                  </a:lnTo>
+                  <a:lnTo>
+                    <a:pt x="6203189" y="1193689"/>
+                  </a:lnTo>
+                  <a:lnTo>
+                    <a:pt x="6129429" y="1186440"/>
+                  </a:lnTo>
+                  <a:lnTo>
+                    <a:pt x="6055669" y="1178866"/>
+                  </a:lnTo>
+                  <a:lnTo>
+                    <a:pt x="5981909" y="1170953"/>
+                  </a:lnTo>
+                  <a:lnTo>
+                    <a:pt x="5908149" y="1162687"/>
+                  </a:lnTo>
+                  <a:lnTo>
+                    <a:pt x="5834389" y="1154050"/>
+                  </a:lnTo>
+                  <a:lnTo>
+                    <a:pt x="5760629" y="1145026"/>
+                  </a:lnTo>
+                  <a:lnTo>
+                    <a:pt x="5686869" y="1135599"/>
+                  </a:lnTo>
+                  <a:lnTo>
+                    <a:pt x="5613109" y="1125750"/>
+                  </a:lnTo>
+                  <a:lnTo>
+                    <a:pt x="5539349" y="1115460"/>
+                  </a:lnTo>
+                  <a:lnTo>
+                    <a:pt x="5465589" y="1104709"/>
+                  </a:lnTo>
+                  <a:lnTo>
+                    <a:pt x="5391829" y="1093477"/>
+                  </a:lnTo>
+                  <a:lnTo>
+                    <a:pt x="5318069" y="1081742"/>
+                  </a:lnTo>
+                  <a:lnTo>
+                    <a:pt x="5244309" y="1069482"/>
+                  </a:lnTo>
+                  <a:lnTo>
+                    <a:pt x="5170549" y="1056673"/>
+                  </a:lnTo>
+                  <a:lnTo>
+                    <a:pt x="5096789" y="1043291"/>
+                  </a:lnTo>
+                  <a:lnTo>
+                    <a:pt x="5023029" y="1029310"/>
+                  </a:lnTo>
+                  <a:lnTo>
+                    <a:pt x="4949269" y="1014703"/>
+                  </a:lnTo>
+                  <a:lnTo>
+                    <a:pt x="4875509" y="999443"/>
+                  </a:lnTo>
+                  <a:lnTo>
+                    <a:pt x="4801749" y="983499"/>
+                  </a:lnTo>
+                  <a:lnTo>
+                    <a:pt x="4727989" y="966841"/>
+                  </a:lnTo>
+                  <a:lnTo>
+                    <a:pt x="4654229" y="949438"/>
+                  </a:lnTo>
+                  <a:lnTo>
+                    <a:pt x="4580469" y="931256"/>
+                  </a:lnTo>
+                  <a:lnTo>
+                    <a:pt x="4506709" y="912260"/>
+                  </a:lnTo>
+                  <a:lnTo>
+                    <a:pt x="4432949" y="892414"/>
+                  </a:lnTo>
+                  <a:lnTo>
+                    <a:pt x="4359189" y="871679"/>
+                  </a:lnTo>
+                  <a:lnTo>
+                    <a:pt x="4285429" y="850016"/>
+                  </a:lnTo>
+                  <a:lnTo>
+                    <a:pt x="4211669" y="827384"/>
+                  </a:lnTo>
+                  <a:lnTo>
+                    <a:pt x="4137909" y="803739"/>
+                  </a:lnTo>
+                  <a:lnTo>
+                    <a:pt x="4064149" y="779035"/>
+                  </a:lnTo>
+                  <a:lnTo>
+                    <a:pt x="3990388" y="753225"/>
+                  </a:lnTo>
+                  <a:lnTo>
+                    <a:pt x="3916628" y="726260"/>
+                  </a:lnTo>
+                  <a:lnTo>
+                    <a:pt x="3842868" y="698088"/>
+                  </a:lnTo>
+                  <a:lnTo>
+                    <a:pt x="3769108" y="668655"/>
+                  </a:lnTo>
+                  <a:lnTo>
+                    <a:pt x="3695348" y="637905"/>
+                  </a:lnTo>
+                  <a:lnTo>
+                    <a:pt x="3621588" y="605778"/>
+                  </a:lnTo>
+                  <a:lnTo>
+                    <a:pt x="3547828" y="572213"/>
+                  </a:lnTo>
+                  <a:lnTo>
+                    <a:pt x="3474068" y="537146"/>
+                  </a:lnTo>
+                  <a:lnTo>
+                    <a:pt x="3400308" y="520093"/>
+                  </a:lnTo>
+                  <a:lnTo>
+                    <a:pt x="3326548" y="511275"/>
+                  </a:lnTo>
+                  <a:lnTo>
+                    <a:pt x="3252788" y="502365"/>
+                  </a:lnTo>
+                  <a:lnTo>
+                    <a:pt x="3179028" y="493360"/>
+                  </a:lnTo>
+                  <a:lnTo>
+                    <a:pt x="3105268" y="484261"/>
+                  </a:lnTo>
+                  <a:lnTo>
+                    <a:pt x="3031508" y="475065"/>
+                  </a:lnTo>
+                  <a:lnTo>
+                    <a:pt x="2957748" y="465772"/>
+                  </a:lnTo>
+                  <a:lnTo>
+                    <a:pt x="2883988" y="456382"/>
+                  </a:lnTo>
+                  <a:lnTo>
+                    <a:pt x="2810228" y="446892"/>
+                  </a:lnTo>
+                  <a:lnTo>
+                    <a:pt x="2736468" y="437302"/>
+                  </a:lnTo>
+                  <a:lnTo>
+                    <a:pt x="2662708" y="427611"/>
+                  </a:lnTo>
+                  <a:lnTo>
+                    <a:pt x="2588948" y="417817"/>
+                  </a:lnTo>
+                  <a:lnTo>
+                    <a:pt x="2515188" y="407921"/>
+                  </a:lnTo>
+                  <a:lnTo>
+                    <a:pt x="2441428" y="397919"/>
+                  </a:lnTo>
+                  <a:lnTo>
+                    <a:pt x="2367668" y="387813"/>
+                  </a:lnTo>
+                  <a:lnTo>
+                    <a:pt x="2293908" y="377599"/>
+                  </a:lnTo>
+                  <a:lnTo>
+                    <a:pt x="2220148" y="367278"/>
+                  </a:lnTo>
+                  <a:lnTo>
+                    <a:pt x="2146388" y="356848"/>
+                  </a:lnTo>
+                  <a:lnTo>
+                    <a:pt x="2072628" y="346308"/>
+                  </a:lnTo>
+                  <a:lnTo>
+                    <a:pt x="1998868" y="335656"/>
+                  </a:lnTo>
+                  <a:lnTo>
+                    <a:pt x="1925108" y="324892"/>
+                  </a:lnTo>
+                  <a:lnTo>
+                    <a:pt x="1851348" y="314015"/>
+                  </a:lnTo>
+                  <a:lnTo>
+                    <a:pt x="1777588" y="303023"/>
+                  </a:lnTo>
+                  <a:lnTo>
+                    <a:pt x="1703828" y="291915"/>
+                  </a:lnTo>
+                  <a:lnTo>
+                    <a:pt x="1630068" y="280689"/>
+                  </a:lnTo>
+                  <a:lnTo>
+                    <a:pt x="1556308" y="269345"/>
+                  </a:lnTo>
+                  <a:lnTo>
+                    <a:pt x="1482548" y="257882"/>
+                  </a:lnTo>
+                  <a:lnTo>
+                    <a:pt x="1408788" y="246297"/>
+                  </a:lnTo>
+                  <a:lnTo>
+                    <a:pt x="1335028" y="234590"/>
+                  </a:lnTo>
+                  <a:lnTo>
+                    <a:pt x="1261268" y="222760"/>
+                  </a:lnTo>
+                  <a:lnTo>
+                    <a:pt x="1187508" y="210805"/>
+                  </a:lnTo>
+                  <a:lnTo>
+                    <a:pt x="1113747" y="198723"/>
+                  </a:lnTo>
+                  <a:lnTo>
+                    <a:pt x="1039987" y="186514"/>
+                  </a:lnTo>
+                  <a:lnTo>
+                    <a:pt x="966227" y="174177"/>
+                  </a:lnTo>
+                  <a:lnTo>
+                    <a:pt x="892467" y="161709"/>
+                  </a:lnTo>
+                  <a:lnTo>
+                    <a:pt x="818707" y="149109"/>
+                  </a:lnTo>
+                  <a:lnTo>
+                    <a:pt x="744947" y="136377"/>
+                  </a:lnTo>
+                  <a:lnTo>
+                    <a:pt x="671187" y="123510"/>
+                  </a:lnTo>
+                  <a:lnTo>
+                    <a:pt x="597427" y="110507"/>
+                  </a:lnTo>
+                  <a:lnTo>
+                    <a:pt x="523667" y="97367"/>
+                  </a:lnTo>
+                  <a:lnTo>
+                    <a:pt x="449907" y="84089"/>
+                  </a:lnTo>
+                  <a:lnTo>
+                    <a:pt x="376147" y="70670"/>
+                  </a:lnTo>
+                  <a:lnTo>
+                    <a:pt x="302387" y="57110"/>
+                  </a:lnTo>
+                  <a:lnTo>
+                    <a:pt x="228627" y="43407"/>
+                  </a:lnTo>
+                  <a:lnTo>
+                    <a:pt x="154867" y="29559"/>
+                  </a:lnTo>
+                  <a:lnTo>
+                    <a:pt x="81107" y="15565"/>
+                  </a:lnTo>
+                  <a:lnTo>
+                    <a:pt x="7347" y="1423"/>
                   </a:lnTo>
                   <a:lnTo>
                     <a:pt x="0" y="0"/>
@@ -4199,312 +4199,312 @@
           </p:nvSpPr>
           <p:spPr>
             <a:xfrm>
-              <a:off x="817517" y="2451762"/>
-              <a:ext cx="7235830" cy="2881382"/>
+              <a:off x="817517" y="2603029"/>
+              <a:ext cx="7235830" cy="2748148"/>
             </a:xfrm>
             <a:custGeom>
               <a:avLst/>
               <a:pathLst>
-                <a:path w="7235830" h="2881382">
+                <a:path w="7235830" h="2748148">
                   <a:moveTo>
                     <a:pt x="0" y="0"/>
                   </a:moveTo>
                   <a:lnTo>
-                    <a:pt x="7347" y="8466"/>
-                  </a:lnTo>
-                  <a:lnTo>
-                    <a:pt x="81107" y="91183"/>
-                  </a:lnTo>
-                  <a:lnTo>
-                    <a:pt x="154867" y="171685"/>
-                  </a:lnTo>
-                  <a:lnTo>
-                    <a:pt x="228627" y="250031"/>
-                  </a:lnTo>
-                  <a:lnTo>
-                    <a:pt x="302387" y="326279"/>
-                  </a:lnTo>
-                  <a:lnTo>
-                    <a:pt x="376147" y="400486"/>
-                  </a:lnTo>
-                  <a:lnTo>
-                    <a:pt x="449907" y="472705"/>
-                  </a:lnTo>
-                  <a:lnTo>
-                    <a:pt x="523667" y="542991"/>
-                  </a:lnTo>
-                  <a:lnTo>
-                    <a:pt x="597427" y="611394"/>
-                  </a:lnTo>
-                  <a:lnTo>
-                    <a:pt x="671187" y="677966"/>
-                  </a:lnTo>
-                  <a:lnTo>
-                    <a:pt x="744947" y="742755"/>
-                  </a:lnTo>
-                  <a:lnTo>
-                    <a:pt x="818707" y="805809"/>
-                  </a:lnTo>
-                  <a:lnTo>
-                    <a:pt x="892467" y="867174"/>
-                  </a:lnTo>
-                  <a:lnTo>
-                    <a:pt x="966227" y="926896"/>
-                  </a:lnTo>
-                  <a:lnTo>
-                    <a:pt x="1039987" y="985020"/>
-                  </a:lnTo>
-                  <a:lnTo>
-                    <a:pt x="1113747" y="1041586"/>
-                  </a:lnTo>
-                  <a:lnTo>
-                    <a:pt x="1187508" y="1096638"/>
-                  </a:lnTo>
-                  <a:lnTo>
-                    <a:pt x="1261268" y="1150216"/>
-                  </a:lnTo>
-                  <a:lnTo>
-                    <a:pt x="1335028" y="1202359"/>
-                  </a:lnTo>
-                  <a:lnTo>
-                    <a:pt x="1408788" y="1253106"/>
-                  </a:lnTo>
-                  <a:lnTo>
-                    <a:pt x="1482548" y="1302493"/>
-                  </a:lnTo>
-                  <a:lnTo>
-                    <a:pt x="1556308" y="1350559"/>
-                  </a:lnTo>
-                  <a:lnTo>
-                    <a:pt x="1630068" y="1397337"/>
-                  </a:lnTo>
-                  <a:lnTo>
-                    <a:pt x="1703828" y="1442863"/>
-                  </a:lnTo>
-                  <a:lnTo>
-                    <a:pt x="1777588" y="1487169"/>
-                  </a:lnTo>
-                  <a:lnTo>
-                    <a:pt x="1851348" y="1530289"/>
-                  </a:lnTo>
-                  <a:lnTo>
-                    <a:pt x="1925108" y="1572255"/>
-                  </a:lnTo>
-                  <a:lnTo>
-                    <a:pt x="1998868" y="1613096"/>
-                  </a:lnTo>
-                  <a:lnTo>
-                    <a:pt x="2072628" y="1652844"/>
-                  </a:lnTo>
-                  <a:lnTo>
-                    <a:pt x="2146388" y="1691528"/>
-                  </a:lnTo>
-                  <a:lnTo>
-                    <a:pt x="2220148" y="1729176"/>
-                  </a:lnTo>
-                  <a:lnTo>
-                    <a:pt x="2293908" y="1765815"/>
-                  </a:lnTo>
-                  <a:lnTo>
-                    <a:pt x="2367668" y="1801474"/>
-                  </a:lnTo>
-                  <a:lnTo>
-                    <a:pt x="2441428" y="1836177"/>
-                  </a:lnTo>
-                  <a:lnTo>
-                    <a:pt x="2515188" y="1869952"/>
-                  </a:lnTo>
-                  <a:lnTo>
-                    <a:pt x="2588948" y="1902821"/>
-                  </a:lnTo>
-                  <a:lnTo>
-                    <a:pt x="2662708" y="1934811"/>
-                  </a:lnTo>
-                  <a:lnTo>
-                    <a:pt x="2736468" y="1965944"/>
-                  </a:lnTo>
-                  <a:lnTo>
-                    <a:pt x="2810228" y="1996244"/>
-                  </a:lnTo>
-                  <a:lnTo>
-                    <a:pt x="2883988" y="2025732"/>
-                  </a:lnTo>
-                  <a:lnTo>
-                    <a:pt x="2957748" y="2054430"/>
-                  </a:lnTo>
-                  <a:lnTo>
-                    <a:pt x="3031508" y="2082360"/>
-                  </a:lnTo>
-                  <a:lnTo>
-                    <a:pt x="3105268" y="2109542"/>
-                  </a:lnTo>
-                  <a:lnTo>
-                    <a:pt x="3179028" y="2135996"/>
-                  </a:lnTo>
-                  <a:lnTo>
-                    <a:pt x="3252788" y="2161742"/>
-                  </a:lnTo>
-                  <a:lnTo>
-                    <a:pt x="3326548" y="2186798"/>
-                  </a:lnTo>
-                  <a:lnTo>
-                    <a:pt x="3400308" y="2211183"/>
-                  </a:lnTo>
-                  <a:lnTo>
-                    <a:pt x="3474068" y="2234916"/>
-                  </a:lnTo>
-                  <a:lnTo>
-                    <a:pt x="3547828" y="2258013"/>
-                  </a:lnTo>
-                  <a:lnTo>
-                    <a:pt x="3621588" y="2280491"/>
-                  </a:lnTo>
-                  <a:lnTo>
-                    <a:pt x="3695348" y="2302367"/>
-                  </a:lnTo>
-                  <a:lnTo>
-                    <a:pt x="3769108" y="2323658"/>
-                  </a:lnTo>
-                  <a:lnTo>
-                    <a:pt x="3842868" y="2344379"/>
-                  </a:lnTo>
-                  <a:lnTo>
-                    <a:pt x="3916628" y="2364544"/>
-                  </a:lnTo>
-                  <a:lnTo>
-                    <a:pt x="3990388" y="2384170"/>
-                  </a:lnTo>
-                  <a:lnTo>
-                    <a:pt x="4064149" y="2403270"/>
-                  </a:lnTo>
-                  <a:lnTo>
-                    <a:pt x="4137909" y="2421859"/>
-                  </a:lnTo>
-                  <a:lnTo>
-                    <a:pt x="4211669" y="2439950"/>
-                  </a:lnTo>
-                  <a:lnTo>
-                    <a:pt x="4285429" y="2457556"/>
-                  </a:lnTo>
-                  <a:lnTo>
-                    <a:pt x="4359189" y="2474691"/>
-                  </a:lnTo>
-                  <a:lnTo>
-                    <a:pt x="4432949" y="2491367"/>
-                  </a:lnTo>
-                  <a:lnTo>
-                    <a:pt x="4506709" y="2507597"/>
-                  </a:lnTo>
-                  <a:lnTo>
-                    <a:pt x="4580469" y="2523392"/>
-                  </a:lnTo>
-                  <a:lnTo>
-                    <a:pt x="4654229" y="2538764"/>
-                  </a:lnTo>
-                  <a:lnTo>
-                    <a:pt x="4727989" y="2553724"/>
-                  </a:lnTo>
-                  <a:lnTo>
-                    <a:pt x="4801749" y="2568284"/>
-                  </a:lnTo>
-                  <a:lnTo>
-                    <a:pt x="4875509" y="2582454"/>
-                  </a:lnTo>
-                  <a:lnTo>
-                    <a:pt x="4949269" y="2596244"/>
-                  </a:lnTo>
-                  <a:lnTo>
-                    <a:pt x="5023029" y="2609665"/>
-                  </a:lnTo>
-                  <a:lnTo>
-                    <a:pt x="5096789" y="2622727"/>
-                  </a:lnTo>
-                  <a:lnTo>
-                    <a:pt x="5170549" y="2635439"/>
-                  </a:lnTo>
-                  <a:lnTo>
-                    <a:pt x="5244309" y="2647811"/>
-                  </a:lnTo>
-                  <a:lnTo>
-                    <a:pt x="5318069" y="2659851"/>
-                  </a:lnTo>
-                  <a:lnTo>
-                    <a:pt x="5391829" y="2671569"/>
-                  </a:lnTo>
-                  <a:lnTo>
-                    <a:pt x="5465589" y="2682973"/>
-                  </a:lnTo>
-                  <a:lnTo>
-                    <a:pt x="5539349" y="2694072"/>
-                  </a:lnTo>
-                  <a:lnTo>
-                    <a:pt x="5613109" y="2704873"/>
-                  </a:lnTo>
-                  <a:lnTo>
-                    <a:pt x="5686869" y="2715386"/>
-                  </a:lnTo>
-                  <a:lnTo>
-                    <a:pt x="5760629" y="2725617"/>
-                  </a:lnTo>
-                  <a:lnTo>
-                    <a:pt x="5834389" y="2735573"/>
-                  </a:lnTo>
-                  <a:lnTo>
-                    <a:pt x="5908149" y="2745264"/>
-                  </a:lnTo>
-                  <a:lnTo>
-                    <a:pt x="5981909" y="2754694"/>
-                  </a:lnTo>
-                  <a:lnTo>
-                    <a:pt x="6055669" y="2763872"/>
-                  </a:lnTo>
-                  <a:lnTo>
-                    <a:pt x="6129429" y="2772805"/>
-                  </a:lnTo>
-                  <a:lnTo>
-                    <a:pt x="6203189" y="2781498"/>
-                  </a:lnTo>
-                  <a:lnTo>
-                    <a:pt x="6276949" y="2789959"/>
-                  </a:lnTo>
-                  <a:lnTo>
-                    <a:pt x="6350709" y="2798192"/>
-                  </a:lnTo>
-                  <a:lnTo>
-                    <a:pt x="6424469" y="2806206"/>
-                  </a:lnTo>
-                  <a:lnTo>
-                    <a:pt x="6498229" y="2814005"/>
-                  </a:lnTo>
-                  <a:lnTo>
-                    <a:pt x="6571989" y="2821595"/>
-                  </a:lnTo>
-                  <a:lnTo>
-                    <a:pt x="6645749" y="2828981"/>
-                  </a:lnTo>
-                  <a:lnTo>
-                    <a:pt x="6719509" y="2836170"/>
-                  </a:lnTo>
-                  <a:lnTo>
-                    <a:pt x="6793269" y="2843167"/>
-                  </a:lnTo>
-                  <a:lnTo>
-                    <a:pt x="6867029" y="2849976"/>
-                  </a:lnTo>
-                  <a:lnTo>
-                    <a:pt x="6940789" y="2856602"/>
-                  </a:lnTo>
-                  <a:lnTo>
-                    <a:pt x="7014550" y="2863052"/>
-                  </a:lnTo>
-                  <a:lnTo>
-                    <a:pt x="7088310" y="2869328"/>
-                  </a:lnTo>
-                  <a:lnTo>
-                    <a:pt x="7162070" y="2875437"/>
-                  </a:lnTo>
-                  <a:lnTo>
-                    <a:pt x="7235830" y="2881382"/>
+                    <a:pt x="7347" y="8075"/>
+                  </a:lnTo>
+                  <a:lnTo>
+                    <a:pt x="81107" y="86967"/>
+                  </a:lnTo>
+                  <a:lnTo>
+                    <a:pt x="154867" y="163746"/>
+                  </a:lnTo>
+                  <a:lnTo>
+                    <a:pt x="228627" y="238470"/>
+                  </a:lnTo>
+                  <a:lnTo>
+                    <a:pt x="302387" y="311192"/>
+                  </a:lnTo>
+                  <a:lnTo>
+                    <a:pt x="376147" y="381967"/>
+                  </a:lnTo>
+                  <a:lnTo>
+                    <a:pt x="449907" y="450847"/>
+                  </a:lnTo>
+                  <a:lnTo>
+                    <a:pt x="523667" y="517883"/>
+                  </a:lnTo>
+                  <a:lnTo>
+                    <a:pt x="597427" y="583123"/>
+                  </a:lnTo>
+                  <a:lnTo>
+                    <a:pt x="671187" y="646617"/>
+                  </a:lnTo>
+                  <a:lnTo>
+                    <a:pt x="744947" y="708410"/>
+                  </a:lnTo>
+                  <a:lnTo>
+                    <a:pt x="818707" y="768548"/>
+                  </a:lnTo>
+                  <a:lnTo>
+                    <a:pt x="892467" y="827076"/>
+                  </a:lnTo>
+                  <a:lnTo>
+                    <a:pt x="966227" y="884037"/>
+                  </a:lnTo>
+                  <a:lnTo>
+                    <a:pt x="1039987" y="939473"/>
+                  </a:lnTo>
+                  <a:lnTo>
+                    <a:pt x="1113747" y="993424"/>
+                  </a:lnTo>
+                  <a:lnTo>
+                    <a:pt x="1187508" y="1045930"/>
+                  </a:lnTo>
+                  <a:lnTo>
+                    <a:pt x="1261268" y="1097030"/>
+                  </a:lnTo>
+                  <a:lnTo>
+                    <a:pt x="1335028" y="1146762"/>
+                  </a:lnTo>
+                  <a:lnTo>
+                    <a:pt x="1408788" y="1195162"/>
+                  </a:lnTo>
+                  <a:lnTo>
+                    <a:pt x="1482548" y="1242267"/>
+                  </a:lnTo>
+                  <a:lnTo>
+                    <a:pt x="1556308" y="1288109"/>
+                  </a:lnTo>
+                  <a:lnTo>
+                    <a:pt x="1630068" y="1332725"/>
+                  </a:lnTo>
+                  <a:lnTo>
+                    <a:pt x="1703828" y="1376145"/>
+                  </a:lnTo>
+                  <a:lnTo>
+                    <a:pt x="1777588" y="1418403"/>
+                  </a:lnTo>
+                  <a:lnTo>
+                    <a:pt x="1851348" y="1459529"/>
+                  </a:lnTo>
+                  <a:lnTo>
+                    <a:pt x="1925108" y="1499554"/>
+                  </a:lnTo>
+                  <a:lnTo>
+                    <a:pt x="1998868" y="1538507"/>
+                  </a:lnTo>
+                  <a:lnTo>
+                    <a:pt x="2072628" y="1576417"/>
+                  </a:lnTo>
+                  <a:lnTo>
+                    <a:pt x="2146388" y="1613312"/>
+                  </a:lnTo>
+                  <a:lnTo>
+                    <a:pt x="2220148" y="1649219"/>
+                  </a:lnTo>
+                  <a:lnTo>
+                    <a:pt x="2293908" y="1684165"/>
+                  </a:lnTo>
+                  <a:lnTo>
+                    <a:pt x="2367668" y="1718174"/>
+                  </a:lnTo>
+                  <a:lnTo>
+                    <a:pt x="2441428" y="1751273"/>
+                  </a:lnTo>
+                  <a:lnTo>
+                    <a:pt x="2515188" y="1783486"/>
+                  </a:lnTo>
+                  <a:lnTo>
+                    <a:pt x="2588948" y="1814836"/>
+                  </a:lnTo>
+                  <a:lnTo>
+                    <a:pt x="2662708" y="1845346"/>
+                  </a:lnTo>
+                  <a:lnTo>
+                    <a:pt x="2736468" y="1875040"/>
+                  </a:lnTo>
+                  <a:lnTo>
+                    <a:pt x="2810228" y="1903938"/>
+                  </a:lnTo>
+                  <a:lnTo>
+                    <a:pt x="2883988" y="1932063"/>
+                  </a:lnTo>
+                  <a:lnTo>
+                    <a:pt x="2957748" y="1959434"/>
+                  </a:lnTo>
+                  <a:lnTo>
+                    <a:pt x="3031508" y="1986072"/>
+                  </a:lnTo>
+                  <a:lnTo>
+                    <a:pt x="3105268" y="2011997"/>
+                  </a:lnTo>
+                  <a:lnTo>
+                    <a:pt x="3179028" y="2037228"/>
+                  </a:lnTo>
+                  <a:lnTo>
+                    <a:pt x="3252788" y="2061784"/>
+                  </a:lnTo>
+                  <a:lnTo>
+                    <a:pt x="3326548" y="2085681"/>
+                  </a:lnTo>
+                  <a:lnTo>
+                    <a:pt x="3400308" y="2108939"/>
+                  </a:lnTo>
+                  <a:lnTo>
+                    <a:pt x="3474068" y="2131574"/>
+                  </a:lnTo>
+                  <a:lnTo>
+                    <a:pt x="3547828" y="2153603"/>
+                  </a:lnTo>
+                  <a:lnTo>
+                    <a:pt x="3621588" y="2175042"/>
+                  </a:lnTo>
+                  <a:lnTo>
+                    <a:pt x="3695348" y="2195907"/>
+                  </a:lnTo>
+                  <a:lnTo>
+                    <a:pt x="3769108" y="2216213"/>
+                  </a:lnTo>
+                  <a:lnTo>
+                    <a:pt x="3842868" y="2235975"/>
+                  </a:lnTo>
+                  <a:lnTo>
+                    <a:pt x="3916628" y="2255209"/>
+                  </a:lnTo>
+                  <a:lnTo>
+                    <a:pt x="3990388" y="2273927"/>
+                  </a:lnTo>
+                  <a:lnTo>
+                    <a:pt x="4064149" y="2292144"/>
+                  </a:lnTo>
+                  <a:lnTo>
+                    <a:pt x="4137909" y="2309873"/>
+                  </a:lnTo>
+                  <a:lnTo>
+                    <a:pt x="4211669" y="2327127"/>
+                  </a:lnTo>
+                  <a:lnTo>
+                    <a:pt x="4285429" y="2343920"/>
+                  </a:lnTo>
+                  <a:lnTo>
+                    <a:pt x="4359189" y="2360262"/>
+                  </a:lnTo>
+                  <a:lnTo>
+                    <a:pt x="4432949" y="2376167"/>
+                  </a:lnTo>
+                  <a:lnTo>
+                    <a:pt x="4506709" y="2391646"/>
+                  </a:lnTo>
+                  <a:lnTo>
+                    <a:pt x="4580469" y="2406711"/>
+                  </a:lnTo>
+                  <a:lnTo>
+                    <a:pt x="4654229" y="2421372"/>
+                  </a:lnTo>
+                  <a:lnTo>
+                    <a:pt x="4727989" y="2435641"/>
+                  </a:lnTo>
+                  <a:lnTo>
+                    <a:pt x="4801749" y="2449527"/>
+                  </a:lnTo>
+                  <a:lnTo>
+                    <a:pt x="4875509" y="2463042"/>
+                  </a:lnTo>
+                  <a:lnTo>
+                    <a:pt x="4949269" y="2476195"/>
+                  </a:lnTo>
+                  <a:lnTo>
+                    <a:pt x="5023029" y="2488995"/>
+                  </a:lnTo>
+                  <a:lnTo>
+                    <a:pt x="5096789" y="2501453"/>
+                  </a:lnTo>
+                  <a:lnTo>
+                    <a:pt x="5170549" y="2513577"/>
+                  </a:lnTo>
+                  <a:lnTo>
+                    <a:pt x="5244309" y="2525377"/>
+                  </a:lnTo>
+                  <a:lnTo>
+                    <a:pt x="5318069" y="2536861"/>
+                  </a:lnTo>
+                  <a:lnTo>
+                    <a:pt x="5391829" y="2548037"/>
+                  </a:lnTo>
+                  <a:lnTo>
+                    <a:pt x="5465589" y="2558913"/>
+                  </a:lnTo>
+                  <a:lnTo>
+                    <a:pt x="5539349" y="2569499"/>
+                  </a:lnTo>
+                  <a:lnTo>
+                    <a:pt x="5613109" y="2579801"/>
+                  </a:lnTo>
+                  <a:lnTo>
+                    <a:pt x="5686869" y="2589827"/>
+                  </a:lnTo>
+                  <a:lnTo>
+                    <a:pt x="5760629" y="2599585"/>
+                  </a:lnTo>
+                  <a:lnTo>
+                    <a:pt x="5834389" y="2609081"/>
+                  </a:lnTo>
+                  <a:lnTo>
+                    <a:pt x="5908149" y="2618324"/>
+                  </a:lnTo>
+                  <a:lnTo>
+                    <a:pt x="5981909" y="2627318"/>
+                  </a:lnTo>
+                  <a:lnTo>
+                    <a:pt x="6055669" y="2636072"/>
+                  </a:lnTo>
+                  <a:lnTo>
+                    <a:pt x="6129429" y="2644591"/>
+                  </a:lnTo>
+                  <a:lnTo>
+                    <a:pt x="6203189" y="2652883"/>
+                  </a:lnTo>
+                  <a:lnTo>
+                    <a:pt x="6276949" y="2660952"/>
+                  </a:lnTo>
+                  <a:lnTo>
+                    <a:pt x="6350709" y="2668805"/>
+                  </a:lnTo>
+                  <a:lnTo>
+                    <a:pt x="6424469" y="2676448"/>
+                  </a:lnTo>
+                  <a:lnTo>
+                    <a:pt x="6498229" y="2683886"/>
+                  </a:lnTo>
+                  <a:lnTo>
+                    <a:pt x="6571989" y="2691125"/>
+                  </a:lnTo>
+                  <a:lnTo>
+                    <a:pt x="6645749" y="2698170"/>
+                  </a:lnTo>
+                  <a:lnTo>
+                    <a:pt x="6719509" y="2705027"/>
+                  </a:lnTo>
+                  <a:lnTo>
+                    <a:pt x="6793269" y="2711700"/>
+                  </a:lnTo>
+                  <a:lnTo>
+                    <a:pt x="6867029" y="2718194"/>
+                  </a:lnTo>
+                  <a:lnTo>
+                    <a:pt x="6940789" y="2724514"/>
+                  </a:lnTo>
+                  <a:lnTo>
+                    <a:pt x="7014550" y="2730665"/>
+                  </a:lnTo>
+                  <a:lnTo>
+                    <a:pt x="7088310" y="2736652"/>
+                  </a:lnTo>
+                  <a:lnTo>
+                    <a:pt x="7162070" y="2742478"/>
+                  </a:lnTo>
+                  <a:lnTo>
+                    <a:pt x="7235830" y="2748148"/>
                   </a:lnTo>
                 </a:path>
               </a:pathLst>
@@ -4533,7 +4533,7 @@
           </p:nvSpPr>
           <p:spPr>
             <a:xfrm>
-              <a:off x="817517" y="4679530"/>
+              <a:off x="817517" y="4727786"/>
               <a:ext cx="7799693" cy="0"/>
             </a:xfrm>
             <a:custGeom>
@@ -4576,15 +4576,15 @@
           </p:nvSpPr>
           <p:spPr>
             <a:xfrm>
-              <a:off x="4269157" y="1896563"/>
-              <a:ext cx="0" cy="3826579"/>
+              <a:off x="4269157" y="2073503"/>
+              <a:ext cx="0" cy="3649639"/>
             </a:xfrm>
             <a:custGeom>
               <a:avLst/>
               <a:pathLst>
-                <a:path w="0" h="3826579">
+                <a:path w="0" h="3649639">
                   <a:moveTo>
-                    <a:pt x="0" y="3826579"/>
+                    <a:pt x="0" y="3649639"/>
                   </a:moveTo>
                   <a:lnTo>
                     <a:pt x="0" y="0"/>
@@ -4619,7 +4619,7 @@
           </p:nvSpPr>
           <p:spPr>
             <a:xfrm>
-              <a:off x="692708" y="5509156"/>
+              <a:off x="692708" y="5517199"/>
               <a:ext cx="62179" cy="80101"/>
             </a:xfrm>
             <a:prstGeom prst="rect">
@@ -4665,7 +4665,7 @@
           </p:nvSpPr>
           <p:spPr>
             <a:xfrm>
-              <a:off x="692708" y="4639479"/>
+              <a:off x="692708" y="4687735"/>
               <a:ext cx="62179" cy="80101"/>
             </a:xfrm>
             <a:prstGeom prst="rect">
@@ -4711,7 +4711,7 @@
           </p:nvSpPr>
           <p:spPr>
             <a:xfrm>
-              <a:off x="692708" y="3769802"/>
+              <a:off x="692708" y="3858272"/>
               <a:ext cx="62179" cy="80101"/>
             </a:xfrm>
             <a:prstGeom prst="rect">
@@ -4757,7 +4757,7 @@
           </p:nvSpPr>
           <p:spPr>
             <a:xfrm>
-              <a:off x="692708" y="2900125"/>
+              <a:off x="692708" y="3028808"/>
               <a:ext cx="62179" cy="80101"/>
             </a:xfrm>
             <a:prstGeom prst="rect">
@@ -4803,7 +4803,7 @@
           </p:nvSpPr>
           <p:spPr>
             <a:xfrm>
-              <a:off x="692708" y="2030448"/>
+              <a:off x="692708" y="2199345"/>
               <a:ext cx="62179" cy="80101"/>
             </a:xfrm>
             <a:prstGeom prst="rect">
@@ -5079,7 +5079,7 @@
           </p:nvSpPr>
           <p:spPr>
             <a:xfrm rot="-5400000">
-              <a:off x="68446" y="3759743"/>
+              <a:off x="68446" y="3848213"/>
               <a:ext cx="1016904" cy="100218"/>
             </a:xfrm>
             <a:prstGeom prst="rect">
@@ -5120,6 +5120,52 @@
         <p:sp>
           <p:nvSpPr>
             <p:cNvPr id="38" name="tx38"/>
+            <p:cNvSpPr/>
+            <p:nvPr/>
+          </p:nvSpPr>
+          <p:spPr>
+            <a:xfrm>
+              <a:off x="817517" y="1896563"/>
+              <a:ext cx="5626211" cy="82021"/>
+            </a:xfrm>
+            <a:prstGeom prst="rect">
+              <a:avLst/>
+            </a:prstGeom>
+            <a:noFill/>
+          </p:spPr>
+          <p:txBody>
+            <a:bodyPr lIns="0" rIns="0" tIns="0" bIns="0" anchorCtr="1" anchor="ctr" wrap="none"/>
+            <a:lstStyle/>
+            <a:p>
+              <a:pPr algn="l" marL="0" marR="0" indent="0">
+                <a:lnSpc>
+                  <a:spcPts val="900"/>
+                </a:lnSpc>
+                <a:spcBef>
+                  <a:spcPts val="0"/>
+                </a:spcBef>
+                <a:spcAft>
+                  <a:spcPts val="0"/>
+                </a:spcAft>
+              </a:pPr>
+              <a:r>
+                <a:rPr sz="900">
+                  <a:solidFill>
+                    <a:srgbClr val="404040">
+                      <a:alpha val="100000"/>
+                    </a:srgbClr>
+                  </a:solidFill>
+                  <a:latin typeface="Helvetica"/>
+                  <a:cs typeface="Helvetica"/>
+                </a:rPr>
+                <a:t>subHR per 0.1 ratio decline: 1.39 (1.13-1.69)  |  per IQR decline (Δ = 0.29): 2.60 (1.45-4.67)  |  IQR: [0.85, 1.15]</a:t>
+              </a:r>
+            </a:p>
+          </p:txBody>
+        </p:sp>
+        <p:sp>
+          <p:nvSpPr>
+            <p:cNvPr id="39" name="tx39"/>
             <p:cNvSpPr/>
             <p:nvPr/>
           </p:nvSpPr>

--- a/docs/pptx/whole/jx-linsubhr-ratio-hosp2.pptx
+++ b/docs/pptx/whole/jx-linsubhr-ratio-hosp2.pptx
@@ -5126,7 +5126,7 @@
           <p:spPr>
             <a:xfrm>
               <a:off x="817517" y="1896563"/>
-              <a:ext cx="5626211" cy="82021"/>
+              <a:ext cx="6169365" cy="82021"/>
             </a:xfrm>
             <a:prstGeom prst="rect">
               <a:avLst/>
@@ -5158,7 +5158,7 @@
                   <a:latin typeface="Helvetica"/>
                   <a:cs typeface="Helvetica"/>
                 </a:rPr>
-                <a:t>subHR per 0.1 ratio decline: 1.39 (1.13-1.69)  |  per IQR decline (Δ = 0.29): 2.60 (1.45-4.67)  |  IQR: [0.85, 1.15]</a:t>
+                <a:t>subHR per 0.1 ratio decline: 1.39 (1.13-1.69), p = 0.001  |  per IQR decline (Δ = 0.29): 2.60 (1.45-4.67)  |  IQR: [0.85, 1.15]</a:t>
               </a:r>
             </a:p>
           </p:txBody>

--- a/docs/pptx/whole/jx-linsubhr-ratio-hosp2.pptx
+++ b/docs/pptx/whole/jx-linsubhr-ratio-hosp2.pptx
@@ -2443,7 +2443,7 @@
           </p:nvSpPr>
           <p:spPr>
             <a:xfrm>
-              <a:off x="1615213" y="2073503"/>
+              <a:off x="1365633" y="2073503"/>
               <a:ext cx="0" cy="3649639"/>
             </a:xfrm>
             <a:custGeom>
@@ -2486,7 +2486,7 @@
           </p:nvSpPr>
           <p:spPr>
             <a:xfrm>
-              <a:off x="3387871" y="2073503"/>
+              <a:off x="3517243" y="2073503"/>
               <a:ext cx="0" cy="3649639"/>
             </a:xfrm>
             <a:custGeom>
@@ -2529,7 +2529,7 @@
           </p:nvSpPr>
           <p:spPr>
             <a:xfrm>
-              <a:off x="5160528" y="2073503"/>
+              <a:off x="5668852" y="2073503"/>
               <a:ext cx="0" cy="3649639"/>
             </a:xfrm>
             <a:custGeom>
@@ -2572,7 +2572,7 @@
           </p:nvSpPr>
           <p:spPr>
             <a:xfrm>
-              <a:off x="6933186" y="2073503"/>
+              <a:off x="7820461" y="2073503"/>
               <a:ext cx="0" cy="3649639"/>
             </a:xfrm>
             <a:custGeom>
@@ -2830,7 +2830,7 @@
           </p:nvSpPr>
           <p:spPr>
             <a:xfrm>
-              <a:off x="2501542" y="2073503"/>
+              <a:off x="2441438" y="2073503"/>
               <a:ext cx="0" cy="3649639"/>
             </a:xfrm>
             <a:custGeom>
@@ -2873,7 +2873,7 @@
           </p:nvSpPr>
           <p:spPr>
             <a:xfrm>
-              <a:off x="4274200" y="2073503"/>
+              <a:off x="4593047" y="2073503"/>
               <a:ext cx="0" cy="3649639"/>
             </a:xfrm>
             <a:custGeom>
@@ -2916,7 +2916,7 @@
           </p:nvSpPr>
           <p:spPr>
             <a:xfrm>
-              <a:off x="6046857" y="2073503"/>
+              <a:off x="6744657" y="2073503"/>
               <a:ext cx="0" cy="3649639"/>
             </a:xfrm>
             <a:custGeom>
@@ -2953,619 +2953,576 @@
         </p:sp>
         <p:sp>
           <p:nvSpPr>
-            <p:cNvPr id="20" name="pl20"/>
+            <p:cNvPr id="20" name="pg20"/>
             <p:cNvSpPr/>
             <p:nvPr/>
           </p:nvSpPr>
           <p:spPr>
             <a:xfrm>
-              <a:off x="7819515" y="2073503"/>
-              <a:ext cx="0" cy="3649639"/>
+              <a:off x="1172049" y="2073503"/>
+              <a:ext cx="7090630" cy="3396018"/>
             </a:xfrm>
             <a:custGeom>
               <a:avLst/>
               <a:pathLst>
-                <a:path w="0" h="3649639">
+                <a:path w="7090630" h="3396018">
                   <a:moveTo>
-                    <a:pt x="0" y="3649639"/>
+                    <a:pt x="1068927" y="0"/>
                   </a:moveTo>
                   <a:lnTo>
-                    <a:pt x="0" y="0"/>
-                  </a:lnTo>
-                  <a:lnTo>
-                    <a:pt x="0" y="0"/>
-                  </a:lnTo>
-                </a:path>
-              </a:pathLst>
-            </a:custGeom>
-            <a:ln w="13550" cap="flat">
-              <a:solidFill>
-                <a:srgbClr val="EBEBEB">
-                  <a:alpha val="100000"/>
-                </a:srgbClr>
-              </a:solidFill>
-              <a:prstDash val="solid"/>
-              <a:round/>
-            </a:ln>
-          </p:spPr>
-          <p:txBody>
-            <a:bodyPr/>
-            <a:lstStyle/>
-            <a:p/>
-          </p:txBody>
-        </p:sp>
-        <p:sp>
-          <p:nvSpPr>
-            <p:cNvPr id="21" name="pg21"/>
-            <p:cNvSpPr/>
-            <p:nvPr/>
-          </p:nvSpPr>
-          <p:spPr>
-            <a:xfrm>
-              <a:off x="817517" y="2073503"/>
-              <a:ext cx="7235830" cy="3396018"/>
-            </a:xfrm>
-            <a:custGeom>
-              <a:avLst/>
-              <a:pathLst>
-                <a:path w="7235830" h="3396018">
-                  <a:moveTo>
-                    <a:pt x="1034415" y="0"/>
-                  </a:moveTo>
-                  <a:lnTo>
-                    <a:pt x="1039987" y="11740"/>
-                  </a:lnTo>
-                  <a:lnTo>
-                    <a:pt x="1113747" y="160494"/>
-                  </a:lnTo>
-                  <a:lnTo>
-                    <a:pt x="1187508" y="302874"/>
-                  </a:lnTo>
-                  <a:lnTo>
-                    <a:pt x="1261268" y="439155"/>
-                  </a:lnTo>
-                  <a:lnTo>
-                    <a:pt x="1335028" y="569596"/>
-                  </a:lnTo>
-                  <a:lnTo>
-                    <a:pt x="1408788" y="694449"/>
-                  </a:lnTo>
-                  <a:lnTo>
-                    <a:pt x="1482548" y="813953"/>
-                  </a:lnTo>
-                  <a:lnTo>
-                    <a:pt x="1556308" y="928337"/>
-                  </a:lnTo>
-                  <a:lnTo>
-                    <a:pt x="1630068" y="1037820"/>
-                  </a:lnTo>
-                  <a:lnTo>
-                    <a:pt x="1703828" y="1142613"/>
-                  </a:lnTo>
-                  <a:lnTo>
-                    <a:pt x="1777588" y="1242916"/>
-                  </a:lnTo>
-                  <a:lnTo>
-                    <a:pt x="1851348" y="1338921"/>
-                  </a:lnTo>
-                  <a:lnTo>
-                    <a:pt x="1925108" y="1430814"/>
-                  </a:lnTo>
-                  <a:lnTo>
-                    <a:pt x="1998868" y="1518769"/>
-                  </a:lnTo>
-                  <a:lnTo>
-                    <a:pt x="2072628" y="1602956"/>
-                  </a:lnTo>
-                  <a:lnTo>
-                    <a:pt x="2146388" y="1683536"/>
-                  </a:lnTo>
-                  <a:lnTo>
-                    <a:pt x="2220148" y="1760664"/>
-                  </a:lnTo>
-                  <a:lnTo>
-                    <a:pt x="2293908" y="1834487"/>
-                  </a:lnTo>
-                  <a:lnTo>
-                    <a:pt x="2367668" y="1905147"/>
-                  </a:lnTo>
-                  <a:lnTo>
-                    <a:pt x="2441428" y="1972781"/>
-                  </a:lnTo>
-                  <a:lnTo>
-                    <a:pt x="2515188" y="2037516"/>
-                  </a:lnTo>
-                  <a:lnTo>
-                    <a:pt x="2588948" y="2099478"/>
-                  </a:lnTo>
-                  <a:lnTo>
-                    <a:pt x="2662708" y="2158785"/>
-                  </a:lnTo>
-                  <a:lnTo>
-                    <a:pt x="2736468" y="2215551"/>
-                  </a:lnTo>
-                  <a:lnTo>
-                    <a:pt x="2810228" y="2269886"/>
-                  </a:lnTo>
-                  <a:lnTo>
-                    <a:pt x="2883988" y="2321892"/>
-                  </a:lnTo>
-                  <a:lnTo>
-                    <a:pt x="2957748" y="2371670"/>
-                  </a:lnTo>
-                  <a:lnTo>
-                    <a:pt x="3031508" y="2419316"/>
-                  </a:lnTo>
-                  <a:lnTo>
-                    <a:pt x="3105268" y="2464920"/>
-                  </a:lnTo>
-                  <a:lnTo>
-                    <a:pt x="3179028" y="2508570"/>
-                  </a:lnTo>
-                  <a:lnTo>
-                    <a:pt x="3252788" y="2550350"/>
-                  </a:lnTo>
-                  <a:lnTo>
-                    <a:pt x="3326548" y="2590340"/>
-                  </a:lnTo>
-                  <a:lnTo>
-                    <a:pt x="3400308" y="2628617"/>
-                  </a:lnTo>
-                  <a:lnTo>
-                    <a:pt x="3474068" y="2656926"/>
-                  </a:lnTo>
-                  <a:lnTo>
-                    <a:pt x="3547828" y="2665561"/>
-                  </a:lnTo>
-                  <a:lnTo>
-                    <a:pt x="3621588" y="2674105"/>
-                  </a:lnTo>
-                  <a:lnTo>
-                    <a:pt x="3695348" y="2682560"/>
-                  </a:lnTo>
-                  <a:lnTo>
-                    <a:pt x="3769108" y="2690926"/>
-                  </a:lnTo>
-                  <a:lnTo>
-                    <a:pt x="3842868" y="2699206"/>
-                  </a:lnTo>
-                  <a:lnTo>
-                    <a:pt x="3916628" y="2707398"/>
-                  </a:lnTo>
-                  <a:lnTo>
-                    <a:pt x="3990388" y="2715506"/>
-                  </a:lnTo>
-                  <a:lnTo>
-                    <a:pt x="4064149" y="2723528"/>
-                  </a:lnTo>
-                  <a:lnTo>
-                    <a:pt x="4137909" y="2731467"/>
-                  </a:lnTo>
-                  <a:lnTo>
-                    <a:pt x="4211669" y="2739323"/>
-                  </a:lnTo>
-                  <a:lnTo>
-                    <a:pt x="4285429" y="2747097"/>
-                  </a:lnTo>
-                  <a:lnTo>
-                    <a:pt x="4359189" y="2754789"/>
-                  </a:lnTo>
-                  <a:lnTo>
-                    <a:pt x="4432949" y="2762402"/>
-                  </a:lnTo>
-                  <a:lnTo>
-                    <a:pt x="4506709" y="2769934"/>
-                  </a:lnTo>
-                  <a:lnTo>
-                    <a:pt x="4580469" y="2777389"/>
-                  </a:lnTo>
-                  <a:lnTo>
-                    <a:pt x="4654229" y="2784765"/>
-                  </a:lnTo>
-                  <a:lnTo>
-                    <a:pt x="4727989" y="2792064"/>
-                  </a:lnTo>
-                  <a:lnTo>
-                    <a:pt x="4801749" y="2799287"/>
-                  </a:lnTo>
-                  <a:lnTo>
-                    <a:pt x="4875509" y="2806435"/>
-                  </a:lnTo>
-                  <a:lnTo>
-                    <a:pt x="4949269" y="2813508"/>
-                  </a:lnTo>
-                  <a:lnTo>
-                    <a:pt x="5023029" y="2820507"/>
-                  </a:lnTo>
-                  <a:lnTo>
-                    <a:pt x="5096789" y="2827433"/>
-                  </a:lnTo>
-                  <a:lnTo>
-                    <a:pt x="5170549" y="2834287"/>
-                  </a:lnTo>
-                  <a:lnTo>
-                    <a:pt x="5244309" y="2841069"/>
-                  </a:lnTo>
-                  <a:lnTo>
-                    <a:pt x="5318069" y="2847780"/>
-                  </a:lnTo>
-                  <a:lnTo>
-                    <a:pt x="5391829" y="2854421"/>
-                  </a:lnTo>
-                  <a:lnTo>
-                    <a:pt x="5465589" y="2860993"/>
-                  </a:lnTo>
-                  <a:lnTo>
-                    <a:pt x="5539349" y="2867497"/>
-                  </a:lnTo>
-                  <a:lnTo>
-                    <a:pt x="5613109" y="2873932"/>
-                  </a:lnTo>
-                  <a:lnTo>
-                    <a:pt x="5686869" y="2880300"/>
-                  </a:lnTo>
-                  <a:lnTo>
-                    <a:pt x="5760629" y="2886602"/>
-                  </a:lnTo>
-                  <a:lnTo>
-                    <a:pt x="5834389" y="2892838"/>
-                  </a:lnTo>
-                  <a:lnTo>
-                    <a:pt x="5908149" y="2899008"/>
-                  </a:lnTo>
-                  <a:lnTo>
-                    <a:pt x="5981909" y="2905115"/>
-                  </a:lnTo>
-                  <a:lnTo>
-                    <a:pt x="6055669" y="2911157"/>
-                  </a:lnTo>
-                  <a:lnTo>
-                    <a:pt x="6129429" y="2917137"/>
-                  </a:lnTo>
-                  <a:lnTo>
-                    <a:pt x="6203189" y="2923054"/>
-                  </a:lnTo>
-                  <a:lnTo>
-                    <a:pt x="6276949" y="2928909"/>
-                  </a:lnTo>
-                  <a:lnTo>
-                    <a:pt x="6350709" y="2934703"/>
-                  </a:lnTo>
-                  <a:lnTo>
-                    <a:pt x="6424469" y="2940436"/>
-                  </a:lnTo>
-                  <a:lnTo>
-                    <a:pt x="6498229" y="2946110"/>
-                  </a:lnTo>
-                  <a:lnTo>
-                    <a:pt x="6571989" y="2951724"/>
-                  </a:lnTo>
-                  <a:lnTo>
-                    <a:pt x="6645749" y="2957280"/>
-                  </a:lnTo>
-                  <a:lnTo>
-                    <a:pt x="6719509" y="2962778"/>
-                  </a:lnTo>
-                  <a:lnTo>
-                    <a:pt x="6793269" y="2968218"/>
-                  </a:lnTo>
-                  <a:lnTo>
-                    <a:pt x="6867029" y="2973602"/>
-                  </a:lnTo>
-                  <a:lnTo>
-                    <a:pt x="6940789" y="2978929"/>
-                  </a:lnTo>
-                  <a:lnTo>
-                    <a:pt x="7014550" y="2984201"/>
-                  </a:lnTo>
-                  <a:lnTo>
-                    <a:pt x="7088310" y="2989417"/>
-                  </a:lnTo>
-                  <a:lnTo>
-                    <a:pt x="7162070" y="2994580"/>
-                  </a:lnTo>
-                  <a:lnTo>
-                    <a:pt x="7235830" y="2999688"/>
-                  </a:lnTo>
-                  <a:lnTo>
-                    <a:pt x="7235830" y="3396018"/>
-                  </a:lnTo>
-                  <a:lnTo>
-                    <a:pt x="7162070" y="3392091"/>
-                  </a:lnTo>
-                  <a:lnTo>
-                    <a:pt x="7088310" y="3387989"/>
-                  </a:lnTo>
-                  <a:lnTo>
-                    <a:pt x="7014550" y="3383702"/>
-                  </a:lnTo>
-                  <a:lnTo>
-                    <a:pt x="6940789" y="3379224"/>
-                  </a:lnTo>
-                  <a:lnTo>
-                    <a:pt x="6867029" y="3374546"/>
-                  </a:lnTo>
-                  <a:lnTo>
-                    <a:pt x="6793269" y="3369658"/>
-                  </a:lnTo>
-                  <a:lnTo>
-                    <a:pt x="6719509" y="3364551"/>
-                  </a:lnTo>
-                  <a:lnTo>
-                    <a:pt x="6645749" y="3359216"/>
-                  </a:lnTo>
-                  <a:lnTo>
-                    <a:pt x="6571989" y="3353641"/>
-                  </a:lnTo>
-                  <a:lnTo>
-                    <a:pt x="6498229" y="3347818"/>
-                  </a:lnTo>
-                  <a:lnTo>
-                    <a:pt x="6424469" y="3341733"/>
-                  </a:lnTo>
-                  <a:lnTo>
-                    <a:pt x="6350709" y="3335377"/>
-                  </a:lnTo>
-                  <a:lnTo>
-                    <a:pt x="6276949" y="3328735"/>
-                  </a:lnTo>
-                  <a:lnTo>
-                    <a:pt x="6203189" y="3321797"/>
-                  </a:lnTo>
-                  <a:lnTo>
-                    <a:pt x="6129429" y="3314548"/>
-                  </a:lnTo>
-                  <a:lnTo>
-                    <a:pt x="6055669" y="3306974"/>
-                  </a:lnTo>
-                  <a:lnTo>
-                    <a:pt x="5981909" y="3299061"/>
-                  </a:lnTo>
-                  <a:lnTo>
-                    <a:pt x="5908149" y="3290795"/>
-                  </a:lnTo>
-                  <a:lnTo>
-                    <a:pt x="5834389" y="3282158"/>
-                  </a:lnTo>
-                  <a:lnTo>
-                    <a:pt x="5760629" y="3273134"/>
-                  </a:lnTo>
-                  <a:lnTo>
-                    <a:pt x="5686869" y="3263707"/>
-                  </a:lnTo>
-                  <a:lnTo>
-                    <a:pt x="5613109" y="3253858"/>
-                  </a:lnTo>
-                  <a:lnTo>
-                    <a:pt x="5539349" y="3243568"/>
-                  </a:lnTo>
-                  <a:lnTo>
-                    <a:pt x="5465589" y="3232817"/>
-                  </a:lnTo>
-                  <a:lnTo>
-                    <a:pt x="5391829" y="3221585"/>
-                  </a:lnTo>
-                  <a:lnTo>
-                    <a:pt x="5318069" y="3209850"/>
-                  </a:lnTo>
-                  <a:lnTo>
-                    <a:pt x="5244309" y="3197590"/>
-                  </a:lnTo>
-                  <a:lnTo>
-                    <a:pt x="5170549" y="3184782"/>
-                  </a:lnTo>
-                  <a:lnTo>
-                    <a:pt x="5096789" y="3171399"/>
-                  </a:lnTo>
-                  <a:lnTo>
-                    <a:pt x="5023029" y="3157418"/>
-                  </a:lnTo>
-                  <a:lnTo>
-                    <a:pt x="4949269" y="3142811"/>
-                  </a:lnTo>
-                  <a:lnTo>
-                    <a:pt x="4875509" y="3127551"/>
-                  </a:lnTo>
-                  <a:lnTo>
-                    <a:pt x="4801749" y="3111607"/>
-                  </a:lnTo>
-                  <a:lnTo>
-                    <a:pt x="4727989" y="3094949"/>
-                  </a:lnTo>
-                  <a:lnTo>
-                    <a:pt x="4654229" y="3077546"/>
-                  </a:lnTo>
-                  <a:lnTo>
-                    <a:pt x="4580469" y="3059364"/>
-                  </a:lnTo>
-                  <a:lnTo>
-                    <a:pt x="4506709" y="3040368"/>
-                  </a:lnTo>
-                  <a:lnTo>
-                    <a:pt x="4432949" y="3020522"/>
-                  </a:lnTo>
-                  <a:lnTo>
-                    <a:pt x="4359189" y="2999787"/>
-                  </a:lnTo>
-                  <a:lnTo>
-                    <a:pt x="4285429" y="2978124"/>
-                  </a:lnTo>
-                  <a:lnTo>
-                    <a:pt x="4211669" y="2955492"/>
-                  </a:lnTo>
-                  <a:lnTo>
-                    <a:pt x="4137909" y="2931847"/>
-                  </a:lnTo>
-                  <a:lnTo>
-                    <a:pt x="4064149" y="2907143"/>
-                  </a:lnTo>
-                  <a:lnTo>
-                    <a:pt x="3990388" y="2881333"/>
-                  </a:lnTo>
-                  <a:lnTo>
-                    <a:pt x="3916628" y="2854368"/>
-                  </a:lnTo>
-                  <a:lnTo>
-                    <a:pt x="3842868" y="2826196"/>
-                  </a:lnTo>
-                  <a:lnTo>
-                    <a:pt x="3769108" y="2796763"/>
-                  </a:lnTo>
-                  <a:lnTo>
-                    <a:pt x="3695348" y="2766013"/>
-                  </a:lnTo>
-                  <a:lnTo>
-                    <a:pt x="3621588" y="2733886"/>
-                  </a:lnTo>
-                  <a:lnTo>
-                    <a:pt x="3547828" y="2700321"/>
-                  </a:lnTo>
-                  <a:lnTo>
-                    <a:pt x="3474068" y="2665254"/>
-                  </a:lnTo>
-                  <a:lnTo>
-                    <a:pt x="3400308" y="2648201"/>
-                  </a:lnTo>
-                  <a:lnTo>
-                    <a:pt x="3326548" y="2639384"/>
-                  </a:lnTo>
-                  <a:lnTo>
-                    <a:pt x="3252788" y="2630473"/>
-                  </a:lnTo>
-                  <a:lnTo>
-                    <a:pt x="3179028" y="2621468"/>
-                  </a:lnTo>
-                  <a:lnTo>
-                    <a:pt x="3105268" y="2612369"/>
-                  </a:lnTo>
-                  <a:lnTo>
-                    <a:pt x="3031508" y="2603173"/>
-                  </a:lnTo>
-                  <a:lnTo>
-                    <a:pt x="2957748" y="2593881"/>
-                  </a:lnTo>
-                  <a:lnTo>
-                    <a:pt x="2883988" y="2584490"/>
-                  </a:lnTo>
-                  <a:lnTo>
-                    <a:pt x="2810228" y="2575000"/>
-                  </a:lnTo>
-                  <a:lnTo>
-                    <a:pt x="2736468" y="2565410"/>
-                  </a:lnTo>
-                  <a:lnTo>
-                    <a:pt x="2662708" y="2555719"/>
-                  </a:lnTo>
-                  <a:lnTo>
-                    <a:pt x="2588948" y="2545925"/>
-                  </a:lnTo>
-                  <a:lnTo>
-                    <a:pt x="2515188" y="2536029"/>
-                  </a:lnTo>
-                  <a:lnTo>
-                    <a:pt x="2441428" y="2526027"/>
-                  </a:lnTo>
-                  <a:lnTo>
-                    <a:pt x="2367668" y="2515921"/>
-                  </a:lnTo>
-                  <a:lnTo>
-                    <a:pt x="2293908" y="2505707"/>
-                  </a:lnTo>
-                  <a:lnTo>
-                    <a:pt x="2220148" y="2495386"/>
-                  </a:lnTo>
-                  <a:lnTo>
-                    <a:pt x="2146388" y="2484956"/>
-                  </a:lnTo>
-                  <a:lnTo>
-                    <a:pt x="2072628" y="2474416"/>
-                  </a:lnTo>
-                  <a:lnTo>
-                    <a:pt x="1998868" y="2463764"/>
-                  </a:lnTo>
-                  <a:lnTo>
-                    <a:pt x="1925108" y="2453000"/>
-                  </a:lnTo>
-                  <a:lnTo>
-                    <a:pt x="1851348" y="2442123"/>
-                  </a:lnTo>
-                  <a:lnTo>
-                    <a:pt x="1777588" y="2431131"/>
-                  </a:lnTo>
-                  <a:lnTo>
-                    <a:pt x="1703828" y="2420023"/>
-                  </a:lnTo>
-                  <a:lnTo>
-                    <a:pt x="1630068" y="2408797"/>
-                  </a:lnTo>
-                  <a:lnTo>
-                    <a:pt x="1556308" y="2397453"/>
-                  </a:lnTo>
-                  <a:lnTo>
-                    <a:pt x="1482548" y="2385990"/>
-                  </a:lnTo>
-                  <a:lnTo>
-                    <a:pt x="1408788" y="2374405"/>
-                  </a:lnTo>
-                  <a:lnTo>
-                    <a:pt x="1335028" y="2362698"/>
-                  </a:lnTo>
-                  <a:lnTo>
-                    <a:pt x="1261268" y="2350868"/>
-                  </a:lnTo>
-                  <a:lnTo>
-                    <a:pt x="1187508" y="2338913"/>
-                  </a:lnTo>
-                  <a:lnTo>
-                    <a:pt x="1113747" y="2326831"/>
-                  </a:lnTo>
-                  <a:lnTo>
-                    <a:pt x="1039987" y="2314622"/>
-                  </a:lnTo>
-                  <a:lnTo>
-                    <a:pt x="966227" y="2302285"/>
-                  </a:lnTo>
-                  <a:lnTo>
-                    <a:pt x="892467" y="2289817"/>
-                  </a:lnTo>
-                  <a:lnTo>
-                    <a:pt x="818707" y="2277217"/>
-                  </a:lnTo>
-                  <a:lnTo>
-                    <a:pt x="744947" y="2264485"/>
-                  </a:lnTo>
-                  <a:lnTo>
-                    <a:pt x="671187" y="2251618"/>
-                  </a:lnTo>
-                  <a:lnTo>
-                    <a:pt x="597427" y="2238615"/>
-                  </a:lnTo>
-                  <a:lnTo>
-                    <a:pt x="523667" y="2225476"/>
-                  </a:lnTo>
-                  <a:lnTo>
-                    <a:pt x="449907" y="2212197"/>
-                  </a:lnTo>
-                  <a:lnTo>
-                    <a:pt x="376147" y="2198778"/>
-                  </a:lnTo>
-                  <a:lnTo>
-                    <a:pt x="302387" y="2185218"/>
-                  </a:lnTo>
-                  <a:lnTo>
-                    <a:pt x="228627" y="2171515"/>
-                  </a:lnTo>
-                  <a:lnTo>
-                    <a:pt x="154867" y="2157667"/>
-                  </a:lnTo>
-                  <a:lnTo>
-                    <a:pt x="81107" y="2143673"/>
-                  </a:lnTo>
-                  <a:lnTo>
-                    <a:pt x="7347" y="2129531"/>
-                  </a:lnTo>
-                  <a:lnTo>
-                    <a:pt x="0" y="2128108"/>
+                    <a:pt x="1074337" y="11740"/>
+                  </a:lnTo>
+                  <a:lnTo>
+                    <a:pt x="1145960" y="160494"/>
+                  </a:lnTo>
+                  <a:lnTo>
+                    <a:pt x="1217582" y="302874"/>
+                  </a:lnTo>
+                  <a:lnTo>
+                    <a:pt x="1289205" y="439155"/>
+                  </a:lnTo>
+                  <a:lnTo>
+                    <a:pt x="1360827" y="569596"/>
+                  </a:lnTo>
+                  <a:lnTo>
+                    <a:pt x="1432450" y="694449"/>
+                  </a:lnTo>
+                  <a:lnTo>
+                    <a:pt x="1504073" y="813953"/>
+                  </a:lnTo>
+                  <a:lnTo>
+                    <a:pt x="1575695" y="928337"/>
+                  </a:lnTo>
+                  <a:lnTo>
+                    <a:pt x="1647318" y="1037820"/>
+                  </a:lnTo>
+                  <a:lnTo>
+                    <a:pt x="1718940" y="1142613"/>
+                  </a:lnTo>
+                  <a:lnTo>
+                    <a:pt x="1790563" y="1242916"/>
+                  </a:lnTo>
+                  <a:lnTo>
+                    <a:pt x="1862185" y="1338921"/>
+                  </a:lnTo>
+                  <a:lnTo>
+                    <a:pt x="1933808" y="1430814"/>
+                  </a:lnTo>
+                  <a:lnTo>
+                    <a:pt x="2005430" y="1518769"/>
+                  </a:lnTo>
+                  <a:lnTo>
+                    <a:pt x="2077053" y="1602956"/>
+                  </a:lnTo>
+                  <a:lnTo>
+                    <a:pt x="2148675" y="1683536"/>
+                  </a:lnTo>
+                  <a:lnTo>
+                    <a:pt x="2220298" y="1760664"/>
+                  </a:lnTo>
+                  <a:lnTo>
+                    <a:pt x="2291920" y="1834487"/>
+                  </a:lnTo>
+                  <a:lnTo>
+                    <a:pt x="2363543" y="1905147"/>
+                  </a:lnTo>
+                  <a:lnTo>
+                    <a:pt x="2435165" y="1972781"/>
+                  </a:lnTo>
+                  <a:lnTo>
+                    <a:pt x="2506788" y="2037516"/>
+                  </a:lnTo>
+                  <a:lnTo>
+                    <a:pt x="2578410" y="2099478"/>
+                  </a:lnTo>
+                  <a:lnTo>
+                    <a:pt x="2650033" y="2158785"/>
+                  </a:lnTo>
+                  <a:lnTo>
+                    <a:pt x="2721655" y="2215551"/>
+                  </a:lnTo>
+                  <a:lnTo>
+                    <a:pt x="2793278" y="2269886"/>
+                  </a:lnTo>
+                  <a:lnTo>
+                    <a:pt x="2864901" y="2321892"/>
+                  </a:lnTo>
+                  <a:lnTo>
+                    <a:pt x="2936523" y="2371670"/>
+                  </a:lnTo>
+                  <a:lnTo>
+                    <a:pt x="3008146" y="2419316"/>
+                  </a:lnTo>
+                  <a:lnTo>
+                    <a:pt x="3079768" y="2464920"/>
+                  </a:lnTo>
+                  <a:lnTo>
+                    <a:pt x="3151391" y="2508570"/>
+                  </a:lnTo>
+                  <a:lnTo>
+                    <a:pt x="3223013" y="2550350"/>
+                  </a:lnTo>
+                  <a:lnTo>
+                    <a:pt x="3294636" y="2590340"/>
+                  </a:lnTo>
+                  <a:lnTo>
+                    <a:pt x="3366258" y="2628617"/>
+                  </a:lnTo>
+                  <a:lnTo>
+                    <a:pt x="3437881" y="2656926"/>
+                  </a:lnTo>
+                  <a:lnTo>
+                    <a:pt x="3509503" y="2665561"/>
+                  </a:lnTo>
+                  <a:lnTo>
+                    <a:pt x="3581126" y="2674105"/>
+                  </a:lnTo>
+                  <a:lnTo>
+                    <a:pt x="3652748" y="2682560"/>
+                  </a:lnTo>
+                  <a:lnTo>
+                    <a:pt x="3724371" y="2690926"/>
+                  </a:lnTo>
+                  <a:lnTo>
+                    <a:pt x="3795993" y="2699206"/>
+                  </a:lnTo>
+                  <a:lnTo>
+                    <a:pt x="3867616" y="2707398"/>
+                  </a:lnTo>
+                  <a:lnTo>
+                    <a:pt x="3939238" y="2715506"/>
+                  </a:lnTo>
+                  <a:lnTo>
+                    <a:pt x="4010861" y="2723528"/>
+                  </a:lnTo>
+                  <a:lnTo>
+                    <a:pt x="4082483" y="2731467"/>
+                  </a:lnTo>
+                  <a:lnTo>
+                    <a:pt x="4154106" y="2739323"/>
+                  </a:lnTo>
+                  <a:lnTo>
+                    <a:pt x="4225729" y="2747097"/>
+                  </a:lnTo>
+                  <a:lnTo>
+                    <a:pt x="4297351" y="2754789"/>
+                  </a:lnTo>
+                  <a:lnTo>
+                    <a:pt x="4368974" y="2762402"/>
+                  </a:lnTo>
+                  <a:lnTo>
+                    <a:pt x="4440596" y="2769934"/>
+                  </a:lnTo>
+                  <a:lnTo>
+                    <a:pt x="4512219" y="2777389"/>
+                  </a:lnTo>
+                  <a:lnTo>
+                    <a:pt x="4583841" y="2784765"/>
+                  </a:lnTo>
+                  <a:lnTo>
+                    <a:pt x="4655464" y="2792064"/>
+                  </a:lnTo>
+                  <a:lnTo>
+                    <a:pt x="4727086" y="2799287"/>
+                  </a:lnTo>
+                  <a:lnTo>
+                    <a:pt x="4798709" y="2806435"/>
+                  </a:lnTo>
+                  <a:lnTo>
+                    <a:pt x="4870331" y="2813508"/>
+                  </a:lnTo>
+                  <a:lnTo>
+                    <a:pt x="4941954" y="2820507"/>
+                  </a:lnTo>
+                  <a:lnTo>
+                    <a:pt x="5013576" y="2827433"/>
+                  </a:lnTo>
+                  <a:lnTo>
+                    <a:pt x="5085199" y="2834287"/>
+                  </a:lnTo>
+                  <a:lnTo>
+                    <a:pt x="5156821" y="2841069"/>
+                  </a:lnTo>
+                  <a:lnTo>
+                    <a:pt x="5228444" y="2847780"/>
+                  </a:lnTo>
+                  <a:lnTo>
+                    <a:pt x="5300066" y="2854421"/>
+                  </a:lnTo>
+                  <a:lnTo>
+                    <a:pt x="5371689" y="2860993"/>
+                  </a:lnTo>
+                  <a:lnTo>
+                    <a:pt x="5443311" y="2867497"/>
+                  </a:lnTo>
+                  <a:lnTo>
+                    <a:pt x="5514934" y="2873932"/>
+                  </a:lnTo>
+                  <a:lnTo>
+                    <a:pt x="5586557" y="2880300"/>
+                  </a:lnTo>
+                  <a:lnTo>
+                    <a:pt x="5658179" y="2886602"/>
+                  </a:lnTo>
+                  <a:lnTo>
+                    <a:pt x="5729802" y="2892838"/>
+                  </a:lnTo>
+                  <a:lnTo>
+                    <a:pt x="5801424" y="2899008"/>
+                  </a:lnTo>
+                  <a:lnTo>
+                    <a:pt x="5873047" y="2905115"/>
+                  </a:lnTo>
+                  <a:lnTo>
+                    <a:pt x="5944669" y="2911157"/>
+                  </a:lnTo>
+                  <a:lnTo>
+                    <a:pt x="6016292" y="2917137"/>
+                  </a:lnTo>
+                  <a:lnTo>
+                    <a:pt x="6087914" y="2923054"/>
+                  </a:lnTo>
+                  <a:lnTo>
+                    <a:pt x="6159537" y="2928909"/>
+                  </a:lnTo>
+                  <a:lnTo>
+                    <a:pt x="6231159" y="2934703"/>
+                  </a:lnTo>
+                  <a:lnTo>
+                    <a:pt x="6302782" y="2940436"/>
+                  </a:lnTo>
+                  <a:lnTo>
+                    <a:pt x="6374404" y="2946110"/>
+                  </a:lnTo>
+                  <a:lnTo>
+                    <a:pt x="6446027" y="2951724"/>
+                  </a:lnTo>
+                  <a:lnTo>
+                    <a:pt x="6517649" y="2957280"/>
+                  </a:lnTo>
+                  <a:lnTo>
+                    <a:pt x="6589272" y="2962778"/>
+                  </a:lnTo>
+                  <a:lnTo>
+                    <a:pt x="6660894" y="2968218"/>
+                  </a:lnTo>
+                  <a:lnTo>
+                    <a:pt x="6732517" y="2973602"/>
+                  </a:lnTo>
+                  <a:lnTo>
+                    <a:pt x="6804139" y="2978929"/>
+                  </a:lnTo>
+                  <a:lnTo>
+                    <a:pt x="6875762" y="2984201"/>
+                  </a:lnTo>
+                  <a:lnTo>
+                    <a:pt x="6947385" y="2989417"/>
+                  </a:lnTo>
+                  <a:lnTo>
+                    <a:pt x="7019007" y="2994580"/>
+                  </a:lnTo>
+                  <a:lnTo>
+                    <a:pt x="7090630" y="2999688"/>
+                  </a:lnTo>
+                  <a:lnTo>
+                    <a:pt x="7090630" y="3396018"/>
+                  </a:lnTo>
+                  <a:lnTo>
+                    <a:pt x="7019007" y="3392091"/>
+                  </a:lnTo>
+                  <a:lnTo>
+                    <a:pt x="6947385" y="3387989"/>
+                  </a:lnTo>
+                  <a:lnTo>
+                    <a:pt x="6875762" y="3383702"/>
+                  </a:lnTo>
+                  <a:lnTo>
+                    <a:pt x="6804139" y="3379224"/>
+                  </a:lnTo>
+                  <a:lnTo>
+                    <a:pt x="6732517" y="3374546"/>
+                  </a:lnTo>
+                  <a:lnTo>
+                    <a:pt x="6660894" y="3369658"/>
+                  </a:lnTo>
+                  <a:lnTo>
+                    <a:pt x="6589272" y="3364551"/>
+                  </a:lnTo>
+                  <a:lnTo>
+                    <a:pt x="6517649" y="3359216"/>
+                  </a:lnTo>
+                  <a:lnTo>
+                    <a:pt x="6446027" y="3353641"/>
+                  </a:lnTo>
+                  <a:lnTo>
+                    <a:pt x="6374404" y="3347818"/>
+                  </a:lnTo>
+                  <a:lnTo>
+                    <a:pt x="6302782" y="3341733"/>
+                  </a:lnTo>
+                  <a:lnTo>
+                    <a:pt x="6231159" y="3335377"/>
+                  </a:lnTo>
+                  <a:lnTo>
+                    <a:pt x="6159537" y="3328735"/>
+                  </a:lnTo>
+                  <a:lnTo>
+                    <a:pt x="6087914" y="3321797"/>
+                  </a:lnTo>
+                  <a:lnTo>
+                    <a:pt x="6016292" y="3314548"/>
+                  </a:lnTo>
+                  <a:lnTo>
+                    <a:pt x="5944669" y="3306974"/>
+                  </a:lnTo>
+                  <a:lnTo>
+                    <a:pt x="5873047" y="3299061"/>
+                  </a:lnTo>
+                  <a:lnTo>
+                    <a:pt x="5801424" y="3290795"/>
+                  </a:lnTo>
+                  <a:lnTo>
+                    <a:pt x="5729802" y="3282158"/>
+                  </a:lnTo>
+                  <a:lnTo>
+                    <a:pt x="5658179" y="3273134"/>
+                  </a:lnTo>
+                  <a:lnTo>
+                    <a:pt x="5586557" y="3263707"/>
+                  </a:lnTo>
+                  <a:lnTo>
+                    <a:pt x="5514934" y="3253858"/>
+                  </a:lnTo>
+                  <a:lnTo>
+                    <a:pt x="5443311" y="3243568"/>
+                  </a:lnTo>
+                  <a:lnTo>
+                    <a:pt x="5371689" y="3232817"/>
+                  </a:lnTo>
+                  <a:lnTo>
+                    <a:pt x="5300066" y="3221585"/>
+                  </a:lnTo>
+                  <a:lnTo>
+                    <a:pt x="5228444" y="3209850"/>
+                  </a:lnTo>
+                  <a:lnTo>
+                    <a:pt x="5156821" y="3197590"/>
+                  </a:lnTo>
+                  <a:lnTo>
+                    <a:pt x="5085199" y="3184782"/>
+                  </a:lnTo>
+                  <a:lnTo>
+                    <a:pt x="5013576" y="3171399"/>
+                  </a:lnTo>
+                  <a:lnTo>
+                    <a:pt x="4941954" y="3157418"/>
+                  </a:lnTo>
+                  <a:lnTo>
+                    <a:pt x="4870331" y="3142811"/>
+                  </a:lnTo>
+                  <a:lnTo>
+                    <a:pt x="4798709" y="3127551"/>
+                  </a:lnTo>
+                  <a:lnTo>
+                    <a:pt x="4727086" y="3111607"/>
+                  </a:lnTo>
+                  <a:lnTo>
+                    <a:pt x="4655464" y="3094949"/>
+                  </a:lnTo>
+                  <a:lnTo>
+                    <a:pt x="4583841" y="3077546"/>
+                  </a:lnTo>
+                  <a:lnTo>
+                    <a:pt x="4512219" y="3059364"/>
+                  </a:lnTo>
+                  <a:lnTo>
+                    <a:pt x="4440596" y="3040368"/>
+                  </a:lnTo>
+                  <a:lnTo>
+                    <a:pt x="4368974" y="3020522"/>
+                  </a:lnTo>
+                  <a:lnTo>
+                    <a:pt x="4297351" y="2999787"/>
+                  </a:lnTo>
+                  <a:lnTo>
+                    <a:pt x="4225729" y="2978124"/>
+                  </a:lnTo>
+                  <a:lnTo>
+                    <a:pt x="4154106" y="2955492"/>
+                  </a:lnTo>
+                  <a:lnTo>
+                    <a:pt x="4082483" y="2931847"/>
+                  </a:lnTo>
+                  <a:lnTo>
+                    <a:pt x="4010861" y="2907143"/>
+                  </a:lnTo>
+                  <a:lnTo>
+                    <a:pt x="3939238" y="2881333"/>
+                  </a:lnTo>
+                  <a:lnTo>
+                    <a:pt x="3867616" y="2854368"/>
+                  </a:lnTo>
+                  <a:lnTo>
+                    <a:pt x="3795993" y="2826196"/>
+                  </a:lnTo>
+                  <a:lnTo>
+                    <a:pt x="3724371" y="2796763"/>
+                  </a:lnTo>
+                  <a:lnTo>
+                    <a:pt x="3652748" y="2766013"/>
+                  </a:lnTo>
+                  <a:lnTo>
+                    <a:pt x="3581126" y="2733886"/>
+                  </a:lnTo>
+                  <a:lnTo>
+                    <a:pt x="3509503" y="2700321"/>
+                  </a:lnTo>
+                  <a:lnTo>
+                    <a:pt x="3437881" y="2665254"/>
+                  </a:lnTo>
+                  <a:lnTo>
+                    <a:pt x="3366258" y="2648201"/>
+                  </a:lnTo>
+                  <a:lnTo>
+                    <a:pt x="3294636" y="2639384"/>
+                  </a:lnTo>
+                  <a:lnTo>
+                    <a:pt x="3223013" y="2630473"/>
+                  </a:lnTo>
+                  <a:lnTo>
+                    <a:pt x="3151391" y="2621468"/>
+                  </a:lnTo>
+                  <a:lnTo>
+                    <a:pt x="3079768" y="2612369"/>
+                  </a:lnTo>
+                  <a:lnTo>
+                    <a:pt x="3008146" y="2603173"/>
+                  </a:lnTo>
+                  <a:lnTo>
+                    <a:pt x="2936523" y="2593881"/>
+                  </a:lnTo>
+                  <a:lnTo>
+                    <a:pt x="2864901" y="2584490"/>
+                  </a:lnTo>
+                  <a:lnTo>
+                    <a:pt x="2793278" y="2575000"/>
+                  </a:lnTo>
+                  <a:lnTo>
+                    <a:pt x="2721655" y="2565410"/>
+                  </a:lnTo>
+                  <a:lnTo>
+                    <a:pt x="2650033" y="2555719"/>
+                  </a:lnTo>
+                  <a:lnTo>
+                    <a:pt x="2578410" y="2545925"/>
+                  </a:lnTo>
+                  <a:lnTo>
+                    <a:pt x="2506788" y="2536029"/>
+                  </a:lnTo>
+                  <a:lnTo>
+                    <a:pt x="2435165" y="2526027"/>
+                  </a:lnTo>
+                  <a:lnTo>
+                    <a:pt x="2363543" y="2515921"/>
+                  </a:lnTo>
+                  <a:lnTo>
+                    <a:pt x="2291920" y="2505707"/>
+                  </a:lnTo>
+                  <a:lnTo>
+                    <a:pt x="2220298" y="2495386"/>
+                  </a:lnTo>
+                  <a:lnTo>
+                    <a:pt x="2148675" y="2484956"/>
+                  </a:lnTo>
+                  <a:lnTo>
+                    <a:pt x="2077053" y="2474416"/>
+                  </a:lnTo>
+                  <a:lnTo>
+                    <a:pt x="2005430" y="2463764"/>
+                  </a:lnTo>
+                  <a:lnTo>
+                    <a:pt x="1933808" y="2453000"/>
+                  </a:lnTo>
+                  <a:lnTo>
+                    <a:pt x="1862185" y="2442123"/>
+                  </a:lnTo>
+                  <a:lnTo>
+                    <a:pt x="1790563" y="2431131"/>
+                  </a:lnTo>
+                  <a:lnTo>
+                    <a:pt x="1718940" y="2420023"/>
+                  </a:lnTo>
+                  <a:lnTo>
+                    <a:pt x="1647318" y="2408797"/>
+                  </a:lnTo>
+                  <a:lnTo>
+                    <a:pt x="1575695" y="2397453"/>
+                  </a:lnTo>
+                  <a:lnTo>
+                    <a:pt x="1504073" y="2385990"/>
+                  </a:lnTo>
+                  <a:lnTo>
+                    <a:pt x="1432450" y="2374405"/>
+                  </a:lnTo>
+                  <a:lnTo>
+                    <a:pt x="1360827" y="2362698"/>
+                  </a:lnTo>
+                  <a:lnTo>
+                    <a:pt x="1289205" y="2350868"/>
+                  </a:lnTo>
+                  <a:lnTo>
+                    <a:pt x="1217582" y="2338913"/>
+                  </a:lnTo>
+                  <a:lnTo>
+                    <a:pt x="1145960" y="2326831"/>
+                  </a:lnTo>
+                  <a:lnTo>
+                    <a:pt x="1074337" y="2314622"/>
+                  </a:lnTo>
+                  <a:lnTo>
+                    <a:pt x="1002715" y="2302285"/>
+                  </a:lnTo>
+                  <a:lnTo>
+                    <a:pt x="931092" y="2289817"/>
+                  </a:lnTo>
+                  <a:lnTo>
+                    <a:pt x="859470" y="2277217"/>
+                  </a:lnTo>
+                  <a:lnTo>
+                    <a:pt x="787847" y="2264485"/>
+                  </a:lnTo>
+                  <a:lnTo>
+                    <a:pt x="716225" y="2251618"/>
+                  </a:lnTo>
+                  <a:lnTo>
+                    <a:pt x="644602" y="2238615"/>
+                  </a:lnTo>
+                  <a:lnTo>
+                    <a:pt x="572980" y="2225476"/>
+                  </a:lnTo>
+                  <a:lnTo>
+                    <a:pt x="501357" y="2212197"/>
+                  </a:lnTo>
+                  <a:lnTo>
+                    <a:pt x="429735" y="2198778"/>
+                  </a:lnTo>
+                  <a:lnTo>
+                    <a:pt x="358112" y="2185218"/>
+                  </a:lnTo>
+                  <a:lnTo>
+                    <a:pt x="286490" y="2171515"/>
+                  </a:lnTo>
+                  <a:lnTo>
+                    <a:pt x="214867" y="2157667"/>
+                  </a:lnTo>
+                  <a:lnTo>
+                    <a:pt x="143245" y="2143673"/>
+                  </a:lnTo>
+                  <a:lnTo>
+                    <a:pt x="71622" y="2129531"/>
+                  </a:lnTo>
+                  <a:lnTo>
+                    <a:pt x="0" y="2115240"/>
                   </a:lnTo>
                   <a:close/>
                 </a:path>
@@ -3585,276 +3542,601 @@
         </p:sp>
         <p:sp>
           <p:nvSpPr>
+            <p:cNvPr id="21" name="pl21"/>
+            <p:cNvSpPr/>
+            <p:nvPr/>
+          </p:nvSpPr>
+          <p:spPr>
+            <a:xfrm>
+              <a:off x="2240976" y="2073503"/>
+              <a:ext cx="6021702" cy="2999688"/>
+            </a:xfrm>
+            <a:custGeom>
+              <a:avLst/>
+              <a:pathLst>
+                <a:path w="6021702" h="2999688">
+                  <a:moveTo>
+                    <a:pt x="0" y="0"/>
+                  </a:moveTo>
+                  <a:lnTo>
+                    <a:pt x="5410" y="11740"/>
+                  </a:lnTo>
+                  <a:lnTo>
+                    <a:pt x="77033" y="160494"/>
+                  </a:lnTo>
+                  <a:lnTo>
+                    <a:pt x="148655" y="302874"/>
+                  </a:lnTo>
+                  <a:lnTo>
+                    <a:pt x="220278" y="439155"/>
+                  </a:lnTo>
+                  <a:lnTo>
+                    <a:pt x="291900" y="569596"/>
+                  </a:lnTo>
+                  <a:lnTo>
+                    <a:pt x="363523" y="694449"/>
+                  </a:lnTo>
+                  <a:lnTo>
+                    <a:pt x="435145" y="813953"/>
+                  </a:lnTo>
+                  <a:lnTo>
+                    <a:pt x="506768" y="928337"/>
+                  </a:lnTo>
+                  <a:lnTo>
+                    <a:pt x="578390" y="1037820"/>
+                  </a:lnTo>
+                  <a:lnTo>
+                    <a:pt x="650013" y="1142613"/>
+                  </a:lnTo>
+                  <a:lnTo>
+                    <a:pt x="721636" y="1242916"/>
+                  </a:lnTo>
+                  <a:lnTo>
+                    <a:pt x="793258" y="1338921"/>
+                  </a:lnTo>
+                  <a:lnTo>
+                    <a:pt x="864881" y="1430814"/>
+                  </a:lnTo>
+                  <a:lnTo>
+                    <a:pt x="936503" y="1518769"/>
+                  </a:lnTo>
+                  <a:lnTo>
+                    <a:pt x="1008126" y="1602956"/>
+                  </a:lnTo>
+                  <a:lnTo>
+                    <a:pt x="1079748" y="1683536"/>
+                  </a:lnTo>
+                  <a:lnTo>
+                    <a:pt x="1151371" y="1760664"/>
+                  </a:lnTo>
+                  <a:lnTo>
+                    <a:pt x="1222993" y="1834487"/>
+                  </a:lnTo>
+                  <a:lnTo>
+                    <a:pt x="1294616" y="1905147"/>
+                  </a:lnTo>
+                  <a:lnTo>
+                    <a:pt x="1366238" y="1972781"/>
+                  </a:lnTo>
+                  <a:lnTo>
+                    <a:pt x="1437861" y="2037516"/>
+                  </a:lnTo>
+                  <a:lnTo>
+                    <a:pt x="1509483" y="2099478"/>
+                  </a:lnTo>
+                  <a:lnTo>
+                    <a:pt x="1581106" y="2158785"/>
+                  </a:lnTo>
+                  <a:lnTo>
+                    <a:pt x="1652728" y="2215551"/>
+                  </a:lnTo>
+                  <a:lnTo>
+                    <a:pt x="1724351" y="2269886"/>
+                  </a:lnTo>
+                  <a:lnTo>
+                    <a:pt x="1795973" y="2321892"/>
+                  </a:lnTo>
+                  <a:lnTo>
+                    <a:pt x="1867596" y="2371670"/>
+                  </a:lnTo>
+                  <a:lnTo>
+                    <a:pt x="1939218" y="2419316"/>
+                  </a:lnTo>
+                  <a:lnTo>
+                    <a:pt x="2010841" y="2464920"/>
+                  </a:lnTo>
+                  <a:lnTo>
+                    <a:pt x="2082464" y="2508570"/>
+                  </a:lnTo>
+                  <a:lnTo>
+                    <a:pt x="2154086" y="2550350"/>
+                  </a:lnTo>
+                  <a:lnTo>
+                    <a:pt x="2225709" y="2590340"/>
+                  </a:lnTo>
+                  <a:lnTo>
+                    <a:pt x="2297331" y="2628617"/>
+                  </a:lnTo>
+                  <a:lnTo>
+                    <a:pt x="2368954" y="2656926"/>
+                  </a:lnTo>
+                  <a:lnTo>
+                    <a:pt x="2440576" y="2665561"/>
+                  </a:lnTo>
+                  <a:lnTo>
+                    <a:pt x="2512199" y="2674105"/>
+                  </a:lnTo>
+                  <a:lnTo>
+                    <a:pt x="2583821" y="2682560"/>
+                  </a:lnTo>
+                  <a:lnTo>
+                    <a:pt x="2655444" y="2690926"/>
+                  </a:lnTo>
+                  <a:lnTo>
+                    <a:pt x="2727066" y="2699206"/>
+                  </a:lnTo>
+                  <a:lnTo>
+                    <a:pt x="2798689" y="2707398"/>
+                  </a:lnTo>
+                  <a:lnTo>
+                    <a:pt x="2870311" y="2715506"/>
+                  </a:lnTo>
+                  <a:lnTo>
+                    <a:pt x="2941934" y="2723528"/>
+                  </a:lnTo>
+                  <a:lnTo>
+                    <a:pt x="3013556" y="2731467"/>
+                  </a:lnTo>
+                  <a:lnTo>
+                    <a:pt x="3085179" y="2739323"/>
+                  </a:lnTo>
+                  <a:lnTo>
+                    <a:pt x="3156801" y="2747097"/>
+                  </a:lnTo>
+                  <a:lnTo>
+                    <a:pt x="3228424" y="2754789"/>
+                  </a:lnTo>
+                  <a:lnTo>
+                    <a:pt x="3300046" y="2762402"/>
+                  </a:lnTo>
+                  <a:lnTo>
+                    <a:pt x="3371669" y="2769934"/>
+                  </a:lnTo>
+                  <a:lnTo>
+                    <a:pt x="3443292" y="2777389"/>
+                  </a:lnTo>
+                  <a:lnTo>
+                    <a:pt x="3514914" y="2784765"/>
+                  </a:lnTo>
+                  <a:lnTo>
+                    <a:pt x="3586537" y="2792064"/>
+                  </a:lnTo>
+                  <a:lnTo>
+                    <a:pt x="3658159" y="2799287"/>
+                  </a:lnTo>
+                  <a:lnTo>
+                    <a:pt x="3729782" y="2806435"/>
+                  </a:lnTo>
+                  <a:lnTo>
+                    <a:pt x="3801404" y="2813508"/>
+                  </a:lnTo>
+                  <a:lnTo>
+                    <a:pt x="3873027" y="2820507"/>
+                  </a:lnTo>
+                  <a:lnTo>
+                    <a:pt x="3944649" y="2827433"/>
+                  </a:lnTo>
+                  <a:lnTo>
+                    <a:pt x="4016272" y="2834287"/>
+                  </a:lnTo>
+                  <a:lnTo>
+                    <a:pt x="4087894" y="2841069"/>
+                  </a:lnTo>
+                  <a:lnTo>
+                    <a:pt x="4159517" y="2847780"/>
+                  </a:lnTo>
+                  <a:lnTo>
+                    <a:pt x="4231139" y="2854421"/>
+                  </a:lnTo>
+                  <a:lnTo>
+                    <a:pt x="4302762" y="2860993"/>
+                  </a:lnTo>
+                  <a:lnTo>
+                    <a:pt x="4374384" y="2867497"/>
+                  </a:lnTo>
+                  <a:lnTo>
+                    <a:pt x="4446007" y="2873932"/>
+                  </a:lnTo>
+                  <a:lnTo>
+                    <a:pt x="4517629" y="2880300"/>
+                  </a:lnTo>
+                  <a:lnTo>
+                    <a:pt x="4589252" y="2886602"/>
+                  </a:lnTo>
+                  <a:lnTo>
+                    <a:pt x="4660874" y="2892838"/>
+                  </a:lnTo>
+                  <a:lnTo>
+                    <a:pt x="4732497" y="2899008"/>
+                  </a:lnTo>
+                  <a:lnTo>
+                    <a:pt x="4804119" y="2905115"/>
+                  </a:lnTo>
+                  <a:lnTo>
+                    <a:pt x="4875742" y="2911157"/>
+                  </a:lnTo>
+                  <a:lnTo>
+                    <a:pt x="4947365" y="2917137"/>
+                  </a:lnTo>
+                  <a:lnTo>
+                    <a:pt x="5018987" y="2923054"/>
+                  </a:lnTo>
+                  <a:lnTo>
+                    <a:pt x="5090610" y="2928909"/>
+                  </a:lnTo>
+                  <a:lnTo>
+                    <a:pt x="5162232" y="2934703"/>
+                  </a:lnTo>
+                  <a:lnTo>
+                    <a:pt x="5233855" y="2940436"/>
+                  </a:lnTo>
+                  <a:lnTo>
+                    <a:pt x="5305477" y="2946110"/>
+                  </a:lnTo>
+                  <a:lnTo>
+                    <a:pt x="5377100" y="2951724"/>
+                  </a:lnTo>
+                  <a:lnTo>
+                    <a:pt x="5448722" y="2957280"/>
+                  </a:lnTo>
+                  <a:lnTo>
+                    <a:pt x="5520345" y="2962778"/>
+                  </a:lnTo>
+                  <a:lnTo>
+                    <a:pt x="5591967" y="2968218"/>
+                  </a:lnTo>
+                  <a:lnTo>
+                    <a:pt x="5663590" y="2973602"/>
+                  </a:lnTo>
+                  <a:lnTo>
+                    <a:pt x="5735212" y="2978929"/>
+                  </a:lnTo>
+                  <a:lnTo>
+                    <a:pt x="5806835" y="2984201"/>
+                  </a:lnTo>
+                  <a:lnTo>
+                    <a:pt x="5878457" y="2989417"/>
+                  </a:lnTo>
+                  <a:lnTo>
+                    <a:pt x="5950080" y="2994580"/>
+                  </a:lnTo>
+                  <a:lnTo>
+                    <a:pt x="6021702" y="2999688"/>
+                  </a:lnTo>
+                </a:path>
+              </a:pathLst>
+            </a:custGeom>
+          </p:spPr>
+          <p:txBody>
+            <a:bodyPr/>
+            <a:lstStyle/>
+            <a:p/>
+          </p:txBody>
+        </p:sp>
+        <p:sp>
+          <p:nvSpPr>
             <p:cNvPr id="22" name="pl22"/>
             <p:cNvSpPr/>
             <p:nvPr/>
           </p:nvSpPr>
           <p:spPr>
             <a:xfrm>
-              <a:off x="1851933" y="2073503"/>
-              <a:ext cx="6201414" cy="2999688"/>
+              <a:off x="1172049" y="4188743"/>
+              <a:ext cx="7090630" cy="1280777"/>
             </a:xfrm>
             <a:custGeom>
               <a:avLst/>
               <a:pathLst>
-                <a:path w="6201414" h="2999688">
+                <a:path w="7090630" h="1280777">
                   <a:moveTo>
+                    <a:pt x="7090630" y="1280777"/>
+                  </a:moveTo>
+                  <a:lnTo>
+                    <a:pt x="7019007" y="1276850"/>
+                  </a:lnTo>
+                  <a:lnTo>
+                    <a:pt x="6947385" y="1272748"/>
+                  </a:lnTo>
+                  <a:lnTo>
+                    <a:pt x="6875762" y="1268462"/>
+                  </a:lnTo>
+                  <a:lnTo>
+                    <a:pt x="6804139" y="1263983"/>
+                  </a:lnTo>
+                  <a:lnTo>
+                    <a:pt x="6732517" y="1259305"/>
+                  </a:lnTo>
+                  <a:lnTo>
+                    <a:pt x="6660894" y="1254417"/>
+                  </a:lnTo>
+                  <a:lnTo>
+                    <a:pt x="6589272" y="1249310"/>
+                  </a:lnTo>
+                  <a:lnTo>
+                    <a:pt x="6517649" y="1243975"/>
+                  </a:lnTo>
+                  <a:lnTo>
+                    <a:pt x="6446027" y="1238401"/>
+                  </a:lnTo>
+                  <a:lnTo>
+                    <a:pt x="6374404" y="1232577"/>
+                  </a:lnTo>
+                  <a:lnTo>
+                    <a:pt x="6302782" y="1226493"/>
+                  </a:lnTo>
+                  <a:lnTo>
+                    <a:pt x="6231159" y="1220136"/>
+                  </a:lnTo>
+                  <a:lnTo>
+                    <a:pt x="6159537" y="1213495"/>
+                  </a:lnTo>
+                  <a:lnTo>
+                    <a:pt x="6087914" y="1206556"/>
+                  </a:lnTo>
+                  <a:lnTo>
+                    <a:pt x="6016292" y="1199307"/>
+                  </a:lnTo>
+                  <a:lnTo>
+                    <a:pt x="5944669" y="1191733"/>
+                  </a:lnTo>
+                  <a:lnTo>
+                    <a:pt x="5873047" y="1183821"/>
+                  </a:lnTo>
+                  <a:lnTo>
+                    <a:pt x="5801424" y="1175554"/>
+                  </a:lnTo>
+                  <a:lnTo>
+                    <a:pt x="5729802" y="1166917"/>
+                  </a:lnTo>
+                  <a:lnTo>
+                    <a:pt x="5658179" y="1157894"/>
+                  </a:lnTo>
+                  <a:lnTo>
+                    <a:pt x="5586557" y="1148466"/>
+                  </a:lnTo>
+                  <a:lnTo>
+                    <a:pt x="5514934" y="1138617"/>
+                  </a:lnTo>
+                  <a:lnTo>
+                    <a:pt x="5443311" y="1128327"/>
+                  </a:lnTo>
+                  <a:lnTo>
+                    <a:pt x="5371689" y="1117576"/>
+                  </a:lnTo>
+                  <a:lnTo>
+                    <a:pt x="5300066" y="1106344"/>
+                  </a:lnTo>
+                  <a:lnTo>
+                    <a:pt x="5228444" y="1094610"/>
+                  </a:lnTo>
+                  <a:lnTo>
+                    <a:pt x="5156821" y="1082350"/>
+                  </a:lnTo>
+                  <a:lnTo>
+                    <a:pt x="5085199" y="1069541"/>
+                  </a:lnTo>
+                  <a:lnTo>
+                    <a:pt x="5013576" y="1056159"/>
+                  </a:lnTo>
+                  <a:lnTo>
+                    <a:pt x="4941954" y="1042178"/>
+                  </a:lnTo>
+                  <a:lnTo>
+                    <a:pt x="4870331" y="1027571"/>
+                  </a:lnTo>
+                  <a:lnTo>
+                    <a:pt x="4798709" y="1012310"/>
+                  </a:lnTo>
+                  <a:lnTo>
+                    <a:pt x="4727086" y="996366"/>
+                  </a:lnTo>
+                  <a:lnTo>
+                    <a:pt x="4655464" y="979709"/>
+                  </a:lnTo>
+                  <a:lnTo>
+                    <a:pt x="4583841" y="962305"/>
+                  </a:lnTo>
+                  <a:lnTo>
+                    <a:pt x="4512219" y="944123"/>
+                  </a:lnTo>
+                  <a:lnTo>
+                    <a:pt x="4440596" y="925127"/>
+                  </a:lnTo>
+                  <a:lnTo>
+                    <a:pt x="4368974" y="905281"/>
+                  </a:lnTo>
+                  <a:lnTo>
+                    <a:pt x="4297351" y="884546"/>
+                  </a:lnTo>
+                  <a:lnTo>
+                    <a:pt x="4225729" y="862884"/>
+                  </a:lnTo>
+                  <a:lnTo>
+                    <a:pt x="4154106" y="840251"/>
+                  </a:lnTo>
+                  <a:lnTo>
+                    <a:pt x="4082483" y="816606"/>
+                  </a:lnTo>
+                  <a:lnTo>
+                    <a:pt x="4010861" y="791902"/>
+                  </a:lnTo>
+                  <a:lnTo>
+                    <a:pt x="3939238" y="766092"/>
+                  </a:lnTo>
+                  <a:lnTo>
+                    <a:pt x="3867616" y="739128"/>
+                  </a:lnTo>
+                  <a:lnTo>
+                    <a:pt x="3795993" y="710956"/>
+                  </a:lnTo>
+                  <a:lnTo>
+                    <a:pt x="3724371" y="681523"/>
+                  </a:lnTo>
+                  <a:lnTo>
+                    <a:pt x="3652748" y="650772"/>
+                  </a:lnTo>
+                  <a:lnTo>
+                    <a:pt x="3581126" y="618646"/>
+                  </a:lnTo>
+                  <a:lnTo>
+                    <a:pt x="3509503" y="585081"/>
+                  </a:lnTo>
+                  <a:lnTo>
+                    <a:pt x="3437881" y="550013"/>
+                  </a:lnTo>
+                  <a:lnTo>
+                    <a:pt x="3366258" y="532960"/>
+                  </a:lnTo>
+                  <a:lnTo>
+                    <a:pt x="3294636" y="524143"/>
+                  </a:lnTo>
+                  <a:lnTo>
+                    <a:pt x="3223013" y="515232"/>
+                  </a:lnTo>
+                  <a:lnTo>
+                    <a:pt x="3151391" y="506228"/>
+                  </a:lnTo>
+                  <a:lnTo>
+                    <a:pt x="3079768" y="497128"/>
+                  </a:lnTo>
+                  <a:lnTo>
+                    <a:pt x="3008146" y="487933"/>
+                  </a:lnTo>
+                  <a:lnTo>
+                    <a:pt x="2936523" y="478640"/>
+                  </a:lnTo>
+                  <a:lnTo>
+                    <a:pt x="2864901" y="469249"/>
+                  </a:lnTo>
+                  <a:lnTo>
+                    <a:pt x="2793278" y="459759"/>
+                  </a:lnTo>
+                  <a:lnTo>
+                    <a:pt x="2721655" y="450169"/>
+                  </a:lnTo>
+                  <a:lnTo>
+                    <a:pt x="2650033" y="440478"/>
+                  </a:lnTo>
+                  <a:lnTo>
+                    <a:pt x="2578410" y="430685"/>
+                  </a:lnTo>
+                  <a:lnTo>
+                    <a:pt x="2506788" y="420788"/>
+                  </a:lnTo>
+                  <a:lnTo>
+                    <a:pt x="2435165" y="410787"/>
+                  </a:lnTo>
+                  <a:lnTo>
+                    <a:pt x="2363543" y="400680"/>
+                  </a:lnTo>
+                  <a:lnTo>
+                    <a:pt x="2291920" y="390467"/>
+                  </a:lnTo>
+                  <a:lnTo>
+                    <a:pt x="2220298" y="380145"/>
+                  </a:lnTo>
+                  <a:lnTo>
+                    <a:pt x="2148675" y="369715"/>
+                  </a:lnTo>
+                  <a:lnTo>
+                    <a:pt x="2077053" y="359175"/>
+                  </a:lnTo>
+                  <a:lnTo>
+                    <a:pt x="2005430" y="348524"/>
+                  </a:lnTo>
+                  <a:lnTo>
+                    <a:pt x="1933808" y="337760"/>
+                  </a:lnTo>
+                  <a:lnTo>
+                    <a:pt x="1862185" y="326882"/>
+                  </a:lnTo>
+                  <a:lnTo>
+                    <a:pt x="1790563" y="315890"/>
+                  </a:lnTo>
+                  <a:lnTo>
+                    <a:pt x="1718940" y="304782"/>
+                  </a:lnTo>
+                  <a:lnTo>
+                    <a:pt x="1647318" y="293556"/>
+                  </a:lnTo>
+                  <a:lnTo>
+                    <a:pt x="1575695" y="282213"/>
+                  </a:lnTo>
+                  <a:lnTo>
+                    <a:pt x="1504073" y="270749"/>
+                  </a:lnTo>
+                  <a:lnTo>
+                    <a:pt x="1432450" y="259164"/>
+                  </a:lnTo>
+                  <a:lnTo>
+                    <a:pt x="1360827" y="247458"/>
+                  </a:lnTo>
+                  <a:lnTo>
+                    <a:pt x="1289205" y="235627"/>
+                  </a:lnTo>
+                  <a:lnTo>
+                    <a:pt x="1217582" y="223672"/>
+                  </a:lnTo>
+                  <a:lnTo>
+                    <a:pt x="1145960" y="211591"/>
+                  </a:lnTo>
+                  <a:lnTo>
+                    <a:pt x="1074337" y="199382"/>
+                  </a:lnTo>
+                  <a:lnTo>
+                    <a:pt x="1002715" y="187044"/>
+                  </a:lnTo>
+                  <a:lnTo>
+                    <a:pt x="931092" y="174576"/>
+                  </a:lnTo>
+                  <a:lnTo>
+                    <a:pt x="859470" y="161977"/>
+                  </a:lnTo>
+                  <a:lnTo>
+                    <a:pt x="787847" y="149244"/>
+                  </a:lnTo>
+                  <a:lnTo>
+                    <a:pt x="716225" y="136377"/>
+                  </a:lnTo>
+                  <a:lnTo>
+                    <a:pt x="644602" y="123375"/>
+                  </a:lnTo>
+                  <a:lnTo>
+                    <a:pt x="572980" y="110235"/>
+                  </a:lnTo>
+                  <a:lnTo>
+                    <a:pt x="501357" y="96956"/>
+                  </a:lnTo>
+                  <a:lnTo>
+                    <a:pt x="429735" y="83538"/>
+                  </a:lnTo>
+                  <a:lnTo>
+                    <a:pt x="358112" y="69978"/>
+                  </a:lnTo>
+                  <a:lnTo>
+                    <a:pt x="286490" y="56274"/>
+                  </a:lnTo>
+                  <a:lnTo>
+                    <a:pt x="214867" y="42426"/>
+                  </a:lnTo>
+                  <a:lnTo>
+                    <a:pt x="143245" y="28432"/>
+                  </a:lnTo>
+                  <a:lnTo>
+                    <a:pt x="71622" y="14290"/>
+                  </a:lnTo>
+                  <a:lnTo>
                     <a:pt x="0" y="0"/>
-                  </a:moveTo>
-                  <a:lnTo>
-                    <a:pt x="5572" y="11740"/>
-                  </a:lnTo>
-                  <a:lnTo>
-                    <a:pt x="79332" y="160494"/>
-                  </a:lnTo>
-                  <a:lnTo>
-                    <a:pt x="153092" y="302874"/>
-                  </a:lnTo>
-                  <a:lnTo>
-                    <a:pt x="226852" y="439155"/>
-                  </a:lnTo>
-                  <a:lnTo>
-                    <a:pt x="300612" y="569596"/>
-                  </a:lnTo>
-                  <a:lnTo>
-                    <a:pt x="374372" y="694449"/>
-                  </a:lnTo>
-                  <a:lnTo>
-                    <a:pt x="448132" y="813953"/>
-                  </a:lnTo>
-                  <a:lnTo>
-                    <a:pt x="521892" y="928337"/>
-                  </a:lnTo>
-                  <a:lnTo>
-                    <a:pt x="595652" y="1037820"/>
-                  </a:lnTo>
-                  <a:lnTo>
-                    <a:pt x="669412" y="1142613"/>
-                  </a:lnTo>
-                  <a:lnTo>
-                    <a:pt x="743172" y="1242916"/>
-                  </a:lnTo>
-                  <a:lnTo>
-                    <a:pt x="816932" y="1338921"/>
-                  </a:lnTo>
-                  <a:lnTo>
-                    <a:pt x="890692" y="1430814"/>
-                  </a:lnTo>
-                  <a:lnTo>
-                    <a:pt x="964452" y="1518769"/>
-                  </a:lnTo>
-                  <a:lnTo>
-                    <a:pt x="1038212" y="1602956"/>
-                  </a:lnTo>
-                  <a:lnTo>
-                    <a:pt x="1111972" y="1683536"/>
-                  </a:lnTo>
-                  <a:lnTo>
-                    <a:pt x="1185732" y="1760664"/>
-                  </a:lnTo>
-                  <a:lnTo>
-                    <a:pt x="1259492" y="1834487"/>
-                  </a:lnTo>
-                  <a:lnTo>
-                    <a:pt x="1333252" y="1905147"/>
-                  </a:lnTo>
-                  <a:lnTo>
-                    <a:pt x="1407012" y="1972781"/>
-                  </a:lnTo>
-                  <a:lnTo>
-                    <a:pt x="1480772" y="2037516"/>
-                  </a:lnTo>
-                  <a:lnTo>
-                    <a:pt x="1554532" y="2099478"/>
-                  </a:lnTo>
-                  <a:lnTo>
-                    <a:pt x="1628292" y="2158785"/>
-                  </a:lnTo>
-                  <a:lnTo>
-                    <a:pt x="1702052" y="2215551"/>
-                  </a:lnTo>
-                  <a:lnTo>
-                    <a:pt x="1775812" y="2269886"/>
-                  </a:lnTo>
-                  <a:lnTo>
-                    <a:pt x="1849572" y="2321892"/>
-                  </a:lnTo>
-                  <a:lnTo>
-                    <a:pt x="1923332" y="2371670"/>
-                  </a:lnTo>
-                  <a:lnTo>
-                    <a:pt x="1997092" y="2419316"/>
-                  </a:lnTo>
-                  <a:lnTo>
-                    <a:pt x="2070852" y="2464920"/>
-                  </a:lnTo>
-                  <a:lnTo>
-                    <a:pt x="2144612" y="2508570"/>
-                  </a:lnTo>
-                  <a:lnTo>
-                    <a:pt x="2218372" y="2550350"/>
-                  </a:lnTo>
-                  <a:lnTo>
-                    <a:pt x="2292133" y="2590340"/>
-                  </a:lnTo>
-                  <a:lnTo>
-                    <a:pt x="2365893" y="2628617"/>
-                  </a:lnTo>
-                  <a:lnTo>
-                    <a:pt x="2439653" y="2656926"/>
-                  </a:lnTo>
-                  <a:lnTo>
-                    <a:pt x="2513413" y="2665561"/>
-                  </a:lnTo>
-                  <a:lnTo>
-                    <a:pt x="2587173" y="2674105"/>
-                  </a:lnTo>
-                  <a:lnTo>
-                    <a:pt x="2660933" y="2682560"/>
-                  </a:lnTo>
-                  <a:lnTo>
-                    <a:pt x="2734693" y="2690926"/>
-                  </a:lnTo>
-                  <a:lnTo>
-                    <a:pt x="2808453" y="2699206"/>
-                  </a:lnTo>
-                  <a:lnTo>
-                    <a:pt x="2882213" y="2707398"/>
-                  </a:lnTo>
-                  <a:lnTo>
-                    <a:pt x="2955973" y="2715506"/>
-                  </a:lnTo>
-                  <a:lnTo>
-                    <a:pt x="3029733" y="2723528"/>
-                  </a:lnTo>
-                  <a:lnTo>
-                    <a:pt x="3103493" y="2731467"/>
-                  </a:lnTo>
-                  <a:lnTo>
-                    <a:pt x="3177253" y="2739323"/>
-                  </a:lnTo>
-                  <a:lnTo>
-                    <a:pt x="3251013" y="2747097"/>
-                  </a:lnTo>
-                  <a:lnTo>
-                    <a:pt x="3324773" y="2754789"/>
-                  </a:lnTo>
-                  <a:lnTo>
-                    <a:pt x="3398533" y="2762402"/>
-                  </a:lnTo>
-                  <a:lnTo>
-                    <a:pt x="3472293" y="2769934"/>
-                  </a:lnTo>
-                  <a:lnTo>
-                    <a:pt x="3546053" y="2777389"/>
-                  </a:lnTo>
-                  <a:lnTo>
-                    <a:pt x="3619813" y="2784765"/>
-                  </a:lnTo>
-                  <a:lnTo>
-                    <a:pt x="3693573" y="2792064"/>
-                  </a:lnTo>
-                  <a:lnTo>
-                    <a:pt x="3767333" y="2799287"/>
-                  </a:lnTo>
-                  <a:lnTo>
-                    <a:pt x="3841093" y="2806435"/>
-                  </a:lnTo>
-                  <a:lnTo>
-                    <a:pt x="3914853" y="2813508"/>
-                  </a:lnTo>
-                  <a:lnTo>
-                    <a:pt x="3988613" y="2820507"/>
-                  </a:lnTo>
-                  <a:lnTo>
-                    <a:pt x="4062373" y="2827433"/>
-                  </a:lnTo>
-                  <a:lnTo>
-                    <a:pt x="4136133" y="2834287"/>
-                  </a:lnTo>
-                  <a:lnTo>
-                    <a:pt x="4209893" y="2841069"/>
-                  </a:lnTo>
-                  <a:lnTo>
-                    <a:pt x="4283653" y="2847780"/>
-                  </a:lnTo>
-                  <a:lnTo>
-                    <a:pt x="4357413" y="2854421"/>
-                  </a:lnTo>
-                  <a:lnTo>
-                    <a:pt x="4431173" y="2860993"/>
-                  </a:lnTo>
-                  <a:lnTo>
-                    <a:pt x="4504933" y="2867497"/>
-                  </a:lnTo>
-                  <a:lnTo>
-                    <a:pt x="4578693" y="2873932"/>
-                  </a:lnTo>
-                  <a:lnTo>
-                    <a:pt x="4652453" y="2880300"/>
-                  </a:lnTo>
-                  <a:lnTo>
-                    <a:pt x="4726213" y="2886602"/>
-                  </a:lnTo>
-                  <a:lnTo>
-                    <a:pt x="4799973" y="2892838"/>
-                  </a:lnTo>
-                  <a:lnTo>
-                    <a:pt x="4873733" y="2899008"/>
-                  </a:lnTo>
-                  <a:lnTo>
-                    <a:pt x="4947493" y="2905115"/>
-                  </a:lnTo>
-                  <a:lnTo>
-                    <a:pt x="5021253" y="2911157"/>
-                  </a:lnTo>
-                  <a:lnTo>
-                    <a:pt x="5095013" y="2917137"/>
-                  </a:lnTo>
-                  <a:lnTo>
-                    <a:pt x="5168773" y="2923054"/>
-                  </a:lnTo>
-                  <a:lnTo>
-                    <a:pt x="5242534" y="2928909"/>
-                  </a:lnTo>
-                  <a:lnTo>
-                    <a:pt x="5316294" y="2934703"/>
-                  </a:lnTo>
-                  <a:lnTo>
-                    <a:pt x="5390054" y="2940436"/>
-                  </a:lnTo>
-                  <a:lnTo>
-                    <a:pt x="5463814" y="2946110"/>
-                  </a:lnTo>
-                  <a:lnTo>
-                    <a:pt x="5537574" y="2951724"/>
-                  </a:lnTo>
-                  <a:lnTo>
-                    <a:pt x="5611334" y="2957280"/>
-                  </a:lnTo>
-                  <a:lnTo>
-                    <a:pt x="5685094" y="2962778"/>
-                  </a:lnTo>
-                  <a:lnTo>
-                    <a:pt x="5758854" y="2968218"/>
-                  </a:lnTo>
-                  <a:lnTo>
-                    <a:pt x="5832614" y="2973602"/>
-                  </a:lnTo>
-                  <a:lnTo>
-                    <a:pt x="5906374" y="2978929"/>
-                  </a:lnTo>
-                  <a:lnTo>
-                    <a:pt x="5980134" y="2984201"/>
-                  </a:lnTo>
-                  <a:lnTo>
-                    <a:pt x="6053894" y="2989417"/>
-                  </a:lnTo>
-                  <a:lnTo>
-                    <a:pt x="6127654" y="2994580"/>
-                  </a:lnTo>
-                  <a:lnTo>
-                    <a:pt x="6201414" y="2999688"/>
                   </a:lnTo>
                 </a:path>
               </a:pathLst>
@@ -3874,637 +4156,312 @@
           </p:nvSpPr>
           <p:spPr>
             <a:xfrm>
-              <a:off x="817517" y="4201611"/>
-              <a:ext cx="7235830" cy="1267910"/>
+              <a:off x="1172049" y="2530042"/>
+              <a:ext cx="7090630" cy="2821135"/>
             </a:xfrm>
             <a:custGeom>
               <a:avLst/>
               <a:pathLst>
-                <a:path w="7235830" h="1267910">
-                  <a:moveTo>
-                    <a:pt x="7235830" y="1267910"/>
-                  </a:moveTo>
-                  <a:lnTo>
-                    <a:pt x="7162070" y="1263983"/>
-                  </a:lnTo>
-                  <a:lnTo>
-                    <a:pt x="7088310" y="1259880"/>
-                  </a:lnTo>
-                  <a:lnTo>
-                    <a:pt x="7014550" y="1255594"/>
-                  </a:lnTo>
-                  <a:lnTo>
-                    <a:pt x="6940789" y="1251116"/>
-                  </a:lnTo>
-                  <a:lnTo>
-                    <a:pt x="6867029" y="1246438"/>
-                  </a:lnTo>
-                  <a:lnTo>
-                    <a:pt x="6793269" y="1241550"/>
-                  </a:lnTo>
-                  <a:lnTo>
-                    <a:pt x="6719509" y="1236443"/>
-                  </a:lnTo>
-                  <a:lnTo>
-                    <a:pt x="6645749" y="1231107"/>
-                  </a:lnTo>
-                  <a:lnTo>
-                    <a:pt x="6571989" y="1225533"/>
-                  </a:lnTo>
-                  <a:lnTo>
-                    <a:pt x="6498229" y="1219710"/>
-                  </a:lnTo>
-                  <a:lnTo>
-                    <a:pt x="6424469" y="1213625"/>
-                  </a:lnTo>
-                  <a:lnTo>
-                    <a:pt x="6350709" y="1207268"/>
-                  </a:lnTo>
-                  <a:lnTo>
-                    <a:pt x="6276949" y="1200627"/>
-                  </a:lnTo>
-                  <a:lnTo>
-                    <a:pt x="6203189" y="1193689"/>
-                  </a:lnTo>
-                  <a:lnTo>
-                    <a:pt x="6129429" y="1186440"/>
-                  </a:lnTo>
-                  <a:lnTo>
-                    <a:pt x="6055669" y="1178866"/>
-                  </a:lnTo>
-                  <a:lnTo>
-                    <a:pt x="5981909" y="1170953"/>
-                  </a:lnTo>
-                  <a:lnTo>
-                    <a:pt x="5908149" y="1162687"/>
-                  </a:lnTo>
-                  <a:lnTo>
-                    <a:pt x="5834389" y="1154050"/>
-                  </a:lnTo>
-                  <a:lnTo>
-                    <a:pt x="5760629" y="1145026"/>
-                  </a:lnTo>
-                  <a:lnTo>
-                    <a:pt x="5686869" y="1135599"/>
-                  </a:lnTo>
-                  <a:lnTo>
-                    <a:pt x="5613109" y="1125750"/>
-                  </a:lnTo>
-                  <a:lnTo>
-                    <a:pt x="5539349" y="1115460"/>
-                  </a:lnTo>
-                  <a:lnTo>
-                    <a:pt x="5465589" y="1104709"/>
-                  </a:lnTo>
-                  <a:lnTo>
-                    <a:pt x="5391829" y="1093477"/>
-                  </a:lnTo>
-                  <a:lnTo>
-                    <a:pt x="5318069" y="1081742"/>
-                  </a:lnTo>
-                  <a:lnTo>
-                    <a:pt x="5244309" y="1069482"/>
-                  </a:lnTo>
-                  <a:lnTo>
-                    <a:pt x="5170549" y="1056673"/>
-                  </a:lnTo>
-                  <a:lnTo>
-                    <a:pt x="5096789" y="1043291"/>
-                  </a:lnTo>
-                  <a:lnTo>
-                    <a:pt x="5023029" y="1029310"/>
-                  </a:lnTo>
-                  <a:lnTo>
-                    <a:pt x="4949269" y="1014703"/>
-                  </a:lnTo>
-                  <a:lnTo>
-                    <a:pt x="4875509" y="999443"/>
-                  </a:lnTo>
-                  <a:lnTo>
-                    <a:pt x="4801749" y="983499"/>
-                  </a:lnTo>
-                  <a:lnTo>
-                    <a:pt x="4727989" y="966841"/>
-                  </a:lnTo>
-                  <a:lnTo>
-                    <a:pt x="4654229" y="949438"/>
-                  </a:lnTo>
-                  <a:lnTo>
-                    <a:pt x="4580469" y="931256"/>
-                  </a:lnTo>
-                  <a:lnTo>
-                    <a:pt x="4506709" y="912260"/>
-                  </a:lnTo>
-                  <a:lnTo>
-                    <a:pt x="4432949" y="892414"/>
-                  </a:lnTo>
-                  <a:lnTo>
-                    <a:pt x="4359189" y="871679"/>
-                  </a:lnTo>
-                  <a:lnTo>
-                    <a:pt x="4285429" y="850016"/>
-                  </a:lnTo>
-                  <a:lnTo>
-                    <a:pt x="4211669" y="827384"/>
-                  </a:lnTo>
-                  <a:lnTo>
-                    <a:pt x="4137909" y="803739"/>
-                  </a:lnTo>
-                  <a:lnTo>
-                    <a:pt x="4064149" y="779035"/>
-                  </a:lnTo>
-                  <a:lnTo>
-                    <a:pt x="3990388" y="753225"/>
-                  </a:lnTo>
-                  <a:lnTo>
-                    <a:pt x="3916628" y="726260"/>
-                  </a:lnTo>
-                  <a:lnTo>
-                    <a:pt x="3842868" y="698088"/>
-                  </a:lnTo>
-                  <a:lnTo>
-                    <a:pt x="3769108" y="668655"/>
-                  </a:lnTo>
-                  <a:lnTo>
-                    <a:pt x="3695348" y="637905"/>
-                  </a:lnTo>
-                  <a:lnTo>
-                    <a:pt x="3621588" y="605778"/>
-                  </a:lnTo>
-                  <a:lnTo>
-                    <a:pt x="3547828" y="572213"/>
-                  </a:lnTo>
-                  <a:lnTo>
-                    <a:pt x="3474068" y="537146"/>
-                  </a:lnTo>
-                  <a:lnTo>
-                    <a:pt x="3400308" y="520093"/>
-                  </a:lnTo>
-                  <a:lnTo>
-                    <a:pt x="3326548" y="511275"/>
-                  </a:lnTo>
-                  <a:lnTo>
-                    <a:pt x="3252788" y="502365"/>
-                  </a:lnTo>
-                  <a:lnTo>
-                    <a:pt x="3179028" y="493360"/>
-                  </a:lnTo>
-                  <a:lnTo>
-                    <a:pt x="3105268" y="484261"/>
-                  </a:lnTo>
-                  <a:lnTo>
-                    <a:pt x="3031508" y="475065"/>
-                  </a:lnTo>
-                  <a:lnTo>
-                    <a:pt x="2957748" y="465772"/>
-                  </a:lnTo>
-                  <a:lnTo>
-                    <a:pt x="2883988" y="456382"/>
-                  </a:lnTo>
-                  <a:lnTo>
-                    <a:pt x="2810228" y="446892"/>
-                  </a:lnTo>
-                  <a:lnTo>
-                    <a:pt x="2736468" y="437302"/>
-                  </a:lnTo>
-                  <a:lnTo>
-                    <a:pt x="2662708" y="427611"/>
-                  </a:lnTo>
-                  <a:lnTo>
-                    <a:pt x="2588948" y="417817"/>
-                  </a:lnTo>
-                  <a:lnTo>
-                    <a:pt x="2515188" y="407921"/>
-                  </a:lnTo>
-                  <a:lnTo>
-                    <a:pt x="2441428" y="397919"/>
-                  </a:lnTo>
-                  <a:lnTo>
-                    <a:pt x="2367668" y="387813"/>
-                  </a:lnTo>
-                  <a:lnTo>
-                    <a:pt x="2293908" y="377599"/>
-                  </a:lnTo>
-                  <a:lnTo>
-                    <a:pt x="2220148" y="367278"/>
-                  </a:lnTo>
-                  <a:lnTo>
-                    <a:pt x="2146388" y="356848"/>
-                  </a:lnTo>
-                  <a:lnTo>
-                    <a:pt x="2072628" y="346308"/>
-                  </a:lnTo>
-                  <a:lnTo>
-                    <a:pt x="1998868" y="335656"/>
-                  </a:lnTo>
-                  <a:lnTo>
-                    <a:pt x="1925108" y="324892"/>
-                  </a:lnTo>
-                  <a:lnTo>
-                    <a:pt x="1851348" y="314015"/>
-                  </a:lnTo>
-                  <a:lnTo>
-                    <a:pt x="1777588" y="303023"/>
-                  </a:lnTo>
-                  <a:lnTo>
-                    <a:pt x="1703828" y="291915"/>
-                  </a:lnTo>
-                  <a:lnTo>
-                    <a:pt x="1630068" y="280689"/>
-                  </a:lnTo>
-                  <a:lnTo>
-                    <a:pt x="1556308" y="269345"/>
-                  </a:lnTo>
-                  <a:lnTo>
-                    <a:pt x="1482548" y="257882"/>
-                  </a:lnTo>
-                  <a:lnTo>
-                    <a:pt x="1408788" y="246297"/>
-                  </a:lnTo>
-                  <a:lnTo>
-                    <a:pt x="1335028" y="234590"/>
-                  </a:lnTo>
-                  <a:lnTo>
-                    <a:pt x="1261268" y="222760"/>
-                  </a:lnTo>
-                  <a:lnTo>
-                    <a:pt x="1187508" y="210805"/>
-                  </a:lnTo>
-                  <a:lnTo>
-                    <a:pt x="1113747" y="198723"/>
-                  </a:lnTo>
-                  <a:lnTo>
-                    <a:pt x="1039987" y="186514"/>
-                  </a:lnTo>
-                  <a:lnTo>
-                    <a:pt x="966227" y="174177"/>
-                  </a:lnTo>
-                  <a:lnTo>
-                    <a:pt x="892467" y="161709"/>
-                  </a:lnTo>
-                  <a:lnTo>
-                    <a:pt x="818707" y="149109"/>
-                  </a:lnTo>
-                  <a:lnTo>
-                    <a:pt x="744947" y="136377"/>
-                  </a:lnTo>
-                  <a:lnTo>
-                    <a:pt x="671187" y="123510"/>
-                  </a:lnTo>
-                  <a:lnTo>
-                    <a:pt x="597427" y="110507"/>
-                  </a:lnTo>
-                  <a:lnTo>
-                    <a:pt x="523667" y="97367"/>
-                  </a:lnTo>
-                  <a:lnTo>
-                    <a:pt x="449907" y="84089"/>
-                  </a:lnTo>
-                  <a:lnTo>
-                    <a:pt x="376147" y="70670"/>
-                  </a:lnTo>
-                  <a:lnTo>
-                    <a:pt x="302387" y="57110"/>
-                  </a:lnTo>
-                  <a:lnTo>
-                    <a:pt x="228627" y="43407"/>
-                  </a:lnTo>
-                  <a:lnTo>
-                    <a:pt x="154867" y="29559"/>
-                  </a:lnTo>
-                  <a:lnTo>
-                    <a:pt x="81107" y="15565"/>
-                  </a:lnTo>
-                  <a:lnTo>
-                    <a:pt x="7347" y="1423"/>
-                  </a:lnTo>
-                  <a:lnTo>
-                    <a:pt x="0" y="0"/>
-                  </a:lnTo>
-                </a:path>
-              </a:pathLst>
-            </a:custGeom>
-          </p:spPr>
-          <p:txBody>
-            <a:bodyPr/>
-            <a:lstStyle/>
-            <a:p/>
-          </p:txBody>
-        </p:sp>
-        <p:sp>
-          <p:nvSpPr>
-            <p:cNvPr id="24" name="pl24"/>
-            <p:cNvSpPr/>
-            <p:nvPr/>
-          </p:nvSpPr>
-          <p:spPr>
-            <a:xfrm>
-              <a:off x="817517" y="2603029"/>
-              <a:ext cx="7235830" cy="2748148"/>
-            </a:xfrm>
-            <a:custGeom>
-              <a:avLst/>
-              <a:pathLst>
-                <a:path w="7235830" h="2748148">
+                <a:path w="7090630" h="2821135">
                   <a:moveTo>
                     <a:pt x="0" y="0"/>
                   </a:moveTo>
                   <a:lnTo>
-                    <a:pt x="7347" y="8075"/>
-                  </a:lnTo>
-                  <a:lnTo>
-                    <a:pt x="81107" y="86967"/>
-                  </a:lnTo>
-                  <a:lnTo>
-                    <a:pt x="154867" y="163746"/>
-                  </a:lnTo>
-                  <a:lnTo>
-                    <a:pt x="228627" y="238470"/>
-                  </a:lnTo>
-                  <a:lnTo>
-                    <a:pt x="302387" y="311192"/>
-                  </a:lnTo>
-                  <a:lnTo>
-                    <a:pt x="376147" y="381967"/>
-                  </a:lnTo>
-                  <a:lnTo>
-                    <a:pt x="449907" y="450847"/>
-                  </a:lnTo>
-                  <a:lnTo>
-                    <a:pt x="523667" y="517883"/>
-                  </a:lnTo>
-                  <a:lnTo>
-                    <a:pt x="597427" y="583123"/>
-                  </a:lnTo>
-                  <a:lnTo>
-                    <a:pt x="671187" y="646617"/>
-                  </a:lnTo>
-                  <a:lnTo>
-                    <a:pt x="744947" y="708410"/>
-                  </a:lnTo>
-                  <a:lnTo>
-                    <a:pt x="818707" y="768548"/>
-                  </a:lnTo>
-                  <a:lnTo>
-                    <a:pt x="892467" y="827076"/>
-                  </a:lnTo>
-                  <a:lnTo>
-                    <a:pt x="966227" y="884037"/>
-                  </a:lnTo>
-                  <a:lnTo>
-                    <a:pt x="1039987" y="939473"/>
-                  </a:lnTo>
-                  <a:lnTo>
-                    <a:pt x="1113747" y="993424"/>
-                  </a:lnTo>
-                  <a:lnTo>
-                    <a:pt x="1187508" y="1045930"/>
-                  </a:lnTo>
-                  <a:lnTo>
-                    <a:pt x="1261268" y="1097030"/>
-                  </a:lnTo>
-                  <a:lnTo>
-                    <a:pt x="1335028" y="1146762"/>
-                  </a:lnTo>
-                  <a:lnTo>
-                    <a:pt x="1408788" y="1195162"/>
-                  </a:lnTo>
-                  <a:lnTo>
-                    <a:pt x="1482548" y="1242267"/>
-                  </a:lnTo>
-                  <a:lnTo>
-                    <a:pt x="1556308" y="1288109"/>
-                  </a:lnTo>
-                  <a:lnTo>
-                    <a:pt x="1630068" y="1332725"/>
-                  </a:lnTo>
-                  <a:lnTo>
-                    <a:pt x="1703828" y="1376145"/>
-                  </a:lnTo>
-                  <a:lnTo>
-                    <a:pt x="1777588" y="1418403"/>
-                  </a:lnTo>
-                  <a:lnTo>
-                    <a:pt x="1851348" y="1459529"/>
-                  </a:lnTo>
-                  <a:lnTo>
-                    <a:pt x="1925108" y="1499554"/>
-                  </a:lnTo>
-                  <a:lnTo>
-                    <a:pt x="1998868" y="1538507"/>
-                  </a:lnTo>
-                  <a:lnTo>
-                    <a:pt x="2072628" y="1576417"/>
-                  </a:lnTo>
-                  <a:lnTo>
-                    <a:pt x="2146388" y="1613312"/>
-                  </a:lnTo>
-                  <a:lnTo>
-                    <a:pt x="2220148" y="1649219"/>
-                  </a:lnTo>
-                  <a:lnTo>
-                    <a:pt x="2293908" y="1684165"/>
-                  </a:lnTo>
-                  <a:lnTo>
-                    <a:pt x="2367668" y="1718174"/>
-                  </a:lnTo>
-                  <a:lnTo>
-                    <a:pt x="2441428" y="1751273"/>
-                  </a:lnTo>
-                  <a:lnTo>
-                    <a:pt x="2515188" y="1783486"/>
-                  </a:lnTo>
-                  <a:lnTo>
-                    <a:pt x="2588948" y="1814836"/>
-                  </a:lnTo>
-                  <a:lnTo>
-                    <a:pt x="2662708" y="1845346"/>
-                  </a:lnTo>
-                  <a:lnTo>
-                    <a:pt x="2736468" y="1875040"/>
-                  </a:lnTo>
-                  <a:lnTo>
-                    <a:pt x="2810228" y="1903938"/>
-                  </a:lnTo>
-                  <a:lnTo>
-                    <a:pt x="2883988" y="1932063"/>
-                  </a:lnTo>
-                  <a:lnTo>
-                    <a:pt x="2957748" y="1959434"/>
-                  </a:lnTo>
-                  <a:lnTo>
-                    <a:pt x="3031508" y="1986072"/>
-                  </a:lnTo>
-                  <a:lnTo>
-                    <a:pt x="3105268" y="2011997"/>
-                  </a:lnTo>
-                  <a:lnTo>
-                    <a:pt x="3179028" y="2037228"/>
-                  </a:lnTo>
-                  <a:lnTo>
-                    <a:pt x="3252788" y="2061784"/>
-                  </a:lnTo>
-                  <a:lnTo>
-                    <a:pt x="3326548" y="2085681"/>
-                  </a:lnTo>
-                  <a:lnTo>
-                    <a:pt x="3400308" y="2108939"/>
-                  </a:lnTo>
-                  <a:lnTo>
-                    <a:pt x="3474068" y="2131574"/>
-                  </a:lnTo>
-                  <a:lnTo>
-                    <a:pt x="3547828" y="2153603"/>
-                  </a:lnTo>
-                  <a:lnTo>
-                    <a:pt x="3621588" y="2175042"/>
-                  </a:lnTo>
-                  <a:lnTo>
-                    <a:pt x="3695348" y="2195907"/>
-                  </a:lnTo>
-                  <a:lnTo>
-                    <a:pt x="3769108" y="2216213"/>
-                  </a:lnTo>
-                  <a:lnTo>
-                    <a:pt x="3842868" y="2235975"/>
-                  </a:lnTo>
-                  <a:lnTo>
-                    <a:pt x="3916628" y="2255209"/>
-                  </a:lnTo>
-                  <a:lnTo>
-                    <a:pt x="3990388" y="2273927"/>
-                  </a:lnTo>
-                  <a:lnTo>
-                    <a:pt x="4064149" y="2292144"/>
-                  </a:lnTo>
-                  <a:lnTo>
-                    <a:pt x="4137909" y="2309873"/>
-                  </a:lnTo>
-                  <a:lnTo>
-                    <a:pt x="4211669" y="2327127"/>
-                  </a:lnTo>
-                  <a:lnTo>
-                    <a:pt x="4285429" y="2343920"/>
-                  </a:lnTo>
-                  <a:lnTo>
-                    <a:pt x="4359189" y="2360262"/>
-                  </a:lnTo>
-                  <a:lnTo>
-                    <a:pt x="4432949" y="2376167"/>
-                  </a:lnTo>
-                  <a:lnTo>
-                    <a:pt x="4506709" y="2391646"/>
-                  </a:lnTo>
-                  <a:lnTo>
-                    <a:pt x="4580469" y="2406711"/>
-                  </a:lnTo>
-                  <a:lnTo>
-                    <a:pt x="4654229" y="2421372"/>
-                  </a:lnTo>
-                  <a:lnTo>
-                    <a:pt x="4727989" y="2435641"/>
-                  </a:lnTo>
-                  <a:lnTo>
-                    <a:pt x="4801749" y="2449527"/>
-                  </a:lnTo>
-                  <a:lnTo>
-                    <a:pt x="4875509" y="2463042"/>
-                  </a:lnTo>
-                  <a:lnTo>
-                    <a:pt x="4949269" y="2476195"/>
-                  </a:lnTo>
-                  <a:lnTo>
-                    <a:pt x="5023029" y="2488995"/>
-                  </a:lnTo>
-                  <a:lnTo>
-                    <a:pt x="5096789" y="2501453"/>
-                  </a:lnTo>
-                  <a:lnTo>
-                    <a:pt x="5170549" y="2513577"/>
-                  </a:lnTo>
-                  <a:lnTo>
-                    <a:pt x="5244309" y="2525377"/>
-                  </a:lnTo>
-                  <a:lnTo>
-                    <a:pt x="5318069" y="2536861"/>
-                  </a:lnTo>
-                  <a:lnTo>
-                    <a:pt x="5391829" y="2548037"/>
-                  </a:lnTo>
-                  <a:lnTo>
-                    <a:pt x="5465589" y="2558913"/>
-                  </a:lnTo>
-                  <a:lnTo>
-                    <a:pt x="5539349" y="2569499"/>
-                  </a:lnTo>
-                  <a:lnTo>
-                    <a:pt x="5613109" y="2579801"/>
-                  </a:lnTo>
-                  <a:lnTo>
-                    <a:pt x="5686869" y="2589827"/>
-                  </a:lnTo>
-                  <a:lnTo>
-                    <a:pt x="5760629" y="2599585"/>
-                  </a:lnTo>
-                  <a:lnTo>
-                    <a:pt x="5834389" y="2609081"/>
-                  </a:lnTo>
-                  <a:lnTo>
-                    <a:pt x="5908149" y="2618324"/>
-                  </a:lnTo>
-                  <a:lnTo>
-                    <a:pt x="5981909" y="2627318"/>
-                  </a:lnTo>
-                  <a:lnTo>
-                    <a:pt x="6055669" y="2636072"/>
-                  </a:lnTo>
-                  <a:lnTo>
-                    <a:pt x="6129429" y="2644591"/>
-                  </a:lnTo>
-                  <a:lnTo>
-                    <a:pt x="6203189" y="2652883"/>
-                  </a:lnTo>
-                  <a:lnTo>
-                    <a:pt x="6276949" y="2660952"/>
-                  </a:lnTo>
-                  <a:lnTo>
-                    <a:pt x="6350709" y="2668805"/>
-                  </a:lnTo>
-                  <a:lnTo>
-                    <a:pt x="6424469" y="2676448"/>
-                  </a:lnTo>
-                  <a:lnTo>
-                    <a:pt x="6498229" y="2683886"/>
-                  </a:lnTo>
-                  <a:lnTo>
-                    <a:pt x="6571989" y="2691125"/>
-                  </a:lnTo>
-                  <a:lnTo>
-                    <a:pt x="6645749" y="2698170"/>
-                  </a:lnTo>
-                  <a:lnTo>
-                    <a:pt x="6719509" y="2705027"/>
-                  </a:lnTo>
-                  <a:lnTo>
-                    <a:pt x="6793269" y="2711700"/>
-                  </a:lnTo>
-                  <a:lnTo>
-                    <a:pt x="6867029" y="2718194"/>
-                  </a:lnTo>
-                  <a:lnTo>
-                    <a:pt x="6940789" y="2724514"/>
-                  </a:lnTo>
-                  <a:lnTo>
-                    <a:pt x="7014550" y="2730665"/>
-                  </a:lnTo>
-                  <a:lnTo>
-                    <a:pt x="7088310" y="2736652"/>
-                  </a:lnTo>
-                  <a:lnTo>
-                    <a:pt x="7162070" y="2742478"/>
-                  </a:lnTo>
-                  <a:lnTo>
-                    <a:pt x="7235830" y="2748148"/>
+                    <a:pt x="71622" y="81062"/>
+                  </a:lnTo>
+                  <a:lnTo>
+                    <a:pt x="143245" y="159954"/>
+                  </a:lnTo>
+                  <a:lnTo>
+                    <a:pt x="214867" y="236734"/>
+                  </a:lnTo>
+                  <a:lnTo>
+                    <a:pt x="286490" y="311457"/>
+                  </a:lnTo>
+                  <a:lnTo>
+                    <a:pt x="358112" y="384180"/>
+                  </a:lnTo>
+                  <a:lnTo>
+                    <a:pt x="429735" y="454955"/>
+                  </a:lnTo>
+                  <a:lnTo>
+                    <a:pt x="501357" y="523835"/>
+                  </a:lnTo>
+                  <a:lnTo>
+                    <a:pt x="572980" y="590871"/>
+                  </a:lnTo>
+                  <a:lnTo>
+                    <a:pt x="644602" y="656111"/>
+                  </a:lnTo>
+                  <a:lnTo>
+                    <a:pt x="716225" y="719604"/>
+                  </a:lnTo>
+                  <a:lnTo>
+                    <a:pt x="787847" y="781398"/>
+                  </a:lnTo>
+                  <a:lnTo>
+                    <a:pt x="859470" y="841536"/>
+                  </a:lnTo>
+                  <a:lnTo>
+                    <a:pt x="931092" y="900064"/>
+                  </a:lnTo>
+                  <a:lnTo>
+                    <a:pt x="1002715" y="957025"/>
+                  </a:lnTo>
+                  <a:lnTo>
+                    <a:pt x="1074337" y="1012460"/>
+                  </a:lnTo>
+                  <a:lnTo>
+                    <a:pt x="1145960" y="1066411"/>
+                  </a:lnTo>
+                  <a:lnTo>
+                    <a:pt x="1217582" y="1118918"/>
+                  </a:lnTo>
+                  <a:lnTo>
+                    <a:pt x="1289205" y="1170018"/>
+                  </a:lnTo>
+                  <a:lnTo>
+                    <a:pt x="1360827" y="1219750"/>
+                  </a:lnTo>
+                  <a:lnTo>
+                    <a:pt x="1432450" y="1268150"/>
+                  </a:lnTo>
+                  <a:lnTo>
+                    <a:pt x="1504073" y="1315254"/>
+                  </a:lnTo>
+                  <a:lnTo>
+                    <a:pt x="1575695" y="1361097"/>
+                  </a:lnTo>
+                  <a:lnTo>
+                    <a:pt x="1647318" y="1405712"/>
+                  </a:lnTo>
+                  <a:lnTo>
+                    <a:pt x="1718940" y="1449133"/>
+                  </a:lnTo>
+                  <a:lnTo>
+                    <a:pt x="1790563" y="1491391"/>
+                  </a:lnTo>
+                  <a:lnTo>
+                    <a:pt x="1862185" y="1532517"/>
+                  </a:lnTo>
+                  <a:lnTo>
+                    <a:pt x="1933808" y="1572542"/>
+                  </a:lnTo>
+                  <a:lnTo>
+                    <a:pt x="2005430" y="1611495"/>
+                  </a:lnTo>
+                  <a:lnTo>
+                    <a:pt x="2077053" y="1649405"/>
+                  </a:lnTo>
+                  <a:lnTo>
+                    <a:pt x="2148675" y="1686300"/>
+                  </a:lnTo>
+                  <a:lnTo>
+                    <a:pt x="2220298" y="1722207"/>
+                  </a:lnTo>
+                  <a:lnTo>
+                    <a:pt x="2291920" y="1757152"/>
+                  </a:lnTo>
+                  <a:lnTo>
+                    <a:pt x="2363543" y="1791162"/>
+                  </a:lnTo>
+                  <a:lnTo>
+                    <a:pt x="2435165" y="1824261"/>
+                  </a:lnTo>
+                  <a:lnTo>
+                    <a:pt x="2506788" y="1856473"/>
+                  </a:lnTo>
+                  <a:lnTo>
+                    <a:pt x="2578410" y="1887823"/>
+                  </a:lnTo>
+                  <a:lnTo>
+                    <a:pt x="2650033" y="1918334"/>
+                  </a:lnTo>
+                  <a:lnTo>
+                    <a:pt x="2721655" y="1948027"/>
+                  </a:lnTo>
+                  <a:lnTo>
+                    <a:pt x="2793278" y="1976926"/>
+                  </a:lnTo>
+                  <a:lnTo>
+                    <a:pt x="2864901" y="2005050"/>
+                  </a:lnTo>
+                  <a:lnTo>
+                    <a:pt x="2936523" y="2032422"/>
+                  </a:lnTo>
+                  <a:lnTo>
+                    <a:pt x="3008146" y="2059060"/>
+                  </a:lnTo>
+                  <a:lnTo>
+                    <a:pt x="3079768" y="2084985"/>
+                  </a:lnTo>
+                  <a:lnTo>
+                    <a:pt x="3151391" y="2110216"/>
+                  </a:lnTo>
+                  <a:lnTo>
+                    <a:pt x="3223013" y="2134771"/>
+                  </a:lnTo>
+                  <a:lnTo>
+                    <a:pt x="3294636" y="2158669"/>
+                  </a:lnTo>
+                  <a:lnTo>
+                    <a:pt x="3366258" y="2181927"/>
+                  </a:lnTo>
+                  <a:lnTo>
+                    <a:pt x="3437881" y="2204562"/>
+                  </a:lnTo>
+                  <a:lnTo>
+                    <a:pt x="3509503" y="2226591"/>
+                  </a:lnTo>
+                  <a:lnTo>
+                    <a:pt x="3581126" y="2248030"/>
+                  </a:lnTo>
+                  <a:lnTo>
+                    <a:pt x="3652748" y="2268895"/>
+                  </a:lnTo>
+                  <a:lnTo>
+                    <a:pt x="3724371" y="2289201"/>
+                  </a:lnTo>
+                  <a:lnTo>
+                    <a:pt x="3795993" y="2308963"/>
+                  </a:lnTo>
+                  <a:lnTo>
+                    <a:pt x="3867616" y="2328196"/>
+                  </a:lnTo>
+                  <a:lnTo>
+                    <a:pt x="3939238" y="2346914"/>
+                  </a:lnTo>
+                  <a:lnTo>
+                    <a:pt x="4010861" y="2365131"/>
+                  </a:lnTo>
+                  <a:lnTo>
+                    <a:pt x="4082483" y="2382861"/>
+                  </a:lnTo>
+                  <a:lnTo>
+                    <a:pt x="4154106" y="2400115"/>
+                  </a:lnTo>
+                  <a:lnTo>
+                    <a:pt x="4225729" y="2416907"/>
+                  </a:lnTo>
+                  <a:lnTo>
+                    <a:pt x="4297351" y="2433250"/>
+                  </a:lnTo>
+                  <a:lnTo>
+                    <a:pt x="4368974" y="2449155"/>
+                  </a:lnTo>
+                  <a:lnTo>
+                    <a:pt x="4440596" y="2464634"/>
+                  </a:lnTo>
+                  <a:lnTo>
+                    <a:pt x="4512219" y="2479699"/>
+                  </a:lnTo>
+                  <a:lnTo>
+                    <a:pt x="4583841" y="2494360"/>
+                  </a:lnTo>
+                  <a:lnTo>
+                    <a:pt x="4655464" y="2508629"/>
+                  </a:lnTo>
+                  <a:lnTo>
+                    <a:pt x="4727086" y="2522515"/>
+                  </a:lnTo>
+                  <a:lnTo>
+                    <a:pt x="4798709" y="2536030"/>
+                  </a:lnTo>
+                  <a:lnTo>
+                    <a:pt x="4870331" y="2549183"/>
+                  </a:lnTo>
+                  <a:lnTo>
+                    <a:pt x="4941954" y="2561983"/>
+                  </a:lnTo>
+                  <a:lnTo>
+                    <a:pt x="5013576" y="2574441"/>
+                  </a:lnTo>
+                  <a:lnTo>
+                    <a:pt x="5085199" y="2586565"/>
+                  </a:lnTo>
+                  <a:lnTo>
+                    <a:pt x="5156821" y="2598365"/>
+                  </a:lnTo>
+                  <a:lnTo>
+                    <a:pt x="5228444" y="2609848"/>
+                  </a:lnTo>
+                  <a:lnTo>
+                    <a:pt x="5300066" y="2621024"/>
+                  </a:lnTo>
+                  <a:lnTo>
+                    <a:pt x="5371689" y="2631901"/>
+                  </a:lnTo>
+                  <a:lnTo>
+                    <a:pt x="5443311" y="2642487"/>
+                  </a:lnTo>
+                  <a:lnTo>
+                    <a:pt x="5514934" y="2652789"/>
+                  </a:lnTo>
+                  <a:lnTo>
+                    <a:pt x="5586557" y="2662815"/>
+                  </a:lnTo>
+                  <a:lnTo>
+                    <a:pt x="5658179" y="2672573"/>
+                  </a:lnTo>
+                  <a:lnTo>
+                    <a:pt x="5729802" y="2682069"/>
+                  </a:lnTo>
+                  <a:lnTo>
+                    <a:pt x="5801424" y="2691311"/>
+                  </a:lnTo>
+                  <a:lnTo>
+                    <a:pt x="5873047" y="2700306"/>
+                  </a:lnTo>
+                  <a:lnTo>
+                    <a:pt x="5944669" y="2709060"/>
+                  </a:lnTo>
+                  <a:lnTo>
+                    <a:pt x="6016292" y="2717579"/>
+                  </a:lnTo>
+                  <a:lnTo>
+                    <a:pt x="6087914" y="2725870"/>
+                  </a:lnTo>
+                  <a:lnTo>
+                    <a:pt x="6159537" y="2733940"/>
+                  </a:lnTo>
+                  <a:lnTo>
+                    <a:pt x="6231159" y="2741793"/>
+                  </a:lnTo>
+                  <a:lnTo>
+                    <a:pt x="6302782" y="2749436"/>
+                  </a:lnTo>
+                  <a:lnTo>
+                    <a:pt x="6374404" y="2756874"/>
+                  </a:lnTo>
+                  <a:lnTo>
+                    <a:pt x="6446027" y="2764113"/>
+                  </a:lnTo>
+                  <a:lnTo>
+                    <a:pt x="6517649" y="2771158"/>
+                  </a:lnTo>
+                  <a:lnTo>
+                    <a:pt x="6589272" y="2778014"/>
+                  </a:lnTo>
+                  <a:lnTo>
+                    <a:pt x="6660894" y="2784687"/>
+                  </a:lnTo>
+                  <a:lnTo>
+                    <a:pt x="6732517" y="2791182"/>
+                  </a:lnTo>
+                  <a:lnTo>
+                    <a:pt x="6804139" y="2797502"/>
+                  </a:lnTo>
+                  <a:lnTo>
+                    <a:pt x="6875762" y="2803653"/>
+                  </a:lnTo>
+                  <a:lnTo>
+                    <a:pt x="6947385" y="2809639"/>
+                  </a:lnTo>
+                  <a:lnTo>
+                    <a:pt x="7019007" y="2815465"/>
+                  </a:lnTo>
+                  <a:lnTo>
+                    <a:pt x="7090630" y="2821135"/>
                   </a:lnTo>
                 </a:path>
               </a:pathLst>
@@ -4527,7 +4484,7 @@
         </p:sp>
         <p:sp>
           <p:nvSpPr>
-            <p:cNvPr id="25" name="pl25"/>
+            <p:cNvPr id="24" name="pl24"/>
             <p:cNvSpPr/>
             <p:nvPr/>
           </p:nvSpPr>
@@ -4570,13 +4527,13 @@
         </p:sp>
         <p:sp>
           <p:nvSpPr>
-            <p:cNvPr id="26" name="pl26"/>
+            <p:cNvPr id="25" name="pl25"/>
             <p:cNvSpPr/>
             <p:nvPr/>
           </p:nvSpPr>
           <p:spPr>
             <a:xfrm>
-              <a:off x="4269157" y="2073503"/>
+              <a:off x="4588151" y="2073503"/>
               <a:ext cx="0" cy="3649639"/>
             </a:xfrm>
             <a:custGeom>
@@ -4613,7 +4570,7 @@
         </p:sp>
         <p:sp>
           <p:nvSpPr>
-            <p:cNvPr id="27" name="tx27"/>
+            <p:cNvPr id="26" name="tx26"/>
             <p:cNvSpPr/>
             <p:nvPr/>
           </p:nvSpPr>
@@ -4659,7 +4616,7 @@
         </p:sp>
         <p:sp>
           <p:nvSpPr>
-            <p:cNvPr id="28" name="tx28"/>
+            <p:cNvPr id="27" name="tx27"/>
             <p:cNvSpPr/>
             <p:nvPr/>
           </p:nvSpPr>
@@ -4705,7 +4662,7 @@
         </p:sp>
         <p:sp>
           <p:nvSpPr>
-            <p:cNvPr id="29" name="tx29"/>
+            <p:cNvPr id="28" name="tx28"/>
             <p:cNvSpPr/>
             <p:nvPr/>
           </p:nvSpPr>
@@ -4751,7 +4708,7 @@
         </p:sp>
         <p:sp>
           <p:nvSpPr>
-            <p:cNvPr id="30" name="tx30"/>
+            <p:cNvPr id="29" name="tx29"/>
             <p:cNvSpPr/>
             <p:nvPr/>
           </p:nvSpPr>
@@ -4797,7 +4754,7 @@
         </p:sp>
         <p:sp>
           <p:nvSpPr>
-            <p:cNvPr id="31" name="tx31"/>
+            <p:cNvPr id="30" name="tx30"/>
             <p:cNvSpPr/>
             <p:nvPr/>
           </p:nvSpPr>
@@ -4843,14 +4800,14 @@
         </p:sp>
         <p:sp>
           <p:nvSpPr>
-            <p:cNvPr id="32" name="tx32"/>
+            <p:cNvPr id="31" name="tx31"/>
             <p:cNvSpPr/>
             <p:nvPr/>
           </p:nvSpPr>
           <p:spPr>
             <a:xfrm>
-              <a:off x="2423864" y="5785772"/>
-              <a:ext cx="155356" cy="80101"/>
+              <a:off x="2360651" y="5785772"/>
+              <a:ext cx="161574" cy="80101"/>
             </a:xfrm>
             <a:prstGeom prst="rect">
               <a:avLst/>
@@ -4882,21 +4839,21 @@
                   <a:latin typeface="Helvetica"/>
                   <a:cs typeface="Helvetica"/>
                 </a:rPr>
-                <a:t>0.8</a:t>
+                <a:t>-25</a:t>
               </a:r>
             </a:p>
           </p:txBody>
         </p:sp>
         <p:sp>
           <p:nvSpPr>
-            <p:cNvPr id="33" name="tx33"/>
+            <p:cNvPr id="32" name="tx32"/>
             <p:cNvSpPr/>
             <p:nvPr/>
           </p:nvSpPr>
           <p:spPr>
             <a:xfrm>
-              <a:off x="4196521" y="5785772"/>
-              <a:ext cx="155356" cy="80101"/>
+              <a:off x="4561958" y="5785772"/>
+              <a:ext cx="62179" cy="80101"/>
             </a:xfrm>
             <a:prstGeom prst="rect">
               <a:avLst/>
@@ -4928,21 +4885,21 @@
                   <a:latin typeface="Helvetica"/>
                   <a:cs typeface="Helvetica"/>
                 </a:rPr>
-                <a:t>1.0</a:t>
+                <a:t>0</a:t>
               </a:r>
             </a:p>
           </p:txBody>
         </p:sp>
         <p:sp>
           <p:nvSpPr>
-            <p:cNvPr id="34" name="tx34"/>
+            <p:cNvPr id="33" name="tx33"/>
             <p:cNvSpPr/>
             <p:nvPr/>
           </p:nvSpPr>
           <p:spPr>
             <a:xfrm>
-              <a:off x="5969179" y="5785772"/>
-              <a:ext cx="155356" cy="80101"/>
+              <a:off x="6682478" y="5785772"/>
+              <a:ext cx="124358" cy="80101"/>
             </a:xfrm>
             <a:prstGeom prst="rect">
               <a:avLst/>
@@ -4974,67 +4931,21 @@
                   <a:latin typeface="Helvetica"/>
                   <a:cs typeface="Helvetica"/>
                 </a:rPr>
-                <a:t>1.2</a:t>
+                <a:t>25</a:t>
               </a:r>
             </a:p>
           </p:txBody>
         </p:sp>
         <p:sp>
           <p:nvSpPr>
-            <p:cNvPr id="35" name="tx35"/>
+            <p:cNvPr id="34" name="tx34"/>
             <p:cNvSpPr/>
             <p:nvPr/>
           </p:nvSpPr>
           <p:spPr>
             <a:xfrm>
-              <a:off x="7741836" y="5785772"/>
-              <a:ext cx="155356" cy="80101"/>
-            </a:xfrm>
-            <a:prstGeom prst="rect">
-              <a:avLst/>
-            </a:prstGeom>
-            <a:noFill/>
-          </p:spPr>
-          <p:txBody>
-            <a:bodyPr lIns="0" rIns="0" tIns="0" bIns="0" anchorCtr="1" anchor="ctr" wrap="none"/>
-            <a:lstStyle/>
-            <a:p>
-              <a:pPr algn="l" marL="0" marR="0" indent="0">
-                <a:lnSpc>
-                  <a:spcPts val="880"/>
-                </a:lnSpc>
-                <a:spcBef>
-                  <a:spcPts val="0"/>
-                </a:spcBef>
-                <a:spcAft>
-                  <a:spcPts val="0"/>
-                </a:spcAft>
-              </a:pPr>
-              <a:r>
-                <a:rPr sz="880">
-                  <a:solidFill>
-                    <a:srgbClr val="4D4D4D">
-                      <a:alpha val="100000"/>
-                    </a:srgbClr>
-                  </a:solidFill>
-                  <a:latin typeface="Helvetica"/>
-                  <a:cs typeface="Helvetica"/>
-                </a:rPr>
-                <a:t>1.4</a:t>
-              </a:r>
-            </a:p>
-          </p:txBody>
-        </p:sp>
-        <p:sp>
-          <p:nvSpPr>
-            <p:cNvPr id="36" name="tx36"/>
-            <p:cNvSpPr/>
-            <p:nvPr/>
-          </p:nvSpPr>
-          <p:spPr>
-            <a:xfrm>
-              <a:off x="3879271" y="5925448"/>
-              <a:ext cx="1676186" cy="100218"/>
+              <a:off x="2928340" y="5925448"/>
+              <a:ext cx="3578047" cy="100218"/>
             </a:xfrm>
             <a:prstGeom prst="rect">
               <a:avLst/>
@@ -5066,14 +4977,14 @@
                   <a:latin typeface="Helvetica"/>
                   <a:cs typeface="Helvetica"/>
                 </a:rPr>
-                <a:t>CKD-EPI Cr-Cys / CG ratio</a:t>
+                <a:t>eGFR difference (%): 100 × (CKD-EPI Cr-Cys − CG) / CG</a:t>
               </a:r>
             </a:p>
           </p:txBody>
         </p:sp>
         <p:sp>
           <p:nvSpPr>
-            <p:cNvPr id="37" name="tx37"/>
+            <p:cNvPr id="35" name="tx35"/>
             <p:cNvSpPr/>
             <p:nvPr/>
           </p:nvSpPr>
@@ -5119,14 +5030,14 @@
         </p:sp>
         <p:sp>
           <p:nvSpPr>
-            <p:cNvPr id="38" name="tx38"/>
+            <p:cNvPr id="36" name="tx36"/>
             <p:cNvSpPr/>
             <p:nvPr/>
           </p:nvSpPr>
           <p:spPr>
             <a:xfrm>
               <a:off x="817517" y="1896563"/>
-              <a:ext cx="6169365" cy="82021"/>
+              <a:ext cx="6321612" cy="82021"/>
             </a:xfrm>
             <a:prstGeom prst="rect">
               <a:avLst/>
@@ -5158,14 +5069,14 @@
                   <a:latin typeface="Helvetica"/>
                   <a:cs typeface="Helvetica"/>
                 </a:rPr>
-                <a:t>subHR per 0.1 ratio decline: 1.39 (1.13-1.69), p = 0.001  |  per IQR decline (Δ = 0.29): 2.60 (1.45-4.67)  |  IQR: [0.85, 1.15]</a:t>
+                <a:t>subHR per 10 % decline: 1.39 (1.13-1.69), p = 0.001  |  per IQR decline (Δ = 29.3 %): 2.60 (1.45-4.67)  |  IQR: [-14.6, 14.7] %</a:t>
               </a:r>
             </a:p>
           </p:txBody>
         </p:sp>
         <p:sp>
           <p:nvSpPr>
-            <p:cNvPr id="39" name="tx39"/>
+            <p:cNvPr id="37" name="tx37"/>
             <p:cNvSpPr/>
             <p:nvPr/>
           </p:nvSpPr>

--- a/docs/pptx/whole/jx-linsubhr-ratio-hosp2.pptx
+++ b/docs/pptx/whole/jx-linsubhr-ratio-hosp2.pptx
@@ -2265,34 +2265,26 @@
         </p:sp>
         <p:sp>
           <p:nvSpPr>
-            <p:cNvPr id="4" name="pl4"/>
+            <p:cNvPr id="4" name="rc4"/>
             <p:cNvSpPr/>
             <p:nvPr/>
           </p:nvSpPr>
           <p:spPr>
             <a:xfrm>
-              <a:off x="817517" y="5142518"/>
-              <a:ext cx="7799693" cy="0"/>
+              <a:off x="457200" y="1600200"/>
+              <a:ext cx="8229600" cy="4525962"/>
             </a:xfrm>
-            <a:custGeom>
+            <a:prstGeom prst="rect">
               <a:avLst/>
-              <a:pathLst>
-                <a:path w="7799693" h="0">
-                  <a:moveTo>
-                    <a:pt x="0" y="0"/>
-                  </a:moveTo>
-                  <a:lnTo>
-                    <a:pt x="7799693" y="0"/>
-                  </a:lnTo>
-                  <a:lnTo>
-                    <a:pt x="7799693" y="0"/>
-                  </a:lnTo>
-                </a:path>
-              </a:pathLst>
-            </a:custGeom>
-            <a:ln w="6775" cap="flat">
+            </a:prstGeom>
+            <a:solidFill>
+              <a:srgbClr val="FFFFFF">
+                <a:alpha val="100000"/>
+              </a:srgbClr>
+            </a:solidFill>
+            <a:ln w="13550" cap="rnd">
               <a:solidFill>
-                <a:srgbClr val="EBEBEB">
+                <a:srgbClr val="FFFFFF">
                   <a:alpha val="100000"/>
                 </a:srgbClr>
               </a:solidFill>
@@ -2314,21 +2306,21 @@
           </p:nvSpPr>
           <p:spPr>
             <a:xfrm>
-              <a:off x="817517" y="4313054"/>
-              <a:ext cx="7799693" cy="0"/>
+              <a:off x="887106" y="3250627"/>
+              <a:ext cx="7660515" cy="0"/>
             </a:xfrm>
             <a:custGeom>
               <a:avLst/>
               <a:pathLst>
-                <a:path w="7799693" h="0">
+                <a:path w="7660515" h="0">
                   <a:moveTo>
                     <a:pt x="0" y="0"/>
                   </a:moveTo>
                   <a:lnTo>
-                    <a:pt x="7799693" y="0"/>
-                  </a:lnTo>
-                  <a:lnTo>
-                    <a:pt x="7799693" y="0"/>
+                    <a:pt x="7660515" y="0"/>
+                  </a:lnTo>
+                  <a:lnTo>
+                    <a:pt x="7660515" y="0"/>
                   </a:lnTo>
                 </a:path>
               </a:pathLst>
@@ -2357,21 +2349,21 @@
           </p:nvSpPr>
           <p:spPr>
             <a:xfrm>
-              <a:off x="817517" y="3483591"/>
-              <a:ext cx="7799693" cy="0"/>
+              <a:off x="887106" y="2951293"/>
+              <a:ext cx="7660515" cy="0"/>
             </a:xfrm>
             <a:custGeom>
               <a:avLst/>
               <a:pathLst>
-                <a:path w="7799693" h="0">
+                <a:path w="7660515" h="0">
                   <a:moveTo>
                     <a:pt x="0" y="0"/>
                   </a:moveTo>
                   <a:lnTo>
-                    <a:pt x="7799693" y="0"/>
-                  </a:lnTo>
-                  <a:lnTo>
-                    <a:pt x="7799693" y="0"/>
+                    <a:pt x="7660515" y="0"/>
+                  </a:lnTo>
+                  <a:lnTo>
+                    <a:pt x="7660515" y="0"/>
                   </a:lnTo>
                 </a:path>
               </a:pathLst>
@@ -2400,21 +2392,21 @@
           </p:nvSpPr>
           <p:spPr>
             <a:xfrm>
-              <a:off x="817517" y="2654127"/>
-              <a:ext cx="7799693" cy="0"/>
+              <a:off x="887106" y="2651959"/>
+              <a:ext cx="7660515" cy="0"/>
             </a:xfrm>
             <a:custGeom>
               <a:avLst/>
               <a:pathLst>
-                <a:path w="7799693" h="0">
+                <a:path w="7660515" h="0">
                   <a:moveTo>
                     <a:pt x="0" y="0"/>
                   </a:moveTo>
                   <a:lnTo>
-                    <a:pt x="7799693" y="0"/>
-                  </a:lnTo>
-                  <a:lnTo>
-                    <a:pt x="7799693" y="0"/>
+                    <a:pt x="7660515" y="0"/>
+                  </a:lnTo>
+                  <a:lnTo>
+                    <a:pt x="7660515" y="0"/>
                   </a:lnTo>
                 </a:path>
               </a:pathLst>
@@ -2443,21 +2435,21 @@
           </p:nvSpPr>
           <p:spPr>
             <a:xfrm>
-              <a:off x="1365633" y="2073503"/>
-              <a:ext cx="0" cy="3649639"/>
+              <a:off x="887106" y="2352625"/>
+              <a:ext cx="7660515" cy="0"/>
             </a:xfrm>
             <a:custGeom>
               <a:avLst/>
               <a:pathLst>
-                <a:path w="0" h="3649639">
+                <a:path w="7660515" h="0">
                   <a:moveTo>
-                    <a:pt x="0" y="3649639"/>
+                    <a:pt x="0" y="0"/>
                   </a:moveTo>
                   <a:lnTo>
-                    <a:pt x="0" y="0"/>
-                  </a:lnTo>
-                  <a:lnTo>
-                    <a:pt x="0" y="0"/>
+                    <a:pt x="7660515" y="0"/>
+                  </a:lnTo>
+                  <a:lnTo>
+                    <a:pt x="7660515" y="0"/>
                   </a:lnTo>
                 </a:path>
               </a:pathLst>
@@ -2486,15 +2478,15 @@
           </p:nvSpPr>
           <p:spPr>
             <a:xfrm>
-              <a:off x="3517243" y="2073503"/>
-              <a:ext cx="0" cy="3649639"/>
+              <a:off x="1425442" y="2143092"/>
+              <a:ext cx="0" cy="1317069"/>
             </a:xfrm>
             <a:custGeom>
               <a:avLst/>
               <a:pathLst>
-                <a:path w="0" h="3649639">
+                <a:path w="0" h="1317069">
                   <a:moveTo>
-                    <a:pt x="0" y="3649639"/>
+                    <a:pt x="0" y="1317069"/>
                   </a:moveTo>
                   <a:lnTo>
                     <a:pt x="0" y="0"/>
@@ -2529,15 +2521,15 @@
           </p:nvSpPr>
           <p:spPr>
             <a:xfrm>
-              <a:off x="5668852" y="2073503"/>
-              <a:ext cx="0" cy="3649639"/>
+              <a:off x="3538658" y="2143092"/>
+              <a:ext cx="0" cy="1317069"/>
             </a:xfrm>
             <a:custGeom>
               <a:avLst/>
               <a:pathLst>
-                <a:path w="0" h="3649639">
+                <a:path w="0" h="1317069">
                   <a:moveTo>
-                    <a:pt x="0" y="3649639"/>
+                    <a:pt x="0" y="1317069"/>
                   </a:moveTo>
                   <a:lnTo>
                     <a:pt x="0" y="0"/>
@@ -2572,15 +2564,15 @@
           </p:nvSpPr>
           <p:spPr>
             <a:xfrm>
-              <a:off x="7820461" y="2073503"/>
-              <a:ext cx="0" cy="3649639"/>
+              <a:off x="5651874" y="2143092"/>
+              <a:ext cx="0" cy="1317069"/>
             </a:xfrm>
             <a:custGeom>
               <a:avLst/>
               <a:pathLst>
-                <a:path w="0" h="3649639">
+                <a:path w="0" h="1317069">
                   <a:moveTo>
-                    <a:pt x="0" y="3649639"/>
+                    <a:pt x="0" y="1317069"/>
                   </a:moveTo>
                   <a:lnTo>
                     <a:pt x="0" y="0"/>
@@ -2615,26 +2607,26 @@
           </p:nvSpPr>
           <p:spPr>
             <a:xfrm>
-              <a:off x="817517" y="5557249"/>
-              <a:ext cx="7799693" cy="0"/>
+              <a:off x="7765090" y="2143092"/>
+              <a:ext cx="0" cy="1317069"/>
             </a:xfrm>
             <a:custGeom>
               <a:avLst/>
               <a:pathLst>
-                <a:path w="7799693" h="0">
+                <a:path w="0" h="1317069">
                   <a:moveTo>
+                    <a:pt x="0" y="1317069"/>
+                  </a:moveTo>
+                  <a:lnTo>
                     <a:pt x="0" y="0"/>
-                  </a:moveTo>
-                  <a:lnTo>
-                    <a:pt x="7799693" y="0"/>
-                  </a:lnTo>
-                  <a:lnTo>
-                    <a:pt x="7799693" y="0"/>
+                  </a:lnTo>
+                  <a:lnTo>
+                    <a:pt x="0" y="0"/>
                   </a:lnTo>
                 </a:path>
               </a:pathLst>
             </a:custGeom>
-            <a:ln w="13550" cap="flat">
+            <a:ln w="6775" cap="flat">
               <a:solidFill>
                 <a:srgbClr val="EBEBEB">
                   <a:alpha val="100000"/>
@@ -2658,21 +2650,21 @@
           </p:nvSpPr>
           <p:spPr>
             <a:xfrm>
-              <a:off x="817517" y="4727786"/>
-              <a:ext cx="7799693" cy="0"/>
+              <a:off x="887106" y="3400294"/>
+              <a:ext cx="7660515" cy="0"/>
             </a:xfrm>
             <a:custGeom>
               <a:avLst/>
               <a:pathLst>
-                <a:path w="7799693" h="0">
+                <a:path w="7660515" h="0">
                   <a:moveTo>
                     <a:pt x="0" y="0"/>
                   </a:moveTo>
                   <a:lnTo>
-                    <a:pt x="7799693" y="0"/>
-                  </a:lnTo>
-                  <a:lnTo>
-                    <a:pt x="7799693" y="0"/>
+                    <a:pt x="7660515" y="0"/>
+                  </a:lnTo>
+                  <a:lnTo>
+                    <a:pt x="7660515" y="0"/>
                   </a:lnTo>
                 </a:path>
               </a:pathLst>
@@ -2701,21 +2693,21 @@
           </p:nvSpPr>
           <p:spPr>
             <a:xfrm>
-              <a:off x="817517" y="3898322"/>
-              <a:ext cx="7799693" cy="0"/>
+              <a:off x="887106" y="3100960"/>
+              <a:ext cx="7660515" cy="0"/>
             </a:xfrm>
             <a:custGeom>
               <a:avLst/>
               <a:pathLst>
-                <a:path w="7799693" h="0">
+                <a:path w="7660515" h="0">
                   <a:moveTo>
                     <a:pt x="0" y="0"/>
                   </a:moveTo>
                   <a:lnTo>
-                    <a:pt x="7799693" y="0"/>
-                  </a:lnTo>
-                  <a:lnTo>
-                    <a:pt x="7799693" y="0"/>
+                    <a:pt x="7660515" y="0"/>
+                  </a:lnTo>
+                  <a:lnTo>
+                    <a:pt x="7660515" y="0"/>
                   </a:lnTo>
                 </a:path>
               </a:pathLst>
@@ -2744,21 +2736,21 @@
           </p:nvSpPr>
           <p:spPr>
             <a:xfrm>
-              <a:off x="817517" y="3068859"/>
-              <a:ext cx="7799693" cy="0"/>
+              <a:off x="887106" y="2801626"/>
+              <a:ext cx="7660515" cy="0"/>
             </a:xfrm>
             <a:custGeom>
               <a:avLst/>
               <a:pathLst>
-                <a:path w="7799693" h="0">
+                <a:path w="7660515" h="0">
                   <a:moveTo>
                     <a:pt x="0" y="0"/>
                   </a:moveTo>
                   <a:lnTo>
-                    <a:pt x="7799693" y="0"/>
-                  </a:lnTo>
-                  <a:lnTo>
-                    <a:pt x="7799693" y="0"/>
+                    <a:pt x="7660515" y="0"/>
+                  </a:lnTo>
+                  <a:lnTo>
+                    <a:pt x="7660515" y="0"/>
                   </a:lnTo>
                 </a:path>
               </a:pathLst>
@@ -2787,21 +2779,21 @@
           </p:nvSpPr>
           <p:spPr>
             <a:xfrm>
-              <a:off x="817517" y="2239395"/>
-              <a:ext cx="7799693" cy="0"/>
+              <a:off x="887106" y="2502292"/>
+              <a:ext cx="7660515" cy="0"/>
             </a:xfrm>
             <a:custGeom>
               <a:avLst/>
               <a:pathLst>
-                <a:path w="7799693" h="0">
+                <a:path w="7660515" h="0">
                   <a:moveTo>
                     <a:pt x="0" y="0"/>
                   </a:moveTo>
                   <a:lnTo>
-                    <a:pt x="7799693" y="0"/>
-                  </a:lnTo>
-                  <a:lnTo>
-                    <a:pt x="7799693" y="0"/>
+                    <a:pt x="7660515" y="0"/>
+                  </a:lnTo>
+                  <a:lnTo>
+                    <a:pt x="7660515" y="0"/>
                   </a:lnTo>
                 </a:path>
               </a:pathLst>
@@ -2830,21 +2822,21 @@
           </p:nvSpPr>
           <p:spPr>
             <a:xfrm>
-              <a:off x="2441438" y="2073503"/>
-              <a:ext cx="0" cy="3649639"/>
+              <a:off x="887106" y="2202958"/>
+              <a:ext cx="7660515" cy="0"/>
             </a:xfrm>
             <a:custGeom>
               <a:avLst/>
               <a:pathLst>
-                <a:path w="0" h="3649639">
+                <a:path w="7660515" h="0">
                   <a:moveTo>
-                    <a:pt x="0" y="3649639"/>
+                    <a:pt x="0" y="0"/>
                   </a:moveTo>
                   <a:lnTo>
-                    <a:pt x="0" y="0"/>
-                  </a:lnTo>
-                  <a:lnTo>
-                    <a:pt x="0" y="0"/>
+                    <a:pt x="7660515" y="0"/>
+                  </a:lnTo>
+                  <a:lnTo>
+                    <a:pt x="7660515" y="0"/>
                   </a:lnTo>
                 </a:path>
               </a:pathLst>
@@ -2873,15 +2865,15 @@
           </p:nvSpPr>
           <p:spPr>
             <a:xfrm>
-              <a:off x="4593047" y="2073503"/>
-              <a:ext cx="0" cy="3649639"/>
+              <a:off x="2482050" y="2143092"/>
+              <a:ext cx="0" cy="1317069"/>
             </a:xfrm>
             <a:custGeom>
               <a:avLst/>
               <a:pathLst>
-                <a:path w="0" h="3649639">
+                <a:path w="0" h="1317069">
                   <a:moveTo>
-                    <a:pt x="0" y="3649639"/>
+                    <a:pt x="0" y="1317069"/>
                   </a:moveTo>
                   <a:lnTo>
                     <a:pt x="0" y="0"/>
@@ -2916,15 +2908,15 @@
           </p:nvSpPr>
           <p:spPr>
             <a:xfrm>
-              <a:off x="6744657" y="2073503"/>
-              <a:ext cx="0" cy="3649639"/>
+              <a:off x="4595266" y="2143092"/>
+              <a:ext cx="0" cy="1317069"/>
             </a:xfrm>
             <a:custGeom>
               <a:avLst/>
               <a:pathLst>
-                <a:path w="0" h="3649639">
+                <a:path w="0" h="1317069">
                   <a:moveTo>
-                    <a:pt x="0" y="3649639"/>
+                    <a:pt x="0" y="1317069"/>
                   </a:moveTo>
                   <a:lnTo>
                     <a:pt x="0" y="0"/>
@@ -2953,576 +2945,619 @@
         </p:sp>
         <p:sp>
           <p:nvSpPr>
-            <p:cNvPr id="20" name="pg20"/>
+            <p:cNvPr id="20" name="pl20"/>
             <p:cNvSpPr/>
             <p:nvPr/>
           </p:nvSpPr>
           <p:spPr>
             <a:xfrm>
-              <a:off x="1172049" y="2073503"/>
-              <a:ext cx="7090630" cy="3396018"/>
+              <a:off x="6708482" y="2143092"/>
+              <a:ext cx="0" cy="1317069"/>
             </a:xfrm>
             <a:custGeom>
               <a:avLst/>
               <a:pathLst>
-                <a:path w="7090630" h="3396018">
+                <a:path w="0" h="1317069">
                   <a:moveTo>
-                    <a:pt x="1068927" y="0"/>
+                    <a:pt x="0" y="1317069"/>
                   </a:moveTo>
                   <a:lnTo>
-                    <a:pt x="1074337" y="11740"/>
-                  </a:lnTo>
-                  <a:lnTo>
-                    <a:pt x="1145960" y="160494"/>
-                  </a:lnTo>
-                  <a:lnTo>
-                    <a:pt x="1217582" y="302874"/>
-                  </a:lnTo>
-                  <a:lnTo>
-                    <a:pt x="1289205" y="439155"/>
-                  </a:lnTo>
-                  <a:lnTo>
-                    <a:pt x="1360827" y="569596"/>
-                  </a:lnTo>
-                  <a:lnTo>
-                    <a:pt x="1432450" y="694449"/>
-                  </a:lnTo>
-                  <a:lnTo>
-                    <a:pt x="1504073" y="813953"/>
-                  </a:lnTo>
-                  <a:lnTo>
-                    <a:pt x="1575695" y="928337"/>
-                  </a:lnTo>
-                  <a:lnTo>
-                    <a:pt x="1647318" y="1037820"/>
-                  </a:lnTo>
-                  <a:lnTo>
-                    <a:pt x="1718940" y="1142613"/>
-                  </a:lnTo>
-                  <a:lnTo>
-                    <a:pt x="1790563" y="1242916"/>
-                  </a:lnTo>
-                  <a:lnTo>
-                    <a:pt x="1862185" y="1338921"/>
-                  </a:lnTo>
-                  <a:lnTo>
-                    <a:pt x="1933808" y="1430814"/>
-                  </a:lnTo>
-                  <a:lnTo>
-                    <a:pt x="2005430" y="1518769"/>
-                  </a:lnTo>
-                  <a:lnTo>
-                    <a:pt x="2077053" y="1602956"/>
-                  </a:lnTo>
-                  <a:lnTo>
-                    <a:pt x="2148675" y="1683536"/>
-                  </a:lnTo>
-                  <a:lnTo>
-                    <a:pt x="2220298" y="1760664"/>
-                  </a:lnTo>
-                  <a:lnTo>
-                    <a:pt x="2291920" y="1834487"/>
-                  </a:lnTo>
-                  <a:lnTo>
-                    <a:pt x="2363543" y="1905147"/>
-                  </a:lnTo>
-                  <a:lnTo>
-                    <a:pt x="2435165" y="1972781"/>
-                  </a:lnTo>
-                  <a:lnTo>
-                    <a:pt x="2506788" y="2037516"/>
-                  </a:lnTo>
-                  <a:lnTo>
-                    <a:pt x="2578410" y="2099478"/>
-                  </a:lnTo>
-                  <a:lnTo>
-                    <a:pt x="2650033" y="2158785"/>
-                  </a:lnTo>
-                  <a:lnTo>
-                    <a:pt x="2721655" y="2215551"/>
-                  </a:lnTo>
-                  <a:lnTo>
-                    <a:pt x="2793278" y="2269886"/>
-                  </a:lnTo>
-                  <a:lnTo>
-                    <a:pt x="2864901" y="2321892"/>
-                  </a:lnTo>
-                  <a:lnTo>
-                    <a:pt x="2936523" y="2371670"/>
-                  </a:lnTo>
-                  <a:lnTo>
-                    <a:pt x="3008146" y="2419316"/>
-                  </a:lnTo>
-                  <a:lnTo>
-                    <a:pt x="3079768" y="2464920"/>
-                  </a:lnTo>
-                  <a:lnTo>
-                    <a:pt x="3151391" y="2508570"/>
-                  </a:lnTo>
-                  <a:lnTo>
-                    <a:pt x="3223013" y="2550350"/>
-                  </a:lnTo>
-                  <a:lnTo>
-                    <a:pt x="3294636" y="2590340"/>
-                  </a:lnTo>
-                  <a:lnTo>
-                    <a:pt x="3366258" y="2628617"/>
-                  </a:lnTo>
-                  <a:lnTo>
-                    <a:pt x="3437881" y="2656926"/>
-                  </a:lnTo>
-                  <a:lnTo>
-                    <a:pt x="3509503" y="2665561"/>
-                  </a:lnTo>
-                  <a:lnTo>
-                    <a:pt x="3581126" y="2674105"/>
-                  </a:lnTo>
-                  <a:lnTo>
-                    <a:pt x="3652748" y="2682560"/>
-                  </a:lnTo>
-                  <a:lnTo>
-                    <a:pt x="3724371" y="2690926"/>
-                  </a:lnTo>
-                  <a:lnTo>
-                    <a:pt x="3795993" y="2699206"/>
-                  </a:lnTo>
-                  <a:lnTo>
-                    <a:pt x="3867616" y="2707398"/>
-                  </a:lnTo>
-                  <a:lnTo>
-                    <a:pt x="3939238" y="2715506"/>
-                  </a:lnTo>
-                  <a:lnTo>
-                    <a:pt x="4010861" y="2723528"/>
-                  </a:lnTo>
-                  <a:lnTo>
-                    <a:pt x="4082483" y="2731467"/>
-                  </a:lnTo>
-                  <a:lnTo>
-                    <a:pt x="4154106" y="2739323"/>
-                  </a:lnTo>
-                  <a:lnTo>
-                    <a:pt x="4225729" y="2747097"/>
-                  </a:lnTo>
-                  <a:lnTo>
-                    <a:pt x="4297351" y="2754789"/>
-                  </a:lnTo>
-                  <a:lnTo>
-                    <a:pt x="4368974" y="2762402"/>
-                  </a:lnTo>
-                  <a:lnTo>
-                    <a:pt x="4440596" y="2769934"/>
-                  </a:lnTo>
-                  <a:lnTo>
-                    <a:pt x="4512219" y="2777389"/>
-                  </a:lnTo>
-                  <a:lnTo>
-                    <a:pt x="4583841" y="2784765"/>
-                  </a:lnTo>
-                  <a:lnTo>
-                    <a:pt x="4655464" y="2792064"/>
-                  </a:lnTo>
-                  <a:lnTo>
-                    <a:pt x="4727086" y="2799287"/>
-                  </a:lnTo>
-                  <a:lnTo>
-                    <a:pt x="4798709" y="2806435"/>
-                  </a:lnTo>
-                  <a:lnTo>
-                    <a:pt x="4870331" y="2813508"/>
-                  </a:lnTo>
-                  <a:lnTo>
-                    <a:pt x="4941954" y="2820507"/>
-                  </a:lnTo>
-                  <a:lnTo>
-                    <a:pt x="5013576" y="2827433"/>
-                  </a:lnTo>
-                  <a:lnTo>
-                    <a:pt x="5085199" y="2834287"/>
-                  </a:lnTo>
-                  <a:lnTo>
-                    <a:pt x="5156821" y="2841069"/>
-                  </a:lnTo>
-                  <a:lnTo>
-                    <a:pt x="5228444" y="2847780"/>
-                  </a:lnTo>
-                  <a:lnTo>
-                    <a:pt x="5300066" y="2854421"/>
-                  </a:lnTo>
-                  <a:lnTo>
-                    <a:pt x="5371689" y="2860993"/>
-                  </a:lnTo>
-                  <a:lnTo>
-                    <a:pt x="5443311" y="2867497"/>
-                  </a:lnTo>
-                  <a:lnTo>
-                    <a:pt x="5514934" y="2873932"/>
-                  </a:lnTo>
-                  <a:lnTo>
-                    <a:pt x="5586557" y="2880300"/>
-                  </a:lnTo>
-                  <a:lnTo>
-                    <a:pt x="5658179" y="2886602"/>
-                  </a:lnTo>
-                  <a:lnTo>
-                    <a:pt x="5729802" y="2892838"/>
-                  </a:lnTo>
-                  <a:lnTo>
-                    <a:pt x="5801424" y="2899008"/>
-                  </a:lnTo>
-                  <a:lnTo>
-                    <a:pt x="5873047" y="2905115"/>
-                  </a:lnTo>
-                  <a:lnTo>
-                    <a:pt x="5944669" y="2911157"/>
-                  </a:lnTo>
-                  <a:lnTo>
-                    <a:pt x="6016292" y="2917137"/>
-                  </a:lnTo>
-                  <a:lnTo>
-                    <a:pt x="6087914" y="2923054"/>
-                  </a:lnTo>
-                  <a:lnTo>
-                    <a:pt x="6159537" y="2928909"/>
-                  </a:lnTo>
-                  <a:lnTo>
-                    <a:pt x="6231159" y="2934703"/>
-                  </a:lnTo>
-                  <a:lnTo>
-                    <a:pt x="6302782" y="2940436"/>
-                  </a:lnTo>
-                  <a:lnTo>
-                    <a:pt x="6374404" y="2946110"/>
-                  </a:lnTo>
-                  <a:lnTo>
-                    <a:pt x="6446027" y="2951724"/>
-                  </a:lnTo>
-                  <a:lnTo>
-                    <a:pt x="6517649" y="2957280"/>
-                  </a:lnTo>
-                  <a:lnTo>
-                    <a:pt x="6589272" y="2962778"/>
-                  </a:lnTo>
-                  <a:lnTo>
-                    <a:pt x="6660894" y="2968218"/>
-                  </a:lnTo>
-                  <a:lnTo>
-                    <a:pt x="6732517" y="2973602"/>
-                  </a:lnTo>
-                  <a:lnTo>
-                    <a:pt x="6804139" y="2978929"/>
-                  </a:lnTo>
-                  <a:lnTo>
-                    <a:pt x="6875762" y="2984201"/>
-                  </a:lnTo>
-                  <a:lnTo>
-                    <a:pt x="6947385" y="2989417"/>
-                  </a:lnTo>
-                  <a:lnTo>
-                    <a:pt x="7019007" y="2994580"/>
-                  </a:lnTo>
-                  <a:lnTo>
-                    <a:pt x="7090630" y="2999688"/>
-                  </a:lnTo>
-                  <a:lnTo>
-                    <a:pt x="7090630" y="3396018"/>
-                  </a:lnTo>
-                  <a:lnTo>
-                    <a:pt x="7019007" y="3392091"/>
-                  </a:lnTo>
-                  <a:lnTo>
-                    <a:pt x="6947385" y="3387989"/>
-                  </a:lnTo>
-                  <a:lnTo>
-                    <a:pt x="6875762" y="3383702"/>
-                  </a:lnTo>
-                  <a:lnTo>
-                    <a:pt x="6804139" y="3379224"/>
-                  </a:lnTo>
-                  <a:lnTo>
-                    <a:pt x="6732517" y="3374546"/>
-                  </a:lnTo>
-                  <a:lnTo>
-                    <a:pt x="6660894" y="3369658"/>
-                  </a:lnTo>
-                  <a:lnTo>
-                    <a:pt x="6589272" y="3364551"/>
-                  </a:lnTo>
-                  <a:lnTo>
-                    <a:pt x="6517649" y="3359216"/>
-                  </a:lnTo>
-                  <a:lnTo>
-                    <a:pt x="6446027" y="3353641"/>
-                  </a:lnTo>
-                  <a:lnTo>
-                    <a:pt x="6374404" y="3347818"/>
-                  </a:lnTo>
-                  <a:lnTo>
-                    <a:pt x="6302782" y="3341733"/>
-                  </a:lnTo>
-                  <a:lnTo>
-                    <a:pt x="6231159" y="3335377"/>
-                  </a:lnTo>
-                  <a:lnTo>
-                    <a:pt x="6159537" y="3328735"/>
-                  </a:lnTo>
-                  <a:lnTo>
-                    <a:pt x="6087914" y="3321797"/>
-                  </a:lnTo>
-                  <a:lnTo>
-                    <a:pt x="6016292" y="3314548"/>
-                  </a:lnTo>
-                  <a:lnTo>
-                    <a:pt x="5944669" y="3306974"/>
-                  </a:lnTo>
-                  <a:lnTo>
-                    <a:pt x="5873047" y="3299061"/>
-                  </a:lnTo>
-                  <a:lnTo>
-                    <a:pt x="5801424" y="3290795"/>
-                  </a:lnTo>
-                  <a:lnTo>
-                    <a:pt x="5729802" y="3282158"/>
-                  </a:lnTo>
-                  <a:lnTo>
-                    <a:pt x="5658179" y="3273134"/>
-                  </a:lnTo>
-                  <a:lnTo>
-                    <a:pt x="5586557" y="3263707"/>
-                  </a:lnTo>
-                  <a:lnTo>
-                    <a:pt x="5514934" y="3253858"/>
-                  </a:lnTo>
-                  <a:lnTo>
-                    <a:pt x="5443311" y="3243568"/>
-                  </a:lnTo>
-                  <a:lnTo>
-                    <a:pt x="5371689" y="3232817"/>
-                  </a:lnTo>
-                  <a:lnTo>
-                    <a:pt x="5300066" y="3221585"/>
-                  </a:lnTo>
-                  <a:lnTo>
-                    <a:pt x="5228444" y="3209850"/>
-                  </a:lnTo>
-                  <a:lnTo>
-                    <a:pt x="5156821" y="3197590"/>
-                  </a:lnTo>
-                  <a:lnTo>
-                    <a:pt x="5085199" y="3184782"/>
-                  </a:lnTo>
-                  <a:lnTo>
-                    <a:pt x="5013576" y="3171399"/>
-                  </a:lnTo>
-                  <a:lnTo>
-                    <a:pt x="4941954" y="3157418"/>
-                  </a:lnTo>
-                  <a:lnTo>
-                    <a:pt x="4870331" y="3142811"/>
-                  </a:lnTo>
-                  <a:lnTo>
-                    <a:pt x="4798709" y="3127551"/>
-                  </a:lnTo>
-                  <a:lnTo>
-                    <a:pt x="4727086" y="3111607"/>
-                  </a:lnTo>
-                  <a:lnTo>
-                    <a:pt x="4655464" y="3094949"/>
-                  </a:lnTo>
-                  <a:lnTo>
-                    <a:pt x="4583841" y="3077546"/>
-                  </a:lnTo>
-                  <a:lnTo>
-                    <a:pt x="4512219" y="3059364"/>
-                  </a:lnTo>
-                  <a:lnTo>
-                    <a:pt x="4440596" y="3040368"/>
-                  </a:lnTo>
-                  <a:lnTo>
-                    <a:pt x="4368974" y="3020522"/>
-                  </a:lnTo>
-                  <a:lnTo>
-                    <a:pt x="4297351" y="2999787"/>
-                  </a:lnTo>
-                  <a:lnTo>
-                    <a:pt x="4225729" y="2978124"/>
-                  </a:lnTo>
-                  <a:lnTo>
-                    <a:pt x="4154106" y="2955492"/>
-                  </a:lnTo>
-                  <a:lnTo>
-                    <a:pt x="4082483" y="2931847"/>
-                  </a:lnTo>
-                  <a:lnTo>
-                    <a:pt x="4010861" y="2907143"/>
-                  </a:lnTo>
-                  <a:lnTo>
-                    <a:pt x="3939238" y="2881333"/>
-                  </a:lnTo>
-                  <a:lnTo>
-                    <a:pt x="3867616" y="2854368"/>
-                  </a:lnTo>
-                  <a:lnTo>
-                    <a:pt x="3795993" y="2826196"/>
-                  </a:lnTo>
-                  <a:lnTo>
-                    <a:pt x="3724371" y="2796763"/>
-                  </a:lnTo>
-                  <a:lnTo>
-                    <a:pt x="3652748" y="2766013"/>
-                  </a:lnTo>
-                  <a:lnTo>
-                    <a:pt x="3581126" y="2733886"/>
-                  </a:lnTo>
-                  <a:lnTo>
-                    <a:pt x="3509503" y="2700321"/>
-                  </a:lnTo>
-                  <a:lnTo>
-                    <a:pt x="3437881" y="2665254"/>
-                  </a:lnTo>
-                  <a:lnTo>
-                    <a:pt x="3366258" y="2648201"/>
-                  </a:lnTo>
-                  <a:lnTo>
-                    <a:pt x="3294636" y="2639384"/>
-                  </a:lnTo>
-                  <a:lnTo>
-                    <a:pt x="3223013" y="2630473"/>
-                  </a:lnTo>
-                  <a:lnTo>
-                    <a:pt x="3151391" y="2621468"/>
-                  </a:lnTo>
-                  <a:lnTo>
-                    <a:pt x="3079768" y="2612369"/>
-                  </a:lnTo>
-                  <a:lnTo>
-                    <a:pt x="3008146" y="2603173"/>
-                  </a:lnTo>
-                  <a:lnTo>
-                    <a:pt x="2936523" y="2593881"/>
-                  </a:lnTo>
-                  <a:lnTo>
-                    <a:pt x="2864901" y="2584490"/>
-                  </a:lnTo>
-                  <a:lnTo>
-                    <a:pt x="2793278" y="2575000"/>
-                  </a:lnTo>
-                  <a:lnTo>
-                    <a:pt x="2721655" y="2565410"/>
-                  </a:lnTo>
-                  <a:lnTo>
-                    <a:pt x="2650033" y="2555719"/>
-                  </a:lnTo>
-                  <a:lnTo>
-                    <a:pt x="2578410" y="2545925"/>
-                  </a:lnTo>
-                  <a:lnTo>
-                    <a:pt x="2506788" y="2536029"/>
-                  </a:lnTo>
-                  <a:lnTo>
-                    <a:pt x="2435165" y="2526027"/>
-                  </a:lnTo>
-                  <a:lnTo>
-                    <a:pt x="2363543" y="2515921"/>
-                  </a:lnTo>
-                  <a:lnTo>
-                    <a:pt x="2291920" y="2505707"/>
-                  </a:lnTo>
-                  <a:lnTo>
-                    <a:pt x="2220298" y="2495386"/>
-                  </a:lnTo>
-                  <a:lnTo>
-                    <a:pt x="2148675" y="2484956"/>
-                  </a:lnTo>
-                  <a:lnTo>
-                    <a:pt x="2077053" y="2474416"/>
-                  </a:lnTo>
-                  <a:lnTo>
-                    <a:pt x="2005430" y="2463764"/>
-                  </a:lnTo>
-                  <a:lnTo>
-                    <a:pt x="1933808" y="2453000"/>
-                  </a:lnTo>
-                  <a:lnTo>
-                    <a:pt x="1862185" y="2442123"/>
-                  </a:lnTo>
-                  <a:lnTo>
-                    <a:pt x="1790563" y="2431131"/>
-                  </a:lnTo>
-                  <a:lnTo>
-                    <a:pt x="1718940" y="2420023"/>
-                  </a:lnTo>
-                  <a:lnTo>
-                    <a:pt x="1647318" y="2408797"/>
-                  </a:lnTo>
-                  <a:lnTo>
-                    <a:pt x="1575695" y="2397453"/>
-                  </a:lnTo>
-                  <a:lnTo>
-                    <a:pt x="1504073" y="2385990"/>
-                  </a:lnTo>
-                  <a:lnTo>
-                    <a:pt x="1432450" y="2374405"/>
-                  </a:lnTo>
-                  <a:lnTo>
-                    <a:pt x="1360827" y="2362698"/>
-                  </a:lnTo>
-                  <a:lnTo>
-                    <a:pt x="1289205" y="2350868"/>
-                  </a:lnTo>
-                  <a:lnTo>
-                    <a:pt x="1217582" y="2338913"/>
-                  </a:lnTo>
-                  <a:lnTo>
-                    <a:pt x="1145960" y="2326831"/>
-                  </a:lnTo>
-                  <a:lnTo>
-                    <a:pt x="1074337" y="2314622"/>
-                  </a:lnTo>
-                  <a:lnTo>
-                    <a:pt x="1002715" y="2302285"/>
-                  </a:lnTo>
-                  <a:lnTo>
-                    <a:pt x="931092" y="2289817"/>
-                  </a:lnTo>
-                  <a:lnTo>
-                    <a:pt x="859470" y="2277217"/>
-                  </a:lnTo>
-                  <a:lnTo>
-                    <a:pt x="787847" y="2264485"/>
-                  </a:lnTo>
-                  <a:lnTo>
-                    <a:pt x="716225" y="2251618"/>
-                  </a:lnTo>
-                  <a:lnTo>
-                    <a:pt x="644602" y="2238615"/>
-                  </a:lnTo>
-                  <a:lnTo>
-                    <a:pt x="572980" y="2225476"/>
-                  </a:lnTo>
-                  <a:lnTo>
-                    <a:pt x="501357" y="2212197"/>
-                  </a:lnTo>
-                  <a:lnTo>
-                    <a:pt x="429735" y="2198778"/>
-                  </a:lnTo>
-                  <a:lnTo>
-                    <a:pt x="358112" y="2185218"/>
-                  </a:lnTo>
-                  <a:lnTo>
-                    <a:pt x="286490" y="2171515"/>
-                  </a:lnTo>
-                  <a:lnTo>
-                    <a:pt x="214867" y="2157667"/>
-                  </a:lnTo>
-                  <a:lnTo>
-                    <a:pt x="143245" y="2143673"/>
-                  </a:lnTo>
-                  <a:lnTo>
-                    <a:pt x="71622" y="2129531"/>
-                  </a:lnTo>
-                  <a:lnTo>
-                    <a:pt x="0" y="2115240"/>
+                    <a:pt x="0" y="0"/>
+                  </a:lnTo>
+                  <a:lnTo>
+                    <a:pt x="0" y="0"/>
+                  </a:lnTo>
+                </a:path>
+              </a:pathLst>
+            </a:custGeom>
+            <a:ln w="13550" cap="flat">
+              <a:solidFill>
+                <a:srgbClr val="EBEBEB">
+                  <a:alpha val="100000"/>
+                </a:srgbClr>
+              </a:solidFill>
+              <a:prstDash val="solid"/>
+              <a:round/>
+            </a:ln>
+          </p:spPr>
+          <p:txBody>
+            <a:bodyPr/>
+            <a:lstStyle/>
+            <a:p/>
+          </p:txBody>
+        </p:sp>
+        <p:sp>
+          <p:nvSpPr>
+            <p:cNvPr id="21" name="pg21"/>
+            <p:cNvSpPr/>
+            <p:nvPr/>
+          </p:nvSpPr>
+          <p:spPr>
+            <a:xfrm>
+              <a:off x="1235312" y="2143092"/>
+              <a:ext cx="6964104" cy="1225543"/>
+            </a:xfrm>
+            <a:custGeom>
+              <a:avLst/>
+              <a:pathLst>
+                <a:path w="6964104" h="1225543">
+                  <a:moveTo>
+                    <a:pt x="1049853" y="0"/>
+                  </a:moveTo>
+                  <a:lnTo>
+                    <a:pt x="1055167" y="4236"/>
+                  </a:lnTo>
+                  <a:lnTo>
+                    <a:pt x="1125511" y="57918"/>
+                  </a:lnTo>
+                  <a:lnTo>
+                    <a:pt x="1195856" y="109300"/>
+                  </a:lnTo>
+                  <a:lnTo>
+                    <a:pt x="1266200" y="158480"/>
+                  </a:lnTo>
+                  <a:lnTo>
+                    <a:pt x="1336545" y="205554"/>
+                  </a:lnTo>
+                  <a:lnTo>
+                    <a:pt x="1406889" y="250610"/>
+                  </a:lnTo>
+                  <a:lnTo>
+                    <a:pt x="1477234" y="293736"/>
+                  </a:lnTo>
+                  <a:lnTo>
+                    <a:pt x="1547578" y="335015"/>
+                  </a:lnTo>
+                  <a:lnTo>
+                    <a:pt x="1617923" y="374525"/>
+                  </a:lnTo>
+                  <a:lnTo>
+                    <a:pt x="1688267" y="412342"/>
+                  </a:lnTo>
+                  <a:lnTo>
+                    <a:pt x="1758612" y="448539"/>
+                  </a:lnTo>
+                  <a:lnTo>
+                    <a:pt x="1828956" y="483185"/>
+                  </a:lnTo>
+                  <a:lnTo>
+                    <a:pt x="1899301" y="516347"/>
+                  </a:lnTo>
+                  <a:lnTo>
+                    <a:pt x="1969645" y="548088"/>
+                  </a:lnTo>
+                  <a:lnTo>
+                    <a:pt x="2039990" y="578469"/>
+                  </a:lnTo>
+                  <a:lnTo>
+                    <a:pt x="2110334" y="607548"/>
+                  </a:lnTo>
+                  <a:lnTo>
+                    <a:pt x="2180679" y="635382"/>
+                  </a:lnTo>
+                  <a:lnTo>
+                    <a:pt x="2251023" y="662023"/>
+                  </a:lnTo>
+                  <a:lnTo>
+                    <a:pt x="2321368" y="687523"/>
+                  </a:lnTo>
+                  <a:lnTo>
+                    <a:pt x="2391712" y="711930"/>
+                  </a:lnTo>
+                  <a:lnTo>
+                    <a:pt x="2462057" y="735291"/>
+                  </a:lnTo>
+                  <a:lnTo>
+                    <a:pt x="2532401" y="757652"/>
+                  </a:lnTo>
+                  <a:lnTo>
+                    <a:pt x="2602746" y="779054"/>
+                  </a:lnTo>
+                  <a:lnTo>
+                    <a:pt x="2673090" y="799540"/>
+                  </a:lnTo>
+                  <a:lnTo>
+                    <a:pt x="2743435" y="819148"/>
+                  </a:lnTo>
+                  <a:lnTo>
+                    <a:pt x="2813779" y="837916"/>
+                  </a:lnTo>
+                  <a:lnTo>
+                    <a:pt x="2884124" y="855880"/>
+                  </a:lnTo>
+                  <a:lnTo>
+                    <a:pt x="2954468" y="873074"/>
+                  </a:lnTo>
+                  <a:lnTo>
+                    <a:pt x="3024813" y="889531"/>
+                  </a:lnTo>
+                  <a:lnTo>
+                    <a:pt x="3095157" y="905284"/>
+                  </a:lnTo>
+                  <a:lnTo>
+                    <a:pt x="3165502" y="920361"/>
+                  </a:lnTo>
+                  <a:lnTo>
+                    <a:pt x="3235846" y="934793"/>
+                  </a:lnTo>
+                  <a:lnTo>
+                    <a:pt x="3306191" y="948606"/>
+                  </a:lnTo>
+                  <a:lnTo>
+                    <a:pt x="3376535" y="958822"/>
+                  </a:lnTo>
+                  <a:lnTo>
+                    <a:pt x="3446880" y="961938"/>
+                  </a:lnTo>
+                  <a:lnTo>
+                    <a:pt x="3517224" y="965021"/>
+                  </a:lnTo>
+                  <a:lnTo>
+                    <a:pt x="3587569" y="968072"/>
+                  </a:lnTo>
+                  <a:lnTo>
+                    <a:pt x="3657913" y="971092"/>
+                  </a:lnTo>
+                  <a:lnTo>
+                    <a:pt x="3728257" y="974079"/>
+                  </a:lnTo>
+                  <a:lnTo>
+                    <a:pt x="3798602" y="977036"/>
+                  </a:lnTo>
+                  <a:lnTo>
+                    <a:pt x="3868946" y="979962"/>
+                  </a:lnTo>
+                  <a:lnTo>
+                    <a:pt x="3939291" y="982857"/>
+                  </a:lnTo>
+                  <a:lnTo>
+                    <a:pt x="4009635" y="985722"/>
+                  </a:lnTo>
+                  <a:lnTo>
+                    <a:pt x="4079980" y="988557"/>
+                  </a:lnTo>
+                  <a:lnTo>
+                    <a:pt x="4150324" y="991362"/>
+                  </a:lnTo>
+                  <a:lnTo>
+                    <a:pt x="4220669" y="994138"/>
+                  </a:lnTo>
+                  <a:lnTo>
+                    <a:pt x="4291013" y="996885"/>
+                  </a:lnTo>
+                  <a:lnTo>
+                    <a:pt x="4361358" y="999604"/>
+                  </a:lnTo>
+                  <a:lnTo>
+                    <a:pt x="4431702" y="1002294"/>
+                  </a:lnTo>
+                  <a:lnTo>
+                    <a:pt x="4502047" y="1004956"/>
+                  </a:lnTo>
+                  <a:lnTo>
+                    <a:pt x="4572391" y="1007590"/>
+                  </a:lnTo>
+                  <a:lnTo>
+                    <a:pt x="4642736" y="1010197"/>
+                  </a:lnTo>
+                  <a:lnTo>
+                    <a:pt x="4713080" y="1012776"/>
+                  </a:lnTo>
+                  <a:lnTo>
+                    <a:pt x="4783425" y="1015328"/>
+                  </a:lnTo>
+                  <a:lnTo>
+                    <a:pt x="4853769" y="1017854"/>
+                  </a:lnTo>
+                  <a:lnTo>
+                    <a:pt x="4924114" y="1020354"/>
+                  </a:lnTo>
+                  <a:lnTo>
+                    <a:pt x="4994458" y="1022827"/>
+                  </a:lnTo>
+                  <a:lnTo>
+                    <a:pt x="5064803" y="1025275"/>
+                  </a:lnTo>
+                  <a:lnTo>
+                    <a:pt x="5135147" y="1027697"/>
+                  </a:lnTo>
+                  <a:lnTo>
+                    <a:pt x="5205492" y="1030093"/>
+                  </a:lnTo>
+                  <a:lnTo>
+                    <a:pt x="5275836" y="1032465"/>
+                  </a:lnTo>
+                  <a:lnTo>
+                    <a:pt x="5346181" y="1034812"/>
+                  </a:lnTo>
+                  <a:lnTo>
+                    <a:pt x="5416525" y="1037134"/>
+                  </a:lnTo>
+                  <a:lnTo>
+                    <a:pt x="5486870" y="1039432"/>
+                  </a:lnTo>
+                  <a:lnTo>
+                    <a:pt x="5557214" y="1041706"/>
+                  </a:lnTo>
+                  <a:lnTo>
+                    <a:pt x="5627559" y="1043957"/>
+                  </a:lnTo>
+                  <a:lnTo>
+                    <a:pt x="5697903" y="1046184"/>
+                  </a:lnTo>
+                  <a:lnTo>
+                    <a:pt x="5768248" y="1048387"/>
+                  </a:lnTo>
+                  <a:lnTo>
+                    <a:pt x="5838592" y="1050568"/>
+                  </a:lnTo>
+                  <a:lnTo>
+                    <a:pt x="5908937" y="1052726"/>
+                  </a:lnTo>
+                  <a:lnTo>
+                    <a:pt x="5979281" y="1054861"/>
+                  </a:lnTo>
+                  <a:lnTo>
+                    <a:pt x="6049626" y="1056974"/>
+                  </a:lnTo>
+                  <a:lnTo>
+                    <a:pt x="6119970" y="1059065"/>
+                  </a:lnTo>
+                  <a:lnTo>
+                    <a:pt x="6190315" y="1061134"/>
+                  </a:lnTo>
+                  <a:lnTo>
+                    <a:pt x="6260659" y="1063181"/>
+                  </a:lnTo>
+                  <a:lnTo>
+                    <a:pt x="6331004" y="1065208"/>
+                  </a:lnTo>
+                  <a:lnTo>
+                    <a:pt x="6401348" y="1067212"/>
+                  </a:lnTo>
+                  <a:lnTo>
+                    <a:pt x="6471693" y="1069197"/>
+                  </a:lnTo>
+                  <a:lnTo>
+                    <a:pt x="6542037" y="1071160"/>
+                  </a:lnTo>
+                  <a:lnTo>
+                    <a:pt x="6612382" y="1073103"/>
+                  </a:lnTo>
+                  <a:lnTo>
+                    <a:pt x="6682726" y="1075025"/>
+                  </a:lnTo>
+                  <a:lnTo>
+                    <a:pt x="6753071" y="1076928"/>
+                  </a:lnTo>
+                  <a:lnTo>
+                    <a:pt x="6823415" y="1078810"/>
+                  </a:lnTo>
+                  <a:lnTo>
+                    <a:pt x="6893760" y="1080673"/>
+                  </a:lnTo>
+                  <a:lnTo>
+                    <a:pt x="6964104" y="1082516"/>
+                  </a:lnTo>
+                  <a:lnTo>
+                    <a:pt x="6964104" y="1225543"/>
+                  </a:lnTo>
+                  <a:lnTo>
+                    <a:pt x="6893760" y="1224126"/>
+                  </a:lnTo>
+                  <a:lnTo>
+                    <a:pt x="6823415" y="1222645"/>
+                  </a:lnTo>
+                  <a:lnTo>
+                    <a:pt x="6753071" y="1221098"/>
+                  </a:lnTo>
+                  <a:lnTo>
+                    <a:pt x="6682726" y="1219482"/>
+                  </a:lnTo>
+                  <a:lnTo>
+                    <a:pt x="6612382" y="1217794"/>
+                  </a:lnTo>
+                  <a:lnTo>
+                    <a:pt x="6542037" y="1216030"/>
+                  </a:lnTo>
+                  <a:lnTo>
+                    <a:pt x="6471693" y="1214187"/>
+                  </a:lnTo>
+                  <a:lnTo>
+                    <a:pt x="6401348" y="1212262"/>
+                  </a:lnTo>
+                  <a:lnTo>
+                    <a:pt x="6331004" y="1210250"/>
+                  </a:lnTo>
+                  <a:lnTo>
+                    <a:pt x="6260659" y="1208148"/>
+                  </a:lnTo>
+                  <a:lnTo>
+                    <a:pt x="6190315" y="1205953"/>
+                  </a:lnTo>
+                  <a:lnTo>
+                    <a:pt x="6119970" y="1203659"/>
+                  </a:lnTo>
+                  <a:lnTo>
+                    <a:pt x="6049626" y="1201262"/>
+                  </a:lnTo>
+                  <a:lnTo>
+                    <a:pt x="5979281" y="1198758"/>
+                  </a:lnTo>
+                  <a:lnTo>
+                    <a:pt x="5908937" y="1196142"/>
+                  </a:lnTo>
+                  <a:lnTo>
+                    <a:pt x="5838592" y="1193409"/>
+                  </a:lnTo>
+                  <a:lnTo>
+                    <a:pt x="5768248" y="1190553"/>
+                  </a:lnTo>
+                  <a:lnTo>
+                    <a:pt x="5697903" y="1187570"/>
+                  </a:lnTo>
+                  <a:lnTo>
+                    <a:pt x="5627559" y="1184453"/>
+                  </a:lnTo>
+                  <a:lnTo>
+                    <a:pt x="5557214" y="1181197"/>
+                  </a:lnTo>
+                  <a:lnTo>
+                    <a:pt x="5486870" y="1177795"/>
+                  </a:lnTo>
+                  <a:lnTo>
+                    <a:pt x="5416525" y="1174240"/>
+                  </a:lnTo>
+                  <a:lnTo>
+                    <a:pt x="5346181" y="1170527"/>
+                  </a:lnTo>
+                  <a:lnTo>
+                    <a:pt x="5275836" y="1166647"/>
+                  </a:lnTo>
+                  <a:lnTo>
+                    <a:pt x="5205492" y="1162594"/>
+                  </a:lnTo>
+                  <a:lnTo>
+                    <a:pt x="5135147" y="1158359"/>
+                  </a:lnTo>
+                  <a:lnTo>
+                    <a:pt x="5064803" y="1153935"/>
+                  </a:lnTo>
+                  <a:lnTo>
+                    <a:pt x="4994458" y="1149312"/>
+                  </a:lnTo>
+                  <a:lnTo>
+                    <a:pt x="4924114" y="1144483"/>
+                  </a:lnTo>
+                  <a:lnTo>
+                    <a:pt x="4853769" y="1139438"/>
+                  </a:lnTo>
+                  <a:lnTo>
+                    <a:pt x="4783425" y="1134166"/>
+                  </a:lnTo>
+                  <a:lnTo>
+                    <a:pt x="4713080" y="1128659"/>
+                  </a:lnTo>
+                  <a:lnTo>
+                    <a:pt x="4642736" y="1122905"/>
+                  </a:lnTo>
+                  <a:lnTo>
+                    <a:pt x="4572391" y="1116894"/>
+                  </a:lnTo>
+                  <a:lnTo>
+                    <a:pt x="4502047" y="1110614"/>
+                  </a:lnTo>
+                  <a:lnTo>
+                    <a:pt x="4431702" y="1104052"/>
+                  </a:lnTo>
+                  <a:lnTo>
+                    <a:pt x="4361358" y="1097197"/>
+                  </a:lnTo>
+                  <a:lnTo>
+                    <a:pt x="4291013" y="1090035"/>
+                  </a:lnTo>
+                  <a:lnTo>
+                    <a:pt x="4220669" y="1082552"/>
+                  </a:lnTo>
+                  <a:lnTo>
+                    <a:pt x="4150324" y="1074735"/>
+                  </a:lnTo>
+                  <a:lnTo>
+                    <a:pt x="4079980" y="1066567"/>
+                  </a:lnTo>
+                  <a:lnTo>
+                    <a:pt x="4009635" y="1058034"/>
+                  </a:lnTo>
+                  <a:lnTo>
+                    <a:pt x="3939291" y="1049119"/>
+                  </a:lnTo>
+                  <a:lnTo>
+                    <a:pt x="3868946" y="1039805"/>
+                  </a:lnTo>
+                  <a:lnTo>
+                    <a:pt x="3798602" y="1030074"/>
+                  </a:lnTo>
+                  <a:lnTo>
+                    <a:pt x="3728257" y="1019907"/>
+                  </a:lnTo>
+                  <a:lnTo>
+                    <a:pt x="3657913" y="1009286"/>
+                  </a:lnTo>
+                  <a:lnTo>
+                    <a:pt x="3587569" y="998189"/>
+                  </a:lnTo>
+                  <a:lnTo>
+                    <a:pt x="3517224" y="986595"/>
+                  </a:lnTo>
+                  <a:lnTo>
+                    <a:pt x="3446880" y="974482"/>
+                  </a:lnTo>
+                  <a:lnTo>
+                    <a:pt x="3376535" y="961827"/>
+                  </a:lnTo>
+                  <a:lnTo>
+                    <a:pt x="3306191" y="955673"/>
+                  </a:lnTo>
+                  <a:lnTo>
+                    <a:pt x="3235846" y="952491"/>
+                  </a:lnTo>
+                  <a:lnTo>
+                    <a:pt x="3165502" y="949275"/>
+                  </a:lnTo>
+                  <a:lnTo>
+                    <a:pt x="3095157" y="946026"/>
+                  </a:lnTo>
+                  <a:lnTo>
+                    <a:pt x="3024813" y="942742"/>
+                  </a:lnTo>
+                  <a:lnTo>
+                    <a:pt x="2954468" y="939424"/>
+                  </a:lnTo>
+                  <a:lnTo>
+                    <a:pt x="2884124" y="936070"/>
+                  </a:lnTo>
+                  <a:lnTo>
+                    <a:pt x="2813779" y="932681"/>
+                  </a:lnTo>
+                  <a:lnTo>
+                    <a:pt x="2743435" y="929257"/>
+                  </a:lnTo>
+                  <a:lnTo>
+                    <a:pt x="2673090" y="925796"/>
+                  </a:lnTo>
+                  <a:lnTo>
+                    <a:pt x="2602746" y="922299"/>
+                  </a:lnTo>
+                  <a:lnTo>
+                    <a:pt x="2532401" y="918764"/>
+                  </a:lnTo>
+                  <a:lnTo>
+                    <a:pt x="2462057" y="915193"/>
+                  </a:lnTo>
+                  <a:lnTo>
+                    <a:pt x="2391712" y="911584"/>
+                  </a:lnTo>
+                  <a:lnTo>
+                    <a:pt x="2321368" y="907936"/>
+                  </a:lnTo>
+                  <a:lnTo>
+                    <a:pt x="2251023" y="904250"/>
+                  </a:lnTo>
+                  <a:lnTo>
+                    <a:pt x="2180679" y="900526"/>
+                  </a:lnTo>
+                  <a:lnTo>
+                    <a:pt x="2110334" y="896762"/>
+                  </a:lnTo>
+                  <a:lnTo>
+                    <a:pt x="2039990" y="892958"/>
+                  </a:lnTo>
+                  <a:lnTo>
+                    <a:pt x="1969645" y="889114"/>
+                  </a:lnTo>
+                  <a:lnTo>
+                    <a:pt x="1899301" y="885230"/>
+                  </a:lnTo>
+                  <a:lnTo>
+                    <a:pt x="1828956" y="881304"/>
+                  </a:lnTo>
+                  <a:lnTo>
+                    <a:pt x="1758612" y="877338"/>
+                  </a:lnTo>
+                  <a:lnTo>
+                    <a:pt x="1688267" y="873329"/>
+                  </a:lnTo>
+                  <a:lnTo>
+                    <a:pt x="1617923" y="869278"/>
+                  </a:lnTo>
+                  <a:lnTo>
+                    <a:pt x="1547578" y="865184"/>
+                  </a:lnTo>
+                  <a:lnTo>
+                    <a:pt x="1477234" y="861047"/>
+                  </a:lnTo>
+                  <a:lnTo>
+                    <a:pt x="1406889" y="856867"/>
+                  </a:lnTo>
+                  <a:lnTo>
+                    <a:pt x="1336545" y="852642"/>
+                  </a:lnTo>
+                  <a:lnTo>
+                    <a:pt x="1266200" y="848373"/>
+                  </a:lnTo>
+                  <a:lnTo>
+                    <a:pt x="1195856" y="844058"/>
+                  </a:lnTo>
+                  <a:lnTo>
+                    <a:pt x="1125511" y="839698"/>
+                  </a:lnTo>
+                  <a:lnTo>
+                    <a:pt x="1055167" y="835292"/>
+                  </a:lnTo>
+                  <a:lnTo>
+                    <a:pt x="984822" y="830840"/>
+                  </a:lnTo>
+                  <a:lnTo>
+                    <a:pt x="914478" y="826341"/>
+                  </a:lnTo>
+                  <a:lnTo>
+                    <a:pt x="844133" y="821794"/>
+                  </a:lnTo>
+                  <a:lnTo>
+                    <a:pt x="773789" y="817199"/>
+                  </a:lnTo>
+                  <a:lnTo>
+                    <a:pt x="703444" y="812556"/>
+                  </a:lnTo>
+                  <a:lnTo>
+                    <a:pt x="633100" y="807863"/>
+                  </a:lnTo>
+                  <a:lnTo>
+                    <a:pt x="562755" y="803121"/>
+                  </a:lnTo>
+                  <a:lnTo>
+                    <a:pt x="492411" y="798330"/>
+                  </a:lnTo>
+                  <a:lnTo>
+                    <a:pt x="422066" y="793487"/>
+                  </a:lnTo>
+                  <a:lnTo>
+                    <a:pt x="351722" y="788594"/>
+                  </a:lnTo>
+                  <a:lnTo>
+                    <a:pt x="281377" y="783648"/>
+                  </a:lnTo>
+                  <a:lnTo>
+                    <a:pt x="211033" y="778651"/>
+                  </a:lnTo>
+                  <a:lnTo>
+                    <a:pt x="140688" y="773601"/>
+                  </a:lnTo>
+                  <a:lnTo>
+                    <a:pt x="70344" y="768497"/>
+                  </a:lnTo>
+                  <a:lnTo>
+                    <a:pt x="0" y="763340"/>
                   </a:lnTo>
                   <a:close/>
                 </a:path>
@@ -3542,601 +3577,276 @@
         </p:sp>
         <p:sp>
           <p:nvSpPr>
-            <p:cNvPr id="21" name="pl21"/>
-            <p:cNvSpPr/>
-            <p:nvPr/>
-          </p:nvSpPr>
-          <p:spPr>
-            <a:xfrm>
-              <a:off x="2240976" y="2073503"/>
-              <a:ext cx="6021702" cy="2999688"/>
-            </a:xfrm>
-            <a:custGeom>
-              <a:avLst/>
-              <a:pathLst>
-                <a:path w="6021702" h="2999688">
-                  <a:moveTo>
-                    <a:pt x="0" y="0"/>
-                  </a:moveTo>
-                  <a:lnTo>
-                    <a:pt x="5410" y="11740"/>
-                  </a:lnTo>
-                  <a:lnTo>
-                    <a:pt x="77033" y="160494"/>
-                  </a:lnTo>
-                  <a:lnTo>
-                    <a:pt x="148655" y="302874"/>
-                  </a:lnTo>
-                  <a:lnTo>
-                    <a:pt x="220278" y="439155"/>
-                  </a:lnTo>
-                  <a:lnTo>
-                    <a:pt x="291900" y="569596"/>
-                  </a:lnTo>
-                  <a:lnTo>
-                    <a:pt x="363523" y="694449"/>
-                  </a:lnTo>
-                  <a:lnTo>
-                    <a:pt x="435145" y="813953"/>
-                  </a:lnTo>
-                  <a:lnTo>
-                    <a:pt x="506768" y="928337"/>
-                  </a:lnTo>
-                  <a:lnTo>
-                    <a:pt x="578390" y="1037820"/>
-                  </a:lnTo>
-                  <a:lnTo>
-                    <a:pt x="650013" y="1142613"/>
-                  </a:lnTo>
-                  <a:lnTo>
-                    <a:pt x="721636" y="1242916"/>
-                  </a:lnTo>
-                  <a:lnTo>
-                    <a:pt x="793258" y="1338921"/>
-                  </a:lnTo>
-                  <a:lnTo>
-                    <a:pt x="864881" y="1430814"/>
-                  </a:lnTo>
-                  <a:lnTo>
-                    <a:pt x="936503" y="1518769"/>
-                  </a:lnTo>
-                  <a:lnTo>
-                    <a:pt x="1008126" y="1602956"/>
-                  </a:lnTo>
-                  <a:lnTo>
-                    <a:pt x="1079748" y="1683536"/>
-                  </a:lnTo>
-                  <a:lnTo>
-                    <a:pt x="1151371" y="1760664"/>
-                  </a:lnTo>
-                  <a:lnTo>
-                    <a:pt x="1222993" y="1834487"/>
-                  </a:lnTo>
-                  <a:lnTo>
-                    <a:pt x="1294616" y="1905147"/>
-                  </a:lnTo>
-                  <a:lnTo>
-                    <a:pt x="1366238" y="1972781"/>
-                  </a:lnTo>
-                  <a:lnTo>
-                    <a:pt x="1437861" y="2037516"/>
-                  </a:lnTo>
-                  <a:lnTo>
-                    <a:pt x="1509483" y="2099478"/>
-                  </a:lnTo>
-                  <a:lnTo>
-                    <a:pt x="1581106" y="2158785"/>
-                  </a:lnTo>
-                  <a:lnTo>
-                    <a:pt x="1652728" y="2215551"/>
-                  </a:lnTo>
-                  <a:lnTo>
-                    <a:pt x="1724351" y="2269886"/>
-                  </a:lnTo>
-                  <a:lnTo>
-                    <a:pt x="1795973" y="2321892"/>
-                  </a:lnTo>
-                  <a:lnTo>
-                    <a:pt x="1867596" y="2371670"/>
-                  </a:lnTo>
-                  <a:lnTo>
-                    <a:pt x="1939218" y="2419316"/>
-                  </a:lnTo>
-                  <a:lnTo>
-                    <a:pt x="2010841" y="2464920"/>
-                  </a:lnTo>
-                  <a:lnTo>
-                    <a:pt x="2082464" y="2508570"/>
-                  </a:lnTo>
-                  <a:lnTo>
-                    <a:pt x="2154086" y="2550350"/>
-                  </a:lnTo>
-                  <a:lnTo>
-                    <a:pt x="2225709" y="2590340"/>
-                  </a:lnTo>
-                  <a:lnTo>
-                    <a:pt x="2297331" y="2628617"/>
-                  </a:lnTo>
-                  <a:lnTo>
-                    <a:pt x="2368954" y="2656926"/>
-                  </a:lnTo>
-                  <a:lnTo>
-                    <a:pt x="2440576" y="2665561"/>
-                  </a:lnTo>
-                  <a:lnTo>
-                    <a:pt x="2512199" y="2674105"/>
-                  </a:lnTo>
-                  <a:lnTo>
-                    <a:pt x="2583821" y="2682560"/>
-                  </a:lnTo>
-                  <a:lnTo>
-                    <a:pt x="2655444" y="2690926"/>
-                  </a:lnTo>
-                  <a:lnTo>
-                    <a:pt x="2727066" y="2699206"/>
-                  </a:lnTo>
-                  <a:lnTo>
-                    <a:pt x="2798689" y="2707398"/>
-                  </a:lnTo>
-                  <a:lnTo>
-                    <a:pt x="2870311" y="2715506"/>
-                  </a:lnTo>
-                  <a:lnTo>
-                    <a:pt x="2941934" y="2723528"/>
-                  </a:lnTo>
-                  <a:lnTo>
-                    <a:pt x="3013556" y="2731467"/>
-                  </a:lnTo>
-                  <a:lnTo>
-                    <a:pt x="3085179" y="2739323"/>
-                  </a:lnTo>
-                  <a:lnTo>
-                    <a:pt x="3156801" y="2747097"/>
-                  </a:lnTo>
-                  <a:lnTo>
-                    <a:pt x="3228424" y="2754789"/>
-                  </a:lnTo>
-                  <a:lnTo>
-                    <a:pt x="3300046" y="2762402"/>
-                  </a:lnTo>
-                  <a:lnTo>
-                    <a:pt x="3371669" y="2769934"/>
-                  </a:lnTo>
-                  <a:lnTo>
-                    <a:pt x="3443292" y="2777389"/>
-                  </a:lnTo>
-                  <a:lnTo>
-                    <a:pt x="3514914" y="2784765"/>
-                  </a:lnTo>
-                  <a:lnTo>
-                    <a:pt x="3586537" y="2792064"/>
-                  </a:lnTo>
-                  <a:lnTo>
-                    <a:pt x="3658159" y="2799287"/>
-                  </a:lnTo>
-                  <a:lnTo>
-                    <a:pt x="3729782" y="2806435"/>
-                  </a:lnTo>
-                  <a:lnTo>
-                    <a:pt x="3801404" y="2813508"/>
-                  </a:lnTo>
-                  <a:lnTo>
-                    <a:pt x="3873027" y="2820507"/>
-                  </a:lnTo>
-                  <a:lnTo>
-                    <a:pt x="3944649" y="2827433"/>
-                  </a:lnTo>
-                  <a:lnTo>
-                    <a:pt x="4016272" y="2834287"/>
-                  </a:lnTo>
-                  <a:lnTo>
-                    <a:pt x="4087894" y="2841069"/>
-                  </a:lnTo>
-                  <a:lnTo>
-                    <a:pt x="4159517" y="2847780"/>
-                  </a:lnTo>
-                  <a:lnTo>
-                    <a:pt x="4231139" y="2854421"/>
-                  </a:lnTo>
-                  <a:lnTo>
-                    <a:pt x="4302762" y="2860993"/>
-                  </a:lnTo>
-                  <a:lnTo>
-                    <a:pt x="4374384" y="2867497"/>
-                  </a:lnTo>
-                  <a:lnTo>
-                    <a:pt x="4446007" y="2873932"/>
-                  </a:lnTo>
-                  <a:lnTo>
-                    <a:pt x="4517629" y="2880300"/>
-                  </a:lnTo>
-                  <a:lnTo>
-                    <a:pt x="4589252" y="2886602"/>
-                  </a:lnTo>
-                  <a:lnTo>
-                    <a:pt x="4660874" y="2892838"/>
-                  </a:lnTo>
-                  <a:lnTo>
-                    <a:pt x="4732497" y="2899008"/>
-                  </a:lnTo>
-                  <a:lnTo>
-                    <a:pt x="4804119" y="2905115"/>
-                  </a:lnTo>
-                  <a:lnTo>
-                    <a:pt x="4875742" y="2911157"/>
-                  </a:lnTo>
-                  <a:lnTo>
-                    <a:pt x="4947365" y="2917137"/>
-                  </a:lnTo>
-                  <a:lnTo>
-                    <a:pt x="5018987" y="2923054"/>
-                  </a:lnTo>
-                  <a:lnTo>
-                    <a:pt x="5090610" y="2928909"/>
-                  </a:lnTo>
-                  <a:lnTo>
-                    <a:pt x="5162232" y="2934703"/>
-                  </a:lnTo>
-                  <a:lnTo>
-                    <a:pt x="5233855" y="2940436"/>
-                  </a:lnTo>
-                  <a:lnTo>
-                    <a:pt x="5305477" y="2946110"/>
-                  </a:lnTo>
-                  <a:lnTo>
-                    <a:pt x="5377100" y="2951724"/>
-                  </a:lnTo>
-                  <a:lnTo>
-                    <a:pt x="5448722" y="2957280"/>
-                  </a:lnTo>
-                  <a:lnTo>
-                    <a:pt x="5520345" y="2962778"/>
-                  </a:lnTo>
-                  <a:lnTo>
-                    <a:pt x="5591967" y="2968218"/>
-                  </a:lnTo>
-                  <a:lnTo>
-                    <a:pt x="5663590" y="2973602"/>
-                  </a:lnTo>
-                  <a:lnTo>
-                    <a:pt x="5735212" y="2978929"/>
-                  </a:lnTo>
-                  <a:lnTo>
-                    <a:pt x="5806835" y="2984201"/>
-                  </a:lnTo>
-                  <a:lnTo>
-                    <a:pt x="5878457" y="2989417"/>
-                  </a:lnTo>
-                  <a:lnTo>
-                    <a:pt x="5950080" y="2994580"/>
-                  </a:lnTo>
-                  <a:lnTo>
-                    <a:pt x="6021702" y="2999688"/>
-                  </a:lnTo>
-                </a:path>
-              </a:pathLst>
-            </a:custGeom>
-          </p:spPr>
-          <p:txBody>
-            <a:bodyPr/>
-            <a:lstStyle/>
-            <a:p/>
-          </p:txBody>
-        </p:sp>
-        <p:sp>
-          <p:nvSpPr>
             <p:cNvPr id="22" name="pl22"/>
             <p:cNvSpPr/>
             <p:nvPr/>
           </p:nvSpPr>
           <p:spPr>
             <a:xfrm>
-              <a:off x="1172049" y="4188743"/>
-              <a:ext cx="7090630" cy="1280777"/>
+              <a:off x="2285165" y="2143092"/>
+              <a:ext cx="5914251" cy="1082516"/>
             </a:xfrm>
             <a:custGeom>
               <a:avLst/>
               <a:pathLst>
-                <a:path w="7090630" h="1280777">
+                <a:path w="5914251" h="1082516">
                   <a:moveTo>
-                    <a:pt x="7090630" y="1280777"/>
+                    <a:pt x="0" y="0"/>
                   </a:moveTo>
                   <a:lnTo>
-                    <a:pt x="7019007" y="1276850"/>
-                  </a:lnTo>
-                  <a:lnTo>
-                    <a:pt x="6947385" y="1272748"/>
-                  </a:lnTo>
-                  <a:lnTo>
-                    <a:pt x="6875762" y="1268462"/>
-                  </a:lnTo>
-                  <a:lnTo>
-                    <a:pt x="6804139" y="1263983"/>
-                  </a:lnTo>
-                  <a:lnTo>
-                    <a:pt x="6732517" y="1259305"/>
-                  </a:lnTo>
-                  <a:lnTo>
-                    <a:pt x="6660894" y="1254417"/>
-                  </a:lnTo>
-                  <a:lnTo>
-                    <a:pt x="6589272" y="1249310"/>
-                  </a:lnTo>
-                  <a:lnTo>
-                    <a:pt x="6517649" y="1243975"/>
-                  </a:lnTo>
-                  <a:lnTo>
-                    <a:pt x="6446027" y="1238401"/>
-                  </a:lnTo>
-                  <a:lnTo>
-                    <a:pt x="6374404" y="1232577"/>
-                  </a:lnTo>
-                  <a:lnTo>
-                    <a:pt x="6302782" y="1226493"/>
-                  </a:lnTo>
-                  <a:lnTo>
-                    <a:pt x="6231159" y="1220136"/>
-                  </a:lnTo>
-                  <a:lnTo>
-                    <a:pt x="6159537" y="1213495"/>
-                  </a:lnTo>
-                  <a:lnTo>
-                    <a:pt x="6087914" y="1206556"/>
-                  </a:lnTo>
-                  <a:lnTo>
-                    <a:pt x="6016292" y="1199307"/>
-                  </a:lnTo>
-                  <a:lnTo>
-                    <a:pt x="5944669" y="1191733"/>
-                  </a:lnTo>
-                  <a:lnTo>
-                    <a:pt x="5873047" y="1183821"/>
-                  </a:lnTo>
-                  <a:lnTo>
-                    <a:pt x="5801424" y="1175554"/>
-                  </a:lnTo>
-                  <a:lnTo>
-                    <a:pt x="5729802" y="1166917"/>
-                  </a:lnTo>
-                  <a:lnTo>
-                    <a:pt x="5658179" y="1157894"/>
-                  </a:lnTo>
-                  <a:lnTo>
-                    <a:pt x="5586557" y="1148466"/>
-                  </a:lnTo>
-                  <a:lnTo>
-                    <a:pt x="5514934" y="1138617"/>
-                  </a:lnTo>
-                  <a:lnTo>
-                    <a:pt x="5443311" y="1128327"/>
-                  </a:lnTo>
-                  <a:lnTo>
-                    <a:pt x="5371689" y="1117576"/>
-                  </a:lnTo>
-                  <a:lnTo>
-                    <a:pt x="5300066" y="1106344"/>
-                  </a:lnTo>
-                  <a:lnTo>
-                    <a:pt x="5228444" y="1094610"/>
-                  </a:lnTo>
-                  <a:lnTo>
-                    <a:pt x="5156821" y="1082350"/>
-                  </a:lnTo>
-                  <a:lnTo>
-                    <a:pt x="5085199" y="1069541"/>
-                  </a:lnTo>
-                  <a:lnTo>
-                    <a:pt x="5013576" y="1056159"/>
-                  </a:lnTo>
-                  <a:lnTo>
-                    <a:pt x="4941954" y="1042178"/>
-                  </a:lnTo>
-                  <a:lnTo>
-                    <a:pt x="4870331" y="1027571"/>
-                  </a:lnTo>
-                  <a:lnTo>
-                    <a:pt x="4798709" y="1012310"/>
-                  </a:lnTo>
-                  <a:lnTo>
-                    <a:pt x="4727086" y="996366"/>
-                  </a:lnTo>
-                  <a:lnTo>
-                    <a:pt x="4655464" y="979709"/>
-                  </a:lnTo>
-                  <a:lnTo>
-                    <a:pt x="4583841" y="962305"/>
-                  </a:lnTo>
-                  <a:lnTo>
-                    <a:pt x="4512219" y="944123"/>
-                  </a:lnTo>
-                  <a:lnTo>
-                    <a:pt x="4440596" y="925127"/>
-                  </a:lnTo>
-                  <a:lnTo>
-                    <a:pt x="4368974" y="905281"/>
-                  </a:lnTo>
-                  <a:lnTo>
-                    <a:pt x="4297351" y="884546"/>
-                  </a:lnTo>
-                  <a:lnTo>
-                    <a:pt x="4225729" y="862884"/>
-                  </a:lnTo>
-                  <a:lnTo>
-                    <a:pt x="4154106" y="840251"/>
-                  </a:lnTo>
-                  <a:lnTo>
-                    <a:pt x="4082483" y="816606"/>
-                  </a:lnTo>
-                  <a:lnTo>
-                    <a:pt x="4010861" y="791902"/>
-                  </a:lnTo>
-                  <a:lnTo>
-                    <a:pt x="3939238" y="766092"/>
-                  </a:lnTo>
-                  <a:lnTo>
-                    <a:pt x="3867616" y="739128"/>
-                  </a:lnTo>
-                  <a:lnTo>
-                    <a:pt x="3795993" y="710956"/>
-                  </a:lnTo>
-                  <a:lnTo>
-                    <a:pt x="3724371" y="681523"/>
-                  </a:lnTo>
-                  <a:lnTo>
-                    <a:pt x="3652748" y="650772"/>
-                  </a:lnTo>
-                  <a:lnTo>
-                    <a:pt x="3581126" y="618646"/>
-                  </a:lnTo>
-                  <a:lnTo>
-                    <a:pt x="3509503" y="585081"/>
-                  </a:lnTo>
-                  <a:lnTo>
-                    <a:pt x="3437881" y="550013"/>
-                  </a:lnTo>
-                  <a:lnTo>
-                    <a:pt x="3366258" y="532960"/>
-                  </a:lnTo>
-                  <a:lnTo>
-                    <a:pt x="3294636" y="524143"/>
-                  </a:lnTo>
-                  <a:lnTo>
-                    <a:pt x="3223013" y="515232"/>
-                  </a:lnTo>
-                  <a:lnTo>
-                    <a:pt x="3151391" y="506228"/>
-                  </a:lnTo>
-                  <a:lnTo>
-                    <a:pt x="3079768" y="497128"/>
-                  </a:lnTo>
-                  <a:lnTo>
-                    <a:pt x="3008146" y="487933"/>
-                  </a:lnTo>
-                  <a:lnTo>
-                    <a:pt x="2936523" y="478640"/>
-                  </a:lnTo>
-                  <a:lnTo>
-                    <a:pt x="2864901" y="469249"/>
-                  </a:lnTo>
-                  <a:lnTo>
-                    <a:pt x="2793278" y="459759"/>
-                  </a:lnTo>
-                  <a:lnTo>
-                    <a:pt x="2721655" y="450169"/>
-                  </a:lnTo>
-                  <a:lnTo>
-                    <a:pt x="2650033" y="440478"/>
-                  </a:lnTo>
-                  <a:lnTo>
-                    <a:pt x="2578410" y="430685"/>
-                  </a:lnTo>
-                  <a:lnTo>
-                    <a:pt x="2506788" y="420788"/>
-                  </a:lnTo>
-                  <a:lnTo>
-                    <a:pt x="2435165" y="410787"/>
-                  </a:lnTo>
-                  <a:lnTo>
-                    <a:pt x="2363543" y="400680"/>
-                  </a:lnTo>
-                  <a:lnTo>
-                    <a:pt x="2291920" y="390467"/>
-                  </a:lnTo>
-                  <a:lnTo>
-                    <a:pt x="2220298" y="380145"/>
-                  </a:lnTo>
-                  <a:lnTo>
-                    <a:pt x="2148675" y="369715"/>
-                  </a:lnTo>
-                  <a:lnTo>
-                    <a:pt x="2077053" y="359175"/>
-                  </a:lnTo>
-                  <a:lnTo>
-                    <a:pt x="2005430" y="348524"/>
-                  </a:lnTo>
-                  <a:lnTo>
-                    <a:pt x="1933808" y="337760"/>
-                  </a:lnTo>
-                  <a:lnTo>
-                    <a:pt x="1862185" y="326882"/>
-                  </a:lnTo>
-                  <a:lnTo>
-                    <a:pt x="1790563" y="315890"/>
-                  </a:lnTo>
-                  <a:lnTo>
-                    <a:pt x="1718940" y="304782"/>
-                  </a:lnTo>
-                  <a:lnTo>
-                    <a:pt x="1647318" y="293556"/>
-                  </a:lnTo>
-                  <a:lnTo>
-                    <a:pt x="1575695" y="282213"/>
-                  </a:lnTo>
-                  <a:lnTo>
-                    <a:pt x="1504073" y="270749"/>
-                  </a:lnTo>
-                  <a:lnTo>
-                    <a:pt x="1432450" y="259164"/>
-                  </a:lnTo>
-                  <a:lnTo>
-                    <a:pt x="1360827" y="247458"/>
-                  </a:lnTo>
-                  <a:lnTo>
-                    <a:pt x="1289205" y="235627"/>
-                  </a:lnTo>
-                  <a:lnTo>
-                    <a:pt x="1217582" y="223672"/>
-                  </a:lnTo>
-                  <a:lnTo>
-                    <a:pt x="1145960" y="211591"/>
-                  </a:lnTo>
-                  <a:lnTo>
-                    <a:pt x="1074337" y="199382"/>
-                  </a:lnTo>
-                  <a:lnTo>
-                    <a:pt x="1002715" y="187044"/>
-                  </a:lnTo>
-                  <a:lnTo>
-                    <a:pt x="931092" y="174576"/>
-                  </a:lnTo>
-                  <a:lnTo>
-                    <a:pt x="859470" y="161977"/>
-                  </a:lnTo>
-                  <a:lnTo>
-                    <a:pt x="787847" y="149244"/>
-                  </a:lnTo>
-                  <a:lnTo>
-                    <a:pt x="716225" y="136377"/>
-                  </a:lnTo>
-                  <a:lnTo>
-                    <a:pt x="644602" y="123375"/>
-                  </a:lnTo>
-                  <a:lnTo>
-                    <a:pt x="572980" y="110235"/>
-                  </a:lnTo>
-                  <a:lnTo>
-                    <a:pt x="501357" y="96956"/>
-                  </a:lnTo>
-                  <a:lnTo>
-                    <a:pt x="429735" y="83538"/>
-                  </a:lnTo>
-                  <a:lnTo>
-                    <a:pt x="358112" y="69978"/>
-                  </a:lnTo>
-                  <a:lnTo>
-                    <a:pt x="286490" y="56274"/>
-                  </a:lnTo>
-                  <a:lnTo>
-                    <a:pt x="214867" y="42426"/>
-                  </a:lnTo>
-                  <a:lnTo>
-                    <a:pt x="143245" y="28432"/>
-                  </a:lnTo>
-                  <a:lnTo>
-                    <a:pt x="71622" y="14290"/>
-                  </a:lnTo>
-                  <a:lnTo>
-                    <a:pt x="0" y="0"/>
+                    <a:pt x="5314" y="4236"/>
+                  </a:lnTo>
+                  <a:lnTo>
+                    <a:pt x="75658" y="57918"/>
+                  </a:lnTo>
+                  <a:lnTo>
+                    <a:pt x="146003" y="109300"/>
+                  </a:lnTo>
+                  <a:lnTo>
+                    <a:pt x="216347" y="158480"/>
+                  </a:lnTo>
+                  <a:lnTo>
+                    <a:pt x="286692" y="205554"/>
+                  </a:lnTo>
+                  <a:lnTo>
+                    <a:pt x="357036" y="250610"/>
+                  </a:lnTo>
+                  <a:lnTo>
+                    <a:pt x="427381" y="293736"/>
+                  </a:lnTo>
+                  <a:lnTo>
+                    <a:pt x="497725" y="335015"/>
+                  </a:lnTo>
+                  <a:lnTo>
+                    <a:pt x="568070" y="374525"/>
+                  </a:lnTo>
+                  <a:lnTo>
+                    <a:pt x="638414" y="412342"/>
+                  </a:lnTo>
+                  <a:lnTo>
+                    <a:pt x="708759" y="448539"/>
+                  </a:lnTo>
+                  <a:lnTo>
+                    <a:pt x="779103" y="483185"/>
+                  </a:lnTo>
+                  <a:lnTo>
+                    <a:pt x="849448" y="516347"/>
+                  </a:lnTo>
+                  <a:lnTo>
+                    <a:pt x="919792" y="548088"/>
+                  </a:lnTo>
+                  <a:lnTo>
+                    <a:pt x="990137" y="578469"/>
+                  </a:lnTo>
+                  <a:lnTo>
+                    <a:pt x="1060481" y="607548"/>
+                  </a:lnTo>
+                  <a:lnTo>
+                    <a:pt x="1130826" y="635382"/>
+                  </a:lnTo>
+                  <a:lnTo>
+                    <a:pt x="1201170" y="662023"/>
+                  </a:lnTo>
+                  <a:lnTo>
+                    <a:pt x="1271515" y="687523"/>
+                  </a:lnTo>
+                  <a:lnTo>
+                    <a:pt x="1341859" y="711930"/>
+                  </a:lnTo>
+                  <a:lnTo>
+                    <a:pt x="1412204" y="735291"/>
+                  </a:lnTo>
+                  <a:lnTo>
+                    <a:pt x="1482548" y="757652"/>
+                  </a:lnTo>
+                  <a:lnTo>
+                    <a:pt x="1552892" y="779054"/>
+                  </a:lnTo>
+                  <a:lnTo>
+                    <a:pt x="1623237" y="799540"/>
+                  </a:lnTo>
+                  <a:lnTo>
+                    <a:pt x="1693581" y="819148"/>
+                  </a:lnTo>
+                  <a:lnTo>
+                    <a:pt x="1763926" y="837916"/>
+                  </a:lnTo>
+                  <a:lnTo>
+                    <a:pt x="1834270" y="855880"/>
+                  </a:lnTo>
+                  <a:lnTo>
+                    <a:pt x="1904615" y="873074"/>
+                  </a:lnTo>
+                  <a:lnTo>
+                    <a:pt x="1974959" y="889531"/>
+                  </a:lnTo>
+                  <a:lnTo>
+                    <a:pt x="2045304" y="905284"/>
+                  </a:lnTo>
+                  <a:lnTo>
+                    <a:pt x="2115648" y="920361"/>
+                  </a:lnTo>
+                  <a:lnTo>
+                    <a:pt x="2185993" y="934793"/>
+                  </a:lnTo>
+                  <a:lnTo>
+                    <a:pt x="2256337" y="948606"/>
+                  </a:lnTo>
+                  <a:lnTo>
+                    <a:pt x="2326682" y="958822"/>
+                  </a:lnTo>
+                  <a:lnTo>
+                    <a:pt x="2397026" y="961938"/>
+                  </a:lnTo>
+                  <a:lnTo>
+                    <a:pt x="2467371" y="965021"/>
+                  </a:lnTo>
+                  <a:lnTo>
+                    <a:pt x="2537715" y="968072"/>
+                  </a:lnTo>
+                  <a:lnTo>
+                    <a:pt x="2608060" y="971092"/>
+                  </a:lnTo>
+                  <a:lnTo>
+                    <a:pt x="2678404" y="974079"/>
+                  </a:lnTo>
+                  <a:lnTo>
+                    <a:pt x="2748749" y="977036"/>
+                  </a:lnTo>
+                  <a:lnTo>
+                    <a:pt x="2819093" y="979962"/>
+                  </a:lnTo>
+                  <a:lnTo>
+                    <a:pt x="2889438" y="982857"/>
+                  </a:lnTo>
+                  <a:lnTo>
+                    <a:pt x="2959782" y="985722"/>
+                  </a:lnTo>
+                  <a:lnTo>
+                    <a:pt x="3030127" y="988557"/>
+                  </a:lnTo>
+                  <a:lnTo>
+                    <a:pt x="3100471" y="991362"/>
+                  </a:lnTo>
+                  <a:lnTo>
+                    <a:pt x="3170816" y="994138"/>
+                  </a:lnTo>
+                  <a:lnTo>
+                    <a:pt x="3241160" y="996885"/>
+                  </a:lnTo>
+                  <a:lnTo>
+                    <a:pt x="3311505" y="999604"/>
+                  </a:lnTo>
+                  <a:lnTo>
+                    <a:pt x="3381849" y="1002294"/>
+                  </a:lnTo>
+                  <a:lnTo>
+                    <a:pt x="3452194" y="1004956"/>
+                  </a:lnTo>
+                  <a:lnTo>
+                    <a:pt x="3522538" y="1007590"/>
+                  </a:lnTo>
+                  <a:lnTo>
+                    <a:pt x="3592883" y="1010197"/>
+                  </a:lnTo>
+                  <a:lnTo>
+                    <a:pt x="3663227" y="1012776"/>
+                  </a:lnTo>
+                  <a:lnTo>
+                    <a:pt x="3733572" y="1015328"/>
+                  </a:lnTo>
+                  <a:lnTo>
+                    <a:pt x="3803916" y="1017854"/>
+                  </a:lnTo>
+                  <a:lnTo>
+                    <a:pt x="3874261" y="1020354"/>
+                  </a:lnTo>
+                  <a:lnTo>
+                    <a:pt x="3944605" y="1022827"/>
+                  </a:lnTo>
+                  <a:lnTo>
+                    <a:pt x="4014950" y="1025275"/>
+                  </a:lnTo>
+                  <a:lnTo>
+                    <a:pt x="4085294" y="1027697"/>
+                  </a:lnTo>
+                  <a:lnTo>
+                    <a:pt x="4155639" y="1030093"/>
+                  </a:lnTo>
+                  <a:lnTo>
+                    <a:pt x="4225983" y="1032465"/>
+                  </a:lnTo>
+                  <a:lnTo>
+                    <a:pt x="4296328" y="1034812"/>
+                  </a:lnTo>
+                  <a:lnTo>
+                    <a:pt x="4366672" y="1037134"/>
+                  </a:lnTo>
+                  <a:lnTo>
+                    <a:pt x="4437017" y="1039432"/>
+                  </a:lnTo>
+                  <a:lnTo>
+                    <a:pt x="4507361" y="1041706"/>
+                  </a:lnTo>
+                  <a:lnTo>
+                    <a:pt x="4577706" y="1043957"/>
+                  </a:lnTo>
+                  <a:lnTo>
+                    <a:pt x="4648050" y="1046184"/>
+                  </a:lnTo>
+                  <a:lnTo>
+                    <a:pt x="4718395" y="1048387"/>
+                  </a:lnTo>
+                  <a:lnTo>
+                    <a:pt x="4788739" y="1050568"/>
+                  </a:lnTo>
+                  <a:lnTo>
+                    <a:pt x="4859084" y="1052726"/>
+                  </a:lnTo>
+                  <a:lnTo>
+                    <a:pt x="4929428" y="1054861"/>
+                  </a:lnTo>
+                  <a:lnTo>
+                    <a:pt x="4999773" y="1056974"/>
+                  </a:lnTo>
+                  <a:lnTo>
+                    <a:pt x="5070117" y="1059065"/>
+                  </a:lnTo>
+                  <a:lnTo>
+                    <a:pt x="5140462" y="1061134"/>
+                  </a:lnTo>
+                  <a:lnTo>
+                    <a:pt x="5210806" y="1063181"/>
+                  </a:lnTo>
+                  <a:lnTo>
+                    <a:pt x="5281150" y="1065208"/>
+                  </a:lnTo>
+                  <a:lnTo>
+                    <a:pt x="5351495" y="1067212"/>
+                  </a:lnTo>
+                  <a:lnTo>
+                    <a:pt x="5421839" y="1069197"/>
+                  </a:lnTo>
+                  <a:lnTo>
+                    <a:pt x="5492184" y="1071160"/>
+                  </a:lnTo>
+                  <a:lnTo>
+                    <a:pt x="5562528" y="1073103"/>
+                  </a:lnTo>
+                  <a:lnTo>
+                    <a:pt x="5632873" y="1075025"/>
+                  </a:lnTo>
+                  <a:lnTo>
+                    <a:pt x="5703217" y="1076928"/>
+                  </a:lnTo>
+                  <a:lnTo>
+                    <a:pt x="5773562" y="1078810"/>
+                  </a:lnTo>
+                  <a:lnTo>
+                    <a:pt x="5843906" y="1080673"/>
+                  </a:lnTo>
+                  <a:lnTo>
+                    <a:pt x="5914251" y="1082516"/>
                   </a:lnTo>
                 </a:path>
               </a:pathLst>
@@ -4156,312 +3866,637 @@
           </p:nvSpPr>
           <p:spPr>
             <a:xfrm>
-              <a:off x="1172049" y="2530042"/>
-              <a:ext cx="7090630" cy="2821135"/>
+              <a:off x="1235312" y="2906432"/>
+              <a:ext cx="6964104" cy="462202"/>
             </a:xfrm>
             <a:custGeom>
               <a:avLst/>
               <a:pathLst>
-                <a:path w="7090630" h="2821135">
+                <a:path w="6964104" h="462202">
+                  <a:moveTo>
+                    <a:pt x="6964104" y="462202"/>
+                  </a:moveTo>
+                  <a:lnTo>
+                    <a:pt x="6893760" y="460785"/>
+                  </a:lnTo>
+                  <a:lnTo>
+                    <a:pt x="6823415" y="459304"/>
+                  </a:lnTo>
+                  <a:lnTo>
+                    <a:pt x="6753071" y="457758"/>
+                  </a:lnTo>
+                  <a:lnTo>
+                    <a:pt x="6682726" y="456142"/>
+                  </a:lnTo>
+                  <a:lnTo>
+                    <a:pt x="6612382" y="454453"/>
+                  </a:lnTo>
+                  <a:lnTo>
+                    <a:pt x="6542037" y="452689"/>
+                  </a:lnTo>
+                  <a:lnTo>
+                    <a:pt x="6471693" y="450846"/>
+                  </a:lnTo>
+                  <a:lnTo>
+                    <a:pt x="6401348" y="448921"/>
+                  </a:lnTo>
+                  <a:lnTo>
+                    <a:pt x="6331004" y="446909"/>
+                  </a:lnTo>
+                  <a:lnTo>
+                    <a:pt x="6260659" y="444808"/>
+                  </a:lnTo>
+                  <a:lnTo>
+                    <a:pt x="6190315" y="442612"/>
+                  </a:lnTo>
+                  <a:lnTo>
+                    <a:pt x="6119970" y="440318"/>
+                  </a:lnTo>
+                  <a:lnTo>
+                    <a:pt x="6049626" y="437921"/>
+                  </a:lnTo>
+                  <a:lnTo>
+                    <a:pt x="5979281" y="435417"/>
+                  </a:lnTo>
+                  <a:lnTo>
+                    <a:pt x="5908937" y="432801"/>
+                  </a:lnTo>
+                  <a:lnTo>
+                    <a:pt x="5838592" y="430068"/>
+                  </a:lnTo>
+                  <a:lnTo>
+                    <a:pt x="5768248" y="427213"/>
+                  </a:lnTo>
+                  <a:lnTo>
+                    <a:pt x="5697903" y="424229"/>
+                  </a:lnTo>
+                  <a:lnTo>
+                    <a:pt x="5627559" y="421113"/>
+                  </a:lnTo>
+                  <a:lnTo>
+                    <a:pt x="5557214" y="417856"/>
+                  </a:lnTo>
+                  <a:lnTo>
+                    <a:pt x="5486870" y="414454"/>
+                  </a:lnTo>
+                  <a:lnTo>
+                    <a:pt x="5416525" y="410900"/>
+                  </a:lnTo>
+                  <a:lnTo>
+                    <a:pt x="5346181" y="407186"/>
+                  </a:lnTo>
+                  <a:lnTo>
+                    <a:pt x="5275836" y="403307"/>
+                  </a:lnTo>
+                  <a:lnTo>
+                    <a:pt x="5205492" y="399253"/>
+                  </a:lnTo>
+                  <a:lnTo>
+                    <a:pt x="5135147" y="395019"/>
+                  </a:lnTo>
+                  <a:lnTo>
+                    <a:pt x="5064803" y="390594"/>
+                  </a:lnTo>
+                  <a:lnTo>
+                    <a:pt x="4994458" y="385972"/>
+                  </a:lnTo>
+                  <a:lnTo>
+                    <a:pt x="4924114" y="381143"/>
+                  </a:lnTo>
+                  <a:lnTo>
+                    <a:pt x="4853769" y="376097"/>
+                  </a:lnTo>
+                  <a:lnTo>
+                    <a:pt x="4783425" y="370826"/>
+                  </a:lnTo>
+                  <a:lnTo>
+                    <a:pt x="4713080" y="365319"/>
+                  </a:lnTo>
+                  <a:lnTo>
+                    <a:pt x="4642736" y="359565"/>
+                  </a:lnTo>
+                  <a:lnTo>
+                    <a:pt x="4572391" y="353553"/>
+                  </a:lnTo>
+                  <a:lnTo>
+                    <a:pt x="4502047" y="347273"/>
+                  </a:lnTo>
+                  <a:lnTo>
+                    <a:pt x="4431702" y="340712"/>
+                  </a:lnTo>
+                  <a:lnTo>
+                    <a:pt x="4361358" y="333856"/>
+                  </a:lnTo>
+                  <a:lnTo>
+                    <a:pt x="4291013" y="326694"/>
+                  </a:lnTo>
+                  <a:lnTo>
+                    <a:pt x="4220669" y="319212"/>
+                  </a:lnTo>
+                  <a:lnTo>
+                    <a:pt x="4150324" y="311394"/>
+                  </a:lnTo>
+                  <a:lnTo>
+                    <a:pt x="4079980" y="303227"/>
+                  </a:lnTo>
+                  <a:lnTo>
+                    <a:pt x="4009635" y="294694"/>
+                  </a:lnTo>
+                  <a:lnTo>
+                    <a:pt x="3939291" y="285779"/>
+                  </a:lnTo>
+                  <a:lnTo>
+                    <a:pt x="3868946" y="276464"/>
+                  </a:lnTo>
+                  <a:lnTo>
+                    <a:pt x="3798602" y="266733"/>
+                  </a:lnTo>
+                  <a:lnTo>
+                    <a:pt x="3728257" y="256567"/>
+                  </a:lnTo>
+                  <a:lnTo>
+                    <a:pt x="3657913" y="245945"/>
+                  </a:lnTo>
+                  <a:lnTo>
+                    <a:pt x="3587569" y="234848"/>
+                  </a:lnTo>
+                  <a:lnTo>
+                    <a:pt x="3517224" y="223254"/>
+                  </a:lnTo>
+                  <a:lnTo>
+                    <a:pt x="3446880" y="211142"/>
+                  </a:lnTo>
+                  <a:lnTo>
+                    <a:pt x="3376535" y="198487"/>
+                  </a:lnTo>
+                  <a:lnTo>
+                    <a:pt x="3306191" y="192333"/>
+                  </a:lnTo>
+                  <a:lnTo>
+                    <a:pt x="3235846" y="189150"/>
+                  </a:lnTo>
+                  <a:lnTo>
+                    <a:pt x="3165502" y="185935"/>
+                  </a:lnTo>
+                  <a:lnTo>
+                    <a:pt x="3095157" y="182685"/>
+                  </a:lnTo>
+                  <a:lnTo>
+                    <a:pt x="3024813" y="179402"/>
+                  </a:lnTo>
+                  <a:lnTo>
+                    <a:pt x="2954468" y="176083"/>
+                  </a:lnTo>
+                  <a:lnTo>
+                    <a:pt x="2884124" y="172730"/>
+                  </a:lnTo>
+                  <a:lnTo>
+                    <a:pt x="2813779" y="169341"/>
+                  </a:lnTo>
+                  <a:lnTo>
+                    <a:pt x="2743435" y="165916"/>
+                  </a:lnTo>
+                  <a:lnTo>
+                    <a:pt x="2673090" y="162455"/>
+                  </a:lnTo>
+                  <a:lnTo>
+                    <a:pt x="2602746" y="158958"/>
+                  </a:lnTo>
+                  <a:lnTo>
+                    <a:pt x="2532401" y="155424"/>
+                  </a:lnTo>
+                  <a:lnTo>
+                    <a:pt x="2462057" y="151852"/>
+                  </a:lnTo>
+                  <a:lnTo>
+                    <a:pt x="2391712" y="148243"/>
+                  </a:lnTo>
+                  <a:lnTo>
+                    <a:pt x="2321368" y="144596"/>
+                  </a:lnTo>
+                  <a:lnTo>
+                    <a:pt x="2251023" y="140910"/>
+                  </a:lnTo>
+                  <a:lnTo>
+                    <a:pt x="2180679" y="137185"/>
+                  </a:lnTo>
+                  <a:lnTo>
+                    <a:pt x="2110334" y="133421"/>
+                  </a:lnTo>
+                  <a:lnTo>
+                    <a:pt x="2039990" y="129617"/>
+                  </a:lnTo>
+                  <a:lnTo>
+                    <a:pt x="1969645" y="125774"/>
+                  </a:lnTo>
+                  <a:lnTo>
+                    <a:pt x="1899301" y="121889"/>
+                  </a:lnTo>
+                  <a:lnTo>
+                    <a:pt x="1828956" y="117964"/>
+                  </a:lnTo>
+                  <a:lnTo>
+                    <a:pt x="1758612" y="113997"/>
+                  </a:lnTo>
+                  <a:lnTo>
+                    <a:pt x="1688267" y="109988"/>
+                  </a:lnTo>
+                  <a:lnTo>
+                    <a:pt x="1617923" y="105937"/>
+                  </a:lnTo>
+                  <a:lnTo>
+                    <a:pt x="1547578" y="101844"/>
+                  </a:lnTo>
+                  <a:lnTo>
+                    <a:pt x="1477234" y="97707"/>
+                  </a:lnTo>
+                  <a:lnTo>
+                    <a:pt x="1406889" y="93526"/>
+                  </a:lnTo>
+                  <a:lnTo>
+                    <a:pt x="1336545" y="89301"/>
+                  </a:lnTo>
+                  <a:lnTo>
+                    <a:pt x="1266200" y="85032"/>
+                  </a:lnTo>
+                  <a:lnTo>
+                    <a:pt x="1195856" y="80718"/>
+                  </a:lnTo>
+                  <a:lnTo>
+                    <a:pt x="1125511" y="76358"/>
+                  </a:lnTo>
+                  <a:lnTo>
+                    <a:pt x="1055167" y="71952"/>
+                  </a:lnTo>
+                  <a:lnTo>
+                    <a:pt x="984822" y="67499"/>
+                  </a:lnTo>
+                  <a:lnTo>
+                    <a:pt x="914478" y="63000"/>
+                  </a:lnTo>
+                  <a:lnTo>
+                    <a:pt x="844133" y="58453"/>
+                  </a:lnTo>
+                  <a:lnTo>
+                    <a:pt x="773789" y="53858"/>
+                  </a:lnTo>
+                  <a:lnTo>
+                    <a:pt x="703444" y="49215"/>
+                  </a:lnTo>
+                  <a:lnTo>
+                    <a:pt x="633100" y="44523"/>
+                  </a:lnTo>
+                  <a:lnTo>
+                    <a:pt x="562755" y="39781"/>
+                  </a:lnTo>
+                  <a:lnTo>
+                    <a:pt x="492411" y="34989"/>
+                  </a:lnTo>
+                  <a:lnTo>
+                    <a:pt x="422066" y="30146"/>
+                  </a:lnTo>
+                  <a:lnTo>
+                    <a:pt x="351722" y="25253"/>
+                  </a:lnTo>
+                  <a:lnTo>
+                    <a:pt x="281377" y="20308"/>
+                  </a:lnTo>
+                  <a:lnTo>
+                    <a:pt x="211033" y="15310"/>
+                  </a:lnTo>
+                  <a:lnTo>
+                    <a:pt x="140688" y="10260"/>
+                  </a:lnTo>
+                  <a:lnTo>
+                    <a:pt x="70344" y="5157"/>
+                  </a:lnTo>
+                  <a:lnTo>
+                    <a:pt x="0" y="0"/>
+                  </a:lnTo>
+                </a:path>
+              </a:pathLst>
+            </a:custGeom>
+          </p:spPr>
+          <p:txBody>
+            <a:bodyPr/>
+            <a:lstStyle/>
+            <a:p/>
+          </p:txBody>
+        </p:sp>
+        <p:sp>
+          <p:nvSpPr>
+            <p:cNvPr id="24" name="pl24"/>
+            <p:cNvSpPr/>
+            <p:nvPr/>
+          </p:nvSpPr>
+          <p:spPr>
+            <a:xfrm>
+              <a:off x="1235312" y="2307846"/>
+              <a:ext cx="6964104" cy="1018081"/>
+            </a:xfrm>
+            <a:custGeom>
+              <a:avLst/>
+              <a:pathLst>
+                <a:path w="6964104" h="1018081">
                   <a:moveTo>
                     <a:pt x="0" y="0"/>
                   </a:moveTo>
                   <a:lnTo>
-                    <a:pt x="71622" y="81062"/>
-                  </a:lnTo>
-                  <a:lnTo>
-                    <a:pt x="143245" y="159954"/>
-                  </a:lnTo>
-                  <a:lnTo>
-                    <a:pt x="214867" y="236734"/>
-                  </a:lnTo>
-                  <a:lnTo>
-                    <a:pt x="286490" y="311457"/>
-                  </a:lnTo>
-                  <a:lnTo>
-                    <a:pt x="358112" y="384180"/>
-                  </a:lnTo>
-                  <a:lnTo>
-                    <a:pt x="429735" y="454955"/>
-                  </a:lnTo>
-                  <a:lnTo>
-                    <a:pt x="501357" y="523835"/>
-                  </a:lnTo>
-                  <a:lnTo>
-                    <a:pt x="572980" y="590871"/>
-                  </a:lnTo>
-                  <a:lnTo>
-                    <a:pt x="644602" y="656111"/>
-                  </a:lnTo>
-                  <a:lnTo>
-                    <a:pt x="716225" y="719604"/>
-                  </a:lnTo>
-                  <a:lnTo>
-                    <a:pt x="787847" y="781398"/>
-                  </a:lnTo>
-                  <a:lnTo>
-                    <a:pt x="859470" y="841536"/>
-                  </a:lnTo>
-                  <a:lnTo>
-                    <a:pt x="931092" y="900064"/>
-                  </a:lnTo>
-                  <a:lnTo>
-                    <a:pt x="1002715" y="957025"/>
-                  </a:lnTo>
-                  <a:lnTo>
-                    <a:pt x="1074337" y="1012460"/>
-                  </a:lnTo>
-                  <a:lnTo>
-                    <a:pt x="1145960" y="1066411"/>
-                  </a:lnTo>
-                  <a:lnTo>
-                    <a:pt x="1217582" y="1118918"/>
-                  </a:lnTo>
-                  <a:lnTo>
-                    <a:pt x="1289205" y="1170018"/>
-                  </a:lnTo>
-                  <a:lnTo>
-                    <a:pt x="1360827" y="1219750"/>
-                  </a:lnTo>
-                  <a:lnTo>
-                    <a:pt x="1432450" y="1268150"/>
-                  </a:lnTo>
-                  <a:lnTo>
-                    <a:pt x="1504073" y="1315254"/>
-                  </a:lnTo>
-                  <a:lnTo>
-                    <a:pt x="1575695" y="1361097"/>
-                  </a:lnTo>
-                  <a:lnTo>
-                    <a:pt x="1647318" y="1405712"/>
-                  </a:lnTo>
-                  <a:lnTo>
-                    <a:pt x="1718940" y="1449133"/>
-                  </a:lnTo>
-                  <a:lnTo>
-                    <a:pt x="1790563" y="1491391"/>
-                  </a:lnTo>
-                  <a:lnTo>
-                    <a:pt x="1862185" y="1532517"/>
-                  </a:lnTo>
-                  <a:lnTo>
-                    <a:pt x="1933808" y="1572542"/>
-                  </a:lnTo>
-                  <a:lnTo>
-                    <a:pt x="2005430" y="1611495"/>
-                  </a:lnTo>
-                  <a:lnTo>
-                    <a:pt x="2077053" y="1649405"/>
-                  </a:lnTo>
-                  <a:lnTo>
-                    <a:pt x="2148675" y="1686300"/>
-                  </a:lnTo>
-                  <a:lnTo>
-                    <a:pt x="2220298" y="1722207"/>
-                  </a:lnTo>
-                  <a:lnTo>
-                    <a:pt x="2291920" y="1757152"/>
-                  </a:lnTo>
-                  <a:lnTo>
-                    <a:pt x="2363543" y="1791162"/>
-                  </a:lnTo>
-                  <a:lnTo>
-                    <a:pt x="2435165" y="1824261"/>
-                  </a:lnTo>
-                  <a:lnTo>
-                    <a:pt x="2506788" y="1856473"/>
-                  </a:lnTo>
-                  <a:lnTo>
-                    <a:pt x="2578410" y="1887823"/>
-                  </a:lnTo>
-                  <a:lnTo>
-                    <a:pt x="2650033" y="1918334"/>
-                  </a:lnTo>
-                  <a:lnTo>
-                    <a:pt x="2721655" y="1948027"/>
-                  </a:lnTo>
-                  <a:lnTo>
-                    <a:pt x="2793278" y="1976926"/>
-                  </a:lnTo>
-                  <a:lnTo>
-                    <a:pt x="2864901" y="2005050"/>
-                  </a:lnTo>
-                  <a:lnTo>
-                    <a:pt x="2936523" y="2032422"/>
-                  </a:lnTo>
-                  <a:lnTo>
-                    <a:pt x="3008146" y="2059060"/>
-                  </a:lnTo>
-                  <a:lnTo>
-                    <a:pt x="3079768" y="2084985"/>
-                  </a:lnTo>
-                  <a:lnTo>
-                    <a:pt x="3151391" y="2110216"/>
-                  </a:lnTo>
-                  <a:lnTo>
-                    <a:pt x="3223013" y="2134771"/>
-                  </a:lnTo>
-                  <a:lnTo>
-                    <a:pt x="3294636" y="2158669"/>
-                  </a:lnTo>
-                  <a:lnTo>
-                    <a:pt x="3366258" y="2181927"/>
-                  </a:lnTo>
-                  <a:lnTo>
-                    <a:pt x="3437881" y="2204562"/>
-                  </a:lnTo>
-                  <a:lnTo>
-                    <a:pt x="3509503" y="2226591"/>
-                  </a:lnTo>
-                  <a:lnTo>
-                    <a:pt x="3581126" y="2248030"/>
-                  </a:lnTo>
-                  <a:lnTo>
-                    <a:pt x="3652748" y="2268895"/>
-                  </a:lnTo>
-                  <a:lnTo>
-                    <a:pt x="3724371" y="2289201"/>
-                  </a:lnTo>
-                  <a:lnTo>
-                    <a:pt x="3795993" y="2308963"/>
-                  </a:lnTo>
-                  <a:lnTo>
-                    <a:pt x="3867616" y="2328196"/>
-                  </a:lnTo>
-                  <a:lnTo>
-                    <a:pt x="3939238" y="2346914"/>
-                  </a:lnTo>
-                  <a:lnTo>
-                    <a:pt x="4010861" y="2365131"/>
-                  </a:lnTo>
-                  <a:lnTo>
-                    <a:pt x="4082483" y="2382861"/>
-                  </a:lnTo>
-                  <a:lnTo>
-                    <a:pt x="4154106" y="2400115"/>
-                  </a:lnTo>
-                  <a:lnTo>
-                    <a:pt x="4225729" y="2416907"/>
-                  </a:lnTo>
-                  <a:lnTo>
-                    <a:pt x="4297351" y="2433250"/>
-                  </a:lnTo>
-                  <a:lnTo>
-                    <a:pt x="4368974" y="2449155"/>
-                  </a:lnTo>
-                  <a:lnTo>
-                    <a:pt x="4440596" y="2464634"/>
-                  </a:lnTo>
-                  <a:lnTo>
-                    <a:pt x="4512219" y="2479699"/>
-                  </a:lnTo>
-                  <a:lnTo>
-                    <a:pt x="4583841" y="2494360"/>
-                  </a:lnTo>
-                  <a:lnTo>
-                    <a:pt x="4655464" y="2508629"/>
-                  </a:lnTo>
-                  <a:lnTo>
-                    <a:pt x="4727086" y="2522515"/>
-                  </a:lnTo>
-                  <a:lnTo>
-                    <a:pt x="4798709" y="2536030"/>
-                  </a:lnTo>
-                  <a:lnTo>
-                    <a:pt x="4870331" y="2549183"/>
-                  </a:lnTo>
-                  <a:lnTo>
-                    <a:pt x="4941954" y="2561983"/>
-                  </a:lnTo>
-                  <a:lnTo>
-                    <a:pt x="5013576" y="2574441"/>
-                  </a:lnTo>
-                  <a:lnTo>
-                    <a:pt x="5085199" y="2586565"/>
-                  </a:lnTo>
-                  <a:lnTo>
-                    <a:pt x="5156821" y="2598365"/>
-                  </a:lnTo>
-                  <a:lnTo>
-                    <a:pt x="5228444" y="2609848"/>
-                  </a:lnTo>
-                  <a:lnTo>
-                    <a:pt x="5300066" y="2621024"/>
-                  </a:lnTo>
-                  <a:lnTo>
-                    <a:pt x="5371689" y="2631901"/>
-                  </a:lnTo>
-                  <a:lnTo>
-                    <a:pt x="5443311" y="2642487"/>
-                  </a:lnTo>
-                  <a:lnTo>
-                    <a:pt x="5514934" y="2652789"/>
-                  </a:lnTo>
-                  <a:lnTo>
-                    <a:pt x="5586557" y="2662815"/>
-                  </a:lnTo>
-                  <a:lnTo>
-                    <a:pt x="5658179" y="2672573"/>
-                  </a:lnTo>
-                  <a:lnTo>
-                    <a:pt x="5729802" y="2682069"/>
-                  </a:lnTo>
-                  <a:lnTo>
-                    <a:pt x="5801424" y="2691311"/>
-                  </a:lnTo>
-                  <a:lnTo>
-                    <a:pt x="5873047" y="2700306"/>
-                  </a:lnTo>
-                  <a:lnTo>
-                    <a:pt x="5944669" y="2709060"/>
-                  </a:lnTo>
-                  <a:lnTo>
-                    <a:pt x="6016292" y="2717579"/>
-                  </a:lnTo>
-                  <a:lnTo>
-                    <a:pt x="6087914" y="2725870"/>
-                  </a:lnTo>
-                  <a:lnTo>
-                    <a:pt x="6159537" y="2733940"/>
-                  </a:lnTo>
-                  <a:lnTo>
-                    <a:pt x="6231159" y="2741793"/>
-                  </a:lnTo>
-                  <a:lnTo>
-                    <a:pt x="6302782" y="2749436"/>
-                  </a:lnTo>
-                  <a:lnTo>
-                    <a:pt x="6374404" y="2756874"/>
-                  </a:lnTo>
-                  <a:lnTo>
-                    <a:pt x="6446027" y="2764113"/>
-                  </a:lnTo>
-                  <a:lnTo>
-                    <a:pt x="6517649" y="2771158"/>
-                  </a:lnTo>
-                  <a:lnTo>
-                    <a:pt x="6589272" y="2778014"/>
-                  </a:lnTo>
-                  <a:lnTo>
-                    <a:pt x="6660894" y="2784687"/>
-                  </a:lnTo>
-                  <a:lnTo>
-                    <a:pt x="6732517" y="2791182"/>
-                  </a:lnTo>
-                  <a:lnTo>
-                    <a:pt x="6804139" y="2797502"/>
-                  </a:lnTo>
-                  <a:lnTo>
-                    <a:pt x="6875762" y="2803653"/>
-                  </a:lnTo>
-                  <a:lnTo>
-                    <a:pt x="6947385" y="2809639"/>
-                  </a:lnTo>
-                  <a:lnTo>
-                    <a:pt x="7019007" y="2815465"/>
-                  </a:lnTo>
-                  <a:lnTo>
-                    <a:pt x="7090630" y="2821135"/>
+                    <a:pt x="70344" y="29253"/>
+                  </a:lnTo>
+                  <a:lnTo>
+                    <a:pt x="140688" y="57723"/>
+                  </a:lnTo>
+                  <a:lnTo>
+                    <a:pt x="211033" y="85431"/>
+                  </a:lnTo>
+                  <a:lnTo>
+                    <a:pt x="281377" y="112397"/>
+                  </a:lnTo>
+                  <a:lnTo>
+                    <a:pt x="351722" y="138641"/>
+                  </a:lnTo>
+                  <a:lnTo>
+                    <a:pt x="422066" y="164182"/>
+                  </a:lnTo>
+                  <a:lnTo>
+                    <a:pt x="492411" y="189039"/>
+                  </a:lnTo>
+                  <a:lnTo>
+                    <a:pt x="562755" y="213231"/>
+                  </a:lnTo>
+                  <a:lnTo>
+                    <a:pt x="633100" y="236775"/>
+                  </a:lnTo>
+                  <a:lnTo>
+                    <a:pt x="703444" y="259688"/>
+                  </a:lnTo>
+                  <a:lnTo>
+                    <a:pt x="773789" y="281988"/>
+                  </a:lnTo>
+                  <a:lnTo>
+                    <a:pt x="844133" y="303690"/>
+                  </a:lnTo>
+                  <a:lnTo>
+                    <a:pt x="914478" y="324812"/>
+                  </a:lnTo>
+                  <a:lnTo>
+                    <a:pt x="984822" y="345367"/>
+                  </a:lnTo>
+                  <a:lnTo>
+                    <a:pt x="1055167" y="365373"/>
+                  </a:lnTo>
+                  <a:lnTo>
+                    <a:pt x="1125511" y="384842"/>
+                  </a:lnTo>
+                  <a:lnTo>
+                    <a:pt x="1195856" y="403791"/>
+                  </a:lnTo>
+                  <a:lnTo>
+                    <a:pt x="1266200" y="422232"/>
+                  </a:lnTo>
+                  <a:lnTo>
+                    <a:pt x="1336545" y="440179"/>
+                  </a:lnTo>
+                  <a:lnTo>
+                    <a:pt x="1406889" y="457645"/>
+                  </a:lnTo>
+                  <a:lnTo>
+                    <a:pt x="1477234" y="474644"/>
+                  </a:lnTo>
+                  <a:lnTo>
+                    <a:pt x="1547578" y="491188"/>
+                  </a:lnTo>
+                  <a:lnTo>
+                    <a:pt x="1617923" y="507288"/>
+                  </a:lnTo>
+                  <a:lnTo>
+                    <a:pt x="1688267" y="522958"/>
+                  </a:lnTo>
+                  <a:lnTo>
+                    <a:pt x="1758612" y="538207"/>
+                  </a:lnTo>
+                  <a:lnTo>
+                    <a:pt x="1828956" y="553049"/>
+                  </a:lnTo>
+                  <a:lnTo>
+                    <a:pt x="1899301" y="567493"/>
+                  </a:lnTo>
+                  <a:lnTo>
+                    <a:pt x="1969645" y="581550"/>
+                  </a:lnTo>
+                  <a:lnTo>
+                    <a:pt x="2039990" y="595231"/>
+                  </a:lnTo>
+                  <a:lnTo>
+                    <a:pt x="2110334" y="608546"/>
+                  </a:lnTo>
+                  <a:lnTo>
+                    <a:pt x="2180679" y="621504"/>
+                  </a:lnTo>
+                  <a:lnTo>
+                    <a:pt x="2251023" y="634115"/>
+                  </a:lnTo>
+                  <a:lnTo>
+                    <a:pt x="2321368" y="646388"/>
+                  </a:lnTo>
+                  <a:lnTo>
+                    <a:pt x="2391712" y="658332"/>
+                  </a:lnTo>
+                  <a:lnTo>
+                    <a:pt x="2462057" y="669957"/>
+                  </a:lnTo>
+                  <a:lnTo>
+                    <a:pt x="2532401" y="681271"/>
+                  </a:lnTo>
+                  <a:lnTo>
+                    <a:pt x="2602746" y="692281"/>
+                  </a:lnTo>
+                  <a:lnTo>
+                    <a:pt x="2673090" y="702997"/>
+                  </a:lnTo>
+                  <a:lnTo>
+                    <a:pt x="2743435" y="713426"/>
+                  </a:lnTo>
+                  <a:lnTo>
+                    <a:pt x="2813779" y="723575"/>
+                  </a:lnTo>
+                  <a:lnTo>
+                    <a:pt x="2884124" y="733453"/>
+                  </a:lnTo>
+                  <a:lnTo>
+                    <a:pt x="2954468" y="743066"/>
+                  </a:lnTo>
+                  <a:lnTo>
+                    <a:pt x="3024813" y="752422"/>
+                  </a:lnTo>
+                  <a:lnTo>
+                    <a:pt x="3095157" y="761527"/>
+                  </a:lnTo>
+                  <a:lnTo>
+                    <a:pt x="3165502" y="770388"/>
+                  </a:lnTo>
+                  <a:lnTo>
+                    <a:pt x="3235846" y="779013"/>
+                  </a:lnTo>
+                  <a:lnTo>
+                    <a:pt x="3306191" y="787406"/>
+                  </a:lnTo>
+                  <a:lnTo>
+                    <a:pt x="3376535" y="795574"/>
+                  </a:lnTo>
+                  <a:lnTo>
+                    <a:pt x="3446880" y="803524"/>
+                  </a:lnTo>
+                  <a:lnTo>
+                    <a:pt x="3517224" y="811261"/>
+                  </a:lnTo>
+                  <a:lnTo>
+                    <a:pt x="3587569" y="818790"/>
+                  </a:lnTo>
+                  <a:lnTo>
+                    <a:pt x="3657913" y="826118"/>
+                  </a:lnTo>
+                  <a:lnTo>
+                    <a:pt x="3728257" y="833250"/>
+                  </a:lnTo>
+                  <a:lnTo>
+                    <a:pt x="3798602" y="840191"/>
+                  </a:lnTo>
+                  <a:lnTo>
+                    <a:pt x="3868946" y="846946"/>
+                  </a:lnTo>
+                  <a:lnTo>
+                    <a:pt x="3939291" y="853520"/>
+                  </a:lnTo>
+                  <a:lnTo>
+                    <a:pt x="4009635" y="859918"/>
+                  </a:lnTo>
+                  <a:lnTo>
+                    <a:pt x="4079980" y="866145"/>
+                  </a:lnTo>
+                  <a:lnTo>
+                    <a:pt x="4150324" y="872205"/>
+                  </a:lnTo>
+                  <a:lnTo>
+                    <a:pt x="4220669" y="878102"/>
+                  </a:lnTo>
+                  <a:lnTo>
+                    <a:pt x="4291013" y="883842"/>
+                  </a:lnTo>
+                  <a:lnTo>
+                    <a:pt x="4361358" y="889428"/>
+                  </a:lnTo>
+                  <a:lnTo>
+                    <a:pt x="4431702" y="894865"/>
+                  </a:lnTo>
+                  <a:lnTo>
+                    <a:pt x="4502047" y="900155"/>
+                  </a:lnTo>
+                  <a:lnTo>
+                    <a:pt x="4572391" y="905305"/>
+                  </a:lnTo>
+                  <a:lnTo>
+                    <a:pt x="4642736" y="910316"/>
+                  </a:lnTo>
+                  <a:lnTo>
+                    <a:pt x="4713080" y="915193"/>
+                  </a:lnTo>
+                  <a:lnTo>
+                    <a:pt x="4783425" y="919940"/>
+                  </a:lnTo>
+                  <a:lnTo>
+                    <a:pt x="4853769" y="924559"/>
+                  </a:lnTo>
+                  <a:lnTo>
+                    <a:pt x="4924114" y="929055"/>
+                  </a:lnTo>
+                  <a:lnTo>
+                    <a:pt x="4994458" y="933430"/>
+                  </a:lnTo>
+                  <a:lnTo>
+                    <a:pt x="5064803" y="937688"/>
+                  </a:lnTo>
+                  <a:lnTo>
+                    <a:pt x="5135147" y="941833"/>
+                  </a:lnTo>
+                  <a:lnTo>
+                    <a:pt x="5205492" y="945866"/>
+                  </a:lnTo>
+                  <a:lnTo>
+                    <a:pt x="5275836" y="949791"/>
+                  </a:lnTo>
+                  <a:lnTo>
+                    <a:pt x="5346181" y="953611"/>
+                  </a:lnTo>
+                  <a:lnTo>
+                    <a:pt x="5416525" y="957329"/>
+                  </a:lnTo>
+                  <a:lnTo>
+                    <a:pt x="5486870" y="960947"/>
+                  </a:lnTo>
+                  <a:lnTo>
+                    <a:pt x="5557214" y="964468"/>
+                  </a:lnTo>
+                  <a:lnTo>
+                    <a:pt x="5627559" y="967895"/>
+                  </a:lnTo>
+                  <a:lnTo>
+                    <a:pt x="5697903" y="971231"/>
+                  </a:lnTo>
+                  <a:lnTo>
+                    <a:pt x="5768248" y="974477"/>
+                  </a:lnTo>
+                  <a:lnTo>
+                    <a:pt x="5838592" y="977636"/>
+                  </a:lnTo>
+                  <a:lnTo>
+                    <a:pt x="5908937" y="980710"/>
+                  </a:lnTo>
+                  <a:lnTo>
+                    <a:pt x="5979281" y="983702"/>
+                  </a:lnTo>
+                  <a:lnTo>
+                    <a:pt x="6049626" y="986614"/>
+                  </a:lnTo>
+                  <a:lnTo>
+                    <a:pt x="6119970" y="989448"/>
+                  </a:lnTo>
+                  <a:lnTo>
+                    <a:pt x="6190315" y="992206"/>
+                  </a:lnTo>
+                  <a:lnTo>
+                    <a:pt x="6260659" y="994891"/>
+                  </a:lnTo>
+                  <a:lnTo>
+                    <a:pt x="6331004" y="997503"/>
+                  </a:lnTo>
+                  <a:lnTo>
+                    <a:pt x="6401348" y="1000045"/>
+                  </a:lnTo>
+                  <a:lnTo>
+                    <a:pt x="6471693" y="1002520"/>
+                  </a:lnTo>
+                  <a:lnTo>
+                    <a:pt x="6542037" y="1004928"/>
+                  </a:lnTo>
+                  <a:lnTo>
+                    <a:pt x="6612382" y="1007271"/>
+                  </a:lnTo>
+                  <a:lnTo>
+                    <a:pt x="6682726" y="1009552"/>
+                  </a:lnTo>
+                  <a:lnTo>
+                    <a:pt x="6753071" y="1011772"/>
+                  </a:lnTo>
+                  <a:lnTo>
+                    <a:pt x="6823415" y="1013932"/>
+                  </a:lnTo>
+                  <a:lnTo>
+                    <a:pt x="6893760" y="1016035"/>
+                  </a:lnTo>
+                  <a:lnTo>
+                    <a:pt x="6964104" y="1018081"/>
                   </a:lnTo>
                 </a:path>
               </a:pathLst>
@@ -4484,27 +4519,27 @@
         </p:sp>
         <p:sp>
           <p:nvSpPr>
-            <p:cNvPr id="24" name="pl24"/>
+            <p:cNvPr id="25" name="pl25"/>
             <p:cNvSpPr/>
             <p:nvPr/>
           </p:nvSpPr>
           <p:spPr>
             <a:xfrm>
-              <a:off x="817517" y="4727786"/>
-              <a:ext cx="7799693" cy="0"/>
+              <a:off x="887106" y="3100960"/>
+              <a:ext cx="7660515" cy="0"/>
             </a:xfrm>
             <a:custGeom>
               <a:avLst/>
               <a:pathLst>
-                <a:path w="7799693" h="0">
+                <a:path w="7660515" h="0">
                   <a:moveTo>
                     <a:pt x="0" y="0"/>
                   </a:moveTo>
                   <a:lnTo>
-                    <a:pt x="7799693" y="0"/>
-                  </a:lnTo>
-                  <a:lnTo>
-                    <a:pt x="7799693" y="0"/>
+                    <a:pt x="7660515" y="0"/>
+                  </a:lnTo>
+                  <a:lnTo>
+                    <a:pt x="7660515" y="0"/>
                   </a:lnTo>
                 </a:path>
               </a:pathLst>
@@ -4527,21 +4562,21 @@
         </p:sp>
         <p:sp>
           <p:nvSpPr>
-            <p:cNvPr id="25" name="pl25"/>
+            <p:cNvPr id="26" name="pl26"/>
             <p:cNvSpPr/>
             <p:nvPr/>
           </p:nvSpPr>
           <p:spPr>
             <a:xfrm>
-              <a:off x="4588151" y="2073503"/>
-              <a:ext cx="0" cy="3649639"/>
+              <a:off x="4590457" y="2143092"/>
+              <a:ext cx="0" cy="1317069"/>
             </a:xfrm>
             <a:custGeom>
               <a:avLst/>
               <a:pathLst>
-                <a:path w="0" h="3649639">
+                <a:path w="0" h="1317069">
                   <a:moveTo>
-                    <a:pt x="0" y="3649639"/>
+                    <a:pt x="0" y="1317069"/>
                   </a:moveTo>
                   <a:lnTo>
                     <a:pt x="0" y="0"/>
@@ -4570,13 +4605,13 @@
         </p:sp>
         <p:sp>
           <p:nvSpPr>
-            <p:cNvPr id="26" name="tx26"/>
+            <p:cNvPr id="27" name="tx27"/>
             <p:cNvSpPr/>
             <p:nvPr/>
           </p:nvSpPr>
           <p:spPr>
             <a:xfrm>
-              <a:off x="692708" y="5517199"/>
+              <a:off x="762297" y="3360243"/>
               <a:ext cx="62179" cy="80101"/>
             </a:xfrm>
             <a:prstGeom prst="rect">
@@ -4616,13 +4651,13 @@
         </p:sp>
         <p:sp>
           <p:nvSpPr>
-            <p:cNvPr id="27" name="tx27"/>
+            <p:cNvPr id="28" name="tx28"/>
             <p:cNvSpPr/>
             <p:nvPr/>
           </p:nvSpPr>
           <p:spPr>
             <a:xfrm>
-              <a:off x="692708" y="4687735"/>
+              <a:off x="762297" y="3060909"/>
               <a:ext cx="62179" cy="80101"/>
             </a:xfrm>
             <a:prstGeom prst="rect">
@@ -4662,13 +4697,13 @@
         </p:sp>
         <p:sp>
           <p:nvSpPr>
-            <p:cNvPr id="28" name="tx28"/>
+            <p:cNvPr id="29" name="tx29"/>
             <p:cNvSpPr/>
             <p:nvPr/>
           </p:nvSpPr>
           <p:spPr>
             <a:xfrm>
-              <a:off x="692708" y="3858272"/>
+              <a:off x="762297" y="2761575"/>
               <a:ext cx="62179" cy="80101"/>
             </a:xfrm>
             <a:prstGeom prst="rect">
@@ -4708,13 +4743,13 @@
         </p:sp>
         <p:sp>
           <p:nvSpPr>
-            <p:cNvPr id="29" name="tx29"/>
+            <p:cNvPr id="30" name="tx30"/>
             <p:cNvSpPr/>
             <p:nvPr/>
           </p:nvSpPr>
           <p:spPr>
             <a:xfrm>
-              <a:off x="692708" y="3028808"/>
+              <a:off x="762297" y="2462242"/>
               <a:ext cx="62179" cy="80101"/>
             </a:xfrm>
             <a:prstGeom prst="rect">
@@ -4754,13 +4789,13 @@
         </p:sp>
         <p:sp>
           <p:nvSpPr>
-            <p:cNvPr id="30" name="tx30"/>
+            <p:cNvPr id="31" name="tx31"/>
             <p:cNvSpPr/>
             <p:nvPr/>
           </p:nvSpPr>
           <p:spPr>
             <a:xfrm>
-              <a:off x="692708" y="2199345"/>
+              <a:off x="762297" y="2162908"/>
               <a:ext cx="62179" cy="80101"/>
             </a:xfrm>
             <a:prstGeom prst="rect">
@@ -4800,13 +4835,13 @@
         </p:sp>
         <p:sp>
           <p:nvSpPr>
-            <p:cNvPr id="31" name="tx31"/>
+            <p:cNvPr id="32" name="tx32"/>
             <p:cNvSpPr/>
             <p:nvPr/>
           </p:nvSpPr>
           <p:spPr>
             <a:xfrm>
-              <a:off x="2360651" y="5785772"/>
+              <a:off x="2401262" y="3522791"/>
               <a:ext cx="161574" cy="80101"/>
             </a:xfrm>
             <a:prstGeom prst="rect">
@@ -4846,13 +4881,13 @@
         </p:sp>
         <p:sp>
           <p:nvSpPr>
-            <p:cNvPr id="32" name="tx32"/>
+            <p:cNvPr id="33" name="tx33"/>
             <p:cNvSpPr/>
             <p:nvPr/>
           </p:nvSpPr>
           <p:spPr>
             <a:xfrm>
-              <a:off x="4561958" y="5785772"/>
+              <a:off x="4564176" y="3522791"/>
               <a:ext cx="62179" cy="80101"/>
             </a:xfrm>
             <a:prstGeom prst="rect">
@@ -4892,13 +4927,13 @@
         </p:sp>
         <p:sp>
           <p:nvSpPr>
-            <p:cNvPr id="33" name="tx33"/>
+            <p:cNvPr id="34" name="tx34"/>
             <p:cNvSpPr/>
             <p:nvPr/>
           </p:nvSpPr>
           <p:spPr>
             <a:xfrm>
-              <a:off x="6682478" y="5785772"/>
+              <a:off x="6646302" y="3522791"/>
               <a:ext cx="124358" cy="80101"/>
             </a:xfrm>
             <a:prstGeom prst="rect">
@@ -4938,13 +4973,13 @@
         </p:sp>
         <p:sp>
           <p:nvSpPr>
-            <p:cNvPr id="34" name="tx34"/>
+            <p:cNvPr id="35" name="tx35"/>
             <p:cNvSpPr/>
             <p:nvPr/>
           </p:nvSpPr>
           <p:spPr>
             <a:xfrm>
-              <a:off x="2928340" y="5925448"/>
+              <a:off x="2928340" y="3662467"/>
               <a:ext cx="3578047" cy="100218"/>
             </a:xfrm>
             <a:prstGeom prst="rect">
@@ -4984,13 +5019,13 @@
         </p:sp>
         <p:sp>
           <p:nvSpPr>
-            <p:cNvPr id="35" name="tx35"/>
+            <p:cNvPr id="36" name="tx36"/>
             <p:cNvSpPr/>
             <p:nvPr/>
           </p:nvSpPr>
           <p:spPr>
             <a:xfrm rot="-5400000">
-              <a:off x="68446" y="3848213"/>
+              <a:off x="138035" y="2751517"/>
               <a:ext cx="1016904" cy="100218"/>
             </a:xfrm>
             <a:prstGeom prst="rect">
@@ -5030,13 +5065,13 @@
         </p:sp>
         <p:sp>
           <p:nvSpPr>
-            <p:cNvPr id="36" name="tx36"/>
+            <p:cNvPr id="37" name="tx37"/>
             <p:cNvSpPr/>
             <p:nvPr/>
           </p:nvSpPr>
           <p:spPr>
             <a:xfrm>
-              <a:off x="817517" y="1896563"/>
+              <a:off x="887106" y="1966152"/>
               <a:ext cx="6321612" cy="82021"/>
             </a:xfrm>
             <a:prstGeom prst="rect">
@@ -5076,13 +5111,3619 @@
         </p:sp>
         <p:sp>
           <p:nvSpPr>
-            <p:cNvPr id="37" name="tx37"/>
+            <p:cNvPr id="38" name="tx38"/>
             <p:cNvSpPr/>
             <p:nvPr/>
           </p:nvSpPr>
           <p:spPr>
             <a:xfrm>
-              <a:off x="817517" y="1669789"/>
+              <a:off x="887106" y="1739378"/>
+              <a:ext cx="2765511" cy="120152"/>
+            </a:xfrm>
+            <a:prstGeom prst="rect">
+              <a:avLst/>
+            </a:prstGeom>
+            <a:noFill/>
+          </p:spPr>
+          <p:txBody>
+            <a:bodyPr lIns="0" rIns="0" tIns="0" bIns="0" anchorCtr="1" anchor="ctr" wrap="none"/>
+            <a:lstStyle/>
+            <a:p>
+              <a:pPr algn="l" marL="0" marR="0" indent="0">
+                <a:lnSpc>
+                  <a:spcPts val="1320"/>
+                </a:lnSpc>
+                <a:spcBef>
+                  <a:spcPts val="0"/>
+                </a:spcBef>
+                <a:spcAft>
+                  <a:spcPts val="0"/>
+                </a:spcAft>
+              </a:pPr>
+              <a:r>
+                <a:rPr sz="1320">
+                  <a:solidFill>
+                    <a:srgbClr val="000000">
+                      <a:alpha val="100000"/>
+                    </a:srgbClr>
+                  </a:solidFill>
+                  <a:latin typeface="Helvetica"/>
+                  <a:cs typeface="Helvetica"/>
+                </a:rPr>
+                <a:t>Failure to Thrive/Fatigue/Dehydration</a:t>
+              </a:r>
+            </a:p>
+          </p:txBody>
+        </p:sp>
+        <p:sp>
+          <p:nvSpPr>
+            <p:cNvPr id="39" name="pl39"/>
+            <p:cNvSpPr/>
+            <p:nvPr/>
+          </p:nvSpPr>
+          <p:spPr>
+            <a:xfrm>
+              <a:off x="887106" y="5444019"/>
+              <a:ext cx="7660515" cy="0"/>
+            </a:xfrm>
+            <a:custGeom>
+              <a:avLst/>
+              <a:pathLst>
+                <a:path w="7660515" h="0">
+                  <a:moveTo>
+                    <a:pt x="0" y="0"/>
+                  </a:moveTo>
+                  <a:lnTo>
+                    <a:pt x="7660515" y="0"/>
+                  </a:lnTo>
+                  <a:lnTo>
+                    <a:pt x="7660515" y="0"/>
+                  </a:lnTo>
+                </a:path>
+              </a:pathLst>
+            </a:custGeom>
+            <a:ln w="6775" cap="flat">
+              <a:solidFill>
+                <a:srgbClr val="EBEBEB">
+                  <a:alpha val="100000"/>
+                </a:srgbClr>
+              </a:solidFill>
+              <a:prstDash val="solid"/>
+              <a:round/>
+            </a:ln>
+          </p:spPr>
+          <p:txBody>
+            <a:bodyPr/>
+            <a:lstStyle/>
+            <a:p/>
+          </p:txBody>
+        </p:sp>
+        <p:sp>
+          <p:nvSpPr>
+            <p:cNvPr id="40" name="pl40"/>
+            <p:cNvSpPr/>
+            <p:nvPr/>
+          </p:nvSpPr>
+          <p:spPr>
+            <a:xfrm>
+              <a:off x="887106" y="5144686"/>
+              <a:ext cx="7660515" cy="0"/>
+            </a:xfrm>
+            <a:custGeom>
+              <a:avLst/>
+              <a:pathLst>
+                <a:path w="7660515" h="0">
+                  <a:moveTo>
+                    <a:pt x="0" y="0"/>
+                  </a:moveTo>
+                  <a:lnTo>
+                    <a:pt x="7660515" y="0"/>
+                  </a:lnTo>
+                  <a:lnTo>
+                    <a:pt x="7660515" y="0"/>
+                  </a:lnTo>
+                </a:path>
+              </a:pathLst>
+            </a:custGeom>
+            <a:ln w="6775" cap="flat">
+              <a:solidFill>
+                <a:srgbClr val="EBEBEB">
+                  <a:alpha val="100000"/>
+                </a:srgbClr>
+              </a:solidFill>
+              <a:prstDash val="solid"/>
+              <a:round/>
+            </a:ln>
+          </p:spPr>
+          <p:txBody>
+            <a:bodyPr/>
+            <a:lstStyle/>
+            <a:p/>
+          </p:txBody>
+        </p:sp>
+        <p:sp>
+          <p:nvSpPr>
+            <p:cNvPr id="41" name="pl41"/>
+            <p:cNvSpPr/>
+            <p:nvPr/>
+          </p:nvSpPr>
+          <p:spPr>
+            <a:xfrm>
+              <a:off x="887106" y="4845352"/>
+              <a:ext cx="7660515" cy="0"/>
+            </a:xfrm>
+            <a:custGeom>
+              <a:avLst/>
+              <a:pathLst>
+                <a:path w="7660515" h="0">
+                  <a:moveTo>
+                    <a:pt x="0" y="0"/>
+                  </a:moveTo>
+                  <a:lnTo>
+                    <a:pt x="7660515" y="0"/>
+                  </a:lnTo>
+                  <a:lnTo>
+                    <a:pt x="7660515" y="0"/>
+                  </a:lnTo>
+                </a:path>
+              </a:pathLst>
+            </a:custGeom>
+            <a:ln w="6775" cap="flat">
+              <a:solidFill>
+                <a:srgbClr val="EBEBEB">
+                  <a:alpha val="100000"/>
+                </a:srgbClr>
+              </a:solidFill>
+              <a:prstDash val="solid"/>
+              <a:round/>
+            </a:ln>
+          </p:spPr>
+          <p:txBody>
+            <a:bodyPr/>
+            <a:lstStyle/>
+            <a:p/>
+          </p:txBody>
+        </p:sp>
+        <p:sp>
+          <p:nvSpPr>
+            <p:cNvPr id="42" name="pl42"/>
+            <p:cNvSpPr/>
+            <p:nvPr/>
+          </p:nvSpPr>
+          <p:spPr>
+            <a:xfrm>
+              <a:off x="887106" y="4546018"/>
+              <a:ext cx="7660515" cy="0"/>
+            </a:xfrm>
+            <a:custGeom>
+              <a:avLst/>
+              <a:pathLst>
+                <a:path w="7660515" h="0">
+                  <a:moveTo>
+                    <a:pt x="0" y="0"/>
+                  </a:moveTo>
+                  <a:lnTo>
+                    <a:pt x="7660515" y="0"/>
+                  </a:lnTo>
+                  <a:lnTo>
+                    <a:pt x="7660515" y="0"/>
+                  </a:lnTo>
+                </a:path>
+              </a:pathLst>
+            </a:custGeom>
+            <a:ln w="6775" cap="flat">
+              <a:solidFill>
+                <a:srgbClr val="EBEBEB">
+                  <a:alpha val="100000"/>
+                </a:srgbClr>
+              </a:solidFill>
+              <a:prstDash val="solid"/>
+              <a:round/>
+            </a:ln>
+          </p:spPr>
+          <p:txBody>
+            <a:bodyPr/>
+            <a:lstStyle/>
+            <a:p/>
+          </p:txBody>
+        </p:sp>
+        <p:sp>
+          <p:nvSpPr>
+            <p:cNvPr id="43" name="pl43"/>
+            <p:cNvSpPr/>
+            <p:nvPr/>
+          </p:nvSpPr>
+          <p:spPr>
+            <a:xfrm>
+              <a:off x="1636763" y="4336484"/>
+              <a:ext cx="0" cy="1317069"/>
+            </a:xfrm>
+            <a:custGeom>
+              <a:avLst/>
+              <a:pathLst>
+                <a:path w="0" h="1317069">
+                  <a:moveTo>
+                    <a:pt x="0" y="1317069"/>
+                  </a:moveTo>
+                  <a:lnTo>
+                    <a:pt x="0" y="0"/>
+                  </a:lnTo>
+                  <a:lnTo>
+                    <a:pt x="0" y="0"/>
+                  </a:lnTo>
+                </a:path>
+              </a:pathLst>
+            </a:custGeom>
+            <a:ln w="6775" cap="flat">
+              <a:solidFill>
+                <a:srgbClr val="EBEBEB">
+                  <a:alpha val="100000"/>
+                </a:srgbClr>
+              </a:solidFill>
+              <a:prstDash val="solid"/>
+              <a:round/>
+            </a:ln>
+          </p:spPr>
+          <p:txBody>
+            <a:bodyPr/>
+            <a:lstStyle/>
+            <a:p/>
+          </p:txBody>
+        </p:sp>
+        <p:sp>
+          <p:nvSpPr>
+            <p:cNvPr id="44" name="pl44"/>
+            <p:cNvSpPr/>
+            <p:nvPr/>
+          </p:nvSpPr>
+          <p:spPr>
+            <a:xfrm>
+              <a:off x="2482050" y="4336484"/>
+              <a:ext cx="0" cy="1317069"/>
+            </a:xfrm>
+            <a:custGeom>
+              <a:avLst/>
+              <a:pathLst>
+                <a:path w="0" h="1317069">
+                  <a:moveTo>
+                    <a:pt x="0" y="1317069"/>
+                  </a:moveTo>
+                  <a:lnTo>
+                    <a:pt x="0" y="0"/>
+                  </a:lnTo>
+                  <a:lnTo>
+                    <a:pt x="0" y="0"/>
+                  </a:lnTo>
+                </a:path>
+              </a:pathLst>
+            </a:custGeom>
+            <a:ln w="6775" cap="flat">
+              <a:solidFill>
+                <a:srgbClr val="EBEBEB">
+                  <a:alpha val="100000"/>
+                </a:srgbClr>
+              </a:solidFill>
+              <a:prstDash val="solid"/>
+              <a:round/>
+            </a:ln>
+          </p:spPr>
+          <p:txBody>
+            <a:bodyPr/>
+            <a:lstStyle/>
+            <a:p/>
+          </p:txBody>
+        </p:sp>
+        <p:sp>
+          <p:nvSpPr>
+            <p:cNvPr id="45" name="pl45"/>
+            <p:cNvSpPr/>
+            <p:nvPr/>
+          </p:nvSpPr>
+          <p:spPr>
+            <a:xfrm>
+              <a:off x="3327336" y="4336484"/>
+              <a:ext cx="0" cy="1317069"/>
+            </a:xfrm>
+            <a:custGeom>
+              <a:avLst/>
+              <a:pathLst>
+                <a:path w="0" h="1317069">
+                  <a:moveTo>
+                    <a:pt x="0" y="1317069"/>
+                  </a:moveTo>
+                  <a:lnTo>
+                    <a:pt x="0" y="0"/>
+                  </a:lnTo>
+                  <a:lnTo>
+                    <a:pt x="0" y="0"/>
+                  </a:lnTo>
+                </a:path>
+              </a:pathLst>
+            </a:custGeom>
+            <a:ln w="6775" cap="flat">
+              <a:solidFill>
+                <a:srgbClr val="EBEBEB">
+                  <a:alpha val="100000"/>
+                </a:srgbClr>
+              </a:solidFill>
+              <a:prstDash val="solid"/>
+              <a:round/>
+            </a:ln>
+          </p:spPr>
+          <p:txBody>
+            <a:bodyPr/>
+            <a:lstStyle/>
+            <a:p/>
+          </p:txBody>
+        </p:sp>
+        <p:sp>
+          <p:nvSpPr>
+            <p:cNvPr id="46" name="pl46"/>
+            <p:cNvSpPr/>
+            <p:nvPr/>
+          </p:nvSpPr>
+          <p:spPr>
+            <a:xfrm>
+              <a:off x="4172622" y="4336484"/>
+              <a:ext cx="0" cy="1317069"/>
+            </a:xfrm>
+            <a:custGeom>
+              <a:avLst/>
+              <a:pathLst>
+                <a:path w="0" h="1317069">
+                  <a:moveTo>
+                    <a:pt x="0" y="1317069"/>
+                  </a:moveTo>
+                  <a:lnTo>
+                    <a:pt x="0" y="0"/>
+                  </a:lnTo>
+                  <a:lnTo>
+                    <a:pt x="0" y="0"/>
+                  </a:lnTo>
+                </a:path>
+              </a:pathLst>
+            </a:custGeom>
+            <a:ln w="6775" cap="flat">
+              <a:solidFill>
+                <a:srgbClr val="EBEBEB">
+                  <a:alpha val="100000"/>
+                </a:srgbClr>
+              </a:solidFill>
+              <a:prstDash val="solid"/>
+              <a:round/>
+            </a:ln>
+          </p:spPr>
+          <p:txBody>
+            <a:bodyPr/>
+            <a:lstStyle/>
+            <a:p/>
+          </p:txBody>
+        </p:sp>
+        <p:sp>
+          <p:nvSpPr>
+            <p:cNvPr id="47" name="pl47"/>
+            <p:cNvSpPr/>
+            <p:nvPr/>
+          </p:nvSpPr>
+          <p:spPr>
+            <a:xfrm>
+              <a:off x="5017909" y="4336484"/>
+              <a:ext cx="0" cy="1317069"/>
+            </a:xfrm>
+            <a:custGeom>
+              <a:avLst/>
+              <a:pathLst>
+                <a:path w="0" h="1317069">
+                  <a:moveTo>
+                    <a:pt x="0" y="1317069"/>
+                  </a:moveTo>
+                  <a:lnTo>
+                    <a:pt x="0" y="0"/>
+                  </a:lnTo>
+                  <a:lnTo>
+                    <a:pt x="0" y="0"/>
+                  </a:lnTo>
+                </a:path>
+              </a:pathLst>
+            </a:custGeom>
+            <a:ln w="6775" cap="flat">
+              <a:solidFill>
+                <a:srgbClr val="EBEBEB">
+                  <a:alpha val="100000"/>
+                </a:srgbClr>
+              </a:solidFill>
+              <a:prstDash val="solid"/>
+              <a:round/>
+            </a:ln>
+          </p:spPr>
+          <p:txBody>
+            <a:bodyPr/>
+            <a:lstStyle/>
+            <a:p/>
+          </p:txBody>
+        </p:sp>
+        <p:sp>
+          <p:nvSpPr>
+            <p:cNvPr id="48" name="pl48"/>
+            <p:cNvSpPr/>
+            <p:nvPr/>
+          </p:nvSpPr>
+          <p:spPr>
+            <a:xfrm>
+              <a:off x="5863195" y="4336484"/>
+              <a:ext cx="0" cy="1317069"/>
+            </a:xfrm>
+            <a:custGeom>
+              <a:avLst/>
+              <a:pathLst>
+                <a:path w="0" h="1317069">
+                  <a:moveTo>
+                    <a:pt x="0" y="1317069"/>
+                  </a:moveTo>
+                  <a:lnTo>
+                    <a:pt x="0" y="0"/>
+                  </a:lnTo>
+                  <a:lnTo>
+                    <a:pt x="0" y="0"/>
+                  </a:lnTo>
+                </a:path>
+              </a:pathLst>
+            </a:custGeom>
+            <a:ln w="6775" cap="flat">
+              <a:solidFill>
+                <a:srgbClr val="EBEBEB">
+                  <a:alpha val="100000"/>
+                </a:srgbClr>
+              </a:solidFill>
+              <a:prstDash val="solid"/>
+              <a:round/>
+            </a:ln>
+          </p:spPr>
+          <p:txBody>
+            <a:bodyPr/>
+            <a:lstStyle/>
+            <a:p/>
+          </p:txBody>
+        </p:sp>
+        <p:sp>
+          <p:nvSpPr>
+            <p:cNvPr id="49" name="pl49"/>
+            <p:cNvSpPr/>
+            <p:nvPr/>
+          </p:nvSpPr>
+          <p:spPr>
+            <a:xfrm>
+              <a:off x="6708482" y="4336484"/>
+              <a:ext cx="0" cy="1317069"/>
+            </a:xfrm>
+            <a:custGeom>
+              <a:avLst/>
+              <a:pathLst>
+                <a:path w="0" h="1317069">
+                  <a:moveTo>
+                    <a:pt x="0" y="1317069"/>
+                  </a:moveTo>
+                  <a:lnTo>
+                    <a:pt x="0" y="0"/>
+                  </a:lnTo>
+                  <a:lnTo>
+                    <a:pt x="0" y="0"/>
+                  </a:lnTo>
+                </a:path>
+              </a:pathLst>
+            </a:custGeom>
+            <a:ln w="6775" cap="flat">
+              <a:solidFill>
+                <a:srgbClr val="EBEBEB">
+                  <a:alpha val="100000"/>
+                </a:srgbClr>
+              </a:solidFill>
+              <a:prstDash val="solid"/>
+              <a:round/>
+            </a:ln>
+          </p:spPr>
+          <p:txBody>
+            <a:bodyPr/>
+            <a:lstStyle/>
+            <a:p/>
+          </p:txBody>
+        </p:sp>
+        <p:sp>
+          <p:nvSpPr>
+            <p:cNvPr id="50" name="pl50"/>
+            <p:cNvSpPr/>
+            <p:nvPr/>
+          </p:nvSpPr>
+          <p:spPr>
+            <a:xfrm>
+              <a:off x="7553768" y="4336484"/>
+              <a:ext cx="0" cy="1317069"/>
+            </a:xfrm>
+            <a:custGeom>
+              <a:avLst/>
+              <a:pathLst>
+                <a:path w="0" h="1317069">
+                  <a:moveTo>
+                    <a:pt x="0" y="1317069"/>
+                  </a:moveTo>
+                  <a:lnTo>
+                    <a:pt x="0" y="0"/>
+                  </a:lnTo>
+                  <a:lnTo>
+                    <a:pt x="0" y="0"/>
+                  </a:lnTo>
+                </a:path>
+              </a:pathLst>
+            </a:custGeom>
+            <a:ln w="6775" cap="flat">
+              <a:solidFill>
+                <a:srgbClr val="EBEBEB">
+                  <a:alpha val="100000"/>
+                </a:srgbClr>
+              </a:solidFill>
+              <a:prstDash val="solid"/>
+              <a:round/>
+            </a:ln>
+          </p:spPr>
+          <p:txBody>
+            <a:bodyPr/>
+            <a:lstStyle/>
+            <a:p/>
+          </p:txBody>
+        </p:sp>
+        <p:sp>
+          <p:nvSpPr>
+            <p:cNvPr id="51" name="pl51"/>
+            <p:cNvSpPr/>
+            <p:nvPr/>
+          </p:nvSpPr>
+          <p:spPr>
+            <a:xfrm>
+              <a:off x="8399054" y="4336484"/>
+              <a:ext cx="0" cy="1317069"/>
+            </a:xfrm>
+            <a:custGeom>
+              <a:avLst/>
+              <a:pathLst>
+                <a:path w="0" h="1317069">
+                  <a:moveTo>
+                    <a:pt x="0" y="1317069"/>
+                  </a:moveTo>
+                  <a:lnTo>
+                    <a:pt x="0" y="0"/>
+                  </a:lnTo>
+                  <a:lnTo>
+                    <a:pt x="0" y="0"/>
+                  </a:lnTo>
+                </a:path>
+              </a:pathLst>
+            </a:custGeom>
+            <a:ln w="6775" cap="flat">
+              <a:solidFill>
+                <a:srgbClr val="EBEBEB">
+                  <a:alpha val="100000"/>
+                </a:srgbClr>
+              </a:solidFill>
+              <a:prstDash val="solid"/>
+              <a:round/>
+            </a:ln>
+          </p:spPr>
+          <p:txBody>
+            <a:bodyPr/>
+            <a:lstStyle/>
+            <a:p/>
+          </p:txBody>
+        </p:sp>
+        <p:sp>
+          <p:nvSpPr>
+            <p:cNvPr id="52" name="pl52"/>
+            <p:cNvSpPr/>
+            <p:nvPr/>
+          </p:nvSpPr>
+          <p:spPr>
+            <a:xfrm>
+              <a:off x="887106" y="5593686"/>
+              <a:ext cx="7660515" cy="0"/>
+            </a:xfrm>
+            <a:custGeom>
+              <a:avLst/>
+              <a:pathLst>
+                <a:path w="7660515" h="0">
+                  <a:moveTo>
+                    <a:pt x="0" y="0"/>
+                  </a:moveTo>
+                  <a:lnTo>
+                    <a:pt x="7660515" y="0"/>
+                  </a:lnTo>
+                  <a:lnTo>
+                    <a:pt x="7660515" y="0"/>
+                  </a:lnTo>
+                </a:path>
+              </a:pathLst>
+            </a:custGeom>
+            <a:ln w="13550" cap="flat">
+              <a:solidFill>
+                <a:srgbClr val="EBEBEB">
+                  <a:alpha val="100000"/>
+                </a:srgbClr>
+              </a:solidFill>
+              <a:prstDash val="solid"/>
+              <a:round/>
+            </a:ln>
+          </p:spPr>
+          <p:txBody>
+            <a:bodyPr/>
+            <a:lstStyle/>
+            <a:p/>
+          </p:txBody>
+        </p:sp>
+        <p:sp>
+          <p:nvSpPr>
+            <p:cNvPr id="53" name="pl53"/>
+            <p:cNvSpPr/>
+            <p:nvPr/>
+          </p:nvSpPr>
+          <p:spPr>
+            <a:xfrm>
+              <a:off x="887106" y="5294352"/>
+              <a:ext cx="7660515" cy="0"/>
+            </a:xfrm>
+            <a:custGeom>
+              <a:avLst/>
+              <a:pathLst>
+                <a:path w="7660515" h="0">
+                  <a:moveTo>
+                    <a:pt x="0" y="0"/>
+                  </a:moveTo>
+                  <a:lnTo>
+                    <a:pt x="7660515" y="0"/>
+                  </a:lnTo>
+                  <a:lnTo>
+                    <a:pt x="7660515" y="0"/>
+                  </a:lnTo>
+                </a:path>
+              </a:pathLst>
+            </a:custGeom>
+            <a:ln w="13550" cap="flat">
+              <a:solidFill>
+                <a:srgbClr val="EBEBEB">
+                  <a:alpha val="100000"/>
+                </a:srgbClr>
+              </a:solidFill>
+              <a:prstDash val="solid"/>
+              <a:round/>
+            </a:ln>
+          </p:spPr>
+          <p:txBody>
+            <a:bodyPr/>
+            <a:lstStyle/>
+            <a:p/>
+          </p:txBody>
+        </p:sp>
+        <p:sp>
+          <p:nvSpPr>
+            <p:cNvPr id="54" name="pl54"/>
+            <p:cNvSpPr/>
+            <p:nvPr/>
+          </p:nvSpPr>
+          <p:spPr>
+            <a:xfrm>
+              <a:off x="887106" y="4995019"/>
+              <a:ext cx="7660515" cy="0"/>
+            </a:xfrm>
+            <a:custGeom>
+              <a:avLst/>
+              <a:pathLst>
+                <a:path w="7660515" h="0">
+                  <a:moveTo>
+                    <a:pt x="0" y="0"/>
+                  </a:moveTo>
+                  <a:lnTo>
+                    <a:pt x="7660515" y="0"/>
+                  </a:lnTo>
+                  <a:lnTo>
+                    <a:pt x="7660515" y="0"/>
+                  </a:lnTo>
+                </a:path>
+              </a:pathLst>
+            </a:custGeom>
+            <a:ln w="13550" cap="flat">
+              <a:solidFill>
+                <a:srgbClr val="EBEBEB">
+                  <a:alpha val="100000"/>
+                </a:srgbClr>
+              </a:solidFill>
+              <a:prstDash val="solid"/>
+              <a:round/>
+            </a:ln>
+          </p:spPr>
+          <p:txBody>
+            <a:bodyPr/>
+            <a:lstStyle/>
+            <a:p/>
+          </p:txBody>
+        </p:sp>
+        <p:sp>
+          <p:nvSpPr>
+            <p:cNvPr id="55" name="pl55"/>
+            <p:cNvSpPr/>
+            <p:nvPr/>
+          </p:nvSpPr>
+          <p:spPr>
+            <a:xfrm>
+              <a:off x="887106" y="4695685"/>
+              <a:ext cx="7660515" cy="0"/>
+            </a:xfrm>
+            <a:custGeom>
+              <a:avLst/>
+              <a:pathLst>
+                <a:path w="7660515" h="0">
+                  <a:moveTo>
+                    <a:pt x="0" y="0"/>
+                  </a:moveTo>
+                  <a:lnTo>
+                    <a:pt x="7660515" y="0"/>
+                  </a:lnTo>
+                  <a:lnTo>
+                    <a:pt x="7660515" y="0"/>
+                  </a:lnTo>
+                </a:path>
+              </a:pathLst>
+            </a:custGeom>
+            <a:ln w="13550" cap="flat">
+              <a:solidFill>
+                <a:srgbClr val="EBEBEB">
+                  <a:alpha val="100000"/>
+                </a:srgbClr>
+              </a:solidFill>
+              <a:prstDash val="solid"/>
+              <a:round/>
+            </a:ln>
+          </p:spPr>
+          <p:txBody>
+            <a:bodyPr/>
+            <a:lstStyle/>
+            <a:p/>
+          </p:txBody>
+        </p:sp>
+        <p:sp>
+          <p:nvSpPr>
+            <p:cNvPr id="56" name="pl56"/>
+            <p:cNvSpPr/>
+            <p:nvPr/>
+          </p:nvSpPr>
+          <p:spPr>
+            <a:xfrm>
+              <a:off x="887106" y="4396351"/>
+              <a:ext cx="7660515" cy="0"/>
+            </a:xfrm>
+            <a:custGeom>
+              <a:avLst/>
+              <a:pathLst>
+                <a:path w="7660515" h="0">
+                  <a:moveTo>
+                    <a:pt x="0" y="0"/>
+                  </a:moveTo>
+                  <a:lnTo>
+                    <a:pt x="7660515" y="0"/>
+                  </a:lnTo>
+                  <a:lnTo>
+                    <a:pt x="7660515" y="0"/>
+                  </a:lnTo>
+                </a:path>
+              </a:pathLst>
+            </a:custGeom>
+            <a:ln w="13550" cap="flat">
+              <a:solidFill>
+                <a:srgbClr val="EBEBEB">
+                  <a:alpha val="100000"/>
+                </a:srgbClr>
+              </a:solidFill>
+              <a:prstDash val="solid"/>
+              <a:round/>
+            </a:ln>
+          </p:spPr>
+          <p:txBody>
+            <a:bodyPr/>
+            <a:lstStyle/>
+            <a:p/>
+          </p:txBody>
+        </p:sp>
+        <p:sp>
+          <p:nvSpPr>
+            <p:cNvPr id="57" name="pl57"/>
+            <p:cNvSpPr/>
+            <p:nvPr/>
+          </p:nvSpPr>
+          <p:spPr>
+            <a:xfrm>
+              <a:off x="1214120" y="4336484"/>
+              <a:ext cx="0" cy="1317069"/>
+            </a:xfrm>
+            <a:custGeom>
+              <a:avLst/>
+              <a:pathLst>
+                <a:path w="0" h="1317069">
+                  <a:moveTo>
+                    <a:pt x="0" y="1317069"/>
+                  </a:moveTo>
+                  <a:lnTo>
+                    <a:pt x="0" y="0"/>
+                  </a:lnTo>
+                  <a:lnTo>
+                    <a:pt x="0" y="0"/>
+                  </a:lnTo>
+                </a:path>
+              </a:pathLst>
+            </a:custGeom>
+            <a:ln w="13550" cap="flat">
+              <a:solidFill>
+                <a:srgbClr val="EBEBEB">
+                  <a:alpha val="100000"/>
+                </a:srgbClr>
+              </a:solidFill>
+              <a:prstDash val="solid"/>
+              <a:round/>
+            </a:ln>
+          </p:spPr>
+          <p:txBody>
+            <a:bodyPr/>
+            <a:lstStyle/>
+            <a:p/>
+          </p:txBody>
+        </p:sp>
+        <p:sp>
+          <p:nvSpPr>
+            <p:cNvPr id="58" name="pl58"/>
+            <p:cNvSpPr/>
+            <p:nvPr/>
+          </p:nvSpPr>
+          <p:spPr>
+            <a:xfrm>
+              <a:off x="2059406" y="4336484"/>
+              <a:ext cx="0" cy="1317069"/>
+            </a:xfrm>
+            <a:custGeom>
+              <a:avLst/>
+              <a:pathLst>
+                <a:path w="0" h="1317069">
+                  <a:moveTo>
+                    <a:pt x="0" y="1317069"/>
+                  </a:moveTo>
+                  <a:lnTo>
+                    <a:pt x="0" y="0"/>
+                  </a:lnTo>
+                  <a:lnTo>
+                    <a:pt x="0" y="0"/>
+                  </a:lnTo>
+                </a:path>
+              </a:pathLst>
+            </a:custGeom>
+            <a:ln w="13550" cap="flat">
+              <a:solidFill>
+                <a:srgbClr val="EBEBEB">
+                  <a:alpha val="100000"/>
+                </a:srgbClr>
+              </a:solidFill>
+              <a:prstDash val="solid"/>
+              <a:round/>
+            </a:ln>
+          </p:spPr>
+          <p:txBody>
+            <a:bodyPr/>
+            <a:lstStyle/>
+            <a:p/>
+          </p:txBody>
+        </p:sp>
+        <p:sp>
+          <p:nvSpPr>
+            <p:cNvPr id="59" name="pl59"/>
+            <p:cNvSpPr/>
+            <p:nvPr/>
+          </p:nvSpPr>
+          <p:spPr>
+            <a:xfrm>
+              <a:off x="2904693" y="4336484"/>
+              <a:ext cx="0" cy="1317069"/>
+            </a:xfrm>
+            <a:custGeom>
+              <a:avLst/>
+              <a:pathLst>
+                <a:path w="0" h="1317069">
+                  <a:moveTo>
+                    <a:pt x="0" y="1317069"/>
+                  </a:moveTo>
+                  <a:lnTo>
+                    <a:pt x="0" y="0"/>
+                  </a:lnTo>
+                  <a:lnTo>
+                    <a:pt x="0" y="0"/>
+                  </a:lnTo>
+                </a:path>
+              </a:pathLst>
+            </a:custGeom>
+            <a:ln w="13550" cap="flat">
+              <a:solidFill>
+                <a:srgbClr val="EBEBEB">
+                  <a:alpha val="100000"/>
+                </a:srgbClr>
+              </a:solidFill>
+              <a:prstDash val="solid"/>
+              <a:round/>
+            </a:ln>
+          </p:spPr>
+          <p:txBody>
+            <a:bodyPr/>
+            <a:lstStyle/>
+            <a:p/>
+          </p:txBody>
+        </p:sp>
+        <p:sp>
+          <p:nvSpPr>
+            <p:cNvPr id="60" name="pl60"/>
+            <p:cNvSpPr/>
+            <p:nvPr/>
+          </p:nvSpPr>
+          <p:spPr>
+            <a:xfrm>
+              <a:off x="3749979" y="4336484"/>
+              <a:ext cx="0" cy="1317069"/>
+            </a:xfrm>
+            <a:custGeom>
+              <a:avLst/>
+              <a:pathLst>
+                <a:path w="0" h="1317069">
+                  <a:moveTo>
+                    <a:pt x="0" y="1317069"/>
+                  </a:moveTo>
+                  <a:lnTo>
+                    <a:pt x="0" y="0"/>
+                  </a:lnTo>
+                  <a:lnTo>
+                    <a:pt x="0" y="0"/>
+                  </a:lnTo>
+                </a:path>
+              </a:pathLst>
+            </a:custGeom>
+            <a:ln w="13550" cap="flat">
+              <a:solidFill>
+                <a:srgbClr val="EBEBEB">
+                  <a:alpha val="100000"/>
+                </a:srgbClr>
+              </a:solidFill>
+              <a:prstDash val="solid"/>
+              <a:round/>
+            </a:ln>
+          </p:spPr>
+          <p:txBody>
+            <a:bodyPr/>
+            <a:lstStyle/>
+            <a:p/>
+          </p:txBody>
+        </p:sp>
+        <p:sp>
+          <p:nvSpPr>
+            <p:cNvPr id="61" name="pl61"/>
+            <p:cNvSpPr/>
+            <p:nvPr/>
+          </p:nvSpPr>
+          <p:spPr>
+            <a:xfrm>
+              <a:off x="4595266" y="4336484"/>
+              <a:ext cx="0" cy="1317069"/>
+            </a:xfrm>
+            <a:custGeom>
+              <a:avLst/>
+              <a:pathLst>
+                <a:path w="0" h="1317069">
+                  <a:moveTo>
+                    <a:pt x="0" y="1317069"/>
+                  </a:moveTo>
+                  <a:lnTo>
+                    <a:pt x="0" y="0"/>
+                  </a:lnTo>
+                  <a:lnTo>
+                    <a:pt x="0" y="0"/>
+                  </a:lnTo>
+                </a:path>
+              </a:pathLst>
+            </a:custGeom>
+            <a:ln w="13550" cap="flat">
+              <a:solidFill>
+                <a:srgbClr val="EBEBEB">
+                  <a:alpha val="100000"/>
+                </a:srgbClr>
+              </a:solidFill>
+              <a:prstDash val="solid"/>
+              <a:round/>
+            </a:ln>
+          </p:spPr>
+          <p:txBody>
+            <a:bodyPr/>
+            <a:lstStyle/>
+            <a:p/>
+          </p:txBody>
+        </p:sp>
+        <p:sp>
+          <p:nvSpPr>
+            <p:cNvPr id="62" name="pl62"/>
+            <p:cNvSpPr/>
+            <p:nvPr/>
+          </p:nvSpPr>
+          <p:spPr>
+            <a:xfrm>
+              <a:off x="5440552" y="4336484"/>
+              <a:ext cx="0" cy="1317069"/>
+            </a:xfrm>
+            <a:custGeom>
+              <a:avLst/>
+              <a:pathLst>
+                <a:path w="0" h="1317069">
+                  <a:moveTo>
+                    <a:pt x="0" y="1317069"/>
+                  </a:moveTo>
+                  <a:lnTo>
+                    <a:pt x="0" y="0"/>
+                  </a:lnTo>
+                  <a:lnTo>
+                    <a:pt x="0" y="0"/>
+                  </a:lnTo>
+                </a:path>
+              </a:pathLst>
+            </a:custGeom>
+            <a:ln w="13550" cap="flat">
+              <a:solidFill>
+                <a:srgbClr val="EBEBEB">
+                  <a:alpha val="100000"/>
+                </a:srgbClr>
+              </a:solidFill>
+              <a:prstDash val="solid"/>
+              <a:round/>
+            </a:ln>
+          </p:spPr>
+          <p:txBody>
+            <a:bodyPr/>
+            <a:lstStyle/>
+            <a:p/>
+          </p:txBody>
+        </p:sp>
+        <p:sp>
+          <p:nvSpPr>
+            <p:cNvPr id="63" name="pl63"/>
+            <p:cNvSpPr/>
+            <p:nvPr/>
+          </p:nvSpPr>
+          <p:spPr>
+            <a:xfrm>
+              <a:off x="6285838" y="4336484"/>
+              <a:ext cx="0" cy="1317069"/>
+            </a:xfrm>
+            <a:custGeom>
+              <a:avLst/>
+              <a:pathLst>
+                <a:path w="0" h="1317069">
+                  <a:moveTo>
+                    <a:pt x="0" y="1317069"/>
+                  </a:moveTo>
+                  <a:lnTo>
+                    <a:pt x="0" y="0"/>
+                  </a:lnTo>
+                  <a:lnTo>
+                    <a:pt x="0" y="0"/>
+                  </a:lnTo>
+                </a:path>
+              </a:pathLst>
+            </a:custGeom>
+            <a:ln w="13550" cap="flat">
+              <a:solidFill>
+                <a:srgbClr val="EBEBEB">
+                  <a:alpha val="100000"/>
+                </a:srgbClr>
+              </a:solidFill>
+              <a:prstDash val="solid"/>
+              <a:round/>
+            </a:ln>
+          </p:spPr>
+          <p:txBody>
+            <a:bodyPr/>
+            <a:lstStyle/>
+            <a:p/>
+          </p:txBody>
+        </p:sp>
+        <p:sp>
+          <p:nvSpPr>
+            <p:cNvPr id="64" name="pl64"/>
+            <p:cNvSpPr/>
+            <p:nvPr/>
+          </p:nvSpPr>
+          <p:spPr>
+            <a:xfrm>
+              <a:off x="7131125" y="4336484"/>
+              <a:ext cx="0" cy="1317069"/>
+            </a:xfrm>
+            <a:custGeom>
+              <a:avLst/>
+              <a:pathLst>
+                <a:path w="0" h="1317069">
+                  <a:moveTo>
+                    <a:pt x="0" y="1317069"/>
+                  </a:moveTo>
+                  <a:lnTo>
+                    <a:pt x="0" y="0"/>
+                  </a:lnTo>
+                  <a:lnTo>
+                    <a:pt x="0" y="0"/>
+                  </a:lnTo>
+                </a:path>
+              </a:pathLst>
+            </a:custGeom>
+            <a:ln w="13550" cap="flat">
+              <a:solidFill>
+                <a:srgbClr val="EBEBEB">
+                  <a:alpha val="100000"/>
+                </a:srgbClr>
+              </a:solidFill>
+              <a:prstDash val="solid"/>
+              <a:round/>
+            </a:ln>
+          </p:spPr>
+          <p:txBody>
+            <a:bodyPr/>
+            <a:lstStyle/>
+            <a:p/>
+          </p:txBody>
+        </p:sp>
+        <p:sp>
+          <p:nvSpPr>
+            <p:cNvPr id="65" name="pl65"/>
+            <p:cNvSpPr/>
+            <p:nvPr/>
+          </p:nvSpPr>
+          <p:spPr>
+            <a:xfrm>
+              <a:off x="7976411" y="4336484"/>
+              <a:ext cx="0" cy="1317069"/>
+            </a:xfrm>
+            <a:custGeom>
+              <a:avLst/>
+              <a:pathLst>
+                <a:path w="0" h="1317069">
+                  <a:moveTo>
+                    <a:pt x="0" y="1317069"/>
+                  </a:moveTo>
+                  <a:lnTo>
+                    <a:pt x="0" y="0"/>
+                  </a:lnTo>
+                  <a:lnTo>
+                    <a:pt x="0" y="0"/>
+                  </a:lnTo>
+                </a:path>
+              </a:pathLst>
+            </a:custGeom>
+            <a:ln w="13550" cap="flat">
+              <a:solidFill>
+                <a:srgbClr val="EBEBEB">
+                  <a:alpha val="100000"/>
+                </a:srgbClr>
+              </a:solidFill>
+              <a:prstDash val="solid"/>
+              <a:round/>
+            </a:ln>
+          </p:spPr>
+          <p:txBody>
+            <a:bodyPr/>
+            <a:lstStyle/>
+            <a:p/>
+          </p:txBody>
+        </p:sp>
+        <p:sp>
+          <p:nvSpPr>
+            <p:cNvPr id="66" name="pg66"/>
+            <p:cNvSpPr/>
+            <p:nvPr/>
+          </p:nvSpPr>
+          <p:spPr>
+            <a:xfrm>
+              <a:off x="1235312" y="4336484"/>
+              <a:ext cx="6964104" cy="1225543"/>
+            </a:xfrm>
+            <a:custGeom>
+              <a:avLst/>
+              <a:pathLst>
+                <a:path w="6964104" h="1225543">
+                  <a:moveTo>
+                    <a:pt x="1049853" y="0"/>
+                  </a:moveTo>
+                  <a:lnTo>
+                    <a:pt x="1055167" y="4236"/>
+                  </a:lnTo>
+                  <a:lnTo>
+                    <a:pt x="1125511" y="57918"/>
+                  </a:lnTo>
+                  <a:lnTo>
+                    <a:pt x="1195856" y="109300"/>
+                  </a:lnTo>
+                  <a:lnTo>
+                    <a:pt x="1266200" y="158480"/>
+                  </a:lnTo>
+                  <a:lnTo>
+                    <a:pt x="1336545" y="205554"/>
+                  </a:lnTo>
+                  <a:lnTo>
+                    <a:pt x="1406889" y="250610"/>
+                  </a:lnTo>
+                  <a:lnTo>
+                    <a:pt x="1477234" y="293736"/>
+                  </a:lnTo>
+                  <a:lnTo>
+                    <a:pt x="1547578" y="335015"/>
+                  </a:lnTo>
+                  <a:lnTo>
+                    <a:pt x="1617923" y="374525"/>
+                  </a:lnTo>
+                  <a:lnTo>
+                    <a:pt x="1688267" y="412342"/>
+                  </a:lnTo>
+                  <a:lnTo>
+                    <a:pt x="1758612" y="448539"/>
+                  </a:lnTo>
+                  <a:lnTo>
+                    <a:pt x="1828956" y="483185"/>
+                  </a:lnTo>
+                  <a:lnTo>
+                    <a:pt x="1899301" y="516347"/>
+                  </a:lnTo>
+                  <a:lnTo>
+                    <a:pt x="1969645" y="548088"/>
+                  </a:lnTo>
+                  <a:lnTo>
+                    <a:pt x="2039990" y="578469"/>
+                  </a:lnTo>
+                  <a:lnTo>
+                    <a:pt x="2110334" y="607548"/>
+                  </a:lnTo>
+                  <a:lnTo>
+                    <a:pt x="2180679" y="635382"/>
+                  </a:lnTo>
+                  <a:lnTo>
+                    <a:pt x="2251023" y="662023"/>
+                  </a:lnTo>
+                  <a:lnTo>
+                    <a:pt x="2321368" y="687523"/>
+                  </a:lnTo>
+                  <a:lnTo>
+                    <a:pt x="2391712" y="711930"/>
+                  </a:lnTo>
+                  <a:lnTo>
+                    <a:pt x="2462057" y="735291"/>
+                  </a:lnTo>
+                  <a:lnTo>
+                    <a:pt x="2532401" y="757652"/>
+                  </a:lnTo>
+                  <a:lnTo>
+                    <a:pt x="2602746" y="779054"/>
+                  </a:lnTo>
+                  <a:lnTo>
+                    <a:pt x="2673090" y="799540"/>
+                  </a:lnTo>
+                  <a:lnTo>
+                    <a:pt x="2743435" y="819148"/>
+                  </a:lnTo>
+                  <a:lnTo>
+                    <a:pt x="2813779" y="837916"/>
+                  </a:lnTo>
+                  <a:lnTo>
+                    <a:pt x="2884124" y="855880"/>
+                  </a:lnTo>
+                  <a:lnTo>
+                    <a:pt x="2954468" y="873074"/>
+                  </a:lnTo>
+                  <a:lnTo>
+                    <a:pt x="3024813" y="889531"/>
+                  </a:lnTo>
+                  <a:lnTo>
+                    <a:pt x="3095157" y="905284"/>
+                  </a:lnTo>
+                  <a:lnTo>
+                    <a:pt x="3165502" y="920361"/>
+                  </a:lnTo>
+                  <a:lnTo>
+                    <a:pt x="3235846" y="934793"/>
+                  </a:lnTo>
+                  <a:lnTo>
+                    <a:pt x="3306191" y="948606"/>
+                  </a:lnTo>
+                  <a:lnTo>
+                    <a:pt x="3376535" y="958822"/>
+                  </a:lnTo>
+                  <a:lnTo>
+                    <a:pt x="3446880" y="961938"/>
+                  </a:lnTo>
+                  <a:lnTo>
+                    <a:pt x="3517224" y="965021"/>
+                  </a:lnTo>
+                  <a:lnTo>
+                    <a:pt x="3587569" y="968072"/>
+                  </a:lnTo>
+                  <a:lnTo>
+                    <a:pt x="3657913" y="971092"/>
+                  </a:lnTo>
+                  <a:lnTo>
+                    <a:pt x="3728257" y="974079"/>
+                  </a:lnTo>
+                  <a:lnTo>
+                    <a:pt x="3798602" y="977036"/>
+                  </a:lnTo>
+                  <a:lnTo>
+                    <a:pt x="3868946" y="979962"/>
+                  </a:lnTo>
+                  <a:lnTo>
+                    <a:pt x="3939291" y="982857"/>
+                  </a:lnTo>
+                  <a:lnTo>
+                    <a:pt x="4009635" y="985722"/>
+                  </a:lnTo>
+                  <a:lnTo>
+                    <a:pt x="4079980" y="988557"/>
+                  </a:lnTo>
+                  <a:lnTo>
+                    <a:pt x="4150324" y="991362"/>
+                  </a:lnTo>
+                  <a:lnTo>
+                    <a:pt x="4220669" y="994138"/>
+                  </a:lnTo>
+                  <a:lnTo>
+                    <a:pt x="4291013" y="996885"/>
+                  </a:lnTo>
+                  <a:lnTo>
+                    <a:pt x="4361358" y="999604"/>
+                  </a:lnTo>
+                  <a:lnTo>
+                    <a:pt x="4431702" y="1002294"/>
+                  </a:lnTo>
+                  <a:lnTo>
+                    <a:pt x="4502047" y="1004956"/>
+                  </a:lnTo>
+                  <a:lnTo>
+                    <a:pt x="4572391" y="1007590"/>
+                  </a:lnTo>
+                  <a:lnTo>
+                    <a:pt x="4642736" y="1010197"/>
+                  </a:lnTo>
+                  <a:lnTo>
+                    <a:pt x="4713080" y="1012776"/>
+                  </a:lnTo>
+                  <a:lnTo>
+                    <a:pt x="4783425" y="1015328"/>
+                  </a:lnTo>
+                  <a:lnTo>
+                    <a:pt x="4853769" y="1017854"/>
+                  </a:lnTo>
+                  <a:lnTo>
+                    <a:pt x="4924114" y="1020354"/>
+                  </a:lnTo>
+                  <a:lnTo>
+                    <a:pt x="4994458" y="1022827"/>
+                  </a:lnTo>
+                  <a:lnTo>
+                    <a:pt x="5064803" y="1025275"/>
+                  </a:lnTo>
+                  <a:lnTo>
+                    <a:pt x="5135147" y="1027697"/>
+                  </a:lnTo>
+                  <a:lnTo>
+                    <a:pt x="5205492" y="1030093"/>
+                  </a:lnTo>
+                  <a:lnTo>
+                    <a:pt x="5275836" y="1032465"/>
+                  </a:lnTo>
+                  <a:lnTo>
+                    <a:pt x="5346181" y="1034812"/>
+                  </a:lnTo>
+                  <a:lnTo>
+                    <a:pt x="5416525" y="1037134"/>
+                  </a:lnTo>
+                  <a:lnTo>
+                    <a:pt x="5486870" y="1039432"/>
+                  </a:lnTo>
+                  <a:lnTo>
+                    <a:pt x="5557214" y="1041706"/>
+                  </a:lnTo>
+                  <a:lnTo>
+                    <a:pt x="5627559" y="1043957"/>
+                  </a:lnTo>
+                  <a:lnTo>
+                    <a:pt x="5697903" y="1046184"/>
+                  </a:lnTo>
+                  <a:lnTo>
+                    <a:pt x="5768248" y="1048387"/>
+                  </a:lnTo>
+                  <a:lnTo>
+                    <a:pt x="5838592" y="1050568"/>
+                  </a:lnTo>
+                  <a:lnTo>
+                    <a:pt x="5908937" y="1052726"/>
+                  </a:lnTo>
+                  <a:lnTo>
+                    <a:pt x="5979281" y="1054861"/>
+                  </a:lnTo>
+                  <a:lnTo>
+                    <a:pt x="6049626" y="1056974"/>
+                  </a:lnTo>
+                  <a:lnTo>
+                    <a:pt x="6119970" y="1059065"/>
+                  </a:lnTo>
+                  <a:lnTo>
+                    <a:pt x="6190315" y="1061134"/>
+                  </a:lnTo>
+                  <a:lnTo>
+                    <a:pt x="6260659" y="1063181"/>
+                  </a:lnTo>
+                  <a:lnTo>
+                    <a:pt x="6331004" y="1065208"/>
+                  </a:lnTo>
+                  <a:lnTo>
+                    <a:pt x="6401348" y="1067212"/>
+                  </a:lnTo>
+                  <a:lnTo>
+                    <a:pt x="6471693" y="1069197"/>
+                  </a:lnTo>
+                  <a:lnTo>
+                    <a:pt x="6542037" y="1071160"/>
+                  </a:lnTo>
+                  <a:lnTo>
+                    <a:pt x="6612382" y="1073103"/>
+                  </a:lnTo>
+                  <a:lnTo>
+                    <a:pt x="6682726" y="1075025"/>
+                  </a:lnTo>
+                  <a:lnTo>
+                    <a:pt x="6753071" y="1076928"/>
+                  </a:lnTo>
+                  <a:lnTo>
+                    <a:pt x="6823415" y="1078810"/>
+                  </a:lnTo>
+                  <a:lnTo>
+                    <a:pt x="6893760" y="1080673"/>
+                  </a:lnTo>
+                  <a:lnTo>
+                    <a:pt x="6964104" y="1082516"/>
+                  </a:lnTo>
+                  <a:lnTo>
+                    <a:pt x="6964104" y="1225543"/>
+                  </a:lnTo>
+                  <a:lnTo>
+                    <a:pt x="6893760" y="1224126"/>
+                  </a:lnTo>
+                  <a:lnTo>
+                    <a:pt x="6823415" y="1222645"/>
+                  </a:lnTo>
+                  <a:lnTo>
+                    <a:pt x="6753071" y="1221098"/>
+                  </a:lnTo>
+                  <a:lnTo>
+                    <a:pt x="6682726" y="1219482"/>
+                  </a:lnTo>
+                  <a:lnTo>
+                    <a:pt x="6612382" y="1217794"/>
+                  </a:lnTo>
+                  <a:lnTo>
+                    <a:pt x="6542037" y="1216030"/>
+                  </a:lnTo>
+                  <a:lnTo>
+                    <a:pt x="6471693" y="1214187"/>
+                  </a:lnTo>
+                  <a:lnTo>
+                    <a:pt x="6401348" y="1212262"/>
+                  </a:lnTo>
+                  <a:lnTo>
+                    <a:pt x="6331004" y="1210250"/>
+                  </a:lnTo>
+                  <a:lnTo>
+                    <a:pt x="6260659" y="1208148"/>
+                  </a:lnTo>
+                  <a:lnTo>
+                    <a:pt x="6190315" y="1205953"/>
+                  </a:lnTo>
+                  <a:lnTo>
+                    <a:pt x="6119970" y="1203659"/>
+                  </a:lnTo>
+                  <a:lnTo>
+                    <a:pt x="6049626" y="1201262"/>
+                  </a:lnTo>
+                  <a:lnTo>
+                    <a:pt x="5979281" y="1198758"/>
+                  </a:lnTo>
+                  <a:lnTo>
+                    <a:pt x="5908937" y="1196142"/>
+                  </a:lnTo>
+                  <a:lnTo>
+                    <a:pt x="5838592" y="1193409"/>
+                  </a:lnTo>
+                  <a:lnTo>
+                    <a:pt x="5768248" y="1190553"/>
+                  </a:lnTo>
+                  <a:lnTo>
+                    <a:pt x="5697903" y="1187570"/>
+                  </a:lnTo>
+                  <a:lnTo>
+                    <a:pt x="5627559" y="1184453"/>
+                  </a:lnTo>
+                  <a:lnTo>
+                    <a:pt x="5557214" y="1181197"/>
+                  </a:lnTo>
+                  <a:lnTo>
+                    <a:pt x="5486870" y="1177795"/>
+                  </a:lnTo>
+                  <a:lnTo>
+                    <a:pt x="5416525" y="1174240"/>
+                  </a:lnTo>
+                  <a:lnTo>
+                    <a:pt x="5346181" y="1170527"/>
+                  </a:lnTo>
+                  <a:lnTo>
+                    <a:pt x="5275836" y="1166647"/>
+                  </a:lnTo>
+                  <a:lnTo>
+                    <a:pt x="5205492" y="1162594"/>
+                  </a:lnTo>
+                  <a:lnTo>
+                    <a:pt x="5135147" y="1158359"/>
+                  </a:lnTo>
+                  <a:lnTo>
+                    <a:pt x="5064803" y="1153935"/>
+                  </a:lnTo>
+                  <a:lnTo>
+                    <a:pt x="4994458" y="1149312"/>
+                  </a:lnTo>
+                  <a:lnTo>
+                    <a:pt x="4924114" y="1144483"/>
+                  </a:lnTo>
+                  <a:lnTo>
+                    <a:pt x="4853769" y="1139438"/>
+                  </a:lnTo>
+                  <a:lnTo>
+                    <a:pt x="4783425" y="1134166"/>
+                  </a:lnTo>
+                  <a:lnTo>
+                    <a:pt x="4713080" y="1128659"/>
+                  </a:lnTo>
+                  <a:lnTo>
+                    <a:pt x="4642736" y="1122905"/>
+                  </a:lnTo>
+                  <a:lnTo>
+                    <a:pt x="4572391" y="1116894"/>
+                  </a:lnTo>
+                  <a:lnTo>
+                    <a:pt x="4502047" y="1110614"/>
+                  </a:lnTo>
+                  <a:lnTo>
+                    <a:pt x="4431702" y="1104052"/>
+                  </a:lnTo>
+                  <a:lnTo>
+                    <a:pt x="4361358" y="1097197"/>
+                  </a:lnTo>
+                  <a:lnTo>
+                    <a:pt x="4291013" y="1090035"/>
+                  </a:lnTo>
+                  <a:lnTo>
+                    <a:pt x="4220669" y="1082552"/>
+                  </a:lnTo>
+                  <a:lnTo>
+                    <a:pt x="4150324" y="1074735"/>
+                  </a:lnTo>
+                  <a:lnTo>
+                    <a:pt x="4079980" y="1066567"/>
+                  </a:lnTo>
+                  <a:lnTo>
+                    <a:pt x="4009635" y="1058034"/>
+                  </a:lnTo>
+                  <a:lnTo>
+                    <a:pt x="3939291" y="1049119"/>
+                  </a:lnTo>
+                  <a:lnTo>
+                    <a:pt x="3868946" y="1039805"/>
+                  </a:lnTo>
+                  <a:lnTo>
+                    <a:pt x="3798602" y="1030074"/>
+                  </a:lnTo>
+                  <a:lnTo>
+                    <a:pt x="3728257" y="1019907"/>
+                  </a:lnTo>
+                  <a:lnTo>
+                    <a:pt x="3657913" y="1009286"/>
+                  </a:lnTo>
+                  <a:lnTo>
+                    <a:pt x="3587569" y="998189"/>
+                  </a:lnTo>
+                  <a:lnTo>
+                    <a:pt x="3517224" y="986595"/>
+                  </a:lnTo>
+                  <a:lnTo>
+                    <a:pt x="3446880" y="974482"/>
+                  </a:lnTo>
+                  <a:lnTo>
+                    <a:pt x="3376535" y="961827"/>
+                  </a:lnTo>
+                  <a:lnTo>
+                    <a:pt x="3306191" y="955673"/>
+                  </a:lnTo>
+                  <a:lnTo>
+                    <a:pt x="3235846" y="952491"/>
+                  </a:lnTo>
+                  <a:lnTo>
+                    <a:pt x="3165502" y="949275"/>
+                  </a:lnTo>
+                  <a:lnTo>
+                    <a:pt x="3095157" y="946026"/>
+                  </a:lnTo>
+                  <a:lnTo>
+                    <a:pt x="3024813" y="942742"/>
+                  </a:lnTo>
+                  <a:lnTo>
+                    <a:pt x="2954468" y="939424"/>
+                  </a:lnTo>
+                  <a:lnTo>
+                    <a:pt x="2884124" y="936070"/>
+                  </a:lnTo>
+                  <a:lnTo>
+                    <a:pt x="2813779" y="932681"/>
+                  </a:lnTo>
+                  <a:lnTo>
+                    <a:pt x="2743435" y="929257"/>
+                  </a:lnTo>
+                  <a:lnTo>
+                    <a:pt x="2673090" y="925796"/>
+                  </a:lnTo>
+                  <a:lnTo>
+                    <a:pt x="2602746" y="922299"/>
+                  </a:lnTo>
+                  <a:lnTo>
+                    <a:pt x="2532401" y="918764"/>
+                  </a:lnTo>
+                  <a:lnTo>
+                    <a:pt x="2462057" y="915193"/>
+                  </a:lnTo>
+                  <a:lnTo>
+                    <a:pt x="2391712" y="911584"/>
+                  </a:lnTo>
+                  <a:lnTo>
+                    <a:pt x="2321368" y="907936"/>
+                  </a:lnTo>
+                  <a:lnTo>
+                    <a:pt x="2251023" y="904250"/>
+                  </a:lnTo>
+                  <a:lnTo>
+                    <a:pt x="2180679" y="900526"/>
+                  </a:lnTo>
+                  <a:lnTo>
+                    <a:pt x="2110334" y="896762"/>
+                  </a:lnTo>
+                  <a:lnTo>
+                    <a:pt x="2039990" y="892958"/>
+                  </a:lnTo>
+                  <a:lnTo>
+                    <a:pt x="1969645" y="889114"/>
+                  </a:lnTo>
+                  <a:lnTo>
+                    <a:pt x="1899301" y="885230"/>
+                  </a:lnTo>
+                  <a:lnTo>
+                    <a:pt x="1828956" y="881304"/>
+                  </a:lnTo>
+                  <a:lnTo>
+                    <a:pt x="1758612" y="877338"/>
+                  </a:lnTo>
+                  <a:lnTo>
+                    <a:pt x="1688267" y="873329"/>
+                  </a:lnTo>
+                  <a:lnTo>
+                    <a:pt x="1617923" y="869278"/>
+                  </a:lnTo>
+                  <a:lnTo>
+                    <a:pt x="1547578" y="865184"/>
+                  </a:lnTo>
+                  <a:lnTo>
+                    <a:pt x="1477234" y="861047"/>
+                  </a:lnTo>
+                  <a:lnTo>
+                    <a:pt x="1406889" y="856867"/>
+                  </a:lnTo>
+                  <a:lnTo>
+                    <a:pt x="1336545" y="852642"/>
+                  </a:lnTo>
+                  <a:lnTo>
+                    <a:pt x="1266200" y="848373"/>
+                  </a:lnTo>
+                  <a:lnTo>
+                    <a:pt x="1195856" y="844058"/>
+                  </a:lnTo>
+                  <a:lnTo>
+                    <a:pt x="1125511" y="839698"/>
+                  </a:lnTo>
+                  <a:lnTo>
+                    <a:pt x="1055167" y="835292"/>
+                  </a:lnTo>
+                  <a:lnTo>
+                    <a:pt x="984822" y="830840"/>
+                  </a:lnTo>
+                  <a:lnTo>
+                    <a:pt x="914478" y="826341"/>
+                  </a:lnTo>
+                  <a:lnTo>
+                    <a:pt x="844133" y="821794"/>
+                  </a:lnTo>
+                  <a:lnTo>
+                    <a:pt x="773789" y="817199"/>
+                  </a:lnTo>
+                  <a:lnTo>
+                    <a:pt x="703444" y="812556"/>
+                  </a:lnTo>
+                  <a:lnTo>
+                    <a:pt x="633100" y="807863"/>
+                  </a:lnTo>
+                  <a:lnTo>
+                    <a:pt x="562755" y="803121"/>
+                  </a:lnTo>
+                  <a:lnTo>
+                    <a:pt x="492411" y="798330"/>
+                  </a:lnTo>
+                  <a:lnTo>
+                    <a:pt x="422066" y="793487"/>
+                  </a:lnTo>
+                  <a:lnTo>
+                    <a:pt x="351722" y="788594"/>
+                  </a:lnTo>
+                  <a:lnTo>
+                    <a:pt x="281377" y="783648"/>
+                  </a:lnTo>
+                  <a:lnTo>
+                    <a:pt x="211033" y="778651"/>
+                  </a:lnTo>
+                  <a:lnTo>
+                    <a:pt x="140688" y="773601"/>
+                  </a:lnTo>
+                  <a:lnTo>
+                    <a:pt x="70344" y="768497"/>
+                  </a:lnTo>
+                  <a:lnTo>
+                    <a:pt x="0" y="763340"/>
+                  </a:lnTo>
+                  <a:close/>
+                </a:path>
+              </a:pathLst>
+            </a:custGeom>
+            <a:solidFill>
+              <a:srgbClr val="FF8C00">
+                <a:alpha val="20000"/>
+              </a:srgbClr>
+            </a:solidFill>
+          </p:spPr>
+          <p:txBody>
+            <a:bodyPr/>
+            <a:lstStyle/>
+            <a:p/>
+          </p:txBody>
+        </p:sp>
+        <p:sp>
+          <p:nvSpPr>
+            <p:cNvPr id="67" name="pl67"/>
+            <p:cNvSpPr/>
+            <p:nvPr/>
+          </p:nvSpPr>
+          <p:spPr>
+            <a:xfrm>
+              <a:off x="2285165" y="4336484"/>
+              <a:ext cx="5914251" cy="1082516"/>
+            </a:xfrm>
+            <a:custGeom>
+              <a:avLst/>
+              <a:pathLst>
+                <a:path w="5914251" h="1082516">
+                  <a:moveTo>
+                    <a:pt x="0" y="0"/>
+                  </a:moveTo>
+                  <a:lnTo>
+                    <a:pt x="5314" y="4236"/>
+                  </a:lnTo>
+                  <a:lnTo>
+                    <a:pt x="75658" y="57918"/>
+                  </a:lnTo>
+                  <a:lnTo>
+                    <a:pt x="146003" y="109300"/>
+                  </a:lnTo>
+                  <a:lnTo>
+                    <a:pt x="216347" y="158480"/>
+                  </a:lnTo>
+                  <a:lnTo>
+                    <a:pt x="286692" y="205554"/>
+                  </a:lnTo>
+                  <a:lnTo>
+                    <a:pt x="357036" y="250610"/>
+                  </a:lnTo>
+                  <a:lnTo>
+                    <a:pt x="427381" y="293736"/>
+                  </a:lnTo>
+                  <a:lnTo>
+                    <a:pt x="497725" y="335015"/>
+                  </a:lnTo>
+                  <a:lnTo>
+                    <a:pt x="568070" y="374525"/>
+                  </a:lnTo>
+                  <a:lnTo>
+                    <a:pt x="638414" y="412342"/>
+                  </a:lnTo>
+                  <a:lnTo>
+                    <a:pt x="708759" y="448539"/>
+                  </a:lnTo>
+                  <a:lnTo>
+                    <a:pt x="779103" y="483185"/>
+                  </a:lnTo>
+                  <a:lnTo>
+                    <a:pt x="849448" y="516347"/>
+                  </a:lnTo>
+                  <a:lnTo>
+                    <a:pt x="919792" y="548088"/>
+                  </a:lnTo>
+                  <a:lnTo>
+                    <a:pt x="990137" y="578469"/>
+                  </a:lnTo>
+                  <a:lnTo>
+                    <a:pt x="1060481" y="607548"/>
+                  </a:lnTo>
+                  <a:lnTo>
+                    <a:pt x="1130826" y="635382"/>
+                  </a:lnTo>
+                  <a:lnTo>
+                    <a:pt x="1201170" y="662023"/>
+                  </a:lnTo>
+                  <a:lnTo>
+                    <a:pt x="1271515" y="687523"/>
+                  </a:lnTo>
+                  <a:lnTo>
+                    <a:pt x="1341859" y="711930"/>
+                  </a:lnTo>
+                  <a:lnTo>
+                    <a:pt x="1412204" y="735291"/>
+                  </a:lnTo>
+                  <a:lnTo>
+                    <a:pt x="1482548" y="757652"/>
+                  </a:lnTo>
+                  <a:lnTo>
+                    <a:pt x="1552892" y="779054"/>
+                  </a:lnTo>
+                  <a:lnTo>
+                    <a:pt x="1623237" y="799540"/>
+                  </a:lnTo>
+                  <a:lnTo>
+                    <a:pt x="1693581" y="819148"/>
+                  </a:lnTo>
+                  <a:lnTo>
+                    <a:pt x="1763926" y="837916"/>
+                  </a:lnTo>
+                  <a:lnTo>
+                    <a:pt x="1834270" y="855880"/>
+                  </a:lnTo>
+                  <a:lnTo>
+                    <a:pt x="1904615" y="873074"/>
+                  </a:lnTo>
+                  <a:lnTo>
+                    <a:pt x="1974959" y="889531"/>
+                  </a:lnTo>
+                  <a:lnTo>
+                    <a:pt x="2045304" y="905284"/>
+                  </a:lnTo>
+                  <a:lnTo>
+                    <a:pt x="2115648" y="920361"/>
+                  </a:lnTo>
+                  <a:lnTo>
+                    <a:pt x="2185993" y="934793"/>
+                  </a:lnTo>
+                  <a:lnTo>
+                    <a:pt x="2256337" y="948606"/>
+                  </a:lnTo>
+                  <a:lnTo>
+                    <a:pt x="2326682" y="958822"/>
+                  </a:lnTo>
+                  <a:lnTo>
+                    <a:pt x="2397026" y="961938"/>
+                  </a:lnTo>
+                  <a:lnTo>
+                    <a:pt x="2467371" y="965021"/>
+                  </a:lnTo>
+                  <a:lnTo>
+                    <a:pt x="2537715" y="968072"/>
+                  </a:lnTo>
+                  <a:lnTo>
+                    <a:pt x="2608060" y="971092"/>
+                  </a:lnTo>
+                  <a:lnTo>
+                    <a:pt x="2678404" y="974079"/>
+                  </a:lnTo>
+                  <a:lnTo>
+                    <a:pt x="2748749" y="977036"/>
+                  </a:lnTo>
+                  <a:lnTo>
+                    <a:pt x="2819093" y="979962"/>
+                  </a:lnTo>
+                  <a:lnTo>
+                    <a:pt x="2889438" y="982857"/>
+                  </a:lnTo>
+                  <a:lnTo>
+                    <a:pt x="2959782" y="985722"/>
+                  </a:lnTo>
+                  <a:lnTo>
+                    <a:pt x="3030127" y="988557"/>
+                  </a:lnTo>
+                  <a:lnTo>
+                    <a:pt x="3100471" y="991362"/>
+                  </a:lnTo>
+                  <a:lnTo>
+                    <a:pt x="3170816" y="994138"/>
+                  </a:lnTo>
+                  <a:lnTo>
+                    <a:pt x="3241160" y="996885"/>
+                  </a:lnTo>
+                  <a:lnTo>
+                    <a:pt x="3311505" y="999604"/>
+                  </a:lnTo>
+                  <a:lnTo>
+                    <a:pt x="3381849" y="1002294"/>
+                  </a:lnTo>
+                  <a:lnTo>
+                    <a:pt x="3452194" y="1004956"/>
+                  </a:lnTo>
+                  <a:lnTo>
+                    <a:pt x="3522538" y="1007590"/>
+                  </a:lnTo>
+                  <a:lnTo>
+                    <a:pt x="3592883" y="1010197"/>
+                  </a:lnTo>
+                  <a:lnTo>
+                    <a:pt x="3663227" y="1012776"/>
+                  </a:lnTo>
+                  <a:lnTo>
+                    <a:pt x="3733572" y="1015328"/>
+                  </a:lnTo>
+                  <a:lnTo>
+                    <a:pt x="3803916" y="1017854"/>
+                  </a:lnTo>
+                  <a:lnTo>
+                    <a:pt x="3874261" y="1020354"/>
+                  </a:lnTo>
+                  <a:lnTo>
+                    <a:pt x="3944605" y="1022827"/>
+                  </a:lnTo>
+                  <a:lnTo>
+                    <a:pt x="4014950" y="1025275"/>
+                  </a:lnTo>
+                  <a:lnTo>
+                    <a:pt x="4085294" y="1027697"/>
+                  </a:lnTo>
+                  <a:lnTo>
+                    <a:pt x="4155639" y="1030093"/>
+                  </a:lnTo>
+                  <a:lnTo>
+                    <a:pt x="4225983" y="1032465"/>
+                  </a:lnTo>
+                  <a:lnTo>
+                    <a:pt x="4296328" y="1034812"/>
+                  </a:lnTo>
+                  <a:lnTo>
+                    <a:pt x="4366672" y="1037134"/>
+                  </a:lnTo>
+                  <a:lnTo>
+                    <a:pt x="4437017" y="1039432"/>
+                  </a:lnTo>
+                  <a:lnTo>
+                    <a:pt x="4507361" y="1041706"/>
+                  </a:lnTo>
+                  <a:lnTo>
+                    <a:pt x="4577706" y="1043957"/>
+                  </a:lnTo>
+                  <a:lnTo>
+                    <a:pt x="4648050" y="1046184"/>
+                  </a:lnTo>
+                  <a:lnTo>
+                    <a:pt x="4718395" y="1048387"/>
+                  </a:lnTo>
+                  <a:lnTo>
+                    <a:pt x="4788739" y="1050568"/>
+                  </a:lnTo>
+                  <a:lnTo>
+                    <a:pt x="4859084" y="1052726"/>
+                  </a:lnTo>
+                  <a:lnTo>
+                    <a:pt x="4929428" y="1054861"/>
+                  </a:lnTo>
+                  <a:lnTo>
+                    <a:pt x="4999773" y="1056974"/>
+                  </a:lnTo>
+                  <a:lnTo>
+                    <a:pt x="5070117" y="1059065"/>
+                  </a:lnTo>
+                  <a:lnTo>
+                    <a:pt x="5140462" y="1061134"/>
+                  </a:lnTo>
+                  <a:lnTo>
+                    <a:pt x="5210806" y="1063181"/>
+                  </a:lnTo>
+                  <a:lnTo>
+                    <a:pt x="5281150" y="1065208"/>
+                  </a:lnTo>
+                  <a:lnTo>
+                    <a:pt x="5351495" y="1067212"/>
+                  </a:lnTo>
+                  <a:lnTo>
+                    <a:pt x="5421839" y="1069197"/>
+                  </a:lnTo>
+                  <a:lnTo>
+                    <a:pt x="5492184" y="1071160"/>
+                  </a:lnTo>
+                  <a:lnTo>
+                    <a:pt x="5562528" y="1073103"/>
+                  </a:lnTo>
+                  <a:lnTo>
+                    <a:pt x="5632873" y="1075025"/>
+                  </a:lnTo>
+                  <a:lnTo>
+                    <a:pt x="5703217" y="1076928"/>
+                  </a:lnTo>
+                  <a:lnTo>
+                    <a:pt x="5773562" y="1078810"/>
+                  </a:lnTo>
+                  <a:lnTo>
+                    <a:pt x="5843906" y="1080673"/>
+                  </a:lnTo>
+                  <a:lnTo>
+                    <a:pt x="5914251" y="1082516"/>
+                  </a:lnTo>
+                </a:path>
+              </a:pathLst>
+            </a:custGeom>
+          </p:spPr>
+          <p:txBody>
+            <a:bodyPr/>
+            <a:lstStyle/>
+            <a:p/>
+          </p:txBody>
+        </p:sp>
+        <p:sp>
+          <p:nvSpPr>
+            <p:cNvPr id="68" name="pl68"/>
+            <p:cNvSpPr/>
+            <p:nvPr/>
+          </p:nvSpPr>
+          <p:spPr>
+            <a:xfrm>
+              <a:off x="1235312" y="5099825"/>
+              <a:ext cx="6964104" cy="462202"/>
+            </a:xfrm>
+            <a:custGeom>
+              <a:avLst/>
+              <a:pathLst>
+                <a:path w="6964104" h="462202">
+                  <a:moveTo>
+                    <a:pt x="6964104" y="462202"/>
+                  </a:moveTo>
+                  <a:lnTo>
+                    <a:pt x="6893760" y="460785"/>
+                  </a:lnTo>
+                  <a:lnTo>
+                    <a:pt x="6823415" y="459304"/>
+                  </a:lnTo>
+                  <a:lnTo>
+                    <a:pt x="6753071" y="457758"/>
+                  </a:lnTo>
+                  <a:lnTo>
+                    <a:pt x="6682726" y="456142"/>
+                  </a:lnTo>
+                  <a:lnTo>
+                    <a:pt x="6612382" y="454453"/>
+                  </a:lnTo>
+                  <a:lnTo>
+                    <a:pt x="6542037" y="452689"/>
+                  </a:lnTo>
+                  <a:lnTo>
+                    <a:pt x="6471693" y="450846"/>
+                  </a:lnTo>
+                  <a:lnTo>
+                    <a:pt x="6401348" y="448921"/>
+                  </a:lnTo>
+                  <a:lnTo>
+                    <a:pt x="6331004" y="446909"/>
+                  </a:lnTo>
+                  <a:lnTo>
+                    <a:pt x="6260659" y="444808"/>
+                  </a:lnTo>
+                  <a:lnTo>
+                    <a:pt x="6190315" y="442612"/>
+                  </a:lnTo>
+                  <a:lnTo>
+                    <a:pt x="6119970" y="440318"/>
+                  </a:lnTo>
+                  <a:lnTo>
+                    <a:pt x="6049626" y="437921"/>
+                  </a:lnTo>
+                  <a:lnTo>
+                    <a:pt x="5979281" y="435417"/>
+                  </a:lnTo>
+                  <a:lnTo>
+                    <a:pt x="5908937" y="432801"/>
+                  </a:lnTo>
+                  <a:lnTo>
+                    <a:pt x="5838592" y="430068"/>
+                  </a:lnTo>
+                  <a:lnTo>
+                    <a:pt x="5768248" y="427213"/>
+                  </a:lnTo>
+                  <a:lnTo>
+                    <a:pt x="5697903" y="424229"/>
+                  </a:lnTo>
+                  <a:lnTo>
+                    <a:pt x="5627559" y="421113"/>
+                  </a:lnTo>
+                  <a:lnTo>
+                    <a:pt x="5557214" y="417856"/>
+                  </a:lnTo>
+                  <a:lnTo>
+                    <a:pt x="5486870" y="414454"/>
+                  </a:lnTo>
+                  <a:lnTo>
+                    <a:pt x="5416525" y="410900"/>
+                  </a:lnTo>
+                  <a:lnTo>
+                    <a:pt x="5346181" y="407186"/>
+                  </a:lnTo>
+                  <a:lnTo>
+                    <a:pt x="5275836" y="403307"/>
+                  </a:lnTo>
+                  <a:lnTo>
+                    <a:pt x="5205492" y="399253"/>
+                  </a:lnTo>
+                  <a:lnTo>
+                    <a:pt x="5135147" y="395019"/>
+                  </a:lnTo>
+                  <a:lnTo>
+                    <a:pt x="5064803" y="390594"/>
+                  </a:lnTo>
+                  <a:lnTo>
+                    <a:pt x="4994458" y="385972"/>
+                  </a:lnTo>
+                  <a:lnTo>
+                    <a:pt x="4924114" y="381143"/>
+                  </a:lnTo>
+                  <a:lnTo>
+                    <a:pt x="4853769" y="376097"/>
+                  </a:lnTo>
+                  <a:lnTo>
+                    <a:pt x="4783425" y="370826"/>
+                  </a:lnTo>
+                  <a:lnTo>
+                    <a:pt x="4713080" y="365319"/>
+                  </a:lnTo>
+                  <a:lnTo>
+                    <a:pt x="4642736" y="359565"/>
+                  </a:lnTo>
+                  <a:lnTo>
+                    <a:pt x="4572391" y="353553"/>
+                  </a:lnTo>
+                  <a:lnTo>
+                    <a:pt x="4502047" y="347273"/>
+                  </a:lnTo>
+                  <a:lnTo>
+                    <a:pt x="4431702" y="340712"/>
+                  </a:lnTo>
+                  <a:lnTo>
+                    <a:pt x="4361358" y="333856"/>
+                  </a:lnTo>
+                  <a:lnTo>
+                    <a:pt x="4291013" y="326694"/>
+                  </a:lnTo>
+                  <a:lnTo>
+                    <a:pt x="4220669" y="319212"/>
+                  </a:lnTo>
+                  <a:lnTo>
+                    <a:pt x="4150324" y="311394"/>
+                  </a:lnTo>
+                  <a:lnTo>
+                    <a:pt x="4079980" y="303227"/>
+                  </a:lnTo>
+                  <a:lnTo>
+                    <a:pt x="4009635" y="294694"/>
+                  </a:lnTo>
+                  <a:lnTo>
+                    <a:pt x="3939291" y="285779"/>
+                  </a:lnTo>
+                  <a:lnTo>
+                    <a:pt x="3868946" y="276464"/>
+                  </a:lnTo>
+                  <a:lnTo>
+                    <a:pt x="3798602" y="266733"/>
+                  </a:lnTo>
+                  <a:lnTo>
+                    <a:pt x="3728257" y="256567"/>
+                  </a:lnTo>
+                  <a:lnTo>
+                    <a:pt x="3657913" y="245945"/>
+                  </a:lnTo>
+                  <a:lnTo>
+                    <a:pt x="3587569" y="234848"/>
+                  </a:lnTo>
+                  <a:lnTo>
+                    <a:pt x="3517224" y="223254"/>
+                  </a:lnTo>
+                  <a:lnTo>
+                    <a:pt x="3446880" y="211142"/>
+                  </a:lnTo>
+                  <a:lnTo>
+                    <a:pt x="3376535" y="198487"/>
+                  </a:lnTo>
+                  <a:lnTo>
+                    <a:pt x="3306191" y="192333"/>
+                  </a:lnTo>
+                  <a:lnTo>
+                    <a:pt x="3235846" y="189150"/>
+                  </a:lnTo>
+                  <a:lnTo>
+                    <a:pt x="3165502" y="185935"/>
+                  </a:lnTo>
+                  <a:lnTo>
+                    <a:pt x="3095157" y="182685"/>
+                  </a:lnTo>
+                  <a:lnTo>
+                    <a:pt x="3024813" y="179402"/>
+                  </a:lnTo>
+                  <a:lnTo>
+                    <a:pt x="2954468" y="176083"/>
+                  </a:lnTo>
+                  <a:lnTo>
+                    <a:pt x="2884124" y="172730"/>
+                  </a:lnTo>
+                  <a:lnTo>
+                    <a:pt x="2813779" y="169341"/>
+                  </a:lnTo>
+                  <a:lnTo>
+                    <a:pt x="2743435" y="165916"/>
+                  </a:lnTo>
+                  <a:lnTo>
+                    <a:pt x="2673090" y="162455"/>
+                  </a:lnTo>
+                  <a:lnTo>
+                    <a:pt x="2602746" y="158958"/>
+                  </a:lnTo>
+                  <a:lnTo>
+                    <a:pt x="2532401" y="155424"/>
+                  </a:lnTo>
+                  <a:lnTo>
+                    <a:pt x="2462057" y="151852"/>
+                  </a:lnTo>
+                  <a:lnTo>
+                    <a:pt x="2391712" y="148243"/>
+                  </a:lnTo>
+                  <a:lnTo>
+                    <a:pt x="2321368" y="144596"/>
+                  </a:lnTo>
+                  <a:lnTo>
+                    <a:pt x="2251023" y="140910"/>
+                  </a:lnTo>
+                  <a:lnTo>
+                    <a:pt x="2180679" y="137185"/>
+                  </a:lnTo>
+                  <a:lnTo>
+                    <a:pt x="2110334" y="133421"/>
+                  </a:lnTo>
+                  <a:lnTo>
+                    <a:pt x="2039990" y="129617"/>
+                  </a:lnTo>
+                  <a:lnTo>
+                    <a:pt x="1969645" y="125774"/>
+                  </a:lnTo>
+                  <a:lnTo>
+                    <a:pt x="1899301" y="121889"/>
+                  </a:lnTo>
+                  <a:lnTo>
+                    <a:pt x="1828956" y="117964"/>
+                  </a:lnTo>
+                  <a:lnTo>
+                    <a:pt x="1758612" y="113997"/>
+                  </a:lnTo>
+                  <a:lnTo>
+                    <a:pt x="1688267" y="109988"/>
+                  </a:lnTo>
+                  <a:lnTo>
+                    <a:pt x="1617923" y="105937"/>
+                  </a:lnTo>
+                  <a:lnTo>
+                    <a:pt x="1547578" y="101844"/>
+                  </a:lnTo>
+                  <a:lnTo>
+                    <a:pt x="1477234" y="97707"/>
+                  </a:lnTo>
+                  <a:lnTo>
+                    <a:pt x="1406889" y="93526"/>
+                  </a:lnTo>
+                  <a:lnTo>
+                    <a:pt x="1336545" y="89301"/>
+                  </a:lnTo>
+                  <a:lnTo>
+                    <a:pt x="1266200" y="85032"/>
+                  </a:lnTo>
+                  <a:lnTo>
+                    <a:pt x="1195856" y="80718"/>
+                  </a:lnTo>
+                  <a:lnTo>
+                    <a:pt x="1125511" y="76358"/>
+                  </a:lnTo>
+                  <a:lnTo>
+                    <a:pt x="1055167" y="71952"/>
+                  </a:lnTo>
+                  <a:lnTo>
+                    <a:pt x="984822" y="67499"/>
+                  </a:lnTo>
+                  <a:lnTo>
+                    <a:pt x="914478" y="63000"/>
+                  </a:lnTo>
+                  <a:lnTo>
+                    <a:pt x="844133" y="58453"/>
+                  </a:lnTo>
+                  <a:lnTo>
+                    <a:pt x="773789" y="53858"/>
+                  </a:lnTo>
+                  <a:lnTo>
+                    <a:pt x="703444" y="49215"/>
+                  </a:lnTo>
+                  <a:lnTo>
+                    <a:pt x="633100" y="44523"/>
+                  </a:lnTo>
+                  <a:lnTo>
+                    <a:pt x="562755" y="39781"/>
+                  </a:lnTo>
+                  <a:lnTo>
+                    <a:pt x="492411" y="34989"/>
+                  </a:lnTo>
+                  <a:lnTo>
+                    <a:pt x="422066" y="30146"/>
+                  </a:lnTo>
+                  <a:lnTo>
+                    <a:pt x="351722" y="25253"/>
+                  </a:lnTo>
+                  <a:lnTo>
+                    <a:pt x="281377" y="20308"/>
+                  </a:lnTo>
+                  <a:lnTo>
+                    <a:pt x="211033" y="15310"/>
+                  </a:lnTo>
+                  <a:lnTo>
+                    <a:pt x="140688" y="10260"/>
+                  </a:lnTo>
+                  <a:lnTo>
+                    <a:pt x="70344" y="5157"/>
+                  </a:lnTo>
+                  <a:lnTo>
+                    <a:pt x="0" y="0"/>
+                  </a:lnTo>
+                </a:path>
+              </a:pathLst>
+            </a:custGeom>
+          </p:spPr>
+          <p:txBody>
+            <a:bodyPr/>
+            <a:lstStyle/>
+            <a:p/>
+          </p:txBody>
+        </p:sp>
+        <p:sp>
+          <p:nvSpPr>
+            <p:cNvPr id="69" name="pl69"/>
+            <p:cNvSpPr/>
+            <p:nvPr/>
+          </p:nvSpPr>
+          <p:spPr>
+            <a:xfrm>
+              <a:off x="1235312" y="4501238"/>
+              <a:ext cx="6964104" cy="1018081"/>
+            </a:xfrm>
+            <a:custGeom>
+              <a:avLst/>
+              <a:pathLst>
+                <a:path w="6964104" h="1018081">
+                  <a:moveTo>
+                    <a:pt x="0" y="0"/>
+                  </a:moveTo>
+                  <a:lnTo>
+                    <a:pt x="70344" y="29253"/>
+                  </a:lnTo>
+                  <a:lnTo>
+                    <a:pt x="140688" y="57723"/>
+                  </a:lnTo>
+                  <a:lnTo>
+                    <a:pt x="211033" y="85431"/>
+                  </a:lnTo>
+                  <a:lnTo>
+                    <a:pt x="281377" y="112397"/>
+                  </a:lnTo>
+                  <a:lnTo>
+                    <a:pt x="351722" y="138641"/>
+                  </a:lnTo>
+                  <a:lnTo>
+                    <a:pt x="422066" y="164182"/>
+                  </a:lnTo>
+                  <a:lnTo>
+                    <a:pt x="492411" y="189039"/>
+                  </a:lnTo>
+                  <a:lnTo>
+                    <a:pt x="562755" y="213231"/>
+                  </a:lnTo>
+                  <a:lnTo>
+                    <a:pt x="633100" y="236775"/>
+                  </a:lnTo>
+                  <a:lnTo>
+                    <a:pt x="703444" y="259688"/>
+                  </a:lnTo>
+                  <a:lnTo>
+                    <a:pt x="773789" y="281988"/>
+                  </a:lnTo>
+                  <a:lnTo>
+                    <a:pt x="844133" y="303690"/>
+                  </a:lnTo>
+                  <a:lnTo>
+                    <a:pt x="914478" y="324812"/>
+                  </a:lnTo>
+                  <a:lnTo>
+                    <a:pt x="984822" y="345367"/>
+                  </a:lnTo>
+                  <a:lnTo>
+                    <a:pt x="1055167" y="365373"/>
+                  </a:lnTo>
+                  <a:lnTo>
+                    <a:pt x="1125511" y="384842"/>
+                  </a:lnTo>
+                  <a:lnTo>
+                    <a:pt x="1195856" y="403791"/>
+                  </a:lnTo>
+                  <a:lnTo>
+                    <a:pt x="1266200" y="422232"/>
+                  </a:lnTo>
+                  <a:lnTo>
+                    <a:pt x="1336545" y="440179"/>
+                  </a:lnTo>
+                  <a:lnTo>
+                    <a:pt x="1406889" y="457645"/>
+                  </a:lnTo>
+                  <a:lnTo>
+                    <a:pt x="1477234" y="474644"/>
+                  </a:lnTo>
+                  <a:lnTo>
+                    <a:pt x="1547578" y="491188"/>
+                  </a:lnTo>
+                  <a:lnTo>
+                    <a:pt x="1617923" y="507288"/>
+                  </a:lnTo>
+                  <a:lnTo>
+                    <a:pt x="1688267" y="522958"/>
+                  </a:lnTo>
+                  <a:lnTo>
+                    <a:pt x="1758612" y="538207"/>
+                  </a:lnTo>
+                  <a:lnTo>
+                    <a:pt x="1828956" y="553049"/>
+                  </a:lnTo>
+                  <a:lnTo>
+                    <a:pt x="1899301" y="567493"/>
+                  </a:lnTo>
+                  <a:lnTo>
+                    <a:pt x="1969645" y="581550"/>
+                  </a:lnTo>
+                  <a:lnTo>
+                    <a:pt x="2039990" y="595231"/>
+                  </a:lnTo>
+                  <a:lnTo>
+                    <a:pt x="2110334" y="608546"/>
+                  </a:lnTo>
+                  <a:lnTo>
+                    <a:pt x="2180679" y="621504"/>
+                  </a:lnTo>
+                  <a:lnTo>
+                    <a:pt x="2251023" y="634115"/>
+                  </a:lnTo>
+                  <a:lnTo>
+                    <a:pt x="2321368" y="646388"/>
+                  </a:lnTo>
+                  <a:lnTo>
+                    <a:pt x="2391712" y="658332"/>
+                  </a:lnTo>
+                  <a:lnTo>
+                    <a:pt x="2462057" y="669957"/>
+                  </a:lnTo>
+                  <a:lnTo>
+                    <a:pt x="2532401" y="681271"/>
+                  </a:lnTo>
+                  <a:lnTo>
+                    <a:pt x="2602746" y="692281"/>
+                  </a:lnTo>
+                  <a:lnTo>
+                    <a:pt x="2673090" y="702997"/>
+                  </a:lnTo>
+                  <a:lnTo>
+                    <a:pt x="2743435" y="713426"/>
+                  </a:lnTo>
+                  <a:lnTo>
+                    <a:pt x="2813779" y="723575"/>
+                  </a:lnTo>
+                  <a:lnTo>
+                    <a:pt x="2884124" y="733453"/>
+                  </a:lnTo>
+                  <a:lnTo>
+                    <a:pt x="2954468" y="743066"/>
+                  </a:lnTo>
+                  <a:lnTo>
+                    <a:pt x="3024813" y="752422"/>
+                  </a:lnTo>
+                  <a:lnTo>
+                    <a:pt x="3095157" y="761527"/>
+                  </a:lnTo>
+                  <a:lnTo>
+                    <a:pt x="3165502" y="770388"/>
+                  </a:lnTo>
+                  <a:lnTo>
+                    <a:pt x="3235846" y="779013"/>
+                  </a:lnTo>
+                  <a:lnTo>
+                    <a:pt x="3306191" y="787406"/>
+                  </a:lnTo>
+                  <a:lnTo>
+                    <a:pt x="3376535" y="795574"/>
+                  </a:lnTo>
+                  <a:lnTo>
+                    <a:pt x="3446880" y="803524"/>
+                  </a:lnTo>
+                  <a:lnTo>
+                    <a:pt x="3517224" y="811261"/>
+                  </a:lnTo>
+                  <a:lnTo>
+                    <a:pt x="3587569" y="818790"/>
+                  </a:lnTo>
+                  <a:lnTo>
+                    <a:pt x="3657913" y="826118"/>
+                  </a:lnTo>
+                  <a:lnTo>
+                    <a:pt x="3728257" y="833250"/>
+                  </a:lnTo>
+                  <a:lnTo>
+                    <a:pt x="3798602" y="840191"/>
+                  </a:lnTo>
+                  <a:lnTo>
+                    <a:pt x="3868946" y="846946"/>
+                  </a:lnTo>
+                  <a:lnTo>
+                    <a:pt x="3939291" y="853520"/>
+                  </a:lnTo>
+                  <a:lnTo>
+                    <a:pt x="4009635" y="859918"/>
+                  </a:lnTo>
+                  <a:lnTo>
+                    <a:pt x="4079980" y="866145"/>
+                  </a:lnTo>
+                  <a:lnTo>
+                    <a:pt x="4150324" y="872205"/>
+                  </a:lnTo>
+                  <a:lnTo>
+                    <a:pt x="4220669" y="878102"/>
+                  </a:lnTo>
+                  <a:lnTo>
+                    <a:pt x="4291013" y="883842"/>
+                  </a:lnTo>
+                  <a:lnTo>
+                    <a:pt x="4361358" y="889428"/>
+                  </a:lnTo>
+                  <a:lnTo>
+                    <a:pt x="4431702" y="894865"/>
+                  </a:lnTo>
+                  <a:lnTo>
+                    <a:pt x="4502047" y="900155"/>
+                  </a:lnTo>
+                  <a:lnTo>
+                    <a:pt x="4572391" y="905305"/>
+                  </a:lnTo>
+                  <a:lnTo>
+                    <a:pt x="4642736" y="910316"/>
+                  </a:lnTo>
+                  <a:lnTo>
+                    <a:pt x="4713080" y="915193"/>
+                  </a:lnTo>
+                  <a:lnTo>
+                    <a:pt x="4783425" y="919940"/>
+                  </a:lnTo>
+                  <a:lnTo>
+                    <a:pt x="4853769" y="924559"/>
+                  </a:lnTo>
+                  <a:lnTo>
+                    <a:pt x="4924114" y="929055"/>
+                  </a:lnTo>
+                  <a:lnTo>
+                    <a:pt x="4994458" y="933430"/>
+                  </a:lnTo>
+                  <a:lnTo>
+                    <a:pt x="5064803" y="937688"/>
+                  </a:lnTo>
+                  <a:lnTo>
+                    <a:pt x="5135147" y="941833"/>
+                  </a:lnTo>
+                  <a:lnTo>
+                    <a:pt x="5205492" y="945866"/>
+                  </a:lnTo>
+                  <a:lnTo>
+                    <a:pt x="5275836" y="949791"/>
+                  </a:lnTo>
+                  <a:lnTo>
+                    <a:pt x="5346181" y="953611"/>
+                  </a:lnTo>
+                  <a:lnTo>
+                    <a:pt x="5416525" y="957329"/>
+                  </a:lnTo>
+                  <a:lnTo>
+                    <a:pt x="5486870" y="960947"/>
+                  </a:lnTo>
+                  <a:lnTo>
+                    <a:pt x="5557214" y="964468"/>
+                  </a:lnTo>
+                  <a:lnTo>
+                    <a:pt x="5627559" y="967895"/>
+                  </a:lnTo>
+                  <a:lnTo>
+                    <a:pt x="5697903" y="971231"/>
+                  </a:lnTo>
+                  <a:lnTo>
+                    <a:pt x="5768248" y="974477"/>
+                  </a:lnTo>
+                  <a:lnTo>
+                    <a:pt x="5838592" y="977636"/>
+                  </a:lnTo>
+                  <a:lnTo>
+                    <a:pt x="5908937" y="980710"/>
+                  </a:lnTo>
+                  <a:lnTo>
+                    <a:pt x="5979281" y="983702"/>
+                  </a:lnTo>
+                  <a:lnTo>
+                    <a:pt x="6049626" y="986614"/>
+                  </a:lnTo>
+                  <a:lnTo>
+                    <a:pt x="6119970" y="989448"/>
+                  </a:lnTo>
+                  <a:lnTo>
+                    <a:pt x="6190315" y="992206"/>
+                  </a:lnTo>
+                  <a:lnTo>
+                    <a:pt x="6260659" y="994891"/>
+                  </a:lnTo>
+                  <a:lnTo>
+                    <a:pt x="6331004" y="997503"/>
+                  </a:lnTo>
+                  <a:lnTo>
+                    <a:pt x="6401348" y="1000045"/>
+                  </a:lnTo>
+                  <a:lnTo>
+                    <a:pt x="6471693" y="1002520"/>
+                  </a:lnTo>
+                  <a:lnTo>
+                    <a:pt x="6542037" y="1004928"/>
+                  </a:lnTo>
+                  <a:lnTo>
+                    <a:pt x="6612382" y="1007271"/>
+                  </a:lnTo>
+                  <a:lnTo>
+                    <a:pt x="6682726" y="1009552"/>
+                  </a:lnTo>
+                  <a:lnTo>
+                    <a:pt x="6753071" y="1011772"/>
+                  </a:lnTo>
+                  <a:lnTo>
+                    <a:pt x="6823415" y="1013932"/>
+                  </a:lnTo>
+                  <a:lnTo>
+                    <a:pt x="6893760" y="1016035"/>
+                  </a:lnTo>
+                  <a:lnTo>
+                    <a:pt x="6964104" y="1018081"/>
+                  </a:lnTo>
+                </a:path>
+              </a:pathLst>
+            </a:custGeom>
+            <a:ln w="27101" cap="flat">
+              <a:solidFill>
+                <a:srgbClr val="FF8C00">
+                  <a:alpha val="100000"/>
+                </a:srgbClr>
+              </a:solidFill>
+              <a:prstDash val="solid"/>
+              <a:round/>
+            </a:ln>
+          </p:spPr>
+          <p:txBody>
+            <a:bodyPr/>
+            <a:lstStyle/>
+            <a:p/>
+          </p:txBody>
+        </p:sp>
+        <p:sp>
+          <p:nvSpPr>
+            <p:cNvPr id="70" name="pl70"/>
+            <p:cNvSpPr/>
+            <p:nvPr/>
+          </p:nvSpPr>
+          <p:spPr>
+            <a:xfrm>
+              <a:off x="887106" y="5294352"/>
+              <a:ext cx="7660515" cy="0"/>
+            </a:xfrm>
+            <a:custGeom>
+              <a:avLst/>
+              <a:pathLst>
+                <a:path w="7660515" h="0">
+                  <a:moveTo>
+                    <a:pt x="0" y="0"/>
+                  </a:moveTo>
+                  <a:lnTo>
+                    <a:pt x="7660515" y="0"/>
+                  </a:lnTo>
+                  <a:lnTo>
+                    <a:pt x="7660515" y="0"/>
+                  </a:lnTo>
+                </a:path>
+              </a:pathLst>
+            </a:custGeom>
+            <a:ln w="13550" cap="flat">
+              <a:solidFill>
+                <a:srgbClr val="7F7F7F">
+                  <a:alpha val="100000"/>
+                </a:srgbClr>
+              </a:solidFill>
+              <a:prstDash val="dash"/>
+              <a:round/>
+            </a:ln>
+          </p:spPr>
+          <p:txBody>
+            <a:bodyPr/>
+            <a:lstStyle/>
+            <a:p/>
+          </p:txBody>
+        </p:sp>
+        <p:sp>
+          <p:nvSpPr>
+            <p:cNvPr id="71" name="pl71"/>
+            <p:cNvSpPr/>
+            <p:nvPr/>
+          </p:nvSpPr>
+          <p:spPr>
+            <a:xfrm>
+              <a:off x="4590457" y="4336484"/>
+              <a:ext cx="0" cy="1317069"/>
+            </a:xfrm>
+            <a:custGeom>
+              <a:avLst/>
+              <a:pathLst>
+                <a:path w="0" h="1317069">
+                  <a:moveTo>
+                    <a:pt x="0" y="1317069"/>
+                  </a:moveTo>
+                  <a:lnTo>
+                    <a:pt x="0" y="0"/>
+                  </a:lnTo>
+                  <a:lnTo>
+                    <a:pt x="0" y="0"/>
+                  </a:lnTo>
+                </a:path>
+              </a:pathLst>
+            </a:custGeom>
+            <a:ln w="13550" cap="flat">
+              <a:solidFill>
+                <a:srgbClr val="666666">
+                  <a:alpha val="100000"/>
+                </a:srgbClr>
+              </a:solidFill>
+              <a:prstDash val="dot"/>
+              <a:round/>
+            </a:ln>
+          </p:spPr>
+          <p:txBody>
+            <a:bodyPr/>
+            <a:lstStyle/>
+            <a:p/>
+          </p:txBody>
+        </p:sp>
+        <p:sp>
+          <p:nvSpPr>
+            <p:cNvPr id="72" name="tx72"/>
+            <p:cNvSpPr/>
+            <p:nvPr/>
+          </p:nvSpPr>
+          <p:spPr>
+            <a:xfrm>
+              <a:off x="762297" y="5553636"/>
+              <a:ext cx="62179" cy="80101"/>
+            </a:xfrm>
+            <a:prstGeom prst="rect">
+              <a:avLst/>
+            </a:prstGeom>
+            <a:noFill/>
+          </p:spPr>
+          <p:txBody>
+            <a:bodyPr lIns="0" rIns="0" tIns="0" bIns="0" anchorCtr="1" anchor="ctr" wrap="none"/>
+            <a:lstStyle/>
+            <a:p>
+              <a:pPr algn="l" marL="0" marR="0" indent="0">
+                <a:lnSpc>
+                  <a:spcPts val="880"/>
+                </a:lnSpc>
+                <a:spcBef>
+                  <a:spcPts val="0"/>
+                </a:spcBef>
+                <a:spcAft>
+                  <a:spcPts val="0"/>
+                </a:spcAft>
+              </a:pPr>
+              <a:r>
+                <a:rPr sz="880">
+                  <a:solidFill>
+                    <a:srgbClr val="4D4D4D">
+                      <a:alpha val="100000"/>
+                    </a:srgbClr>
+                  </a:solidFill>
+                  <a:latin typeface="Helvetica"/>
+                  <a:cs typeface="Helvetica"/>
+                </a:rPr>
+                <a:t>0</a:t>
+              </a:r>
+            </a:p>
+          </p:txBody>
+        </p:sp>
+        <p:sp>
+          <p:nvSpPr>
+            <p:cNvPr id="73" name="tx73"/>
+            <p:cNvSpPr/>
+            <p:nvPr/>
+          </p:nvSpPr>
+          <p:spPr>
+            <a:xfrm>
+              <a:off x="762297" y="5254302"/>
+              <a:ext cx="62179" cy="80101"/>
+            </a:xfrm>
+            <a:prstGeom prst="rect">
+              <a:avLst/>
+            </a:prstGeom>
+            <a:noFill/>
+          </p:spPr>
+          <p:txBody>
+            <a:bodyPr lIns="0" rIns="0" tIns="0" bIns="0" anchorCtr="1" anchor="ctr" wrap="none"/>
+            <a:lstStyle/>
+            <a:p>
+              <a:pPr algn="l" marL="0" marR="0" indent="0">
+                <a:lnSpc>
+                  <a:spcPts val="880"/>
+                </a:lnSpc>
+                <a:spcBef>
+                  <a:spcPts val="0"/>
+                </a:spcBef>
+                <a:spcAft>
+                  <a:spcPts val="0"/>
+                </a:spcAft>
+              </a:pPr>
+              <a:r>
+                <a:rPr sz="880">
+                  <a:solidFill>
+                    <a:srgbClr val="4D4D4D">
+                      <a:alpha val="100000"/>
+                    </a:srgbClr>
+                  </a:solidFill>
+                  <a:latin typeface="Helvetica"/>
+                  <a:cs typeface="Helvetica"/>
+                </a:rPr>
+                <a:t>1</a:t>
+              </a:r>
+            </a:p>
+          </p:txBody>
+        </p:sp>
+        <p:sp>
+          <p:nvSpPr>
+            <p:cNvPr id="74" name="tx74"/>
+            <p:cNvSpPr/>
+            <p:nvPr/>
+          </p:nvSpPr>
+          <p:spPr>
+            <a:xfrm>
+              <a:off x="762297" y="4954968"/>
+              <a:ext cx="62179" cy="80101"/>
+            </a:xfrm>
+            <a:prstGeom prst="rect">
+              <a:avLst/>
+            </a:prstGeom>
+            <a:noFill/>
+          </p:spPr>
+          <p:txBody>
+            <a:bodyPr lIns="0" rIns="0" tIns="0" bIns="0" anchorCtr="1" anchor="ctr" wrap="none"/>
+            <a:lstStyle/>
+            <a:p>
+              <a:pPr algn="l" marL="0" marR="0" indent="0">
+                <a:lnSpc>
+                  <a:spcPts val="880"/>
+                </a:lnSpc>
+                <a:spcBef>
+                  <a:spcPts val="0"/>
+                </a:spcBef>
+                <a:spcAft>
+                  <a:spcPts val="0"/>
+                </a:spcAft>
+              </a:pPr>
+              <a:r>
+                <a:rPr sz="880">
+                  <a:solidFill>
+                    <a:srgbClr val="4D4D4D">
+                      <a:alpha val="100000"/>
+                    </a:srgbClr>
+                  </a:solidFill>
+                  <a:latin typeface="Helvetica"/>
+                  <a:cs typeface="Helvetica"/>
+                </a:rPr>
+                <a:t>2</a:t>
+              </a:r>
+            </a:p>
+          </p:txBody>
+        </p:sp>
+        <p:sp>
+          <p:nvSpPr>
+            <p:cNvPr id="75" name="tx75"/>
+            <p:cNvSpPr/>
+            <p:nvPr/>
+          </p:nvSpPr>
+          <p:spPr>
+            <a:xfrm>
+              <a:off x="762297" y="4655634"/>
+              <a:ext cx="62179" cy="80101"/>
+            </a:xfrm>
+            <a:prstGeom prst="rect">
+              <a:avLst/>
+            </a:prstGeom>
+            <a:noFill/>
+          </p:spPr>
+          <p:txBody>
+            <a:bodyPr lIns="0" rIns="0" tIns="0" bIns="0" anchorCtr="1" anchor="ctr" wrap="none"/>
+            <a:lstStyle/>
+            <a:p>
+              <a:pPr algn="l" marL="0" marR="0" indent="0">
+                <a:lnSpc>
+                  <a:spcPts val="880"/>
+                </a:lnSpc>
+                <a:spcBef>
+                  <a:spcPts val="0"/>
+                </a:spcBef>
+                <a:spcAft>
+                  <a:spcPts val="0"/>
+                </a:spcAft>
+              </a:pPr>
+              <a:r>
+                <a:rPr sz="880">
+                  <a:solidFill>
+                    <a:srgbClr val="4D4D4D">
+                      <a:alpha val="100000"/>
+                    </a:srgbClr>
+                  </a:solidFill>
+                  <a:latin typeface="Helvetica"/>
+                  <a:cs typeface="Helvetica"/>
+                </a:rPr>
+                <a:t>3</a:t>
+              </a:r>
+            </a:p>
+          </p:txBody>
+        </p:sp>
+        <p:sp>
+          <p:nvSpPr>
+            <p:cNvPr id="76" name="tx76"/>
+            <p:cNvSpPr/>
+            <p:nvPr/>
+          </p:nvSpPr>
+          <p:spPr>
+            <a:xfrm>
+              <a:off x="762297" y="4356300"/>
+              <a:ext cx="62179" cy="80101"/>
+            </a:xfrm>
+            <a:prstGeom prst="rect">
+              <a:avLst/>
+            </a:prstGeom>
+            <a:noFill/>
+          </p:spPr>
+          <p:txBody>
+            <a:bodyPr lIns="0" rIns="0" tIns="0" bIns="0" anchorCtr="1" anchor="ctr" wrap="none"/>
+            <a:lstStyle/>
+            <a:p>
+              <a:pPr algn="l" marL="0" marR="0" indent="0">
+                <a:lnSpc>
+                  <a:spcPts val="880"/>
+                </a:lnSpc>
+                <a:spcBef>
+                  <a:spcPts val="0"/>
+                </a:spcBef>
+                <a:spcAft>
+                  <a:spcPts val="0"/>
+                </a:spcAft>
+              </a:pPr>
+              <a:r>
+                <a:rPr sz="880">
+                  <a:solidFill>
+                    <a:srgbClr val="4D4D4D">
+                      <a:alpha val="100000"/>
+                    </a:srgbClr>
+                  </a:solidFill>
+                  <a:latin typeface="Helvetica"/>
+                  <a:cs typeface="Helvetica"/>
+                </a:rPr>
+                <a:t>4</a:t>
+              </a:r>
+            </a:p>
+          </p:txBody>
+        </p:sp>
+        <p:sp>
+          <p:nvSpPr>
+            <p:cNvPr id="77" name="tx77"/>
+            <p:cNvSpPr/>
+            <p:nvPr/>
+          </p:nvSpPr>
+          <p:spPr>
+            <a:xfrm>
+              <a:off x="1133333" y="5716183"/>
+              <a:ext cx="161574" cy="80101"/>
+            </a:xfrm>
+            <a:prstGeom prst="rect">
+              <a:avLst/>
+            </a:prstGeom>
+            <a:noFill/>
+          </p:spPr>
+          <p:txBody>
+            <a:bodyPr lIns="0" rIns="0" tIns="0" bIns="0" anchorCtr="1" anchor="ctr" wrap="none"/>
+            <a:lstStyle/>
+            <a:p>
+              <a:pPr algn="l" marL="0" marR="0" indent="0">
+                <a:lnSpc>
+                  <a:spcPts val="880"/>
+                </a:lnSpc>
+                <a:spcBef>
+                  <a:spcPts val="0"/>
+                </a:spcBef>
+                <a:spcAft>
+                  <a:spcPts val="0"/>
+                </a:spcAft>
+              </a:pPr>
+              <a:r>
+                <a:rPr sz="880">
+                  <a:solidFill>
+                    <a:srgbClr val="4D4D4D">
+                      <a:alpha val="100000"/>
+                    </a:srgbClr>
+                  </a:solidFill>
+                  <a:latin typeface="Helvetica"/>
+                  <a:cs typeface="Helvetica"/>
+                </a:rPr>
+                <a:t>-40</a:t>
+              </a:r>
+            </a:p>
+          </p:txBody>
+        </p:sp>
+        <p:sp>
+          <p:nvSpPr>
+            <p:cNvPr id="78" name="tx78"/>
+            <p:cNvSpPr/>
+            <p:nvPr/>
+          </p:nvSpPr>
+          <p:spPr>
+            <a:xfrm>
+              <a:off x="1978619" y="5716183"/>
+              <a:ext cx="161574" cy="80101"/>
+            </a:xfrm>
+            <a:prstGeom prst="rect">
+              <a:avLst/>
+            </a:prstGeom>
+            <a:noFill/>
+          </p:spPr>
+          <p:txBody>
+            <a:bodyPr lIns="0" rIns="0" tIns="0" bIns="0" anchorCtr="1" anchor="ctr" wrap="none"/>
+            <a:lstStyle/>
+            <a:p>
+              <a:pPr algn="l" marL="0" marR="0" indent="0">
+                <a:lnSpc>
+                  <a:spcPts val="880"/>
+                </a:lnSpc>
+                <a:spcBef>
+                  <a:spcPts val="0"/>
+                </a:spcBef>
+                <a:spcAft>
+                  <a:spcPts val="0"/>
+                </a:spcAft>
+              </a:pPr>
+              <a:r>
+                <a:rPr sz="880">
+                  <a:solidFill>
+                    <a:srgbClr val="4D4D4D">
+                      <a:alpha val="100000"/>
+                    </a:srgbClr>
+                  </a:solidFill>
+                  <a:latin typeface="Helvetica"/>
+                  <a:cs typeface="Helvetica"/>
+                </a:rPr>
+                <a:t>-30</a:t>
+              </a:r>
+            </a:p>
+          </p:txBody>
+        </p:sp>
+        <p:sp>
+          <p:nvSpPr>
+            <p:cNvPr id="79" name="tx79"/>
+            <p:cNvSpPr/>
+            <p:nvPr/>
+          </p:nvSpPr>
+          <p:spPr>
+            <a:xfrm>
+              <a:off x="2823906" y="5716183"/>
+              <a:ext cx="161574" cy="80101"/>
+            </a:xfrm>
+            <a:prstGeom prst="rect">
+              <a:avLst/>
+            </a:prstGeom>
+            <a:noFill/>
+          </p:spPr>
+          <p:txBody>
+            <a:bodyPr lIns="0" rIns="0" tIns="0" bIns="0" anchorCtr="1" anchor="ctr" wrap="none"/>
+            <a:lstStyle/>
+            <a:p>
+              <a:pPr algn="l" marL="0" marR="0" indent="0">
+                <a:lnSpc>
+                  <a:spcPts val="880"/>
+                </a:lnSpc>
+                <a:spcBef>
+                  <a:spcPts val="0"/>
+                </a:spcBef>
+                <a:spcAft>
+                  <a:spcPts val="0"/>
+                </a:spcAft>
+              </a:pPr>
+              <a:r>
+                <a:rPr sz="880">
+                  <a:solidFill>
+                    <a:srgbClr val="4D4D4D">
+                      <a:alpha val="100000"/>
+                    </a:srgbClr>
+                  </a:solidFill>
+                  <a:latin typeface="Helvetica"/>
+                  <a:cs typeface="Helvetica"/>
+                </a:rPr>
+                <a:t>-20</a:t>
+              </a:r>
+            </a:p>
+          </p:txBody>
+        </p:sp>
+        <p:sp>
+          <p:nvSpPr>
+            <p:cNvPr id="80" name="tx80"/>
+            <p:cNvSpPr/>
+            <p:nvPr/>
+          </p:nvSpPr>
+          <p:spPr>
+            <a:xfrm>
+              <a:off x="3669192" y="5716183"/>
+              <a:ext cx="161574" cy="80101"/>
+            </a:xfrm>
+            <a:prstGeom prst="rect">
+              <a:avLst/>
+            </a:prstGeom>
+            <a:noFill/>
+          </p:spPr>
+          <p:txBody>
+            <a:bodyPr lIns="0" rIns="0" tIns="0" bIns="0" anchorCtr="1" anchor="ctr" wrap="none"/>
+            <a:lstStyle/>
+            <a:p>
+              <a:pPr algn="l" marL="0" marR="0" indent="0">
+                <a:lnSpc>
+                  <a:spcPts val="880"/>
+                </a:lnSpc>
+                <a:spcBef>
+                  <a:spcPts val="0"/>
+                </a:spcBef>
+                <a:spcAft>
+                  <a:spcPts val="0"/>
+                </a:spcAft>
+              </a:pPr>
+              <a:r>
+                <a:rPr sz="880">
+                  <a:solidFill>
+                    <a:srgbClr val="4D4D4D">
+                      <a:alpha val="100000"/>
+                    </a:srgbClr>
+                  </a:solidFill>
+                  <a:latin typeface="Helvetica"/>
+                  <a:cs typeface="Helvetica"/>
+                </a:rPr>
+                <a:t>-10</a:t>
+              </a:r>
+            </a:p>
+          </p:txBody>
+        </p:sp>
+        <p:sp>
+          <p:nvSpPr>
+            <p:cNvPr id="81" name="tx81"/>
+            <p:cNvSpPr/>
+            <p:nvPr/>
+          </p:nvSpPr>
+          <p:spPr>
+            <a:xfrm>
+              <a:off x="4564176" y="5716183"/>
+              <a:ext cx="62179" cy="80101"/>
+            </a:xfrm>
+            <a:prstGeom prst="rect">
+              <a:avLst/>
+            </a:prstGeom>
+            <a:noFill/>
+          </p:spPr>
+          <p:txBody>
+            <a:bodyPr lIns="0" rIns="0" tIns="0" bIns="0" anchorCtr="1" anchor="ctr" wrap="none"/>
+            <a:lstStyle/>
+            <a:p>
+              <a:pPr algn="l" marL="0" marR="0" indent="0">
+                <a:lnSpc>
+                  <a:spcPts val="880"/>
+                </a:lnSpc>
+                <a:spcBef>
+                  <a:spcPts val="0"/>
+                </a:spcBef>
+                <a:spcAft>
+                  <a:spcPts val="0"/>
+                </a:spcAft>
+              </a:pPr>
+              <a:r>
+                <a:rPr sz="880">
+                  <a:solidFill>
+                    <a:srgbClr val="4D4D4D">
+                      <a:alpha val="100000"/>
+                    </a:srgbClr>
+                  </a:solidFill>
+                  <a:latin typeface="Helvetica"/>
+                  <a:cs typeface="Helvetica"/>
+                </a:rPr>
+                <a:t>0</a:t>
+              </a:r>
+            </a:p>
+          </p:txBody>
+        </p:sp>
+        <p:sp>
+          <p:nvSpPr>
+            <p:cNvPr id="82" name="tx82"/>
+            <p:cNvSpPr/>
+            <p:nvPr/>
+          </p:nvSpPr>
+          <p:spPr>
+            <a:xfrm>
+              <a:off x="5378373" y="5716183"/>
+              <a:ext cx="124358" cy="80101"/>
+            </a:xfrm>
+            <a:prstGeom prst="rect">
+              <a:avLst/>
+            </a:prstGeom>
+            <a:noFill/>
+          </p:spPr>
+          <p:txBody>
+            <a:bodyPr lIns="0" rIns="0" tIns="0" bIns="0" anchorCtr="1" anchor="ctr" wrap="none"/>
+            <a:lstStyle/>
+            <a:p>
+              <a:pPr algn="l" marL="0" marR="0" indent="0">
+                <a:lnSpc>
+                  <a:spcPts val="880"/>
+                </a:lnSpc>
+                <a:spcBef>
+                  <a:spcPts val="0"/>
+                </a:spcBef>
+                <a:spcAft>
+                  <a:spcPts val="0"/>
+                </a:spcAft>
+              </a:pPr>
+              <a:r>
+                <a:rPr sz="880">
+                  <a:solidFill>
+                    <a:srgbClr val="4D4D4D">
+                      <a:alpha val="100000"/>
+                    </a:srgbClr>
+                  </a:solidFill>
+                  <a:latin typeface="Helvetica"/>
+                  <a:cs typeface="Helvetica"/>
+                </a:rPr>
+                <a:t>10</a:t>
+              </a:r>
+            </a:p>
+          </p:txBody>
+        </p:sp>
+        <p:sp>
+          <p:nvSpPr>
+            <p:cNvPr id="83" name="tx83"/>
+            <p:cNvSpPr/>
+            <p:nvPr/>
+          </p:nvSpPr>
+          <p:spPr>
+            <a:xfrm>
+              <a:off x="6223659" y="5716183"/>
+              <a:ext cx="124358" cy="80101"/>
+            </a:xfrm>
+            <a:prstGeom prst="rect">
+              <a:avLst/>
+            </a:prstGeom>
+            <a:noFill/>
+          </p:spPr>
+          <p:txBody>
+            <a:bodyPr lIns="0" rIns="0" tIns="0" bIns="0" anchorCtr="1" anchor="ctr" wrap="none"/>
+            <a:lstStyle/>
+            <a:p>
+              <a:pPr algn="l" marL="0" marR="0" indent="0">
+                <a:lnSpc>
+                  <a:spcPts val="880"/>
+                </a:lnSpc>
+                <a:spcBef>
+                  <a:spcPts val="0"/>
+                </a:spcBef>
+                <a:spcAft>
+                  <a:spcPts val="0"/>
+                </a:spcAft>
+              </a:pPr>
+              <a:r>
+                <a:rPr sz="880">
+                  <a:solidFill>
+                    <a:srgbClr val="4D4D4D">
+                      <a:alpha val="100000"/>
+                    </a:srgbClr>
+                  </a:solidFill>
+                  <a:latin typeface="Helvetica"/>
+                  <a:cs typeface="Helvetica"/>
+                </a:rPr>
+                <a:t>20</a:t>
+              </a:r>
+            </a:p>
+          </p:txBody>
+        </p:sp>
+        <p:sp>
+          <p:nvSpPr>
+            <p:cNvPr id="84" name="tx84"/>
+            <p:cNvSpPr/>
+            <p:nvPr/>
+          </p:nvSpPr>
+          <p:spPr>
+            <a:xfrm>
+              <a:off x="7068946" y="5716183"/>
+              <a:ext cx="124358" cy="80101"/>
+            </a:xfrm>
+            <a:prstGeom prst="rect">
+              <a:avLst/>
+            </a:prstGeom>
+            <a:noFill/>
+          </p:spPr>
+          <p:txBody>
+            <a:bodyPr lIns="0" rIns="0" tIns="0" bIns="0" anchorCtr="1" anchor="ctr" wrap="none"/>
+            <a:lstStyle/>
+            <a:p>
+              <a:pPr algn="l" marL="0" marR="0" indent="0">
+                <a:lnSpc>
+                  <a:spcPts val="880"/>
+                </a:lnSpc>
+                <a:spcBef>
+                  <a:spcPts val="0"/>
+                </a:spcBef>
+                <a:spcAft>
+                  <a:spcPts val="0"/>
+                </a:spcAft>
+              </a:pPr>
+              <a:r>
+                <a:rPr sz="880">
+                  <a:solidFill>
+                    <a:srgbClr val="4D4D4D">
+                      <a:alpha val="100000"/>
+                    </a:srgbClr>
+                  </a:solidFill>
+                  <a:latin typeface="Helvetica"/>
+                  <a:cs typeface="Helvetica"/>
+                </a:rPr>
+                <a:t>30</a:t>
+              </a:r>
+            </a:p>
+          </p:txBody>
+        </p:sp>
+        <p:sp>
+          <p:nvSpPr>
+            <p:cNvPr id="85" name="tx85"/>
+            <p:cNvSpPr/>
+            <p:nvPr/>
+          </p:nvSpPr>
+          <p:spPr>
+            <a:xfrm>
+              <a:off x="7914232" y="5716183"/>
+              <a:ext cx="124358" cy="80101"/>
+            </a:xfrm>
+            <a:prstGeom prst="rect">
+              <a:avLst/>
+            </a:prstGeom>
+            <a:noFill/>
+          </p:spPr>
+          <p:txBody>
+            <a:bodyPr lIns="0" rIns="0" tIns="0" bIns="0" anchorCtr="1" anchor="ctr" wrap="none"/>
+            <a:lstStyle/>
+            <a:p>
+              <a:pPr algn="l" marL="0" marR="0" indent="0">
+                <a:lnSpc>
+                  <a:spcPts val="880"/>
+                </a:lnSpc>
+                <a:spcBef>
+                  <a:spcPts val="0"/>
+                </a:spcBef>
+                <a:spcAft>
+                  <a:spcPts val="0"/>
+                </a:spcAft>
+              </a:pPr>
+              <a:r>
+                <a:rPr sz="880">
+                  <a:solidFill>
+                    <a:srgbClr val="4D4D4D">
+                      <a:alpha val="100000"/>
+                    </a:srgbClr>
+                  </a:solidFill>
+                  <a:latin typeface="Helvetica"/>
+                  <a:cs typeface="Helvetica"/>
+                </a:rPr>
+                <a:t>40</a:t>
+              </a:r>
+            </a:p>
+          </p:txBody>
+        </p:sp>
+        <p:sp>
+          <p:nvSpPr>
+            <p:cNvPr id="86" name="tx86"/>
+            <p:cNvSpPr/>
+            <p:nvPr/>
+          </p:nvSpPr>
+          <p:spPr>
+            <a:xfrm>
+              <a:off x="2928340" y="5855859"/>
+              <a:ext cx="3578047" cy="100218"/>
+            </a:xfrm>
+            <a:prstGeom prst="rect">
+              <a:avLst/>
+            </a:prstGeom>
+            <a:noFill/>
+          </p:spPr>
+          <p:txBody>
+            <a:bodyPr lIns="0" rIns="0" tIns="0" bIns="0" anchorCtr="1" anchor="ctr" wrap="none"/>
+            <a:lstStyle/>
+            <a:p>
+              <a:pPr algn="l" marL="0" marR="0" indent="0">
+                <a:lnSpc>
+                  <a:spcPts val="1100"/>
+                </a:lnSpc>
+                <a:spcBef>
+                  <a:spcPts val="0"/>
+                </a:spcBef>
+                <a:spcAft>
+                  <a:spcPts val="0"/>
+                </a:spcAft>
+              </a:pPr>
+              <a:r>
+                <a:rPr sz="1100">
+                  <a:solidFill>
+                    <a:srgbClr val="000000">
+                      <a:alpha val="100000"/>
+                    </a:srgbClr>
+                  </a:solidFill>
+                  <a:latin typeface="Helvetica"/>
+                  <a:cs typeface="Helvetica"/>
+                </a:rPr>
+                <a:t>eGFR difference (%): 100 × (CKD-EPI Cr-Cys − CG) / CG</a:t>
+              </a:r>
+            </a:p>
+          </p:txBody>
+        </p:sp>
+        <p:sp>
+          <p:nvSpPr>
+            <p:cNvPr id="87" name="tx87"/>
+            <p:cNvSpPr/>
+            <p:nvPr/>
+          </p:nvSpPr>
+          <p:spPr>
+            <a:xfrm rot="-5400000">
+              <a:off x="138035" y="4944909"/>
+              <a:ext cx="1016904" cy="100218"/>
+            </a:xfrm>
+            <a:prstGeom prst="rect">
+              <a:avLst/>
+            </a:prstGeom>
+            <a:noFill/>
+          </p:spPr>
+          <p:txBody>
+            <a:bodyPr lIns="0" rIns="0" tIns="0" bIns="0" anchorCtr="1" anchor="ctr" wrap="none"/>
+            <a:lstStyle/>
+            <a:p>
+              <a:pPr algn="l" marL="0" marR="0" indent="0">
+                <a:lnSpc>
+                  <a:spcPts val="1100"/>
+                </a:lnSpc>
+                <a:spcBef>
+                  <a:spcPts val="0"/>
+                </a:spcBef>
+                <a:spcAft>
+                  <a:spcPts val="0"/>
+                </a:spcAft>
+              </a:pPr>
+              <a:r>
+                <a:rPr sz="1100">
+                  <a:solidFill>
+                    <a:srgbClr val="000000">
+                      <a:alpha val="100000"/>
+                    </a:srgbClr>
+                  </a:solidFill>
+                  <a:latin typeface="Helvetica"/>
+                  <a:cs typeface="Helvetica"/>
+                </a:rPr>
+                <a:t>subHR (95% CI)</a:t>
+              </a:r>
+            </a:p>
+          </p:txBody>
+        </p:sp>
+        <p:sp>
+          <p:nvSpPr>
+            <p:cNvPr id="88" name="tx88"/>
+            <p:cNvSpPr/>
+            <p:nvPr/>
+          </p:nvSpPr>
+          <p:spPr>
+            <a:xfrm>
+              <a:off x="887106" y="4159544"/>
+              <a:ext cx="6321612" cy="82021"/>
+            </a:xfrm>
+            <a:prstGeom prst="rect">
+              <a:avLst/>
+            </a:prstGeom>
+            <a:noFill/>
+          </p:spPr>
+          <p:txBody>
+            <a:bodyPr lIns="0" rIns="0" tIns="0" bIns="0" anchorCtr="1" anchor="ctr" wrap="none"/>
+            <a:lstStyle/>
+            <a:p>
+              <a:pPr algn="l" marL="0" marR="0" indent="0">
+                <a:lnSpc>
+                  <a:spcPts val="900"/>
+                </a:lnSpc>
+                <a:spcBef>
+                  <a:spcPts val="0"/>
+                </a:spcBef>
+                <a:spcAft>
+                  <a:spcPts val="0"/>
+                </a:spcAft>
+              </a:pPr>
+              <a:r>
+                <a:rPr sz="900">
+                  <a:solidFill>
+                    <a:srgbClr val="404040">
+                      <a:alpha val="100000"/>
+                    </a:srgbClr>
+                  </a:solidFill>
+                  <a:latin typeface="Helvetica"/>
+                  <a:cs typeface="Helvetica"/>
+                </a:rPr>
+                <a:t>subHR per 10 % decline: 1.39 (1.13-1.69), p = 0.001  |  per IQR decline (Δ = 29.3 %): 2.60 (1.45-4.67)  |  IQR: [-14.6, 14.7] %</a:t>
+              </a:r>
+            </a:p>
+          </p:txBody>
+        </p:sp>
+        <p:sp>
+          <p:nvSpPr>
+            <p:cNvPr id="89" name="tx89"/>
+            <p:cNvSpPr/>
+            <p:nvPr/>
+          </p:nvSpPr>
+          <p:spPr>
+            <a:xfrm>
+              <a:off x="887106" y="3932770"/>
               <a:ext cx="2765511" cy="120152"/>
             </a:xfrm>
             <a:prstGeom prst="rect">
